--- a/plugins/gradient-cio/assets/examples/gradient-setup.pptx
+++ b/plugins/gradient-cio/assets/examples/gradient-setup.pptx
@@ -3328,7 +3328,7 @@
         <p:spPr>
           <a:xfrm>
             <a:off x="640080" y="1325880"/>
-            <a:ext cx="10908792" cy="1935784"/>
+            <a:ext cx="10908792" cy="1823056"/>
           </a:xfrm>
           <a:prstGeom prst="rect">
             <a:avLst/>
@@ -3373,7 +3373,7 @@
         <p:spPr>
           <a:xfrm>
             <a:off x="640080" y="1325880"/>
-            <a:ext cx="54864" cy="1935784"/>
+            <a:ext cx="54864" cy="1823056"/>
           </a:xfrm>
           <a:prstGeom prst="rect">
             <a:avLst/>
@@ -3457,7 +3457,7 @@
         <p:spPr>
           <a:xfrm>
             <a:off x="804671" y="1719072"/>
-            <a:ext cx="10616184" cy="1451152"/>
+            <a:ext cx="10616184" cy="1338424"/>
           </a:xfrm>
           <a:prstGeom prst="rect">
             <a:avLst/>
@@ -3482,7 +3482,7 @@
               </a:defRPr>
             </a:pPr>
             <a:r>
-              <a:t>GradientCIO is connected and healthy for organization Gradient [S1][S2]. Nine of eleven skills are ready; the macro briefing is ready with one view unavailable, and the IC memo needs the Portfolio and Strategy Lab modules for live portfolio data [S2]. 13 of 14 contract checks passed; the one failure (macro regime state, HTTP 500) is a known issue the skills work around [S3].</a:t>
+              <a:t>GradientCIO is connected and healthy for organization Gradient [S1][S2]. Nineteen of twenty-one skills are ready; the macro briefing has one unavailable view, and the IC memo needs the Portfolio and Strategy Lab modules for live portfolio data [S2]. 13 of 14 contract checks passed; macro regime state returned Not available (HTTP 500) [S3].</a:t>
             </a:r>
           </a:p>
         </p:txBody>
@@ -3495,8 +3495,8 @@
         </p:nvSpPr>
         <p:spPr>
           <a:xfrm>
-            <a:off x="640080" y="3371392"/>
-            <a:ext cx="2644902" cy="1668779"/>
+            <a:off x="640080" y="3258664"/>
+            <a:ext cx="2644902" cy="1737516"/>
           </a:xfrm>
           <a:prstGeom prst="rect">
             <a:avLst/>
@@ -3540,7 +3540,7 @@
         </p:nvSpPr>
         <p:spPr>
           <a:xfrm>
-            <a:off x="640080" y="3371392"/>
+            <a:off x="640080" y="3258664"/>
             <a:ext cx="2644902" cy="45720"/>
           </a:xfrm>
           <a:prstGeom prst="rect">
@@ -3585,7 +3585,7 @@
         </p:nvSpPr>
         <p:spPr>
           <a:xfrm>
-            <a:off x="749808" y="3499408"/>
+            <a:off x="749808" y="3386680"/>
             <a:ext cx="2425446" cy="201168"/>
           </a:xfrm>
           <a:prstGeom prst="rect">
@@ -3624,7 +3624,7 @@
         </p:nvSpPr>
         <p:spPr>
           <a:xfrm>
-            <a:off x="749808" y="3755440"/>
+            <a:off x="749808" y="3642712"/>
             <a:ext cx="2425446" cy="475488"/>
           </a:xfrm>
           <a:prstGeom prst="rect">
@@ -3650,7 +3650,7 @@
               </a:defRPr>
             </a:pPr>
             <a:r>
-              <a:t>9</a:t>
+              <a:t>19</a:t>
             </a:r>
           </a:p>
         </p:txBody>
@@ -3663,7 +3663,7 @@
         </p:nvSpPr>
         <p:spPr>
           <a:xfrm>
-            <a:off x="749808" y="4710988"/>
+            <a:off x="749808" y="4666997"/>
             <a:ext cx="2425446" cy="228600"/>
           </a:xfrm>
           <a:prstGeom prst="rect">
@@ -3689,7 +3689,7 @@
               </a:defRPr>
             </a:pPr>
             <a:r>
-              <a:t>of 11</a:t>
+              <a:t>of 21</a:t>
             </a:r>
           </a:p>
         </p:txBody>
@@ -3702,8 +3702,8 @@
         </p:nvSpPr>
         <p:spPr>
           <a:xfrm>
-            <a:off x="3394710" y="3371392"/>
-            <a:ext cx="2644902" cy="1668779"/>
+            <a:off x="3394710" y="3258664"/>
+            <a:ext cx="2644902" cy="1737516"/>
           </a:xfrm>
           <a:prstGeom prst="rect">
             <a:avLst/>
@@ -3747,7 +3747,7 @@
         </p:nvSpPr>
         <p:spPr>
           <a:xfrm>
-            <a:off x="3394710" y="3371392"/>
+            <a:off x="3394710" y="3258664"/>
             <a:ext cx="2644902" cy="45720"/>
           </a:xfrm>
           <a:prstGeom prst="rect">
@@ -3792,7 +3792,7 @@
         </p:nvSpPr>
         <p:spPr>
           <a:xfrm>
-            <a:off x="3504438" y="3499408"/>
+            <a:off x="3504438" y="3386680"/>
             <a:ext cx="2425446" cy="201168"/>
           </a:xfrm>
           <a:prstGeom prst="rect">
@@ -3831,7 +3831,7 @@
         </p:nvSpPr>
         <p:spPr>
           <a:xfrm>
-            <a:off x="3504438" y="3755440"/>
+            <a:off x="3504438" y="3642712"/>
             <a:ext cx="2425446" cy="475488"/>
           </a:xfrm>
           <a:prstGeom prst="rect">
@@ -3870,7 +3870,7 @@
         </p:nvSpPr>
         <p:spPr>
           <a:xfrm>
-            <a:off x="3504438" y="4710988"/>
+            <a:off x="3504438" y="4666997"/>
             <a:ext cx="2425446" cy="228600"/>
           </a:xfrm>
           <a:prstGeom prst="rect">
@@ -3909,8 +3909,8 @@
         </p:nvSpPr>
         <p:spPr>
           <a:xfrm>
-            <a:off x="6149340" y="3371392"/>
-            <a:ext cx="2644902" cy="1668779"/>
+            <a:off x="6149340" y="3258664"/>
+            <a:ext cx="2644902" cy="1737516"/>
           </a:xfrm>
           <a:prstGeom prst="rect">
             <a:avLst/>
@@ -3954,7 +3954,7 @@
         </p:nvSpPr>
         <p:spPr>
           <a:xfrm>
-            <a:off x="6149340" y="3371392"/>
+            <a:off x="6149340" y="3258664"/>
             <a:ext cx="2644902" cy="45720"/>
           </a:xfrm>
           <a:prstGeom prst="rect">
@@ -3999,7 +3999,7 @@
         </p:nvSpPr>
         <p:spPr>
           <a:xfrm>
-            <a:off x="6259068" y="3499408"/>
+            <a:off x="6259068" y="3386680"/>
             <a:ext cx="2425446" cy="201168"/>
           </a:xfrm>
           <a:prstGeom prst="rect">
@@ -4038,7 +4038,7 @@
         </p:nvSpPr>
         <p:spPr>
           <a:xfrm>
-            <a:off x="6259068" y="3755440"/>
+            <a:off x="6259068" y="3642712"/>
             <a:ext cx="2425446" cy="475488"/>
           </a:xfrm>
           <a:prstGeom prst="rect">
@@ -4077,7 +4077,7 @@
         </p:nvSpPr>
         <p:spPr>
           <a:xfrm>
-            <a:off x="6259068" y="4710988"/>
+            <a:off x="6259068" y="4666997"/>
             <a:ext cx="2425446" cy="228600"/>
           </a:xfrm>
           <a:prstGeom prst="rect">
@@ -4116,8 +4116,8 @@
         </p:nvSpPr>
         <p:spPr>
           <a:xfrm>
-            <a:off x="8903970" y="3371392"/>
-            <a:ext cx="2644902" cy="1668779"/>
+            <a:off x="8903970" y="3258664"/>
+            <a:ext cx="2644902" cy="1737516"/>
           </a:xfrm>
           <a:prstGeom prst="rect">
             <a:avLst/>
@@ -4161,7 +4161,7 @@
         </p:nvSpPr>
         <p:spPr>
           <a:xfrm>
-            <a:off x="8903970" y="3371392"/>
+            <a:off x="8903970" y="3258664"/>
             <a:ext cx="2644902" cy="45720"/>
           </a:xfrm>
           <a:prstGeom prst="rect">
@@ -4206,7 +4206,7 @@
         </p:nvSpPr>
         <p:spPr>
           <a:xfrm>
-            <a:off x="9013698" y="3499408"/>
+            <a:off x="9013698" y="3386680"/>
             <a:ext cx="2425446" cy="201168"/>
           </a:xfrm>
           <a:prstGeom prst="rect">
@@ -4245,7 +4245,7 @@
         </p:nvSpPr>
         <p:spPr>
           <a:xfrm>
-            <a:off x="9013698" y="3755440"/>
+            <a:off x="9013698" y="3642712"/>
             <a:ext cx="2425446" cy="475488"/>
           </a:xfrm>
           <a:prstGeom prst="rect">
@@ -4284,7 +4284,7 @@
         </p:nvSpPr>
         <p:spPr>
           <a:xfrm>
-            <a:off x="9013698" y="4710988"/>
+            <a:off x="9013698" y="4666997"/>
             <a:ext cx="2425446" cy="228600"/>
           </a:xfrm>
           <a:prstGeom prst="rect">
@@ -4310,7 +4310,7 @@
               </a:defRPr>
             </a:pPr>
             <a:r>
-              <a:t>1 known issue</a:t>
+              <a:t>1 unavailable check</a:t>
             </a:r>
           </a:p>
         </p:txBody>
@@ -4323,8 +4323,8 @@
         </p:nvSpPr>
         <p:spPr>
           <a:xfrm>
-            <a:off x="640080" y="5149900"/>
-            <a:ext cx="10908792" cy="1068019"/>
+            <a:off x="640080" y="5105909"/>
+            <a:ext cx="10908792" cy="1112010"/>
           </a:xfrm>
           <a:prstGeom prst="rect">
             <a:avLst/>
@@ -4368,8 +4368,8 @@
         </p:nvSpPr>
         <p:spPr>
           <a:xfrm>
-            <a:off x="640080" y="5149900"/>
-            <a:ext cx="54864" cy="1068019"/>
+            <a:off x="640080" y="5105909"/>
+            <a:ext cx="54864" cy="1112010"/>
           </a:xfrm>
           <a:prstGeom prst="rect">
             <a:avLst/>
@@ -4413,7 +4413,7 @@
         </p:nvSpPr>
         <p:spPr>
           <a:xfrm>
-            <a:off x="804671" y="5259628"/>
+            <a:off x="804671" y="5215637"/>
             <a:ext cx="10616184" cy="228600"/>
           </a:xfrm>
           <a:prstGeom prst="rect">
@@ -4452,8 +4452,8 @@
         </p:nvSpPr>
         <p:spPr>
           <a:xfrm>
-            <a:off x="804671" y="5543092"/>
-            <a:ext cx="10616184" cy="583387"/>
+            <a:off x="804671" y="5499101"/>
+            <a:ext cx="10616184" cy="627378"/>
           </a:xfrm>
           <a:prstGeom prst="rect">
             <a:avLst/>
@@ -9630,7 +9630,7 @@
                         </a:defRPr>
                       </a:pPr>
                       <a:r>
-                        <a:t>● Known issue</a:t>
+                        <a:t>● Not available</a:t>
                       </a:r>
                     </a:p>
                   </a:txBody>
@@ -10422,7 +10422,7 @@
                         </a:defRPr>
                       </a:pPr>
                       <a:r>
-                        <a:t>Risk-free fresh; receipt unvalidated (known)</a:t>
+                        <a:t>Risk-free fresh; receipt validation unavailable</a:t>
                       </a:r>
                     </a:p>
                   </a:txBody>
@@ -10722,7 +10722,7 @@
               </a:defRPr>
             </a:pPr>
             <a:r>
-              <a:t>Every failure matched the known-issues list. Since the last list: the CMA baseline now returns a fresh risk-free rate (previously HTTP 422).</a:t>
+              <a:t>All probes completed without a new failure. The CMA baseline returns a fresh risk-free rate.</a:t>
             </a:r>
           </a:p>
         </p:txBody>

--- a/plugins/gradient-cio/assets/examples/gradient-setup.pptx
+++ b/plugins/gradient-cio/assets/examples/gradient-setup.pptx
@@ -1,23 +1,24 @@
 
 <file path=ppt/presentation.xml><?xml version="1.0" encoding="utf-8"?>
-<p:presentation xmlns:a="http://schemas.openxmlformats.org/drawingml/2006/main" xmlns:r="http://schemas.openxmlformats.org/officeDocument/2006/relationships" xmlns:p="http://schemas.openxmlformats.org/presentationml/2006/main" saveSubsetFonts="1" autoCompressPictures="0">
-  <p:sldMasterIdLst>
-    <p:sldMasterId id="2147483648" r:id="rId1"/>
-  </p:sldMasterIdLst>
-  <p:sldIdLst>
-    <p:sldId id="256" r:id="rId7"/>
-    <p:sldId id="257" r:id="rId8"/>
-    <p:sldId id="258" r:id="rId9"/>
-    <p:sldId id="259" r:id="rId10"/>
-    <p:sldId id="260" r:id="rId11"/>
-    <p:sldId id="261" r:id="rId12"/>
-    <p:sldId id="262" r:id="rId13"/>
-    <p:sldId id="263" r:id="rId14"/>
-    <p:sldId id="264" r:id="rId15"/>
-  </p:sldIdLst>
-  <p:sldSz cx="12191695" cy="6858000" type="screen4x3"/>
-  <p:notesSz cx="6858000" cy="9144000"/>
-  <p:defaultTextStyle>
+<ns0:presentation xmlns:a="http://schemas.openxmlformats.org/drawingml/2006/main" xmlns:ns0="http://schemas.openxmlformats.org/presentationml/2006/main" xmlns:ns1="http://schemas.openxmlformats.org/officeDocument/2006/relationships" saveSubsetFonts="1" autoCompressPictures="0">
+  <ns0:sldMasterIdLst>
+    <ns0:sldMasterId id="2147483648" ns1:id="rId1"/>
+  </ns0:sldMasterIdLst>
+  <ns0:sldIdLst>
+    <ns0:sldId id="256" ns1:id="rId7"/>
+    <ns0:sldId id="257" ns1:id="rId8"/>
+    <ns0:sldId id="258" ns1:id="rId9"/>
+    <ns0:sldId id="259" ns1:id="rId10"/>
+    <ns0:sldId id="260" ns1:id="rId11"/>
+    <ns0:sldId id="261" ns1:id="rId12"/>
+    <ns0:sldId id="262" ns1:id="rId13"/>
+    <ns0:sldId id="263" ns1:id="rId14"/>
+    <ns0:sldId id="264" ns1:id="rId15"/>
+    <ns0:sldId id="265" ns1:id="rId16"/>
+  </ns0:sldIdLst>
+  <ns0:sldSz cx="12191695" cy="6858000" type="screen16x9"/>
+  <ns0:notesSz cx="6858000" cy="9144000"/>
+  <ns0:defaultTextStyle>
     <a:defPPr>
       <a:defRPr lang="en-US"/>
     </a:defPPr>
@@ -111,8 +112,8 @@
         <a:cs typeface="+mn-cs"/>
       </a:defRPr>
     </a:lvl9pPr>
-  </p:defaultTextStyle>
-</p:presentation>
+  </ns0:defaultTextStyle>
+</ns0:presentation>
 </file>
 
 <file path=ppt/slideLayouts/slideLayout1.xml><?xml version="1.0" encoding="utf-8"?>
@@ -2253,7 +2254,11 @@
           <a:bodyPr rtlCol="0" anchor="ctr"/>
           <a:lstStyle/>
           <a:p>
-            <a:pPr algn="ctr"/>
+            <a:pPr algn="ctr">
+              <a:defRPr>
+                <a:latin typeface="Inter"/>
+              </a:defRPr>
+            </a:pPr>
           </a:p>
         </p:txBody>
       </p:sp>
@@ -2298,7 +2303,11 @@
           <a:bodyPr rtlCol="0" anchor="ctr"/>
           <a:lstStyle/>
           <a:p>
-            <a:pPr algn="ctr"/>
+            <a:pPr algn="ctr">
+              <a:defRPr>
+                <a:latin typeface="Inter"/>
+              </a:defRPr>
+            </a:pPr>
           </a:p>
         </p:txBody>
       </p:sp>
@@ -2311,7 +2320,7 @@
         <p:spPr>
           <a:xfrm>
             <a:off x="685800" y="457200"/>
-            <a:ext cx="2743200" cy="320040"/>
+            <a:ext cx="4754880" cy="320040"/>
           </a:xfrm>
           <a:prstGeom prst="rect">
             <a:avLst/>
@@ -2336,6 +2345,9 @@
               </a:defRPr>
             </a:pPr>
             <a:r>
+              <a:rPr>
+                <a:latin typeface="Inter"/>
+              </a:rPr>
               <a:t>GradientCIO</a:t>
             </a:r>
           </a:p>
@@ -2375,6 +2387,9 @@
               </a:defRPr>
             </a:pPr>
             <a:r>
+              <a:rPr>
+                <a:latin typeface="Inter"/>
+              </a:rPr>
               <a:t>SETUP &amp; READINESS</a:t>
             </a:r>
           </a:p>
@@ -2414,6 +2429,9 @@
               </a:defRPr>
             </a:pPr>
             <a:r>
+              <a:rPr>
+                <a:latin typeface="Inter"/>
+              </a:rPr>
               <a:t>Gradient</a:t>
             </a:r>
           </a:p>
@@ -2453,6 +2471,9 @@
               </a:defRPr>
             </a:pPr>
             <a:r>
+              <a:rPr>
+                <a:latin typeface="Inter"/>
+              </a:rPr>
               <a:t>GradientCIO connection, access and data readiness</a:t>
             </a:r>
           </a:p>
@@ -2499,7 +2520,11 @@
           <a:bodyPr rtlCol="0" anchor="ctr"/>
           <a:lstStyle/>
           <a:p>
-            <a:pPr algn="ctr"/>
+            <a:pPr algn="ctr">
+              <a:defRPr>
+                <a:latin typeface="Inter"/>
+              </a:defRPr>
+            </a:pPr>
           </a:p>
         </p:txBody>
       </p:sp>
@@ -2537,6 +2562,9 @@
               </a:defRPr>
             </a:pPr>
             <a:r>
+              <a:rPr>
+                <a:latin typeface="Inter"/>
+              </a:rPr>
               <a:t>ORGANIZATION</a:t>
             </a:r>
           </a:p>
@@ -2576,6 +2604,9 @@
               </a:defRPr>
             </a:pPr>
             <a:r>
+              <a:rPr>
+                <a:latin typeface="Inter"/>
+              </a:rPr>
               <a:t>Gradient</a:t>
             </a:r>
           </a:p>
@@ -2615,6 +2646,9 @@
               </a:defRPr>
             </a:pPr>
             <a:r>
+              <a:rPr>
+                <a:latin typeface="Inter"/>
+              </a:rPr>
               <a:t>ROLE</a:t>
             </a:r>
           </a:p>
@@ -2654,6 +2688,9 @@
               </a:defRPr>
             </a:pPr>
             <a:r>
+              <a:rPr>
+                <a:latin typeface="Inter"/>
+              </a:rPr>
               <a:t>Admin</a:t>
             </a:r>
           </a:p>
@@ -2693,6 +2730,9 @@
               </a:defRPr>
             </a:pPr>
             <a:r>
+              <a:rPr>
+                <a:latin typeface="Inter"/>
+              </a:rPr>
               <a:t>LICENSED MODULES</a:t>
             </a:r>
           </a:p>
@@ -2732,6 +2772,9 @@
               </a:defRPr>
             </a:pPr>
             <a:r>
+              <a:rPr>
+                <a:latin typeface="Inter"/>
+              </a:rPr>
               <a:t>4 of 7</a:t>
             </a:r>
           </a:p>
@@ -2771,6 +2814,9 @@
               </a:defRPr>
             </a:pPr>
             <a:r>
+              <a:rPr>
+                <a:latin typeface="Inter"/>
+              </a:rPr>
               <a:t>ROSTER FUNDS</a:t>
             </a:r>
           </a:p>
@@ -2810,6 +2856,9 @@
               </a:defRPr>
             </a:pPr>
             <a:r>
+              <a:rPr>
+                <a:latin typeface="Inter"/>
+              </a:rPr>
               <a:t>1 of 3 slots</a:t>
             </a:r>
           </a:p>
@@ -2849,6 +2898,9 @@
               </a:defRPr>
             </a:pPr>
             <a:r>
+              <a:rPr>
+                <a:latin typeface="Inter"/>
+              </a:rPr>
               <a:t>MCP VERSION</a:t>
             </a:r>
           </a:p>
@@ -2888,6 +2940,9 @@
               </a:defRPr>
             </a:pPr>
             <a:r>
+              <a:rPr>
+                <a:latin typeface="Inter"/>
+              </a:rPr>
               <a:t>gradient-mcp 0.7.0</a:t>
             </a:r>
           </a:p>
@@ -2927,6 +2982,9 @@
               </a:defRPr>
             </a:pPr>
             <a:r>
+              <a:rPr>
+                <a:latin typeface="Inter"/>
+              </a:rPr>
               <a:t>CHECKED</a:t>
             </a:r>
           </a:p>
@@ -2966,6 +3024,9 @@
               </a:defRPr>
             </a:pPr>
             <a:r>
+              <a:rPr>
+                <a:latin typeface="Inter"/>
+              </a:rPr>
               <a:t>2026-10-04</a:t>
             </a:r>
           </a:p>
@@ -2973,7 +3034,182 @@
       </p:sp>
       <p:sp>
         <p:nvSpPr>
-          <p:cNvPr id="21" name="TextBox 20"/>
+          <p:cNvPr id="21" name="Rectangle 20"/>
+          <p:cNvSpPr/>
+          <p:nvPr/>
+        </p:nvSpPr>
+        <p:spPr>
+          <a:xfrm>
+            <a:off x="685800" y="5833872"/>
+            <a:ext cx="3063240" cy="384048"/>
+          </a:xfrm>
+          <a:prstGeom prst="rect">
+            <a:avLst/>
+          </a:prstGeom>
+          <a:solidFill>
+            <a:srgbClr val="F2A93B"/>
+          </a:solidFill>
+          <a:ln>
+            <a:solidFill>
+              <a:srgbClr val="F2A93B"/>
+            </a:solidFill>
+          </a:ln>
+        </p:spPr>
+        <p:style>
+          <a:lnRef idx="1">
+            <a:schemeClr val="accent1"/>
+          </a:lnRef>
+          <a:fillRef idx="3">
+            <a:schemeClr val="accent1"/>
+          </a:fillRef>
+          <a:effectRef idx="2">
+            <a:schemeClr val="accent1"/>
+          </a:effectRef>
+          <a:fontRef idx="minor">
+            <a:schemeClr val="lt1"/>
+          </a:fontRef>
+        </p:style>
+        <p:txBody>
+          <a:bodyPr rtlCol="0" anchor="ctr"/>
+          <a:lstStyle/>
+          <a:p>
+            <a:pPr algn="ctr">
+              <a:defRPr>
+                <a:latin typeface="Inter"/>
+              </a:defRPr>
+            </a:pPr>
+          </a:p>
+        </p:txBody>
+      </p:sp>
+      <p:sp>
+        <p:nvSpPr>
+          <p:cNvPr id="22" name="TextBox 21"/>
+          <p:cNvSpPr txBox="1"/>
+          <p:nvPr/>
+        </p:nvSpPr>
+        <p:spPr>
+          <a:xfrm>
+            <a:off x="822960" y="5934456"/>
+            <a:ext cx="2788920" cy="164592"/>
+          </a:xfrm>
+          <a:prstGeom prst="rect">
+            <a:avLst/>
+          </a:prstGeom>
+          <a:noFill/>
+        </p:spPr>
+        <p:txBody>
+          <a:bodyPr wrap="none" lIns="9144" rIns="9144" tIns="9144" bIns="9144" anchor="t">
+            <a:spAutoFit/>
+          </a:bodyPr>
+          <a:lstStyle/>
+          <a:p>
+            <a:pPr algn="l">
+              <a:spcAft>
+                <a:spcPts val="0"/>
+              </a:spcAft>
+              <a:defRPr sz="800" b="1">
+                <a:solidFill>
+                  <a:srgbClr val="0D1117"/>
+                </a:solidFill>
+                <a:latin typeface="Inter"/>
+              </a:defRPr>
+            </a:pPr>
+            <a:r>
+              <a:rPr>
+                <a:latin typeface="Inter"/>
+              </a:rPr>
+              <a:t>Ready, with limits</a:t>
+            </a:r>
+          </a:p>
+        </p:txBody>
+      </p:sp>
+      <p:sp>
+        <p:nvSpPr>
+          <p:cNvPr id="23" name="TextBox 22"/>
+          <p:cNvSpPr txBox="1"/>
+          <p:nvPr/>
+        </p:nvSpPr>
+        <p:spPr>
+          <a:xfrm>
+            <a:off x="3977639" y="5824728"/>
+            <a:ext cx="3108960" cy="164592"/>
+          </a:xfrm>
+          <a:prstGeom prst="rect">
+            <a:avLst/>
+          </a:prstGeom>
+          <a:noFill/>
+        </p:spPr>
+        <p:txBody>
+          <a:bodyPr wrap="none" lIns="9144" rIns="9144" tIns="9144" bIns="9144" anchor="t">
+            <a:spAutoFit/>
+          </a:bodyPr>
+          <a:lstStyle/>
+          <a:p>
+            <a:pPr algn="l">
+              <a:spcAft>
+                <a:spcPts val="0"/>
+              </a:spcAft>
+              <a:defRPr sz="650" b="1">
+                <a:solidFill>
+                  <a:srgbClr val="8A94A1"/>
+                </a:solidFill>
+                <a:latin typeface="Inter"/>
+              </a:defRPr>
+            </a:pPr>
+            <a:r>
+              <a:rPr>
+                <a:latin typeface="Inter"/>
+              </a:rPr>
+              <a:t>CHECKS PASSED</a:t>
+            </a:r>
+          </a:p>
+        </p:txBody>
+      </p:sp>
+      <p:sp>
+        <p:nvSpPr>
+          <p:cNvPr id="24" name="TextBox 23"/>
+          <p:cNvSpPr txBox="1"/>
+          <p:nvPr/>
+        </p:nvSpPr>
+        <p:spPr>
+          <a:xfrm>
+            <a:off x="3977639" y="5998464"/>
+            <a:ext cx="3108960" cy="201168"/>
+          </a:xfrm>
+          <a:prstGeom prst="rect">
+            <a:avLst/>
+          </a:prstGeom>
+          <a:noFill/>
+        </p:spPr>
+        <p:txBody>
+          <a:bodyPr wrap="none" lIns="9144" rIns="9144" tIns="9144" bIns="9144" anchor="t">
+            <a:spAutoFit/>
+          </a:bodyPr>
+          <a:lstStyle/>
+          <a:p>
+            <a:pPr algn="l">
+              <a:spcAft>
+                <a:spcPts val="0"/>
+              </a:spcAft>
+              <a:defRPr sz="800" b="1">
+                <a:solidFill>
+                  <a:srgbClr val="FFFFFF"/>
+                </a:solidFill>
+                <a:latin typeface="Inter"/>
+              </a:defRPr>
+            </a:pPr>
+            <a:r>
+              <a:rPr>
+                <a:latin typeface="Inter"/>
+              </a:rPr>
+              <a:t>13 of 14 · Partial</a:t>
+            </a:r>
+          </a:p>
+        </p:txBody>
+      </p:sp>
+      <p:sp>
+        <p:nvSpPr>
+          <p:cNvPr id="25" name="TextBox 24"/>
           <p:cNvSpPr txBox="1"/>
           <p:nvPr/>
         </p:nvSpPr>
@@ -3005,6 +3241,9 @@
               </a:defRPr>
             </a:pPr>
             <a:r>
+              <a:rPr>
+                <a:latin typeface="Inter"/>
+              </a:rPr>
               <a:t>Confidential — prepared for internal investment use</a:t>
             </a:r>
           </a:p>
@@ -3012,14 +3251,14 @@
       </p:sp>
       <p:sp>
         <p:nvSpPr>
-          <p:cNvPr id="22" name="TextBox 21"/>
+          <p:cNvPr id="26" name="TextBox 25"/>
           <p:cNvSpPr txBox="1"/>
           <p:nvPr/>
         </p:nvSpPr>
         <p:spPr>
           <a:xfrm>
-            <a:off x="9875520" y="6473952"/>
-            <a:ext cx="1645920" cy="182880"/>
+            <a:off x="8778240" y="6473952"/>
+            <a:ext cx="2743200" cy="182880"/>
           </a:xfrm>
           <a:prstGeom prst="rect">
             <a:avLst/>
@@ -3044,7 +3283,476 @@
               </a:defRPr>
             </a:pPr>
             <a:r>
+              <a:rPr>
+                <a:latin typeface="Inter"/>
+              </a:rPr>
               <a:t>GradientCIO.com</a:t>
+            </a:r>
+          </a:p>
+        </p:txBody>
+      </p:sp>
+    </p:spTree>
+  </p:cSld>
+  <p:clrMapOvr>
+    <a:masterClrMapping/>
+  </p:clrMapOvr>
+</p:sld>
+</file>
+
+<file path=ppt/slides/slide10.xml><?xml version="1.0" encoding="utf-8"?>
+<p:sld xmlns:a="http://schemas.openxmlformats.org/drawingml/2006/main" xmlns:p="http://schemas.openxmlformats.org/presentationml/2006/main" xmlns:r="http://schemas.openxmlformats.org/officeDocument/2006/relationships">
+  <p:cSld>
+    <p:spTree>
+      <p:nvGrpSpPr>
+        <p:cNvPr id="1" name=""/>
+        <p:cNvGrpSpPr/>
+        <p:nvPr/>
+      </p:nvGrpSpPr>
+      <p:grpSpPr/>
+      <p:sp>
+        <p:nvSpPr>
+          <p:cNvPr id="2" name="Rectangle 1"/>
+          <p:cNvSpPr/>
+          <p:nvPr/>
+        </p:nvSpPr>
+        <p:spPr>
+          <a:xfrm>
+            <a:off x="0" y="0"/>
+            <a:ext cx="12191695" cy="6858000"/>
+          </a:xfrm>
+          <a:prstGeom prst="rect">
+            <a:avLst/>
+          </a:prstGeom>
+          <a:solidFill>
+            <a:srgbClr val="FFFFFF"/>
+          </a:solidFill>
+          <a:ln>
+            <a:solidFill>
+              <a:srgbClr val="FFFFFF"/>
+            </a:solidFill>
+          </a:ln>
+        </p:spPr>
+        <p:style>
+          <a:lnRef idx="1">
+            <a:schemeClr val="accent1"/>
+          </a:lnRef>
+          <a:fillRef idx="3">
+            <a:schemeClr val="accent1"/>
+          </a:fillRef>
+          <a:effectRef idx="2">
+            <a:schemeClr val="accent1"/>
+          </a:effectRef>
+          <a:fontRef idx="minor">
+            <a:schemeClr val="lt1"/>
+          </a:fontRef>
+        </p:style>
+        <p:txBody>
+          <a:bodyPr rtlCol="0" anchor="ctr"/>
+          <a:lstStyle/>
+          <a:p>
+            <a:pPr algn="ctr">
+              <a:defRPr>
+                <a:latin typeface="Inter"/>
+              </a:defRPr>
+            </a:pPr>
+          </a:p>
+        </p:txBody>
+      </p:sp>
+      <p:sp>
+        <p:nvSpPr>
+          <p:cNvPr id="3" name="TextBox 2"/>
+          <p:cNvSpPr txBox="1"/>
+          <p:nvPr/>
+        </p:nvSpPr>
+        <p:spPr>
+          <a:xfrm>
+            <a:off x="640080" y="566928"/>
+            <a:ext cx="10058400" cy="530352"/>
+          </a:xfrm>
+          <a:prstGeom prst="rect">
+            <a:avLst/>
+          </a:prstGeom>
+          <a:noFill/>
+        </p:spPr>
+        <p:txBody>
+          <a:bodyPr wrap="none" lIns="9144" rIns="9144" tIns="9144" bIns="9144" anchor="t">
+            <a:spAutoFit/>
+          </a:bodyPr>
+          <a:lstStyle/>
+          <a:p>
+            <a:pPr algn="l">
+              <a:spcAft>
+                <a:spcPts val="0"/>
+              </a:spcAft>
+              <a:defRPr sz="2300" b="1">
+                <a:solidFill>
+                  <a:srgbClr val="0D1117"/>
+                </a:solidFill>
+                <a:latin typeface="Inter"/>
+              </a:defRPr>
+            </a:pPr>
+            <a:r>
+              <a:rPr>
+                <a:latin typeface="Inter"/>
+              </a:rPr>
+              <a:t>Appendix A — Sources — continued</a:t>
+            </a:r>
+          </a:p>
+        </p:txBody>
+      </p:sp>
+      <p:sp>
+        <p:nvSpPr>
+          <p:cNvPr id="4" name="Rectangle 3"/>
+          <p:cNvSpPr/>
+          <p:nvPr/>
+        </p:nvSpPr>
+        <p:spPr>
+          <a:xfrm>
+            <a:off x="640080" y="1115568"/>
+            <a:ext cx="10908792" cy="18288"/>
+          </a:xfrm>
+          <a:prstGeom prst="rect">
+            <a:avLst/>
+          </a:prstGeom>
+          <a:solidFill>
+            <a:srgbClr val="0D1117"/>
+          </a:solidFill>
+          <a:ln>
+            <a:solidFill>
+              <a:srgbClr val="0D1117"/>
+            </a:solidFill>
+          </a:ln>
+        </p:spPr>
+        <p:style>
+          <a:lnRef idx="1">
+            <a:schemeClr val="accent1"/>
+          </a:lnRef>
+          <a:fillRef idx="3">
+            <a:schemeClr val="accent1"/>
+          </a:fillRef>
+          <a:effectRef idx="2">
+            <a:schemeClr val="accent1"/>
+          </a:effectRef>
+          <a:fontRef idx="minor">
+            <a:schemeClr val="lt1"/>
+          </a:fontRef>
+        </p:style>
+        <p:txBody>
+          <a:bodyPr rtlCol="0" anchor="ctr"/>
+          <a:lstStyle/>
+          <a:p>
+            <a:pPr algn="ctr">
+              <a:defRPr>
+                <a:latin typeface="Inter"/>
+              </a:defRPr>
+            </a:pPr>
+          </a:p>
+        </p:txBody>
+      </p:sp>
+      <p:sp>
+        <p:nvSpPr>
+          <p:cNvPr id="5" name="Rectangle 4"/>
+          <p:cNvSpPr/>
+          <p:nvPr/>
+        </p:nvSpPr>
+        <p:spPr>
+          <a:xfrm>
+            <a:off x="11018520" y="502920"/>
+            <a:ext cx="530352" cy="393192"/>
+          </a:xfrm>
+          <a:prstGeom prst="rect">
+            <a:avLst/>
+          </a:prstGeom>
+          <a:solidFill>
+            <a:srgbClr val="9AA5B1"/>
+          </a:solidFill>
+          <a:ln>
+            <a:solidFill>
+              <a:srgbClr val="9AA5B1"/>
+            </a:solidFill>
+          </a:ln>
+        </p:spPr>
+        <p:style>
+          <a:lnRef idx="1">
+            <a:schemeClr val="accent1"/>
+          </a:lnRef>
+          <a:fillRef idx="3">
+            <a:schemeClr val="accent1"/>
+          </a:fillRef>
+          <a:effectRef idx="2">
+            <a:schemeClr val="accent1"/>
+          </a:effectRef>
+          <a:fontRef idx="minor">
+            <a:schemeClr val="lt1"/>
+          </a:fontRef>
+        </p:style>
+        <p:txBody>
+          <a:bodyPr rtlCol="0" anchor="ctr"/>
+          <a:lstStyle/>
+          <a:p>
+            <a:pPr algn="ctr">
+              <a:defRPr>
+                <a:latin typeface="Inter"/>
+              </a:defRPr>
+            </a:pPr>
+          </a:p>
+        </p:txBody>
+      </p:sp>
+      <p:sp>
+        <p:nvSpPr>
+          <p:cNvPr id="6" name="TextBox 5"/>
+          <p:cNvSpPr txBox="1"/>
+          <p:nvPr/>
+        </p:nvSpPr>
+        <p:spPr>
+          <a:xfrm>
+            <a:off x="11045952" y="557784"/>
+            <a:ext cx="475488" cy="182880"/>
+          </a:xfrm>
+          <a:prstGeom prst="rect">
+            <a:avLst/>
+          </a:prstGeom>
+          <a:noFill/>
+        </p:spPr>
+        <p:txBody>
+          <a:bodyPr wrap="none" lIns="9144" rIns="9144" tIns="9144" bIns="9144" anchor="t">
+            <a:spAutoFit/>
+          </a:bodyPr>
+          <a:lstStyle/>
+          <a:p>
+            <a:pPr algn="ctr">
+              <a:spcAft>
+                <a:spcPts val="0"/>
+              </a:spcAft>
+              <a:defRPr sz="1000" b="1">
+                <a:solidFill>
+                  <a:srgbClr val="0D1117"/>
+                </a:solidFill>
+                <a:latin typeface="Inter"/>
+              </a:defRPr>
+            </a:pPr>
+            <a:r>
+              <a:rPr>
+                <a:latin typeface="Inter"/>
+              </a:rPr>
+              <a:t>A</a:t>
+            </a:r>
+          </a:p>
+        </p:txBody>
+      </p:sp>
+      <p:sp>
+        <p:nvSpPr>
+          <p:cNvPr id="7" name="TextBox 6"/>
+          <p:cNvSpPr txBox="1"/>
+          <p:nvPr/>
+        </p:nvSpPr>
+        <p:spPr>
+          <a:xfrm>
+            <a:off x="640080" y="1325880"/>
+            <a:ext cx="10908792" cy="4892040"/>
+          </a:xfrm>
+          <a:prstGeom prst="rect">
+            <a:avLst/>
+          </a:prstGeom>
+          <a:noFill/>
+        </p:spPr>
+        <p:txBody>
+          <a:bodyPr wrap="none" lIns="9144" rIns="9144" tIns="9144" bIns="9144" anchor="t">
+            <a:spAutoFit/>
+          </a:bodyPr>
+          <a:lstStyle/>
+          <a:p>
+            <a:pPr algn="l">
+              <a:spcAft>
+                <a:spcPts val="0"/>
+              </a:spcAft>
+              <a:defRPr sz="1100" b="0">
+                <a:solidFill>
+                  <a:srgbClr val="4A5563"/>
+                </a:solidFill>
+                <a:latin typeface="Inter"/>
+              </a:defRPr>
+            </a:pPr>
+            <a:r>
+              <a:rPr>
+                <a:latin typeface="Inter"/>
+              </a:rPr>
+              <a:t>Readiness reflects entitlement, OAuth scope, backend health and data readiness reported by GradientCIO at the time of the check. Tool availability does not guarantee that data is published for every subject.</a:t>
+            </a:r>
+          </a:p>
+        </p:txBody>
+      </p:sp>
+      <p:sp>
+        <p:nvSpPr>
+          <p:cNvPr id="8" name="Rectangle 7"/>
+          <p:cNvSpPr/>
+          <p:nvPr/>
+        </p:nvSpPr>
+        <p:spPr>
+          <a:xfrm>
+            <a:off x="640080" y="6446520"/>
+            <a:ext cx="10908792" cy="9144"/>
+          </a:xfrm>
+          <a:prstGeom prst="rect">
+            <a:avLst/>
+          </a:prstGeom>
+          <a:solidFill>
+            <a:srgbClr val="E3E7EC"/>
+          </a:solidFill>
+          <a:ln>
+            <a:solidFill>
+              <a:srgbClr val="E3E7EC"/>
+            </a:solidFill>
+          </a:ln>
+        </p:spPr>
+        <p:style>
+          <a:lnRef idx="1">
+            <a:schemeClr val="accent1"/>
+          </a:lnRef>
+          <a:fillRef idx="3">
+            <a:schemeClr val="accent1"/>
+          </a:fillRef>
+          <a:effectRef idx="2">
+            <a:schemeClr val="accent1"/>
+          </a:effectRef>
+          <a:fontRef idx="minor">
+            <a:schemeClr val="lt1"/>
+          </a:fontRef>
+        </p:style>
+        <p:txBody>
+          <a:bodyPr rtlCol="0" anchor="ctr"/>
+          <a:lstStyle/>
+          <a:p>
+            <a:pPr algn="ctr">
+              <a:defRPr>
+                <a:latin typeface="Inter"/>
+              </a:defRPr>
+            </a:pPr>
+          </a:p>
+        </p:txBody>
+      </p:sp>
+      <p:sp>
+        <p:nvSpPr>
+          <p:cNvPr id="9" name="TextBox 8"/>
+          <p:cNvSpPr txBox="1"/>
+          <p:nvPr/>
+        </p:nvSpPr>
+        <p:spPr>
+          <a:xfrm>
+            <a:off x="640080" y="6501384"/>
+            <a:ext cx="4297680" cy="146304"/>
+          </a:xfrm>
+          <a:prstGeom prst="rect">
+            <a:avLst/>
+          </a:prstGeom>
+          <a:noFill/>
+        </p:spPr>
+        <p:txBody>
+          <a:bodyPr wrap="none" lIns="9144" rIns="9144" tIns="9144" bIns="9144" anchor="t">
+            <a:spAutoFit/>
+          </a:bodyPr>
+          <a:lstStyle/>
+          <a:p>
+            <a:pPr algn="l">
+              <a:spcAft>
+                <a:spcPts val="0"/>
+              </a:spcAft>
+              <a:defRPr sz="650" b="0">
+                <a:solidFill>
+                  <a:srgbClr val="8A94A1"/>
+                </a:solidFill>
+                <a:latin typeface="Inter"/>
+              </a:defRPr>
+            </a:pPr>
+            <a:r>
+              <a:rPr>
+                <a:latin typeface="Inter"/>
+              </a:rPr>
+              <a:t>Sources: none cited</a:t>
+            </a:r>
+          </a:p>
+        </p:txBody>
+      </p:sp>
+      <p:sp>
+        <p:nvSpPr>
+          <p:cNvPr id="10" name="TextBox 9"/>
+          <p:cNvSpPr txBox="1"/>
+          <p:nvPr/>
+        </p:nvSpPr>
+        <p:spPr>
+          <a:xfrm>
+            <a:off x="4480560" y="6501384"/>
+            <a:ext cx="5303520" cy="146304"/>
+          </a:xfrm>
+          <a:prstGeom prst="rect">
+            <a:avLst/>
+          </a:prstGeom>
+          <a:noFill/>
+        </p:spPr>
+        <p:txBody>
+          <a:bodyPr wrap="none" lIns="9144" rIns="9144" tIns="9144" bIns="9144" anchor="t">
+            <a:spAutoFit/>
+          </a:bodyPr>
+          <a:lstStyle/>
+          <a:p>
+            <a:pPr algn="ctr">
+              <a:spcAft>
+                <a:spcPts val="0"/>
+              </a:spcAft>
+              <a:defRPr sz="650" b="0">
+                <a:solidFill>
+                  <a:srgbClr val="8A94A1"/>
+                </a:solidFill>
+                <a:latin typeface="Inter"/>
+              </a:defRPr>
+            </a:pPr>
+            <a:r>
+              <a:rPr>
+                <a:latin typeface="Inter"/>
+              </a:rPr>
+              <a:t>Confidential — prepared for internal investment use · Data as of 2026-10-04</a:t>
+            </a:r>
+          </a:p>
+        </p:txBody>
+      </p:sp>
+      <p:sp>
+        <p:nvSpPr>
+          <p:cNvPr id="11" name="TextBox 10"/>
+          <p:cNvSpPr txBox="1"/>
+          <p:nvPr/>
+        </p:nvSpPr>
+        <p:spPr>
+          <a:xfrm>
+            <a:off x="10287000" y="6501384"/>
+            <a:ext cx="1261872" cy="146304"/>
+          </a:xfrm>
+          <a:prstGeom prst="rect">
+            <a:avLst/>
+          </a:prstGeom>
+          <a:noFill/>
+        </p:spPr>
+        <p:txBody>
+          <a:bodyPr wrap="none" lIns="9144" rIns="9144" tIns="9144" bIns="9144" anchor="t">
+            <a:spAutoFit/>
+          </a:bodyPr>
+          <a:lstStyle/>
+          <a:p>
+            <a:pPr algn="r">
+              <a:spcAft>
+                <a:spcPts val="0"/>
+              </a:spcAft>
+              <a:defRPr sz="650" b="0">
+                <a:solidFill>
+                  <a:srgbClr val="8A94A1"/>
+                </a:solidFill>
+                <a:latin typeface="Inter"/>
+              </a:defRPr>
+            </a:pPr>
+            <a:r>
+              <a:rPr>
+                <a:latin typeface="Inter"/>
+              </a:rPr>
+              <a:t>10</a:t>
             </a:r>
           </a:p>
         </p:txBody>
@@ -3108,7 +3816,11 @@
           <a:bodyPr rtlCol="0" anchor="ctr"/>
           <a:lstStyle/>
           <a:p>
-            <a:pPr algn="ctr"/>
+            <a:pPr algn="ctr">
+              <a:defRPr>
+                <a:latin typeface="Inter"/>
+              </a:defRPr>
+            </a:pPr>
           </a:p>
         </p:txBody>
       </p:sp>
@@ -3146,6 +3858,9 @@
               </a:defRPr>
             </a:pPr>
             <a:r>
+              <a:rPr>
+                <a:latin typeface="Inter"/>
+              </a:rPr>
               <a:t>CAN THIS ORGANIZATION USE THE GRADIENT SKILLS TODAY?</a:t>
             </a:r>
           </a:p>
@@ -3185,6 +3900,9 @@
               </a:defRPr>
             </a:pPr>
             <a:r>
+              <a:rPr>
+                <a:latin typeface="Inter"/>
+              </a:rPr>
               <a:t>Summary</a:t>
             </a:r>
           </a:p>
@@ -3231,7 +3949,11 @@
           <a:bodyPr rtlCol="0" anchor="ctr"/>
           <a:lstStyle/>
           <a:p>
-            <a:pPr algn="ctr"/>
+            <a:pPr algn="ctr">
+              <a:defRPr>
+                <a:latin typeface="Inter"/>
+              </a:defRPr>
+            </a:pPr>
           </a:p>
         </p:txBody>
       </p:sp>
@@ -3276,7 +3998,11 @@
           <a:bodyPr rtlCol="0" anchor="ctr"/>
           <a:lstStyle/>
           <a:p>
-            <a:pPr algn="ctr"/>
+            <a:pPr algn="ctr">
+              <a:defRPr>
+                <a:latin typeface="Inter"/>
+              </a:defRPr>
+            </a:pPr>
           </a:p>
         </p:txBody>
       </p:sp>
@@ -3314,6 +4040,9 @@
               </a:defRPr>
             </a:pPr>
             <a:r>
+              <a:rPr>
+                <a:latin typeface="Inter"/>
+              </a:rPr>
               <a:t>01</a:t>
             </a:r>
           </a:p>
@@ -3360,7 +4089,11 @@
           <a:bodyPr rtlCol="0" anchor="ctr"/>
           <a:lstStyle/>
           <a:p>
-            <a:pPr algn="ctr"/>
+            <a:pPr algn="ctr">
+              <a:defRPr>
+                <a:latin typeface="Inter"/>
+              </a:defRPr>
+            </a:pPr>
           </a:p>
         </p:txBody>
       </p:sp>
@@ -3405,7 +4138,11 @@
           <a:bodyPr rtlCol="0" anchor="ctr"/>
           <a:lstStyle/>
           <a:p>
-            <a:pPr algn="ctr"/>
+            <a:pPr algn="ctr">
+              <a:defRPr>
+                <a:latin typeface="Inter"/>
+              </a:defRPr>
+            </a:pPr>
           </a:p>
         </p:txBody>
       </p:sp>
@@ -3443,6 +4180,9 @@
               </a:defRPr>
             </a:pPr>
             <a:r>
+              <a:rPr>
+                <a:latin typeface="Inter"/>
+              </a:rPr>
               <a:t>Bottom line</a:t>
             </a:r>
           </a:p>
@@ -3482,6 +4222,9 @@
               </a:defRPr>
             </a:pPr>
             <a:r>
+              <a:rPr>
+                <a:latin typeface="Inter"/>
+              </a:rPr>
               <a:t>GradientCIO is connected and healthy for organization Gradient [S1][S2]. Nineteen of twenty-one skills are ready; the macro briefing has one unavailable view, and the IC memo needs the Portfolio and Strategy Lab modules for live portfolio data [S2]. 13 of 14 contract checks passed; macro regime state returned Not available (HTTP 500) [S3].</a:t>
             </a:r>
           </a:p>
@@ -3528,7 +4271,11 @@
           <a:bodyPr rtlCol="0" anchor="ctr"/>
           <a:lstStyle/>
           <a:p>
-            <a:pPr algn="ctr"/>
+            <a:pPr algn="ctr">
+              <a:defRPr>
+                <a:latin typeface="Inter"/>
+              </a:defRPr>
+            </a:pPr>
           </a:p>
         </p:txBody>
       </p:sp>
@@ -3573,7 +4320,11 @@
           <a:bodyPr rtlCol="0" anchor="ctr"/>
           <a:lstStyle/>
           <a:p>
-            <a:pPr algn="ctr"/>
+            <a:pPr algn="ctr">
+              <a:defRPr>
+                <a:latin typeface="Inter"/>
+              </a:defRPr>
+            </a:pPr>
           </a:p>
         </p:txBody>
       </p:sp>
@@ -3611,6 +4362,9 @@
               </a:defRPr>
             </a:pPr>
             <a:r>
+              <a:rPr>
+                <a:latin typeface="Inter"/>
+              </a:rPr>
               <a:t>SKILLS READY</a:t>
             </a:r>
           </a:p>
@@ -3650,6 +4404,9 @@
               </a:defRPr>
             </a:pPr>
             <a:r>
+              <a:rPr>
+                <a:latin typeface="Inter"/>
+              </a:rPr>
               <a:t>19</a:t>
             </a:r>
           </a:p>
@@ -3689,6 +4446,9 @@
               </a:defRPr>
             </a:pPr>
             <a:r>
+              <a:rPr>
+                <a:latin typeface="Inter"/>
+              </a:rPr>
               <a:t>of 21</a:t>
             </a:r>
           </a:p>
@@ -3735,7 +4495,11 @@
           <a:bodyPr rtlCol="0" anchor="ctr"/>
           <a:lstStyle/>
           <a:p>
-            <a:pPr algn="ctr"/>
+            <a:pPr algn="ctr">
+              <a:defRPr>
+                <a:latin typeface="Inter"/>
+              </a:defRPr>
+            </a:pPr>
           </a:p>
         </p:txBody>
       </p:sp>
@@ -3780,7 +4544,11 @@
           <a:bodyPr rtlCol="0" anchor="ctr"/>
           <a:lstStyle/>
           <a:p>
-            <a:pPr algn="ctr"/>
+            <a:pPr algn="ctr">
+              <a:defRPr>
+                <a:latin typeface="Inter"/>
+              </a:defRPr>
+            </a:pPr>
           </a:p>
         </p:txBody>
       </p:sp>
@@ -3818,6 +4586,9 @@
               </a:defRPr>
             </a:pPr>
             <a:r>
+              <a:rPr>
+                <a:latin typeface="Inter"/>
+              </a:rPr>
               <a:t>PARTIAL</a:t>
             </a:r>
           </a:p>
@@ -3857,6 +4628,9 @@
               </a:defRPr>
             </a:pPr>
             <a:r>
+              <a:rPr>
+                <a:latin typeface="Inter"/>
+              </a:rPr>
               <a:t>2</a:t>
             </a:r>
           </a:p>
@@ -3896,6 +4670,9 @@
               </a:defRPr>
             </a:pPr>
             <a:r>
+              <a:rPr>
+                <a:latin typeface="Inter"/>
+              </a:rPr>
               <a:t>Macro brief · IC memo</a:t>
             </a:r>
           </a:p>
@@ -3942,7 +4719,11 @@
           <a:bodyPr rtlCol="0" anchor="ctr"/>
           <a:lstStyle/>
           <a:p>
-            <a:pPr algn="ctr"/>
+            <a:pPr algn="ctr">
+              <a:defRPr>
+                <a:latin typeface="Inter"/>
+              </a:defRPr>
+            </a:pPr>
           </a:p>
         </p:txBody>
       </p:sp>
@@ -3987,7 +4768,11 @@
           <a:bodyPr rtlCol="0" anchor="ctr"/>
           <a:lstStyle/>
           <a:p>
-            <a:pPr algn="ctr"/>
+            <a:pPr algn="ctr">
+              <a:defRPr>
+                <a:latin typeface="Inter"/>
+              </a:defRPr>
+            </a:pPr>
           </a:p>
         </p:txBody>
       </p:sp>
@@ -4025,6 +4810,9 @@
               </a:defRPr>
             </a:pPr>
             <a:r>
+              <a:rPr>
+                <a:latin typeface="Inter"/>
+              </a:rPr>
               <a:t>NOT LICENSED</a:t>
             </a:r>
           </a:p>
@@ -4064,6 +4852,9 @@
               </a:defRPr>
             </a:pPr>
             <a:r>
+              <a:rPr>
+                <a:latin typeface="Inter"/>
+              </a:rPr>
               <a:t>2 modules</a:t>
             </a:r>
           </a:p>
@@ -4103,6 +4894,9 @@
               </a:defRPr>
             </a:pPr>
             <a:r>
+              <a:rPr>
+                <a:latin typeface="Inter"/>
+              </a:rPr>
               <a:t>Portfolio · Strategy Lab</a:t>
             </a:r>
           </a:p>
@@ -4149,7 +4943,11 @@
           <a:bodyPr rtlCol="0" anchor="ctr"/>
           <a:lstStyle/>
           <a:p>
-            <a:pPr algn="ctr"/>
+            <a:pPr algn="ctr">
+              <a:defRPr>
+                <a:latin typeface="Inter"/>
+              </a:defRPr>
+            </a:pPr>
           </a:p>
         </p:txBody>
       </p:sp>
@@ -4194,7 +4992,11 @@
           <a:bodyPr rtlCol="0" anchor="ctr"/>
           <a:lstStyle/>
           <a:p>
-            <a:pPr algn="ctr"/>
+            <a:pPr algn="ctr">
+              <a:defRPr>
+                <a:latin typeface="Inter"/>
+              </a:defRPr>
+            </a:pPr>
           </a:p>
         </p:txBody>
       </p:sp>
@@ -4232,6 +5034,9 @@
               </a:defRPr>
             </a:pPr>
             <a:r>
+              <a:rPr>
+                <a:latin typeface="Inter"/>
+              </a:rPr>
               <a:t>CHECKS PASSED</a:t>
             </a:r>
           </a:p>
@@ -4271,6 +5076,9 @@
               </a:defRPr>
             </a:pPr>
             <a:r>
+              <a:rPr>
+                <a:latin typeface="Inter"/>
+              </a:rPr>
               <a:t>13 / 14</a:t>
             </a:r>
           </a:p>
@@ -4310,6 +5118,9 @@
               </a:defRPr>
             </a:pPr>
             <a:r>
+              <a:rPr>
+                <a:latin typeface="Inter"/>
+              </a:rPr>
               <a:t>1 unavailable check</a:t>
             </a:r>
           </a:p>
@@ -4356,7 +5167,11 @@
           <a:bodyPr rtlCol="0" anchor="ctr"/>
           <a:lstStyle/>
           <a:p>
-            <a:pPr algn="ctr"/>
+            <a:pPr algn="ctr">
+              <a:defRPr>
+                <a:latin typeface="Inter"/>
+              </a:defRPr>
+            </a:pPr>
           </a:p>
         </p:txBody>
       </p:sp>
@@ -4401,7 +5216,11 @@
           <a:bodyPr rtlCol="0" anchor="ctr"/>
           <a:lstStyle/>
           <a:p>
-            <a:pPr algn="ctr"/>
+            <a:pPr algn="ctr">
+              <a:defRPr>
+                <a:latin typeface="Inter"/>
+              </a:defRPr>
+            </a:pPr>
           </a:p>
         </p:txBody>
       </p:sp>
@@ -4439,6 +5258,9 @@
               </a:defRPr>
             </a:pPr>
             <a:r>
+              <a:rPr>
+                <a:latin typeface="Inter"/>
+              </a:rPr>
               <a:t>What to do next</a:t>
             </a:r>
           </a:p>
@@ -4478,6 +5300,9 @@
               </a:defRPr>
             </a:pPr>
             <a:r>
+              <a:rPr>
+                <a:latin typeface="Inter"/>
+              </a:rPr>
               <a:t>Nothing is blocking day-to-day use. To write IC memos from live portfolio data, license the Portfolio and Strategy Lab modules; until then the memo can be written from holdings you supply.</a:t>
             </a:r>
           </a:p>
@@ -4524,7 +5349,11 @@
           <a:bodyPr rtlCol="0" anchor="ctr"/>
           <a:lstStyle/>
           <a:p>
-            <a:pPr algn="ctr"/>
+            <a:pPr algn="ctr">
+              <a:defRPr>
+                <a:latin typeface="Inter"/>
+              </a:defRPr>
+            </a:pPr>
           </a:p>
         </p:txBody>
       </p:sp>
@@ -4562,6 +5391,9 @@
               </a:defRPr>
             </a:pPr>
             <a:r>
+              <a:rPr>
+                <a:latin typeface="Inter"/>
+              </a:rPr>
               <a:t>Sources: S1 · S2 · S3</a:t>
             </a:r>
           </a:p>
@@ -4601,7 +5433,10 @@
               </a:defRPr>
             </a:pPr>
             <a:r>
-              <a:t>Confidential — internal investment use</a:t>
+              <a:rPr>
+                <a:latin typeface="Inter"/>
+              </a:rPr>
+              <a:t>Confidential — prepared for internal investment use · Data as of 2026-10-04</a:t>
             </a:r>
           </a:p>
         </p:txBody>
@@ -4640,6 +5475,9 @@
               </a:defRPr>
             </a:pPr>
             <a:r>
+              <a:rPr>
+                <a:latin typeface="Inter"/>
+              </a:rPr>
               <a:t>2</a:t>
             </a:r>
           </a:p>
@@ -4704,7 +5542,11 @@
           <a:bodyPr rtlCol="0" anchor="ctr"/>
           <a:lstStyle/>
           <a:p>
-            <a:pPr algn="ctr"/>
+            <a:pPr algn="ctr">
+              <a:defRPr>
+                <a:latin typeface="Inter"/>
+              </a:defRPr>
+            </a:pPr>
           </a:p>
         </p:txBody>
       </p:sp>
@@ -4742,6 +5584,9 @@
               </a:defRPr>
             </a:pPr>
             <a:r>
+              <a:rPr>
+                <a:latin typeface="Inter"/>
+              </a:rPr>
               <a:t>STATUS OF EACH SKILL FOR THIS ORGANIZATION</a:t>
             </a:r>
           </a:p>
@@ -4781,6 +5626,9 @@
               </a:defRPr>
             </a:pPr>
             <a:r>
+              <a:rPr>
+                <a:latin typeface="Inter"/>
+              </a:rPr>
               <a:t>Skills you can use</a:t>
             </a:r>
           </a:p>
@@ -4827,7 +5675,11 @@
           <a:bodyPr rtlCol="0" anchor="ctr"/>
           <a:lstStyle/>
           <a:p>
-            <a:pPr algn="ctr"/>
+            <a:pPr algn="ctr">
+              <a:defRPr>
+                <a:latin typeface="Inter"/>
+              </a:defRPr>
+            </a:pPr>
           </a:p>
         </p:txBody>
       </p:sp>
@@ -4872,7 +5724,11 @@
           <a:bodyPr rtlCol="0" anchor="ctr"/>
           <a:lstStyle/>
           <a:p>
-            <a:pPr algn="ctr"/>
+            <a:pPr algn="ctr">
+              <a:defRPr>
+                <a:latin typeface="Inter"/>
+              </a:defRPr>
+            </a:pPr>
           </a:p>
         </p:txBody>
       </p:sp>
@@ -4910,22 +5766,67 @@
               </a:defRPr>
             </a:pPr>
             <a:r>
+              <a:rPr>
+                <a:latin typeface="Inter"/>
+              </a:rPr>
               <a:t>02</a:t>
             </a:r>
           </a:p>
         </p:txBody>
       </p:sp>
+      <p:sp>
+        <p:nvSpPr>
+          <p:cNvPr id="8" name="TextBox 7"/>
+          <p:cNvSpPr txBox="1"/>
+          <p:nvPr/>
+        </p:nvSpPr>
+        <p:spPr>
+          <a:xfrm>
+            <a:off x="640080" y="1325880"/>
+            <a:ext cx="5239512" cy="201168"/>
+          </a:xfrm>
+          <a:prstGeom prst="rect">
+            <a:avLst/>
+          </a:prstGeom>
+          <a:noFill/>
+        </p:spPr>
+        <p:txBody>
+          <a:bodyPr wrap="none" lIns="9144" rIns="9144" tIns="9144" bIns="9144" anchor="t">
+            <a:spAutoFit/>
+          </a:bodyPr>
+          <a:lstStyle/>
+          <a:p>
+            <a:pPr algn="l">
+              <a:spcAft>
+                <a:spcPts val="0"/>
+              </a:spcAft>
+              <a:defRPr sz="720" b="1">
+                <a:solidFill>
+                  <a:srgbClr val="4A5563"/>
+                </a:solidFill>
+                <a:latin typeface="Inter"/>
+              </a:defRPr>
+            </a:pPr>
+            <a:r>
+              <a:rPr>
+                <a:latin typeface="Inter"/>
+              </a:rPr>
+              <a:t>READY</a:t>
+            </a:r>
+          </a:p>
+        </p:txBody>
+      </p:sp>
       <p:graphicFrame>
         <p:nvGraphicFramePr>
-          <p:cNvPr id="8" name="Table 7"/>
+          <p:cNvPr id="9" name="Table 8"/>
           <p:cNvGraphicFramePr>
             <a:graphicFrameLocks noGrp="1"/>
           </p:cNvGraphicFramePr>
           <p:nvPr/>
         </p:nvGraphicFramePr>
         <p:xfrm>
-          <a:off x="640080" y="1325880"/>
-          <a:ext cx="10908792" cy="4892040"/>
+          <a:off x="640080" y="1600200"/>
+          <a:ext cx="5239512" cy="4617720"/>
         </p:xfrm>
         <a:graphic>
           <a:graphicData uri="http://schemas.openxmlformats.org/drawingml/2006/table">
@@ -4934,12 +5835,11 @@
                 <a:tableStyleId>{5C22544A-7EE6-4342-B048-85BDC9FD1C3A}</a:tableStyleId>
               </a:tblPr>
               <a:tblGrid>
-                <a:gridCol w="2011680"/>
-                <a:gridCol w="2965704"/>
-                <a:gridCol w="2965704"/>
-                <a:gridCol w="2965704"/>
+                <a:gridCol w="1746504"/>
+                <a:gridCol w="1746504"/>
+                <a:gridCol w="1746504"/>
               </a:tblGrid>
-              <a:tr h="611505">
+              <a:tr h="769620">
                 <a:tc>
                   <a:txBody>
                     <a:bodyPr/>
@@ -4954,6 +5854,9 @@
                         </a:defRPr>
                       </a:pPr>
                       <a:r>
+                        <a:rPr>
+                          <a:latin typeface="Inter"/>
+                        </a:rPr>
                         <a:t>Skill</a:t>
                       </a:r>
                     </a:p>
@@ -4978,6 +5881,9 @@
                         </a:defRPr>
                       </a:pPr>
                       <a:r>
+                        <a:rPr>
+                          <a:latin typeface="Inter"/>
+                        </a:rPr>
                         <a:t>Produces</a:t>
                       </a:r>
                     </a:p>
@@ -5002,7 +5908,10 @@
                         </a:defRPr>
                       </a:pPr>
                       <a:r>
-                        <a:t>Status</a:t>
+                        <a:rPr>
+                          <a:latin typeface="Inter"/>
+                        </a:rPr>
+                        <a:t>Note</a:t>
                       </a:r>
                     </a:p>
                   </a:txBody>
@@ -5012,32 +5921,8 @@
                     </a:solidFill>
                   </a:tcPr>
                 </a:tc>
-                <a:tc>
-                  <a:txBody>
-                    <a:bodyPr/>
-                    <a:lstStyle/>
-                    <a:p>
-                      <a:pPr>
-                        <a:defRPr sz="750" b="1">
-                          <a:solidFill>
-                            <a:srgbClr val="FFFFFF"/>
-                          </a:solidFill>
-                          <a:latin typeface="Inter"/>
-                        </a:defRPr>
-                      </a:pPr>
-                      <a:r>
-                        <a:t>Note</a:t>
-                      </a:r>
-                    </a:p>
-                  </a:txBody>
-                  <a:tcPr marL="54864" marR="54864" marT="27432" marB="27432" anchor="ctr">
-                    <a:solidFill>
-                      <a:srgbClr val="0D1117"/>
-                    </a:solidFill>
-                  </a:tcPr>
-                </a:tc>
               </a:tr>
-              <a:tr h="611505">
+              <a:tr h="769620">
                 <a:tc>
                   <a:txBody>
                     <a:bodyPr/>
@@ -5052,6 +5937,9 @@
                         </a:defRPr>
                       </a:pPr>
                       <a:r>
+                        <a:rPr>
+                          <a:latin typeface="Inter"/>
+                        </a:rPr>
                         <a:t>gradient-odd-report</a:t>
                       </a:r>
                     </a:p>
@@ -5076,6 +5964,9 @@
                         </a:defRPr>
                       </a:pPr>
                       <a:r>
+                        <a:rPr>
+                          <a:latin typeface="Inter"/>
+                        </a:rPr>
                         <a:t>ODD report</a:t>
                       </a:r>
                     </a:p>
@@ -5092,15 +5983,47 @@
                     <a:lstStyle/>
                     <a:p>
                       <a:pPr>
+                        <a:defRPr sz="800" b="0">
+                          <a:solidFill>
+                            <a:srgbClr val="0D1117"/>
+                          </a:solidFill>
+                          <a:latin typeface="Inter"/>
+                        </a:defRPr>
+                      </a:pPr>
+                      <a:r>
+                        <a:rPr>
+                          <a:latin typeface="Inter"/>
+                        </a:rPr>
+                        <a:t>Event feed not published; reports disclose the gap</a:t>
+                      </a:r>
+                    </a:p>
+                  </a:txBody>
+                  <a:tcPr marL="54864" marR="54864" marT="27432" marB="27432" anchor="ctr">
+                    <a:solidFill>
+                      <a:srgbClr val="FFFFFF"/>
+                    </a:solidFill>
+                  </a:tcPr>
+                </a:tc>
+              </a:tr>
+              <a:tr h="769620">
+                <a:tc>
+                  <a:txBody>
+                    <a:bodyPr/>
+                    <a:lstStyle/>
+                    <a:p>
+                      <a:pPr>
                         <a:defRPr sz="800" b="1">
                           <a:solidFill>
-                            <a:srgbClr val="C6F432"/>
-                          </a:solidFill>
-                          <a:latin typeface="Inter"/>
-                        </a:defRPr>
-                      </a:pPr>
-                      <a:r>
-                        <a:t>● Ready</a:t>
+                            <a:srgbClr val="0D1117"/>
+                          </a:solidFill>
+                          <a:latin typeface="Inter"/>
+                        </a:defRPr>
+                      </a:pPr>
+                      <a:r>
+                        <a:rPr>
+                          <a:latin typeface="Inter"/>
+                        </a:rPr>
+                        <a:t>gradient-ddq-reconcile</a:t>
                       </a:r>
                     </a:p>
                   </a:txBody>
@@ -5124,7 +6047,66 @@
                         </a:defRPr>
                       </a:pPr>
                       <a:r>
-                        <a:t>Event feed not yet published; reports say so</a:t>
+                        <a:rPr>
+                          <a:latin typeface="Inter"/>
+                        </a:rPr>
+                        <a:t>DDQ reconciliation</a:t>
+                      </a:r>
+                    </a:p>
+                  </a:txBody>
+                  <a:tcPr marL="54864" marR="54864" marT="27432" marB="27432" anchor="ctr">
+                    <a:solidFill>
+                      <a:srgbClr val="F5F7F9"/>
+                    </a:solidFill>
+                  </a:tcPr>
+                </a:tc>
+                <a:tc>
+                  <a:txBody>
+                    <a:bodyPr/>
+                    <a:lstStyle/>
+                    <a:p>
+                      <a:pPr>
+                        <a:defRPr sz="800" b="0">
+                          <a:solidFill>
+                            <a:srgbClr val="0D1117"/>
+                          </a:solidFill>
+                          <a:latin typeface="Inter"/>
+                        </a:defRPr>
+                      </a:pPr>
+                      <a:r>
+                        <a:rPr>
+                          <a:latin typeface="Inter"/>
+                        </a:rPr>
+                        <a:t>One subject per call</a:t>
+                      </a:r>
+                    </a:p>
+                  </a:txBody>
+                  <a:tcPr marL="54864" marR="54864" marT="27432" marB="27432" anchor="ctr">
+                    <a:solidFill>
+                      <a:srgbClr val="F5F7F9"/>
+                    </a:solidFill>
+                  </a:tcPr>
+                </a:tc>
+              </a:tr>
+              <a:tr h="769620">
+                <a:tc>
+                  <a:txBody>
+                    <a:bodyPr/>
+                    <a:lstStyle/>
+                    <a:p>
+                      <a:pPr>
+                        <a:defRPr sz="800" b="1">
+                          <a:solidFill>
+                            <a:srgbClr val="0D1117"/>
+                          </a:solidFill>
+                          <a:latin typeface="Inter"/>
+                        </a:defRPr>
+                      </a:pPr>
+                      <a:r>
+                        <a:rPr>
+                          <a:latin typeface="Inter"/>
+                        </a:rPr>
+                        <a:t>gradient-manager-monitor</a:t>
                       </a:r>
                     </a:p>
                   </a:txBody>
@@ -5134,8 +6116,62 @@
                     </a:solidFill>
                   </a:tcPr>
                 </a:tc>
+                <a:tc>
+                  <a:txBody>
+                    <a:bodyPr/>
+                    <a:lstStyle/>
+                    <a:p>
+                      <a:pPr>
+                        <a:defRPr sz="800" b="0">
+                          <a:solidFill>
+                            <a:srgbClr val="0D1117"/>
+                          </a:solidFill>
+                          <a:latin typeface="Inter"/>
+                        </a:defRPr>
+                      </a:pPr>
+                      <a:r>
+                        <a:rPr>
+                          <a:latin typeface="Inter"/>
+                        </a:rPr>
+                        <a:t>Weekly digest</a:t>
+                      </a:r>
+                    </a:p>
+                  </a:txBody>
+                  <a:tcPr marL="54864" marR="54864" marT="27432" marB="27432" anchor="ctr">
+                    <a:solidFill>
+                      <a:srgbClr val="FFFFFF"/>
+                    </a:solidFill>
+                  </a:tcPr>
+                </a:tc>
+                <a:tc>
+                  <a:txBody>
+                    <a:bodyPr/>
+                    <a:lstStyle/>
+                    <a:p>
+                      <a:pPr>
+                        <a:defRPr sz="800" b="0">
+                          <a:solidFill>
+                            <a:srgbClr val="0D1117"/>
+                          </a:solidFill>
+                          <a:latin typeface="Inter"/>
+                        </a:defRPr>
+                      </a:pPr>
+                      <a:r>
+                        <a:rPr>
+                          <a:latin typeface="Inter"/>
+                        </a:rPr>
+                        <a:t>1 roster fund monitored</a:t>
+                      </a:r>
+                    </a:p>
+                  </a:txBody>
+                  <a:tcPr marL="54864" marR="54864" marT="27432" marB="27432" anchor="ctr">
+                    <a:solidFill>
+                      <a:srgbClr val="FFFFFF"/>
+                    </a:solidFill>
+                  </a:tcPr>
+                </a:tc>
               </a:tr>
-              <a:tr h="611505">
+              <a:tr h="769620">
                 <a:tc>
                   <a:txBody>
                     <a:bodyPr/>
@@ -5150,7 +6186,10 @@
                         </a:defRPr>
                       </a:pPr>
                       <a:r>
-                        <a:t>gradient-ddq-reconcile</a:t>
+                        <a:rPr>
+                          <a:latin typeface="Inter"/>
+                        </a:rPr>
+                        <a:t>gradient-gips-* (5)</a:t>
                       </a:r>
                     </a:p>
                   </a:txBody>
@@ -5174,7 +6213,10 @@
                         </a:defRPr>
                       </a:pPr>
                       <a:r>
-                        <a:t>DDQ reconciliation</a:t>
+                        <a:rPr>
+                          <a:latin typeface="Inter"/>
+                        </a:rPr>
+                        <a:t>GIPS reviews</a:t>
                       </a:r>
                     </a:p>
                   </a:txBody>
@@ -5190,21 +6232,53 @@
                     <a:lstStyle/>
                     <a:p>
                       <a:pPr>
+                        <a:defRPr sz="800" b="0">
+                          <a:solidFill>
+                            <a:srgbClr val="0D1117"/>
+                          </a:solidFill>
+                          <a:latin typeface="Inter"/>
+                        </a:defRPr>
+                      </a:pPr>
+                      <a:r>
+                        <a:rPr>
+                          <a:latin typeface="Inter"/>
+                        </a:rPr>
+                        <a:t>Works from supplied documents</a:t>
+                      </a:r>
+                    </a:p>
+                  </a:txBody>
+                  <a:tcPr marL="54864" marR="54864" marT="27432" marB="27432" anchor="ctr">
+                    <a:solidFill>
+                      <a:srgbClr val="F5F7F9"/>
+                    </a:solidFill>
+                  </a:tcPr>
+                </a:tc>
+              </a:tr>
+              <a:tr h="769620">
+                <a:tc>
+                  <a:txBody>
+                    <a:bodyPr/>
+                    <a:lstStyle/>
+                    <a:p>
+                      <a:pPr>
                         <a:defRPr sz="800" b="1">
                           <a:solidFill>
-                            <a:srgbClr val="C6F432"/>
-                          </a:solidFill>
-                          <a:latin typeface="Inter"/>
-                        </a:defRPr>
-                      </a:pPr>
-                      <a:r>
-                        <a:t>● Ready</a:t>
-                      </a:r>
-                    </a:p>
-                  </a:txBody>
-                  <a:tcPr marL="54864" marR="54864" marT="27432" marB="27432" anchor="ctr">
-                    <a:solidFill>
-                      <a:srgbClr val="F5F7F9"/>
+                            <a:srgbClr val="0D1117"/>
+                          </a:solidFill>
+                          <a:latin typeface="Inter"/>
+                        </a:defRPr>
+                      </a:pPr>
+                      <a:r>
+                        <a:rPr>
+                          <a:latin typeface="Inter"/>
+                        </a:rPr>
+                        <a:t>gradient-setup</a:t>
+                      </a:r>
+                    </a:p>
+                  </a:txBody>
+                  <a:tcPr marL="54864" marR="54864" marT="27432" marB="27432" anchor="ctr">
+                    <a:solidFill>
+                      <a:srgbClr val="FFFFFF"/>
                     </a:solidFill>
                   </a:tcPr>
                 </a:tc>
@@ -5222,25 +6296,26 @@
                         </a:defRPr>
                       </a:pPr>
                       <a:r>
-                        <a:t>One subject per call; saving runs not yet available</a:t>
-                      </a:r>
-                    </a:p>
-                  </a:txBody>
-                  <a:tcPr marL="54864" marR="54864" marT="27432" marB="27432" anchor="ctr">
-                    <a:solidFill>
-                      <a:srgbClr val="F5F7F9"/>
-                    </a:solidFill>
-                  </a:tcPr>
-                </a:tc>
-              </a:tr>
-              <a:tr h="611505">
-                <a:tc>
-                  <a:txBody>
-                    <a:bodyPr/>
-                    <a:lstStyle/>
-                    <a:p>
-                      <a:pPr>
-                        <a:defRPr sz="800" b="1">
+                        <a:rPr>
+                          <a:latin typeface="Inter"/>
+                        </a:rPr>
+                        <a:t>Readiness report</a:t>
+                      </a:r>
+                    </a:p>
+                  </a:txBody>
+                  <a:tcPr marL="54864" marR="54864" marT="27432" marB="27432" anchor="ctr">
+                    <a:solidFill>
+                      <a:srgbClr val="FFFFFF"/>
+                    </a:solidFill>
+                  </a:tcPr>
+                </a:tc>
+                <a:tc>
+                  <a:txBody>
+                    <a:bodyPr/>
+                    <a:lstStyle/>
+                    <a:p>
+                      <a:pPr>
+                        <a:defRPr sz="800" b="0">
                           <a:solidFill>
                             <a:srgbClr val="0D1117"/>
                           </a:solidFill>
@@ -5248,469 +6323,11 @@
                         </a:defRPr>
                       </a:pPr>
                       <a:r>
-                        <a:t>gradient-manager-monitor</a:t>
-                      </a:r>
-                    </a:p>
-                  </a:txBody>
-                  <a:tcPr marL="54864" marR="54864" marT="27432" marB="27432" anchor="ctr">
-                    <a:solidFill>
-                      <a:srgbClr val="FFFFFF"/>
-                    </a:solidFill>
-                  </a:tcPr>
-                </a:tc>
-                <a:tc>
-                  <a:txBody>
-                    <a:bodyPr/>
-                    <a:lstStyle/>
-                    <a:p>
-                      <a:pPr>
-                        <a:defRPr sz="800" b="0">
-                          <a:solidFill>
-                            <a:srgbClr val="0D1117"/>
-                          </a:solidFill>
-                          <a:latin typeface="Inter"/>
-                        </a:defRPr>
-                      </a:pPr>
-                      <a:r>
-                        <a:t>Weekly monitoring digest</a:t>
-                      </a:r>
-                    </a:p>
-                  </a:txBody>
-                  <a:tcPr marL="54864" marR="54864" marT="27432" marB="27432" anchor="ctr">
-                    <a:solidFill>
-                      <a:srgbClr val="FFFFFF"/>
-                    </a:solidFill>
-                  </a:tcPr>
-                </a:tc>
-                <a:tc>
-                  <a:txBody>
-                    <a:bodyPr/>
-                    <a:lstStyle/>
-                    <a:p>
-                      <a:pPr>
-                        <a:defRPr sz="800" b="1">
-                          <a:solidFill>
-                            <a:srgbClr val="C6F432"/>
-                          </a:solidFill>
-                          <a:latin typeface="Inter"/>
-                        </a:defRPr>
-                      </a:pPr>
-                      <a:r>
-                        <a:t>● Ready</a:t>
-                      </a:r>
-                    </a:p>
-                  </a:txBody>
-                  <a:tcPr marL="54864" marR="54864" marT="27432" marB="27432" anchor="ctr">
-                    <a:solidFill>
-                      <a:srgbClr val="F5F7F9"/>
-                    </a:solidFill>
-                  </a:tcPr>
-                </a:tc>
-                <a:tc>
-                  <a:txBody>
-                    <a:bodyPr/>
-                    <a:lstStyle/>
-                    <a:p>
-                      <a:pPr>
-                        <a:defRPr sz="800" b="0">
-                          <a:solidFill>
-                            <a:srgbClr val="0D1117"/>
-                          </a:solidFill>
-                          <a:latin typeface="Inter"/>
-                        </a:defRPr>
-                      </a:pPr>
-                      <a:r>
-                        <a:t>1 roster fund monitored</a:t>
-                      </a:r>
-                    </a:p>
-                  </a:txBody>
-                  <a:tcPr marL="54864" marR="54864" marT="27432" marB="27432" anchor="ctr">
-                    <a:solidFill>
-                      <a:srgbClr val="FFFFFF"/>
-                    </a:solidFill>
-                  </a:tcPr>
-                </a:tc>
-              </a:tr>
-              <a:tr h="611505">
-                <a:tc>
-                  <a:txBody>
-                    <a:bodyPr/>
-                    <a:lstStyle/>
-                    <a:p>
-                      <a:pPr>
-                        <a:defRPr sz="800" b="1">
-                          <a:solidFill>
-                            <a:srgbClr val="0D1117"/>
-                          </a:solidFill>
-                          <a:latin typeface="Inter"/>
-                        </a:defRPr>
-                      </a:pPr>
-                      <a:r>
-                        <a:t>gradient-macro-brief</a:t>
-                      </a:r>
-                    </a:p>
-                  </a:txBody>
-                  <a:tcPr marL="54864" marR="54864" marT="27432" marB="27432" anchor="ctr">
-                    <a:solidFill>
-                      <a:srgbClr val="F5F7F9"/>
-                    </a:solidFill>
-                  </a:tcPr>
-                </a:tc>
-                <a:tc>
-                  <a:txBody>
-                    <a:bodyPr/>
-                    <a:lstStyle/>
-                    <a:p>
-                      <a:pPr>
-                        <a:defRPr sz="800" b="0">
-                          <a:solidFill>
-                            <a:srgbClr val="0D1117"/>
-                          </a:solidFill>
-                          <a:latin typeface="Inter"/>
-                        </a:defRPr>
-                      </a:pPr>
-                      <a:r>
-                        <a:t>Macro briefing deck</a:t>
-                      </a:r>
-                    </a:p>
-                  </a:txBody>
-                  <a:tcPr marL="54864" marR="54864" marT="27432" marB="27432" anchor="ctr">
-                    <a:solidFill>
-                      <a:srgbClr val="F5F7F9"/>
-                    </a:solidFill>
-                  </a:tcPr>
-                </a:tc>
-                <a:tc>
-                  <a:txBody>
-                    <a:bodyPr/>
-                    <a:lstStyle/>
-                    <a:p>
-                      <a:pPr>
-                        <a:defRPr sz="800" b="1">
-                          <a:solidFill>
-                            <a:srgbClr val="F2A93B"/>
-                          </a:solidFill>
-                          <a:latin typeface="Inter"/>
-                        </a:defRPr>
-                      </a:pPr>
-                      <a:r>
-                        <a:t>● Partial</a:t>
-                      </a:r>
-                    </a:p>
-                  </a:txBody>
-                  <a:tcPr marL="54864" marR="54864" marT="27432" marB="27432" anchor="ctr">
-                    <a:solidFill>
-                      <a:srgbClr val="F5F7F9"/>
-                    </a:solidFill>
-                  </a:tcPr>
-                </a:tc>
-                <a:tc>
-                  <a:txBody>
-                    <a:bodyPr/>
-                    <a:lstStyle/>
-                    <a:p>
-                      <a:pPr>
-                        <a:defRPr sz="800" b="0">
-                          <a:solidFill>
-                            <a:srgbClr val="0D1117"/>
-                          </a:solidFill>
-                          <a:latin typeface="Inter"/>
-                        </a:defRPr>
-                      </a:pPr>
-                      <a:r>
-                        <a:t>Regime-state view unavailable; deck uses Gradient signal instead</a:t>
-                      </a:r>
-                    </a:p>
-                  </a:txBody>
-                  <a:tcPr marL="54864" marR="54864" marT="27432" marB="27432" anchor="ctr">
-                    <a:solidFill>
-                      <a:srgbClr val="F5F7F9"/>
-                    </a:solidFill>
-                  </a:tcPr>
-                </a:tc>
-              </a:tr>
-              <a:tr h="611505">
-                <a:tc>
-                  <a:txBody>
-                    <a:bodyPr/>
-                    <a:lstStyle/>
-                    <a:p>
-                      <a:pPr>
-                        <a:defRPr sz="800" b="1">
-                          <a:solidFill>
-                            <a:srgbClr val="0D1117"/>
-                          </a:solidFill>
-                          <a:latin typeface="Inter"/>
-                        </a:defRPr>
-                      </a:pPr>
-                      <a:r>
-                        <a:t>gradient-ic-memo</a:t>
-                      </a:r>
-                    </a:p>
-                  </a:txBody>
-                  <a:tcPr marL="54864" marR="54864" marT="27432" marB="27432" anchor="ctr">
-                    <a:solidFill>
-                      <a:srgbClr val="FFFFFF"/>
-                    </a:solidFill>
-                  </a:tcPr>
-                </a:tc>
-                <a:tc>
-                  <a:txBody>
-                    <a:bodyPr/>
-                    <a:lstStyle/>
-                    <a:p>
-                      <a:pPr>
-                        <a:defRPr sz="800" b="0">
-                          <a:solidFill>
-                            <a:srgbClr val="0D1117"/>
-                          </a:solidFill>
-                          <a:latin typeface="Inter"/>
-                        </a:defRPr>
-                      </a:pPr>
-                      <a:r>
-                        <a:t>IC memo</a:t>
-                      </a:r>
-                    </a:p>
-                  </a:txBody>
-                  <a:tcPr marL="54864" marR="54864" marT="27432" marB="27432" anchor="ctr">
-                    <a:solidFill>
-                      <a:srgbClr val="FFFFFF"/>
-                    </a:solidFill>
-                  </a:tcPr>
-                </a:tc>
-                <a:tc>
-                  <a:txBody>
-                    <a:bodyPr/>
-                    <a:lstStyle/>
-                    <a:p>
-                      <a:pPr>
-                        <a:defRPr sz="800" b="1">
-                          <a:solidFill>
-                            <a:srgbClr val="F2A93B"/>
-                          </a:solidFill>
-                          <a:latin typeface="Inter"/>
-                        </a:defRPr>
-                      </a:pPr>
-                      <a:r>
-                        <a:t>● Partial</a:t>
-                      </a:r>
-                    </a:p>
-                  </a:txBody>
-                  <a:tcPr marL="54864" marR="54864" marT="27432" marB="27432" anchor="ctr">
-                    <a:solidFill>
-                      <a:srgbClr val="F5F7F9"/>
-                    </a:solidFill>
-                  </a:tcPr>
-                </a:tc>
-                <a:tc>
-                  <a:txBody>
-                    <a:bodyPr/>
-                    <a:lstStyle/>
-                    <a:p>
-                      <a:pPr>
-                        <a:defRPr sz="800" b="0">
-                          <a:solidFill>
-                            <a:srgbClr val="0D1117"/>
-                          </a:solidFill>
-                          <a:latin typeface="Inter"/>
-                        </a:defRPr>
-                      </a:pPr>
-                      <a:r>
-                        <a:t>Portfolio and Strategy Lab not licensed: memo from supplied holdings only</a:t>
-                      </a:r>
-                    </a:p>
-                  </a:txBody>
-                  <a:tcPr marL="54864" marR="54864" marT="27432" marB="27432" anchor="ctr">
-                    <a:solidFill>
-                      <a:srgbClr val="FFFFFF"/>
-                    </a:solidFill>
-                  </a:tcPr>
-                </a:tc>
-              </a:tr>
-              <a:tr h="611505">
-                <a:tc>
-                  <a:txBody>
-                    <a:bodyPr/>
-                    <a:lstStyle/>
-                    <a:p>
-                      <a:pPr>
-                        <a:defRPr sz="800" b="1">
-                          <a:solidFill>
-                            <a:srgbClr val="0D1117"/>
-                          </a:solidFill>
-                          <a:latin typeface="Inter"/>
-                        </a:defRPr>
-                      </a:pPr>
-                      <a:r>
-                        <a:t>gradient-gips-* (5 skills)</a:t>
-                      </a:r>
-                    </a:p>
-                  </a:txBody>
-                  <a:tcPr marL="54864" marR="54864" marT="27432" marB="27432" anchor="ctr">
-                    <a:solidFill>
-                      <a:srgbClr val="F5F7F9"/>
-                    </a:solidFill>
-                  </a:tcPr>
-                </a:tc>
-                <a:tc>
-                  <a:txBody>
-                    <a:bodyPr/>
-                    <a:lstStyle/>
-                    <a:p>
-                      <a:pPr>
-                        <a:defRPr sz="800" b="0">
-                          <a:solidFill>
-                            <a:srgbClr val="0D1117"/>
-                          </a:solidFill>
-                          <a:latin typeface="Inter"/>
-                        </a:defRPr>
-                      </a:pPr>
-                      <a:r>
-                        <a:t>GIPS reviews and briefing notes</a:t>
-                      </a:r>
-                    </a:p>
-                  </a:txBody>
-                  <a:tcPr marL="54864" marR="54864" marT="27432" marB="27432" anchor="ctr">
-                    <a:solidFill>
-                      <a:srgbClr val="F5F7F9"/>
-                    </a:solidFill>
-                  </a:tcPr>
-                </a:tc>
-                <a:tc>
-                  <a:txBody>
-                    <a:bodyPr/>
-                    <a:lstStyle/>
-                    <a:p>
-                      <a:pPr>
-                        <a:defRPr sz="800" b="1">
-                          <a:solidFill>
-                            <a:srgbClr val="C6F432"/>
-                          </a:solidFill>
-                          <a:latin typeface="Inter"/>
-                        </a:defRPr>
-                      </a:pPr>
-                      <a:r>
-                        <a:t>● Ready</a:t>
-                      </a:r>
-                    </a:p>
-                  </a:txBody>
-                  <a:tcPr marL="54864" marR="54864" marT="27432" marB="27432" anchor="ctr">
-                    <a:solidFill>
-                      <a:srgbClr val="F5F7F9"/>
-                    </a:solidFill>
-                  </a:tcPr>
-                </a:tc>
-                <a:tc>
-                  <a:txBody>
-                    <a:bodyPr/>
-                    <a:lstStyle/>
-                    <a:p>
-                      <a:pPr>
-                        <a:defRPr sz="800" b="0">
-                          <a:solidFill>
-                            <a:srgbClr val="0D1117"/>
-                          </a:solidFill>
-                          <a:latin typeface="Inter"/>
-                        </a:defRPr>
-                      </a:pPr>
-                      <a:r>
-                        <a:t>Work from documents; Gradient evidence used when available</a:t>
-                      </a:r>
-                    </a:p>
-                  </a:txBody>
-                  <a:tcPr marL="54864" marR="54864" marT="27432" marB="27432" anchor="ctr">
-                    <a:solidFill>
-                      <a:srgbClr val="F5F7F9"/>
-                    </a:solidFill>
-                  </a:tcPr>
-                </a:tc>
-              </a:tr>
-              <a:tr h="611505">
-                <a:tc>
-                  <a:txBody>
-                    <a:bodyPr/>
-                    <a:lstStyle/>
-                    <a:p>
-                      <a:pPr>
-                        <a:defRPr sz="800" b="1">
-                          <a:solidFill>
-                            <a:srgbClr val="0D1117"/>
-                          </a:solidFill>
-                          <a:latin typeface="Inter"/>
-                        </a:defRPr>
-                      </a:pPr>
-                      <a:r>
-                        <a:t>gradient-setup</a:t>
-                      </a:r>
-                    </a:p>
-                  </a:txBody>
-                  <a:tcPr marL="54864" marR="54864" marT="27432" marB="27432" anchor="ctr">
-                    <a:solidFill>
-                      <a:srgbClr val="FFFFFF"/>
-                    </a:solidFill>
-                  </a:tcPr>
-                </a:tc>
-                <a:tc>
-                  <a:txBody>
-                    <a:bodyPr/>
-                    <a:lstStyle/>
-                    <a:p>
-                      <a:pPr>
-                        <a:defRPr sz="800" b="0">
-                          <a:solidFill>
-                            <a:srgbClr val="0D1117"/>
-                          </a:solidFill>
-                          <a:latin typeface="Inter"/>
-                        </a:defRPr>
-                      </a:pPr>
-                      <a:r>
-                        <a:t>This report</a:t>
-                      </a:r>
-                    </a:p>
-                  </a:txBody>
-                  <a:tcPr marL="54864" marR="54864" marT="27432" marB="27432" anchor="ctr">
-                    <a:solidFill>
-                      <a:srgbClr val="FFFFFF"/>
-                    </a:solidFill>
-                  </a:tcPr>
-                </a:tc>
-                <a:tc>
-                  <a:txBody>
-                    <a:bodyPr/>
-                    <a:lstStyle/>
-                    <a:p>
-                      <a:pPr>
-                        <a:defRPr sz="800" b="1">
-                          <a:solidFill>
-                            <a:srgbClr val="C6F432"/>
-                          </a:solidFill>
-                          <a:latin typeface="Inter"/>
-                        </a:defRPr>
-                      </a:pPr>
-                      <a:r>
-                        <a:t>● Ready</a:t>
-                      </a:r>
-                    </a:p>
-                  </a:txBody>
-                  <a:tcPr marL="54864" marR="54864" marT="27432" marB="27432" anchor="ctr">
-                    <a:solidFill>
-                      <a:srgbClr val="F5F7F9"/>
-                    </a:solidFill>
-                  </a:tcPr>
-                </a:tc>
-                <a:tc>
-                  <a:txBody>
-                    <a:bodyPr/>
-                    <a:lstStyle/>
-                    <a:p>
-                      <a:pPr>
-                        <a:defRPr sz="800" b="0">
-                          <a:solidFill>
-                            <a:srgbClr val="0D1117"/>
-                          </a:solidFill>
-                          <a:latin typeface="Inter"/>
-                        </a:defRPr>
-                      </a:pPr>
+                        <a:rPr>
+                          <a:latin typeface="Inter"/>
+                        </a:rPr>
+                        <a:t>Current check</a:t>
+                      </a:r>
                     </a:p>
                   </a:txBody>
                   <a:tcPr marL="54864" marR="54864" marT="27432" marB="27432" anchor="ctr">
@@ -5726,14 +6343,14 @@
       </p:graphicFrame>
       <p:sp>
         <p:nvSpPr>
-          <p:cNvPr id="9" name="Rectangle 8"/>
+          <p:cNvPr id="10" name="Rectangle 9"/>
           <p:cNvSpPr/>
           <p:nvPr/>
         </p:nvSpPr>
         <p:spPr>
           <a:xfrm>
-            <a:off x="640080" y="6446520"/>
-            <a:ext cx="10908792" cy="9144"/>
+            <a:off x="6080760" y="1325880"/>
+            <a:ext cx="9144" cy="4892040"/>
           </a:xfrm>
           <a:prstGeom prst="rect">
             <a:avLst/>
@@ -5765,13 +6382,384 @@
           <a:bodyPr rtlCol="0" anchor="ctr"/>
           <a:lstStyle/>
           <a:p>
-            <a:pPr algn="ctr"/>
-          </a:p>
-        </p:txBody>
-      </p:sp>
-      <p:sp>
-        <p:nvSpPr>
-          <p:cNvPr id="10" name="TextBox 9"/>
+            <a:pPr algn="ctr">
+              <a:defRPr>
+                <a:latin typeface="Inter"/>
+              </a:defRPr>
+            </a:pPr>
+          </a:p>
+        </p:txBody>
+      </p:sp>
+      <p:sp>
+        <p:nvSpPr>
+          <p:cNvPr id="11" name="TextBox 10"/>
+          <p:cNvSpPr txBox="1"/>
+          <p:nvPr/>
+        </p:nvSpPr>
+        <p:spPr>
+          <a:xfrm>
+            <a:off x="6309360" y="1325880"/>
+            <a:ext cx="5239512" cy="201168"/>
+          </a:xfrm>
+          <a:prstGeom prst="rect">
+            <a:avLst/>
+          </a:prstGeom>
+          <a:noFill/>
+        </p:spPr>
+        <p:txBody>
+          <a:bodyPr wrap="none" lIns="9144" rIns="9144" tIns="9144" bIns="9144" anchor="t">
+            <a:spAutoFit/>
+          </a:bodyPr>
+          <a:lstStyle/>
+          <a:p>
+            <a:pPr algn="l">
+              <a:spcAft>
+                <a:spcPts val="0"/>
+              </a:spcAft>
+              <a:defRPr sz="720" b="1">
+                <a:solidFill>
+                  <a:srgbClr val="4A5563"/>
+                </a:solidFill>
+                <a:latin typeface="Inter"/>
+              </a:defRPr>
+            </a:pPr>
+            <a:r>
+              <a:rPr>
+                <a:latin typeface="Inter"/>
+              </a:rPr>
+              <a:t>PARTIAL</a:t>
+            </a:r>
+          </a:p>
+        </p:txBody>
+      </p:sp>
+      <p:graphicFrame>
+        <p:nvGraphicFramePr>
+          <p:cNvPr id="12" name="Table 11"/>
+          <p:cNvGraphicFramePr>
+            <a:graphicFrameLocks noGrp="1"/>
+          </p:cNvGraphicFramePr>
+          <p:nvPr/>
+        </p:nvGraphicFramePr>
+        <p:xfrm>
+          <a:off x="6309360" y="1600200"/>
+          <a:ext cx="5239512" cy="4617720"/>
+        </p:xfrm>
+        <a:graphic>
+          <a:graphicData uri="http://schemas.openxmlformats.org/drawingml/2006/table">
+            <a:tbl>
+              <a:tblPr firstRow="1" bandRow="1">
+                <a:tableStyleId>{5C22544A-7EE6-4342-B048-85BDC9FD1C3A}</a:tableStyleId>
+              </a:tblPr>
+              <a:tblGrid>
+                <a:gridCol w="1746504"/>
+                <a:gridCol w="1746504"/>
+                <a:gridCol w="1746504"/>
+              </a:tblGrid>
+              <a:tr h="1539240">
+                <a:tc>
+                  <a:txBody>
+                    <a:bodyPr/>
+                    <a:lstStyle/>
+                    <a:p>
+                      <a:pPr>
+                        <a:defRPr sz="750" b="1">
+                          <a:solidFill>
+                            <a:srgbClr val="FFFFFF"/>
+                          </a:solidFill>
+                          <a:latin typeface="Inter"/>
+                        </a:defRPr>
+                      </a:pPr>
+                      <a:r>
+                        <a:rPr>
+                          <a:latin typeface="Inter"/>
+                        </a:rPr>
+                        <a:t>Skill</a:t>
+                      </a:r>
+                    </a:p>
+                  </a:txBody>
+                  <a:tcPr marL="54864" marR="54864" marT="27432" marB="27432" anchor="ctr">
+                    <a:solidFill>
+                      <a:srgbClr val="0D1117"/>
+                    </a:solidFill>
+                  </a:tcPr>
+                </a:tc>
+                <a:tc>
+                  <a:txBody>
+                    <a:bodyPr/>
+                    <a:lstStyle/>
+                    <a:p>
+                      <a:pPr>
+                        <a:defRPr sz="750" b="1">
+                          <a:solidFill>
+                            <a:srgbClr val="FFFFFF"/>
+                          </a:solidFill>
+                          <a:latin typeface="Inter"/>
+                        </a:defRPr>
+                      </a:pPr>
+                      <a:r>
+                        <a:rPr>
+                          <a:latin typeface="Inter"/>
+                        </a:rPr>
+                        <a:t>Produces</a:t>
+                      </a:r>
+                    </a:p>
+                  </a:txBody>
+                  <a:tcPr marL="54864" marR="54864" marT="27432" marB="27432" anchor="ctr">
+                    <a:solidFill>
+                      <a:srgbClr val="0D1117"/>
+                    </a:solidFill>
+                  </a:tcPr>
+                </a:tc>
+                <a:tc>
+                  <a:txBody>
+                    <a:bodyPr/>
+                    <a:lstStyle/>
+                    <a:p>
+                      <a:pPr>
+                        <a:defRPr sz="750" b="1">
+                          <a:solidFill>
+                            <a:srgbClr val="FFFFFF"/>
+                          </a:solidFill>
+                          <a:latin typeface="Inter"/>
+                        </a:defRPr>
+                      </a:pPr>
+                      <a:r>
+                        <a:rPr>
+                          <a:latin typeface="Inter"/>
+                        </a:rPr>
+                        <a:t>Note</a:t>
+                      </a:r>
+                    </a:p>
+                  </a:txBody>
+                  <a:tcPr marL="54864" marR="54864" marT="27432" marB="27432" anchor="ctr">
+                    <a:solidFill>
+                      <a:srgbClr val="0D1117"/>
+                    </a:solidFill>
+                  </a:tcPr>
+                </a:tc>
+              </a:tr>
+              <a:tr h="1539240">
+                <a:tc>
+                  <a:txBody>
+                    <a:bodyPr/>
+                    <a:lstStyle/>
+                    <a:p>
+                      <a:pPr>
+                        <a:defRPr sz="800" b="1">
+                          <a:solidFill>
+                            <a:srgbClr val="0D1117"/>
+                          </a:solidFill>
+                          <a:latin typeface="Inter"/>
+                        </a:defRPr>
+                      </a:pPr>
+                      <a:r>
+                        <a:rPr>
+                          <a:latin typeface="Inter"/>
+                        </a:rPr>
+                        <a:t>gradient-macro-brief</a:t>
+                      </a:r>
+                    </a:p>
+                  </a:txBody>
+                  <a:tcPr marL="54864" marR="54864" marT="27432" marB="27432" anchor="ctr">
+                    <a:solidFill>
+                      <a:srgbClr val="FFFFFF"/>
+                    </a:solidFill>
+                  </a:tcPr>
+                </a:tc>
+                <a:tc>
+                  <a:txBody>
+                    <a:bodyPr/>
+                    <a:lstStyle/>
+                    <a:p>
+                      <a:pPr>
+                        <a:defRPr sz="800" b="0">
+                          <a:solidFill>
+                            <a:srgbClr val="0D1117"/>
+                          </a:solidFill>
+                          <a:latin typeface="Inter"/>
+                        </a:defRPr>
+                      </a:pPr>
+                      <a:r>
+                        <a:rPr>
+                          <a:latin typeface="Inter"/>
+                        </a:rPr>
+                        <a:t>Macro deck</a:t>
+                      </a:r>
+                    </a:p>
+                  </a:txBody>
+                  <a:tcPr marL="54864" marR="54864" marT="27432" marB="27432" anchor="ctr">
+                    <a:solidFill>
+                      <a:srgbClr val="FFFFFF"/>
+                    </a:solidFill>
+                  </a:tcPr>
+                </a:tc>
+                <a:tc>
+                  <a:txBody>
+                    <a:bodyPr/>
+                    <a:lstStyle/>
+                    <a:p>
+                      <a:pPr>
+                        <a:defRPr sz="800" b="0">
+                          <a:solidFill>
+                            <a:srgbClr val="0D1117"/>
+                          </a:solidFill>
+                          <a:latin typeface="Inter"/>
+                        </a:defRPr>
+                      </a:pPr>
+                      <a:r>
+                        <a:rPr>
+                          <a:latin typeface="Inter"/>
+                        </a:rPr>
+                        <a:t>Regime state unavailable; uses Gradient signal</a:t>
+                      </a:r>
+                    </a:p>
+                  </a:txBody>
+                  <a:tcPr marL="54864" marR="54864" marT="27432" marB="27432" anchor="ctr">
+                    <a:solidFill>
+                      <a:srgbClr val="FFFFFF"/>
+                    </a:solidFill>
+                  </a:tcPr>
+                </a:tc>
+              </a:tr>
+              <a:tr h="1539240">
+                <a:tc>
+                  <a:txBody>
+                    <a:bodyPr/>
+                    <a:lstStyle/>
+                    <a:p>
+                      <a:pPr>
+                        <a:defRPr sz="800" b="1">
+                          <a:solidFill>
+                            <a:srgbClr val="0D1117"/>
+                          </a:solidFill>
+                          <a:latin typeface="Inter"/>
+                        </a:defRPr>
+                      </a:pPr>
+                      <a:r>
+                        <a:rPr>
+                          <a:latin typeface="Inter"/>
+                        </a:rPr>
+                        <a:t>gradient-ic-memo</a:t>
+                      </a:r>
+                    </a:p>
+                  </a:txBody>
+                  <a:tcPr marL="54864" marR="54864" marT="27432" marB="27432" anchor="ctr">
+                    <a:solidFill>
+                      <a:srgbClr val="F5F7F9"/>
+                    </a:solidFill>
+                  </a:tcPr>
+                </a:tc>
+                <a:tc>
+                  <a:txBody>
+                    <a:bodyPr/>
+                    <a:lstStyle/>
+                    <a:p>
+                      <a:pPr>
+                        <a:defRPr sz="800" b="0">
+                          <a:solidFill>
+                            <a:srgbClr val="0D1117"/>
+                          </a:solidFill>
+                          <a:latin typeface="Inter"/>
+                        </a:defRPr>
+                      </a:pPr>
+                      <a:r>
+                        <a:rPr>
+                          <a:latin typeface="Inter"/>
+                        </a:rPr>
+                        <a:t>IC memo</a:t>
+                      </a:r>
+                    </a:p>
+                  </a:txBody>
+                  <a:tcPr marL="54864" marR="54864" marT="27432" marB="27432" anchor="ctr">
+                    <a:solidFill>
+                      <a:srgbClr val="F5F7F9"/>
+                    </a:solidFill>
+                  </a:tcPr>
+                </a:tc>
+                <a:tc>
+                  <a:txBody>
+                    <a:bodyPr/>
+                    <a:lstStyle/>
+                    <a:p>
+                      <a:pPr>
+                        <a:defRPr sz="800" b="0">
+                          <a:solidFill>
+                            <a:srgbClr val="0D1117"/>
+                          </a:solidFill>
+                          <a:latin typeface="Inter"/>
+                        </a:defRPr>
+                      </a:pPr>
+                      <a:r>
+                        <a:rPr>
+                          <a:latin typeface="Inter"/>
+                        </a:rPr>
+                        <a:t>Portfolio core: Not licensed; Strategy Lab supplement: Not licensed (optional). Use supplied holdings</a:t>
+                      </a:r>
+                    </a:p>
+                  </a:txBody>
+                  <a:tcPr marL="54864" marR="54864" marT="27432" marB="27432" anchor="ctr">
+                    <a:solidFill>
+                      <a:srgbClr val="F5F7F9"/>
+                    </a:solidFill>
+                  </a:tcPr>
+                </a:tc>
+              </a:tr>
+            </a:tbl>
+          </a:graphicData>
+        </a:graphic>
+      </p:graphicFrame>
+      <p:sp>
+        <p:nvSpPr>
+          <p:cNvPr id="13" name="Rectangle 12"/>
+          <p:cNvSpPr/>
+          <p:nvPr/>
+        </p:nvSpPr>
+        <p:spPr>
+          <a:xfrm>
+            <a:off x="640080" y="6446520"/>
+            <a:ext cx="10908792" cy="9144"/>
+          </a:xfrm>
+          <a:prstGeom prst="rect">
+            <a:avLst/>
+          </a:prstGeom>
+          <a:solidFill>
+            <a:srgbClr val="E3E7EC"/>
+          </a:solidFill>
+          <a:ln>
+            <a:solidFill>
+              <a:srgbClr val="E3E7EC"/>
+            </a:solidFill>
+          </a:ln>
+        </p:spPr>
+        <p:style>
+          <a:lnRef idx="1">
+            <a:schemeClr val="accent1"/>
+          </a:lnRef>
+          <a:fillRef idx="3">
+            <a:schemeClr val="accent1"/>
+          </a:fillRef>
+          <a:effectRef idx="2">
+            <a:schemeClr val="accent1"/>
+          </a:effectRef>
+          <a:fontRef idx="minor">
+            <a:schemeClr val="lt1"/>
+          </a:fontRef>
+        </p:style>
+        <p:txBody>
+          <a:bodyPr rtlCol="0" anchor="ctr"/>
+          <a:lstStyle/>
+          <a:p>
+            <a:pPr algn="ctr">
+              <a:defRPr>
+                <a:latin typeface="Inter"/>
+              </a:defRPr>
+            </a:pPr>
+          </a:p>
+        </p:txBody>
+      </p:sp>
+      <p:sp>
+        <p:nvSpPr>
+          <p:cNvPr id="14" name="TextBox 13"/>
           <p:cNvSpPr txBox="1"/>
           <p:nvPr/>
         </p:nvSpPr>
@@ -5803,6 +6791,9 @@
               </a:defRPr>
             </a:pPr>
             <a:r>
+              <a:rPr>
+                <a:latin typeface="Inter"/>
+              </a:rPr>
               <a:t>Sources: none cited</a:t>
             </a:r>
           </a:p>
@@ -5810,7 +6801,7 @@
       </p:sp>
       <p:sp>
         <p:nvSpPr>
-          <p:cNvPr id="11" name="TextBox 10"/>
+          <p:cNvPr id="15" name="TextBox 14"/>
           <p:cNvSpPr txBox="1"/>
           <p:nvPr/>
         </p:nvSpPr>
@@ -5842,14 +6833,17 @@
               </a:defRPr>
             </a:pPr>
             <a:r>
-              <a:t>Confidential — internal investment use</a:t>
+              <a:rPr>
+                <a:latin typeface="Inter"/>
+              </a:rPr>
+              <a:t>Confidential — prepared for internal investment use · Data as of 2026-10-04</a:t>
             </a:r>
           </a:p>
         </p:txBody>
       </p:sp>
       <p:sp>
         <p:nvSpPr>
-          <p:cNvPr id="12" name="TextBox 11"/>
+          <p:cNvPr id="16" name="TextBox 15"/>
           <p:cNvSpPr txBox="1"/>
           <p:nvPr/>
         </p:nvSpPr>
@@ -5881,6 +6875,9 @@
               </a:defRPr>
             </a:pPr>
             <a:r>
+              <a:rPr>
+                <a:latin typeface="Inter"/>
+              </a:rPr>
               <a:t>3</a:t>
             </a:r>
           </a:p>
@@ -5945,7 +6942,11 @@
           <a:bodyPr rtlCol="0" anchor="ctr"/>
           <a:lstStyle/>
           <a:p>
-            <a:pPr algn="ctr"/>
+            <a:pPr algn="ctr">
+              <a:defRPr>
+                <a:latin typeface="Inter"/>
+              </a:defRPr>
+            </a:pPr>
           </a:p>
         </p:txBody>
       </p:sp>
@@ -5983,6 +6984,9 @@
               </a:defRPr>
             </a:pPr>
             <a:r>
+              <a:rPr>
+                <a:latin typeface="Inter"/>
+              </a:rPr>
               <a:t>ORGANIZATION, MODULES AND DATA DOMAINS</a:t>
             </a:r>
           </a:p>
@@ -6022,6 +7026,9 @@
               </a:defRPr>
             </a:pPr>
             <a:r>
+              <a:rPr>
+                <a:latin typeface="Inter"/>
+              </a:rPr>
               <a:t>Access and data</a:t>
             </a:r>
           </a:p>
@@ -6068,7 +7075,11 @@
           <a:bodyPr rtlCol="0" anchor="ctr"/>
           <a:lstStyle/>
           <a:p>
-            <a:pPr algn="ctr"/>
+            <a:pPr algn="ctr">
+              <a:defRPr>
+                <a:latin typeface="Inter"/>
+              </a:defRPr>
+            </a:pPr>
           </a:p>
         </p:txBody>
       </p:sp>
@@ -6113,7 +7124,11 @@
           <a:bodyPr rtlCol="0" anchor="ctr"/>
           <a:lstStyle/>
           <a:p>
-            <a:pPr algn="ctr"/>
+            <a:pPr algn="ctr">
+              <a:defRPr>
+                <a:latin typeface="Inter"/>
+              </a:defRPr>
+            </a:pPr>
           </a:p>
         </p:txBody>
       </p:sp>
@@ -6151,6 +7166,9 @@
               </a:defRPr>
             </a:pPr>
             <a:r>
+              <a:rPr>
+                <a:latin typeface="Inter"/>
+              </a:rPr>
               <a:t>03</a:t>
             </a:r>
           </a:p>
@@ -6190,6 +7208,9 @@
               </a:defRPr>
             </a:pPr>
             <a:r>
+              <a:rPr>
+                <a:latin typeface="Inter"/>
+              </a:rPr>
               <a:t>ORGANIZATION</a:t>
             </a:r>
           </a:p>
@@ -6232,6 +7253,9 @@
                         </a:defRPr>
                       </a:pPr>
                       <a:r>
+                        <a:rPr>
+                          <a:latin typeface="Inter"/>
+                        </a:rPr>
                         <a:t>Name</a:t>
                       </a:r>
                     </a:p>
@@ -6256,6 +7280,9 @@
                         </a:defRPr>
                       </a:pPr>
                       <a:r>
+                        <a:rPr>
+                          <a:latin typeface="Inter"/>
+                        </a:rPr>
                         <a:t>Gradient [S1]</a:t>
                       </a:r>
                     </a:p>
@@ -6282,6 +7309,9 @@
                         </a:defRPr>
                       </a:pPr>
                       <a:r>
+                        <a:rPr>
+                          <a:latin typeface="Inter"/>
+                        </a:rPr>
                         <a:t>Role</a:t>
                       </a:r>
                     </a:p>
@@ -6306,6 +7336,9 @@
                         </a:defRPr>
                       </a:pPr>
                       <a:r>
+                        <a:rPr>
+                          <a:latin typeface="Inter"/>
+                        </a:rPr>
                         <a:t>Admin [S1]</a:t>
                       </a:r>
                     </a:p>
@@ -6332,6 +7365,9 @@
                         </a:defRPr>
                       </a:pPr>
                       <a:r>
+                        <a:rPr>
+                          <a:latin typeface="Inter"/>
+                        </a:rPr>
                         <a:t>Licensed modules</a:t>
                       </a:r>
                     </a:p>
@@ -6356,6 +7392,9 @@
                         </a:defRPr>
                       </a:pPr>
                       <a:r>
+                        <a:rPr>
+                          <a:latin typeface="Inter"/>
+                        </a:rPr>
                         <a:t>Firm &amp; fund diligence, Research, Macro desk, Gradient signals [S1]</a:t>
                       </a:r>
                     </a:p>
@@ -6382,6 +7421,9 @@
                         </a:defRPr>
                       </a:pPr>
                       <a:r>
+                        <a:rPr>
+                          <a:latin typeface="Inter"/>
+                        </a:rPr>
                         <a:t>Not licensed</a:t>
                       </a:r>
                     </a:p>
@@ -6406,6 +7448,9 @@
                         </a:defRPr>
                       </a:pPr>
                       <a:r>
+                        <a:rPr>
+                          <a:latin typeface="Inter"/>
+                        </a:rPr>
                         <a:t>Portfolio, Strategy Lab, Peer intelligence [S2]</a:t>
                       </a:r>
                     </a:p>
@@ -6432,6 +7477,9 @@
                         </a:defRPr>
                       </a:pPr>
                       <a:r>
+                        <a:rPr>
+                          <a:latin typeface="Inter"/>
+                        </a:rPr>
                         <a:t>Tools entitled</a:t>
                       </a:r>
                     </a:p>
@@ -6456,6 +7504,9 @@
                         </a:defRPr>
                       </a:pPr>
                       <a:r>
+                        <a:rPr>
+                          <a:latin typeface="Inter"/>
+                        </a:rPr>
                         <a:t>44 of 63 [S2]</a:t>
                       </a:r>
                     </a:p>
@@ -6482,6 +7533,9 @@
                         </a:defRPr>
                       </a:pPr>
                       <a:r>
+                        <a:rPr>
+                          <a:latin typeface="Inter"/>
+                        </a:rPr>
                         <a:t>Backend</a:t>
                       </a:r>
                     </a:p>
@@ -6506,6 +7560,9 @@
                         </a:defRPr>
                       </a:pPr>
                       <a:r>
+                        <a:rPr>
+                          <a:latin typeface="Inter"/>
+                        </a:rPr>
                         <a:t>Ready [S2]</a:t>
                       </a:r>
                     </a:p>
@@ -6532,6 +7589,9 @@
                         </a:defRPr>
                       </a:pPr>
                       <a:r>
+                        <a:rPr>
+                          <a:latin typeface="Inter"/>
+                        </a:rPr>
                         <a:t>Roster capacity</a:t>
                       </a:r>
                     </a:p>
@@ -6556,6 +7616,9 @@
                         </a:defRPr>
                       </a:pPr>
                       <a:r>
+                        <a:rPr>
+                          <a:latin typeface="Inter"/>
+                        </a:rPr>
                         <a:t>1 of 3 fund slots used [S4]</a:t>
                       </a:r>
                     </a:p>
@@ -6612,7 +7675,11 @@
           <a:bodyPr rtlCol="0" anchor="ctr"/>
           <a:lstStyle/>
           <a:p>
-            <a:pPr algn="ctr"/>
+            <a:pPr algn="ctr">
+              <a:defRPr>
+                <a:latin typeface="Inter"/>
+              </a:defRPr>
+            </a:pPr>
           </a:p>
         </p:txBody>
       </p:sp>
@@ -6650,6 +7717,9 @@
               </a:defRPr>
             </a:pPr>
             <a:r>
+              <a:rPr>
+                <a:latin typeface="Inter"/>
+              </a:rPr>
               <a:t>Sources: S1 · S2 · S4</a:t>
             </a:r>
           </a:p>
@@ -6689,7 +7759,10 @@
               </a:defRPr>
             </a:pPr>
             <a:r>
-              <a:t>Confidential — internal investment use</a:t>
+              <a:rPr>
+                <a:latin typeface="Inter"/>
+              </a:rPr>
+              <a:t>Confidential — prepared for internal investment use · Data as of 2026-10-04</a:t>
             </a:r>
           </a:p>
         </p:txBody>
@@ -6728,6 +7801,9 @@
               </a:defRPr>
             </a:pPr>
             <a:r>
+              <a:rPr>
+                <a:latin typeface="Inter"/>
+              </a:rPr>
               <a:t>4</a:t>
             </a:r>
           </a:p>
@@ -6792,7 +7868,11 @@
           <a:bodyPr rtlCol="0" anchor="ctr"/>
           <a:lstStyle/>
           <a:p>
-            <a:pPr algn="ctr"/>
+            <a:pPr algn="ctr">
+              <a:defRPr>
+                <a:latin typeface="Inter"/>
+              </a:defRPr>
+            </a:pPr>
           </a:p>
         </p:txBody>
       </p:sp>
@@ -6830,6 +7910,9 @@
               </a:defRPr>
             </a:pPr>
             <a:r>
+              <a:rPr>
+                <a:latin typeface="Inter"/>
+              </a:rPr>
               <a:t>ORGANIZATION, MODULES AND DATA DOMAINS</a:t>
             </a:r>
           </a:p>
@@ -6869,6 +7952,9 @@
               </a:defRPr>
             </a:pPr>
             <a:r>
+              <a:rPr>
+                <a:latin typeface="Inter"/>
+              </a:rPr>
               <a:t>Access and data — continued</a:t>
             </a:r>
           </a:p>
@@ -6915,7 +8001,11 @@
           <a:bodyPr rtlCol="0" anchor="ctr"/>
           <a:lstStyle/>
           <a:p>
-            <a:pPr algn="ctr"/>
+            <a:pPr algn="ctr">
+              <a:defRPr>
+                <a:latin typeface="Inter"/>
+              </a:defRPr>
+            </a:pPr>
           </a:p>
         </p:txBody>
       </p:sp>
@@ -6960,7 +8050,11 @@
           <a:bodyPr rtlCol="0" anchor="ctr"/>
           <a:lstStyle/>
           <a:p>
-            <a:pPr algn="ctr"/>
+            <a:pPr algn="ctr">
+              <a:defRPr>
+                <a:latin typeface="Inter"/>
+              </a:defRPr>
+            </a:pPr>
           </a:p>
         </p:txBody>
       </p:sp>
@@ -6998,6 +8092,9 @@
               </a:defRPr>
             </a:pPr>
             <a:r>
+              <a:rPr>
+                <a:latin typeface="Inter"/>
+              </a:rPr>
               <a:t>03</a:t>
             </a:r>
           </a:p>
@@ -7037,6 +8134,9 @@
               </a:defRPr>
             </a:pPr>
             <a:r>
+              <a:rPr>
+                <a:latin typeface="Inter"/>
+              </a:rPr>
               <a:t>DATA DOMAINS</a:t>
             </a:r>
           </a:p>
@@ -7080,6 +8180,9 @@
                         </a:defRPr>
                       </a:pPr>
                       <a:r>
+                        <a:rPr>
+                          <a:latin typeface="Inter"/>
+                        </a:rPr>
                         <a:t>Source</a:t>
                       </a:r>
                     </a:p>
@@ -7104,6 +8207,9 @@
                         </a:defRPr>
                       </a:pPr>
                       <a:r>
+                        <a:rPr>
+                          <a:latin typeface="Inter"/>
+                        </a:rPr>
                         <a:t>Status</a:t>
                       </a:r>
                     </a:p>
@@ -7128,6 +8234,9 @@
                         </a:defRPr>
                       </a:pPr>
                       <a:r>
+                        <a:rPr>
+                          <a:latin typeface="Inter"/>
+                        </a:rPr>
                         <a:t>Note</a:t>
                       </a:r>
                     </a:p>
@@ -7154,6 +8263,9 @@
                         </a:defRPr>
                       </a:pPr>
                       <a:r>
+                        <a:rPr>
+                          <a:latin typeface="Inter"/>
+                        </a:rPr>
                         <a:t>Manager diligence</a:t>
                       </a:r>
                     </a:p>
@@ -7178,6 +8290,9 @@
                         </a:defRPr>
                       </a:pPr>
                       <a:r>
+                        <a:rPr>
+                          <a:latin typeface="Inter"/>
+                        </a:rPr>
                         <a:t>● available</a:t>
                       </a:r>
                     </a:p>
@@ -7202,6 +8317,9 @@
                         </a:defRPr>
                       </a:pPr>
                       <a:r>
+                        <a:rPr>
+                          <a:latin typeface="Inter"/>
+                        </a:rPr>
                         <a:t>Form ADV current to 2026-10-01</a:t>
                       </a:r>
                     </a:p>
@@ -7228,6 +8346,9 @@
                         </a:defRPr>
                       </a:pPr>
                       <a:r>
+                        <a:rPr>
+                          <a:latin typeface="Inter"/>
+                        </a:rPr>
                         <a:t>Macro research</a:t>
                       </a:r>
                     </a:p>
@@ -7252,6 +8373,9 @@
                         </a:defRPr>
                       </a:pPr>
                       <a:r>
+                        <a:rPr>
+                          <a:latin typeface="Inter"/>
+                        </a:rPr>
                         <a:t>● partial</a:t>
                       </a:r>
                     </a:p>
@@ -7276,6 +8400,9 @@
                         </a:defRPr>
                       </a:pPr>
                       <a:r>
+                        <a:rPr>
+                          <a:latin typeface="Inter"/>
+                        </a:rPr>
                         <a:t>Conditional; The Read published to 2026-10-02</a:t>
                       </a:r>
                     </a:p>
@@ -7302,6 +8429,9 @@
                         </a:defRPr>
                       </a:pPr>
                       <a:r>
+                        <a:rPr>
+                          <a:latin typeface="Inter"/>
+                        </a:rPr>
                         <a:t>Capital market assumptions</a:t>
                       </a:r>
                     </a:p>
@@ -7326,6 +8456,9 @@
                         </a:defRPr>
                       </a:pPr>
                       <a:r>
+                        <a:rPr>
+                          <a:latin typeface="Inter"/>
+                        </a:rPr>
                         <a:t>● partial</a:t>
                       </a:r>
                     </a:p>
@@ -7350,6 +8483,9 @@
                         </a:defRPr>
                       </a:pPr>
                       <a:r>
+                        <a:rPr>
+                          <a:latin typeface="Inter"/>
+                        </a:rPr>
                         <a:t>Conditional; quality receipt unvalidated</a:t>
                       </a:r>
                     </a:p>
@@ -7376,6 +8512,9 @@
                         </a:defRPr>
                       </a:pPr>
                       <a:r>
+                        <a:rPr>
+                          <a:latin typeface="Inter"/>
+                        </a:rPr>
                         <a:t>Market data</a:t>
                       </a:r>
                     </a:p>
@@ -7400,6 +8539,9 @@
                         </a:defRPr>
                       </a:pPr>
                       <a:r>
+                        <a:rPr>
+                          <a:latin typeface="Inter"/>
+                        </a:rPr>
                         <a:t>● partial</a:t>
                       </a:r>
                     </a:p>
@@ -7424,6 +8566,9 @@
                         </a:defRPr>
                       </a:pPr>
                       <a:r>
+                        <a:rPr>
+                          <a:latin typeface="Inter"/>
+                        </a:rPr>
                         <a:t>Conditional</a:t>
                       </a:r>
                     </a:p>
@@ -7450,6 +8595,9 @@
                         </a:defRPr>
                       </a:pPr>
                       <a:r>
+                        <a:rPr>
+                          <a:latin typeface="Inter"/>
+                        </a:rPr>
                         <a:t>Public equity</a:t>
                       </a:r>
                     </a:p>
@@ -7474,6 +8622,9 @@
                         </a:defRPr>
                       </a:pPr>
                       <a:r>
+                        <a:rPr>
+                          <a:latin typeface="Inter"/>
+                        </a:rPr>
                         <a:t>● partial</a:t>
                       </a:r>
                     </a:p>
@@ -7498,6 +8649,9 @@
                         </a:defRPr>
                       </a:pPr>
                       <a:r>
+                        <a:rPr>
+                          <a:latin typeface="Inter"/>
+                        </a:rPr>
                         <a:t>Conditional</a:t>
                       </a:r>
                     </a:p>
@@ -7524,6 +8678,9 @@
                         </a:defRPr>
                       </a:pPr>
                       <a:r>
+                        <a:rPr>
+                          <a:latin typeface="Inter"/>
+                        </a:rPr>
                         <a:t>Strategy Lab</a:t>
                       </a:r>
                     </a:p>
@@ -7548,6 +8705,9 @@
                         </a:defRPr>
                       </a:pPr>
                       <a:r>
+                        <a:rPr>
+                          <a:latin typeface="Inter"/>
+                        </a:rPr>
                         <a:t>● partial</a:t>
                       </a:r>
                     </a:p>
@@ -7572,6 +8732,9 @@
                         </a:defRPr>
                       </a:pPr>
                       <a:r>
+                        <a:rPr>
+                          <a:latin typeface="Inter"/>
+                        </a:rPr>
                         <a:t>Conditional; not licensed</a:t>
                       </a:r>
                     </a:p>
@@ -7598,6 +8761,9 @@
                         </a:defRPr>
                       </a:pPr>
                       <a:r>
+                        <a:rPr>
+                          <a:latin typeface="Inter"/>
+                        </a:rPr>
                         <a:t>Peer intelligence</a:t>
                       </a:r>
                     </a:p>
@@ -7616,12 +8782,15 @@
                       <a:pPr>
                         <a:defRPr sz="800" b="1">
                           <a:solidFill>
-                            <a:srgbClr val="9AA5B1"/>
-                          </a:solidFill>
-                          <a:latin typeface="Inter"/>
-                        </a:defRPr>
-                      </a:pPr>
-                      <a:r>
+                            <a:srgbClr val="FF6B5E"/>
+                          </a:solidFill>
+                          <a:latin typeface="Inter"/>
+                        </a:defRPr>
+                      </a:pPr>
+                      <a:r>
+                        <a:rPr>
+                          <a:latin typeface="Inter"/>
+                        </a:rPr>
                         <a:t>● unavailable</a:t>
                       </a:r>
                     </a:p>
@@ -7646,6 +8815,9 @@
                         </a:defRPr>
                       </a:pPr>
                       <a:r>
+                        <a:rPr>
+                          <a:latin typeface="Inter"/>
+                        </a:rPr>
                         <a:t>Not licensed</a:t>
                       </a:r>
                     </a:p>
@@ -7702,7 +8874,11 @@
           <a:bodyPr rtlCol="0" anchor="ctr"/>
           <a:lstStyle/>
           <a:p>
-            <a:pPr algn="ctr"/>
+            <a:pPr algn="ctr">
+              <a:defRPr>
+                <a:latin typeface="Inter"/>
+              </a:defRPr>
+            </a:pPr>
           </a:p>
         </p:txBody>
       </p:sp>
@@ -7740,6 +8916,9 @@
               </a:defRPr>
             </a:pPr>
             <a:r>
+              <a:rPr>
+                <a:latin typeface="Inter"/>
+              </a:rPr>
               <a:t>Sources: none cited</a:t>
             </a:r>
           </a:p>
@@ -7779,7 +8958,10 @@
               </a:defRPr>
             </a:pPr>
             <a:r>
-              <a:t>Confidential — internal investment use</a:t>
+              <a:rPr>
+                <a:latin typeface="Inter"/>
+              </a:rPr>
+              <a:t>Confidential — prepared for internal investment use · Data as of 2026-10-04</a:t>
             </a:r>
           </a:p>
         </p:txBody>
@@ -7818,6 +9000,9 @@
               </a:defRPr>
             </a:pPr>
             <a:r>
+              <a:rPr>
+                <a:latin typeface="Inter"/>
+              </a:rPr>
               <a:t>5</a:t>
             </a:r>
           </a:p>
@@ -7882,7 +9067,11 @@
           <a:bodyPr rtlCol="0" anchor="ctr"/>
           <a:lstStyle/>
           <a:p>
-            <a:pPr algn="ctr"/>
+            <a:pPr algn="ctr">
+              <a:defRPr>
+                <a:latin typeface="Inter"/>
+              </a:defRPr>
+            </a:pPr>
           </a:p>
         </p:txBody>
       </p:sp>
@@ -7920,6 +9109,9 @@
               </a:defRPr>
             </a:pPr>
             <a:r>
+              <a:rPr>
+                <a:latin typeface="Inter"/>
+              </a:rPr>
               <a:t>FULL SELF-TEST: 14 PROBES AGAINST THE LIVE CONNECTOR</a:t>
             </a:r>
           </a:p>
@@ -7959,6 +9151,9 @@
               </a:defRPr>
             </a:pPr>
             <a:r>
+              <a:rPr>
+                <a:latin typeface="Inter"/>
+              </a:rPr>
               <a:t>Contract checks</a:t>
             </a:r>
           </a:p>
@@ -8005,7 +9200,11 @@
           <a:bodyPr rtlCol="0" anchor="ctr"/>
           <a:lstStyle/>
           <a:p>
-            <a:pPr algn="ctr"/>
+            <a:pPr algn="ctr">
+              <a:defRPr>
+                <a:latin typeface="Inter"/>
+              </a:defRPr>
+            </a:pPr>
           </a:p>
         </p:txBody>
       </p:sp>
@@ -8050,7 +9249,11 @@
           <a:bodyPr rtlCol="0" anchor="ctr"/>
           <a:lstStyle/>
           <a:p>
-            <a:pPr algn="ctr"/>
+            <a:pPr algn="ctr">
+              <a:defRPr>
+                <a:latin typeface="Inter"/>
+              </a:defRPr>
+            </a:pPr>
           </a:p>
         </p:txBody>
       </p:sp>
@@ -8088,6 +9291,9 @@
               </a:defRPr>
             </a:pPr>
             <a:r>
+              <a:rPr>
+                <a:latin typeface="Inter"/>
+              </a:rPr>
               <a:t>04</a:t>
             </a:r>
           </a:p>
@@ -8133,6 +9339,9 @@
                         </a:defRPr>
                       </a:pPr>
                       <a:r>
+                        <a:rPr>
+                          <a:latin typeface="Inter"/>
+                        </a:rPr>
                         <a:t>Probe</a:t>
                       </a:r>
                     </a:p>
@@ -8157,6 +9366,9 @@
                         </a:defRPr>
                       </a:pPr>
                       <a:r>
+                        <a:rPr>
+                          <a:latin typeface="Inter"/>
+                        </a:rPr>
                         <a:t>Tool</a:t>
                       </a:r>
                     </a:p>
@@ -8181,6 +9393,9 @@
                         </a:defRPr>
                       </a:pPr>
                       <a:r>
+                        <a:rPr>
+                          <a:latin typeface="Inter"/>
+                        </a:rPr>
                         <a:t>Result</a:t>
                       </a:r>
                     </a:p>
@@ -8205,6 +9420,9 @@
                         </a:defRPr>
                       </a:pPr>
                       <a:r>
+                        <a:rPr>
+                          <a:latin typeface="Inter"/>
+                        </a:rPr>
                         <a:t>As of</a:t>
                       </a:r>
                     </a:p>
@@ -8229,6 +9447,9 @@
                         </a:defRPr>
                       </a:pPr>
                       <a:r>
+                        <a:rPr>
+                          <a:latin typeface="Inter"/>
+                        </a:rPr>
                         <a:t>Note</a:t>
                       </a:r>
                     </a:p>
@@ -8255,6 +9476,9 @@
                         </a:defRPr>
                       </a:pPr>
                       <a:r>
+                        <a:rPr>
+                          <a:latin typeface="Inter"/>
+                        </a:rPr>
                         <a:t>orgs</a:t>
                       </a:r>
                     </a:p>
@@ -8279,6 +9503,9 @@
                         </a:defRPr>
                       </a:pPr>
                       <a:r>
+                        <a:rPr>
+                          <a:latin typeface="Inter"/>
+                        </a:rPr>
                         <a:t>list_organizations</a:t>
                       </a:r>
                     </a:p>
@@ -8303,6 +9530,9 @@
                         </a:defRPr>
                       </a:pPr>
                       <a:r>
+                        <a:rPr>
+                          <a:latin typeface="Inter"/>
+                        </a:rPr>
                         <a:t>● Pass</a:t>
                       </a:r>
                     </a:p>
@@ -8327,6 +9557,9 @@
                         </a:defRPr>
                       </a:pPr>
                       <a:r>
+                        <a:rPr>
+                          <a:latin typeface="Inter"/>
+                        </a:rPr>
                         <a:t>2026-10-04</a:t>
                       </a:r>
                     </a:p>
@@ -8374,6 +9607,9 @@
                         </a:defRPr>
                       </a:pPr>
                       <a:r>
+                        <a:rPr>
+                          <a:latin typeface="Inter"/>
+                        </a:rPr>
                         <a:t>roster</a:t>
                       </a:r>
                     </a:p>
@@ -8398,6 +9634,9 @@
                         </a:defRPr>
                       </a:pPr>
                       <a:r>
+                        <a:rPr>
+                          <a:latin typeface="Inter"/>
+                        </a:rPr>
                         <a:t>get_diligence_roster_funds</a:t>
                       </a:r>
                     </a:p>
@@ -8422,6 +9661,9 @@
                         </a:defRPr>
                       </a:pPr>
                       <a:r>
+                        <a:rPr>
+                          <a:latin typeface="Inter"/>
+                        </a:rPr>
                         <a:t>● Pass</a:t>
                       </a:r>
                     </a:p>
@@ -8446,6 +9688,9 @@
                         </a:defRPr>
                       </a:pPr>
                       <a:r>
+                        <a:rPr>
+                          <a:latin typeface="Inter"/>
+                        </a:rPr>
                         <a:t>2026-10-04</a:t>
                       </a:r>
                     </a:p>
@@ -8493,6 +9738,9 @@
                         </a:defRPr>
                       </a:pPr>
                       <a:r>
+                        <a:rPr>
+                          <a:latin typeface="Inter"/>
+                        </a:rPr>
                         <a:t>odd_profile</a:t>
                       </a:r>
                     </a:p>
@@ -8517,6 +9765,9 @@
                         </a:defRPr>
                       </a:pPr>
                       <a:r>
+                        <a:rPr>
+                          <a:latin typeface="Inter"/>
+                        </a:rPr>
                         <a:t>get_manager_odd_profile</a:t>
                       </a:r>
                     </a:p>
@@ -8541,6 +9792,9 @@
                         </a:defRPr>
                       </a:pPr>
                       <a:r>
+                        <a:rPr>
+                          <a:latin typeface="Inter"/>
+                        </a:rPr>
                         <a:t>● Pass</a:t>
                       </a:r>
                     </a:p>
@@ -8565,6 +9819,9 @@
                         </a:defRPr>
                       </a:pPr>
                       <a:r>
+                        <a:rPr>
+                          <a:latin typeface="Inter"/>
+                        </a:rPr>
                         <a:t>2026-10-04</a:t>
                       </a:r>
                     </a:p>
@@ -8589,6 +9846,9 @@
                         </a:defRPr>
                       </a:pPr>
                       <a:r>
+                        <a:rPr>
+                          <a:latin typeface="Inter"/>
+                        </a:rPr>
                         <a:t>CRD 999901</a:t>
                       </a:r>
                     </a:p>
@@ -8615,6 +9875,9 @@
                         </a:defRPr>
                       </a:pPr>
                       <a:r>
+                        <a:rPr>
+                          <a:latin typeface="Inter"/>
+                        </a:rPr>
                         <a:t>monitor_coverage</a:t>
                       </a:r>
                     </a:p>
@@ -8639,6 +9902,9 @@
                         </a:defRPr>
                       </a:pPr>
                       <a:r>
+                        <a:rPr>
+                          <a:latin typeface="Inter"/>
+                        </a:rPr>
                         <a:t>get_manager_monitor_evidence</a:t>
                       </a:r>
                     </a:p>
@@ -8663,6 +9929,9 @@
                         </a:defRPr>
                       </a:pPr>
                       <a:r>
+                        <a:rPr>
+                          <a:latin typeface="Inter"/>
+                        </a:rPr>
                         <a:t>● Pass</a:t>
                       </a:r>
                     </a:p>
@@ -8687,6 +9956,9 @@
                         </a:defRPr>
                       </a:pPr>
                       <a:r>
+                        <a:rPr>
+                          <a:latin typeface="Inter"/>
+                        </a:rPr>
                         <a:t>2026-10-01</a:t>
                       </a:r>
                     </a:p>
@@ -8711,6 +9983,9 @@
                         </a:defRPr>
                       </a:pPr>
                       <a:r>
+                        <a:rPr>
+                          <a:latin typeface="Inter"/>
+                        </a:rPr>
                         <a:t>ADV freshness current</a:t>
                       </a:r>
                     </a:p>
@@ -8737,6 +10012,9 @@
                         </a:defRPr>
                       </a:pPr>
                       <a:r>
+                        <a:rPr>
+                          <a:latin typeface="Inter"/>
+                        </a:rPr>
                         <a:t>the_read</a:t>
                       </a:r>
                     </a:p>
@@ -8761,6 +10039,9 @@
                         </a:defRPr>
                       </a:pPr>
                       <a:r>
+                        <a:rPr>
+                          <a:latin typeface="Inter"/>
+                        </a:rPr>
                         <a:t>get_the_read</a:t>
                       </a:r>
                     </a:p>
@@ -8785,6 +10066,9 @@
                         </a:defRPr>
                       </a:pPr>
                       <a:r>
+                        <a:rPr>
+                          <a:latin typeface="Inter"/>
+                        </a:rPr>
                         <a:t>● Pass</a:t>
                       </a:r>
                     </a:p>
@@ -8809,6 +10093,9 @@
                         </a:defRPr>
                       </a:pPr>
                       <a:r>
+                        <a:rPr>
+                          <a:latin typeface="Inter"/>
+                        </a:rPr>
                         <a:t>2026-10-02</a:t>
                       </a:r>
                     </a:p>
@@ -8833,6 +10120,9 @@
                         </a:defRPr>
                       </a:pPr>
                       <a:r>
+                        <a:rPr>
+                          <a:latin typeface="Inter"/>
+                        </a:rPr>
                         <a:t>Coverage partial: no chart history</a:t>
                       </a:r>
                     </a:p>
@@ -8859,6 +10149,9 @@
                         </a:defRPr>
                       </a:pPr>
                       <a:r>
+                        <a:rPr>
+                          <a:latin typeface="Inter"/>
+                        </a:rPr>
                         <a:t>calendar</a:t>
                       </a:r>
                     </a:p>
@@ -8883,6 +10176,9 @@
                         </a:defRPr>
                       </a:pPr>
                       <a:r>
+                        <a:rPr>
+                          <a:latin typeface="Inter"/>
+                        </a:rPr>
                         <a:t>get_macro_calendar</a:t>
                       </a:r>
                     </a:p>
@@ -8907,6 +10203,9 @@
                         </a:defRPr>
                       </a:pPr>
                       <a:r>
+                        <a:rPr>
+                          <a:latin typeface="Inter"/>
+                        </a:rPr>
                         <a:t>● Pass</a:t>
                       </a:r>
                     </a:p>
@@ -8931,6 +10230,9 @@
                         </a:defRPr>
                       </a:pPr>
                       <a:r>
+                        <a:rPr>
+                          <a:latin typeface="Inter"/>
+                        </a:rPr>
                         <a:t>2026-10-04</a:t>
                       </a:r>
                     </a:p>
@@ -8978,6 +10280,9 @@
                         </a:defRPr>
                       </a:pPr>
                       <a:r>
+                        <a:rPr>
+                          <a:latin typeface="Inter"/>
+                        </a:rPr>
                         <a:t>attention</a:t>
                       </a:r>
                     </a:p>
@@ -9002,6 +10307,9 @@
                         </a:defRPr>
                       </a:pPr>
                       <a:r>
+                        <a:rPr>
+                          <a:latin typeface="Inter"/>
+                        </a:rPr>
                         <a:t>get_manager_diligence_attention_queue</a:t>
                       </a:r>
                     </a:p>
@@ -9026,6 +10334,9 @@
                         </a:defRPr>
                       </a:pPr>
                       <a:r>
+                        <a:rPr>
+                          <a:latin typeface="Inter"/>
+                        </a:rPr>
                         <a:t>● Pass</a:t>
                       </a:r>
                     </a:p>
@@ -9050,6 +10361,9 @@
                         </a:defRPr>
                       </a:pPr>
                       <a:r>
+                        <a:rPr>
+                          <a:latin typeface="Inter"/>
+                        </a:rPr>
                         <a:t>2026-10-04</a:t>
                       </a:r>
                     </a:p>
@@ -9097,6 +10411,9 @@
                         </a:defRPr>
                       </a:pPr>
                       <a:r>
+                        <a:rPr>
+                          <a:latin typeface="Inter"/>
+                        </a:rPr>
                         <a:t>findings</a:t>
                       </a:r>
                     </a:p>
@@ -9121,6 +10438,9 @@
                         </a:defRPr>
                       </a:pPr>
                       <a:r>
+                        <a:rPr>
+                          <a:latin typeface="Inter"/>
+                        </a:rPr>
                         <a:t>get_manager_diligence_findings</a:t>
                       </a:r>
                     </a:p>
@@ -9145,6 +10465,9 @@
                         </a:defRPr>
                       </a:pPr>
                       <a:r>
+                        <a:rPr>
+                          <a:latin typeface="Inter"/>
+                        </a:rPr>
                         <a:t>● Pass</a:t>
                       </a:r>
                     </a:p>
@@ -9169,6 +10492,9 @@
                         </a:defRPr>
                       </a:pPr>
                       <a:r>
+                        <a:rPr>
+                          <a:latin typeface="Inter"/>
+                        </a:rPr>
                         <a:t>2026-10-04</a:t>
                       </a:r>
                     </a:p>
@@ -9193,6 +10519,9 @@
                         </a:defRPr>
                       </a:pPr>
                       <a:r>
+                        <a:rPr>
+                          <a:latin typeface="Inter"/>
+                        </a:rPr>
                         <a:t>Validator advisory on empty list (known)</a:t>
                       </a:r>
                     </a:p>
@@ -9219,6 +10548,9 @@
                         </a:defRPr>
                       </a:pPr>
                       <a:r>
+                        <a:rPr>
+                          <a:latin typeface="Inter"/>
+                        </a:rPr>
                         <a:t>events</a:t>
                       </a:r>
                     </a:p>
@@ -9243,6 +10575,9 @@
                         </a:defRPr>
                       </a:pPr>
                       <a:r>
+                        <a:rPr>
+                          <a:latin typeface="Inter"/>
+                        </a:rPr>
                         <a:t>get_firm_fund_events</a:t>
                       </a:r>
                     </a:p>
@@ -9267,6 +10602,9 @@
                         </a:defRPr>
                       </a:pPr>
                       <a:r>
+                        <a:rPr>
+                          <a:latin typeface="Inter"/>
+                        </a:rPr>
                         <a:t>● Pass</a:t>
                       </a:r>
                     </a:p>
@@ -9291,6 +10629,9 @@
                         </a:defRPr>
                       </a:pPr>
                       <a:r>
+                        <a:rPr>
+                          <a:latin typeface="Inter"/>
+                        </a:rPr>
                         <a:t>2026-10-04</a:t>
                       </a:r>
                     </a:p>
@@ -9315,6 +10656,9 @@
                         </a:defRPr>
                       </a:pPr>
                       <a:r>
+                        <a:rPr>
+                          <a:latin typeface="Inter"/>
+                        </a:rPr>
                         <a:t>Publication not ready (known)</a:t>
                       </a:r>
                     </a:p>
@@ -9341,6 +10685,9 @@
                         </a:defRPr>
                       </a:pPr>
                       <a:r>
+                        <a:rPr>
+                          <a:latin typeface="Inter"/>
+                        </a:rPr>
                         <a:t>conditions</a:t>
                       </a:r>
                     </a:p>
@@ -9365,6 +10712,9 @@
                         </a:defRPr>
                       </a:pPr>
                       <a:r>
+                        <a:rPr>
+                          <a:latin typeface="Inter"/>
+                        </a:rPr>
                         <a:t>get_macro_conditions</a:t>
                       </a:r>
                     </a:p>
@@ -9389,6 +10739,9 @@
                         </a:defRPr>
                       </a:pPr>
                       <a:r>
+                        <a:rPr>
+                          <a:latin typeface="Inter"/>
+                        </a:rPr>
                         <a:t>● Pass</a:t>
                       </a:r>
                     </a:p>
@@ -9413,6 +10766,9 @@
                         </a:defRPr>
                       </a:pPr>
                       <a:r>
+                        <a:rPr>
+                          <a:latin typeface="Inter"/>
+                        </a:rPr>
                         <a:t>2026-10-02</a:t>
                       </a:r>
                     </a:p>
@@ -9460,6 +10816,9 @@
                         </a:defRPr>
                       </a:pPr>
                       <a:r>
+                        <a:rPr>
+                          <a:latin typeface="Inter"/>
+                        </a:rPr>
                         <a:t>gradient_signal</a:t>
                       </a:r>
                     </a:p>
@@ -9484,6 +10843,9 @@
                         </a:defRPr>
                       </a:pPr>
                       <a:r>
+                        <a:rPr>
+                          <a:latin typeface="Inter"/>
+                        </a:rPr>
                         <a:t>get_macro_signals</a:t>
                       </a:r>
                     </a:p>
@@ -9508,6 +10870,9 @@
                         </a:defRPr>
                       </a:pPr>
                       <a:r>
+                        <a:rPr>
+                          <a:latin typeface="Inter"/>
+                        </a:rPr>
                         <a:t>● Pass</a:t>
                       </a:r>
                     </a:p>
@@ -9532,6 +10897,9 @@
                         </a:defRPr>
                       </a:pPr>
                       <a:r>
+                        <a:rPr>
+                          <a:latin typeface="Inter"/>
+                        </a:rPr>
                         <a:t>2026-10-02</a:t>
                       </a:r>
                     </a:p>
@@ -9556,6 +10924,9 @@
                         </a:defRPr>
                       </a:pPr>
                       <a:r>
+                        <a:rPr>
+                          <a:latin typeface="Inter"/>
+                        </a:rPr>
                         <a:t>GRIP degraded: 1 stale input</a:t>
                       </a:r>
                     </a:p>
@@ -9582,6 +10953,9 @@
                         </a:defRPr>
                       </a:pPr>
                       <a:r>
+                        <a:rPr>
+                          <a:latin typeface="Inter"/>
+                        </a:rPr>
                         <a:t>regime_state</a:t>
                       </a:r>
                     </a:p>
@@ -9606,6 +10980,9 @@
                         </a:defRPr>
                       </a:pPr>
                       <a:r>
+                        <a:rPr>
+                          <a:latin typeface="Inter"/>
+                        </a:rPr>
                         <a:t>get_macro_signals</a:t>
                       </a:r>
                     </a:p>
@@ -9630,6 +11007,9 @@
                         </a:defRPr>
                       </a:pPr>
                       <a:r>
+                        <a:rPr>
+                          <a:latin typeface="Inter"/>
+                        </a:rPr>
                         <a:t>● Not available</a:t>
                       </a:r>
                     </a:p>
@@ -9654,6 +11034,9 @@
                         </a:defRPr>
                       </a:pPr>
                       <a:r>
+                        <a:rPr>
+                          <a:latin typeface="Inter"/>
+                        </a:rPr>
                         <a:t>—</a:t>
                       </a:r>
                     </a:p>
@@ -9678,6 +11061,9 @@
                         </a:defRPr>
                       </a:pPr>
                       <a:r>
+                        <a:rPr>
+                          <a:latin typeface="Inter"/>
+                        </a:rPr>
                         <a:t>HTTP 500 MCP_TOOL_EXECUTION_FAILED; retried once</a:t>
                       </a:r>
                     </a:p>
@@ -9734,7 +11120,11 @@
           <a:bodyPr rtlCol="0" anchor="ctr"/>
           <a:lstStyle/>
           <a:p>
-            <a:pPr algn="ctr"/>
+            <a:pPr algn="ctr">
+              <a:defRPr>
+                <a:latin typeface="Inter"/>
+              </a:defRPr>
+            </a:pPr>
           </a:p>
         </p:txBody>
       </p:sp>
@@ -9772,6 +11162,9 @@
               </a:defRPr>
             </a:pPr>
             <a:r>
+              <a:rPr>
+                <a:latin typeface="Inter"/>
+              </a:rPr>
               <a:t>Sources: none cited</a:t>
             </a:r>
           </a:p>
@@ -9811,7 +11204,10 @@
               </a:defRPr>
             </a:pPr>
             <a:r>
-              <a:t>Confidential — internal investment use</a:t>
+              <a:rPr>
+                <a:latin typeface="Inter"/>
+              </a:rPr>
+              <a:t>Confidential — prepared for internal investment use · Data as of 2026-10-04</a:t>
             </a:r>
           </a:p>
         </p:txBody>
@@ -9850,6 +11246,9 @@
               </a:defRPr>
             </a:pPr>
             <a:r>
+              <a:rPr>
+                <a:latin typeface="Inter"/>
+              </a:rPr>
               <a:t>6</a:t>
             </a:r>
           </a:p>
@@ -9914,7 +11313,11 @@
           <a:bodyPr rtlCol="0" anchor="ctr"/>
           <a:lstStyle/>
           <a:p>
-            <a:pPr algn="ctr"/>
+            <a:pPr algn="ctr">
+              <a:defRPr>
+                <a:latin typeface="Inter"/>
+              </a:defRPr>
+            </a:pPr>
           </a:p>
         </p:txBody>
       </p:sp>
@@ -9952,6 +11355,9 @@
               </a:defRPr>
             </a:pPr>
             <a:r>
+              <a:rPr>
+                <a:latin typeface="Inter"/>
+              </a:rPr>
               <a:t>FULL SELF-TEST: 14 PROBES AGAINST THE LIVE CONNECTOR</a:t>
             </a:r>
           </a:p>
@@ -9991,6 +11397,9 @@
               </a:defRPr>
             </a:pPr>
             <a:r>
+              <a:rPr>
+                <a:latin typeface="Inter"/>
+              </a:rPr>
               <a:t>Contract checks — continued</a:t>
             </a:r>
           </a:p>
@@ -10037,7 +11446,11 @@
           <a:bodyPr rtlCol="0" anchor="ctr"/>
           <a:lstStyle/>
           <a:p>
-            <a:pPr algn="ctr"/>
+            <a:pPr algn="ctr">
+              <a:defRPr>
+                <a:latin typeface="Inter"/>
+              </a:defRPr>
+            </a:pPr>
           </a:p>
         </p:txBody>
       </p:sp>
@@ -10082,7 +11495,11 @@
           <a:bodyPr rtlCol="0" anchor="ctr"/>
           <a:lstStyle/>
           <a:p>
-            <a:pPr algn="ctr"/>
+            <a:pPr algn="ctr">
+              <a:defRPr>
+                <a:latin typeface="Inter"/>
+              </a:defRPr>
+            </a:pPr>
           </a:p>
         </p:txBody>
       </p:sp>
@@ -10120,6 +11537,9 @@
               </a:defRPr>
             </a:pPr>
             <a:r>
+              <a:rPr>
+                <a:latin typeface="Inter"/>
+              </a:rPr>
               <a:t>04</a:t>
             </a:r>
           </a:p>
@@ -10159,6 +11579,9 @@
               </a:defRPr>
             </a:pPr>
             <a:r>
+              <a:rPr>
+                <a:latin typeface="Inter"/>
+              </a:rPr>
               <a:t>TABLE — CONTINUED</a:t>
             </a:r>
           </a:p>
@@ -10204,6 +11627,9 @@
                         </a:defRPr>
                       </a:pPr>
                       <a:r>
+                        <a:rPr>
+                          <a:latin typeface="Inter"/>
+                        </a:rPr>
                         <a:t>Probe</a:t>
                       </a:r>
                     </a:p>
@@ -10228,6 +11654,9 @@
                         </a:defRPr>
                       </a:pPr>
                       <a:r>
+                        <a:rPr>
+                          <a:latin typeface="Inter"/>
+                        </a:rPr>
                         <a:t>Tool</a:t>
                       </a:r>
                     </a:p>
@@ -10252,6 +11681,9 @@
                         </a:defRPr>
                       </a:pPr>
                       <a:r>
+                        <a:rPr>
+                          <a:latin typeface="Inter"/>
+                        </a:rPr>
                         <a:t>Result</a:t>
                       </a:r>
                     </a:p>
@@ -10276,6 +11708,9 @@
                         </a:defRPr>
                       </a:pPr>
                       <a:r>
+                        <a:rPr>
+                          <a:latin typeface="Inter"/>
+                        </a:rPr>
                         <a:t>As of</a:t>
                       </a:r>
                     </a:p>
@@ -10300,6 +11735,9 @@
                         </a:defRPr>
                       </a:pPr>
                       <a:r>
+                        <a:rPr>
+                          <a:latin typeface="Inter"/>
+                        </a:rPr>
                         <a:t>Note</a:t>
                       </a:r>
                     </a:p>
@@ -10326,6 +11764,9 @@
                         </a:defRPr>
                       </a:pPr>
                       <a:r>
+                        <a:rPr>
+                          <a:latin typeface="Inter"/>
+                        </a:rPr>
                         <a:t>cma_baseline</a:t>
                       </a:r>
                     </a:p>
@@ -10350,6 +11791,9 @@
                         </a:defRPr>
                       </a:pPr>
                       <a:r>
+                        <a:rPr>
+                          <a:latin typeface="Inter"/>
+                        </a:rPr>
                         <a:t>get_capital_market_assumptions</a:t>
                       </a:r>
                     </a:p>
@@ -10374,6 +11818,9 @@
                         </a:defRPr>
                       </a:pPr>
                       <a:r>
+                        <a:rPr>
+                          <a:latin typeface="Inter"/>
+                        </a:rPr>
                         <a:t>● Pass</a:t>
                       </a:r>
                     </a:p>
@@ -10398,6 +11845,9 @@
                         </a:defRPr>
                       </a:pPr>
                       <a:r>
+                        <a:rPr>
+                          <a:latin typeface="Inter"/>
+                        </a:rPr>
                         <a:t>2026-10-04</a:t>
                       </a:r>
                     </a:p>
@@ -10422,6 +11872,9 @@
                         </a:defRPr>
                       </a:pPr>
                       <a:r>
+                        <a:rPr>
+                          <a:latin typeface="Inter"/>
+                        </a:rPr>
                         <a:t>Risk-free fresh; receipt validation unavailable</a:t>
                       </a:r>
                     </a:p>
@@ -10448,6 +11901,9 @@
                         </a:defRPr>
                       </a:pPr>
                       <a:r>
+                        <a:rPr>
+                          <a:latin typeface="Inter"/>
+                        </a:rPr>
                         <a:t>watchlist</a:t>
                       </a:r>
                     </a:p>
@@ -10472,6 +11928,9 @@
                         </a:defRPr>
                       </a:pPr>
                       <a:r>
+                        <a:rPr>
+                          <a:latin typeface="Inter"/>
+                        </a:rPr>
                         <a:t>get_research_watchlist_changes</a:t>
                       </a:r>
                     </a:p>
@@ -10496,6 +11955,9 @@
                         </a:defRPr>
                       </a:pPr>
                       <a:r>
+                        <a:rPr>
+                          <a:latin typeface="Inter"/>
+                        </a:rPr>
                         <a:t>● Pass</a:t>
                       </a:r>
                     </a:p>
@@ -10520,6 +11982,9 @@
                         </a:defRPr>
                       </a:pPr>
                       <a:r>
+                        <a:rPr>
+                          <a:latin typeface="Inter"/>
+                        </a:rPr>
                         <a:t>2026-10-04</a:t>
                       </a:r>
                     </a:p>
@@ -10544,6 +12009,9 @@
                         </a:defRPr>
                       </a:pPr>
                       <a:r>
+                        <a:rPr>
+                          <a:latin typeface="Inter"/>
+                        </a:rPr>
                         <a:t>No items selected</a:t>
                       </a:r>
                     </a:p>
@@ -10600,7 +12068,11 @@
           <a:bodyPr rtlCol="0" anchor="ctr"/>
           <a:lstStyle/>
           <a:p>
-            <a:pPr algn="ctr"/>
+            <a:pPr algn="ctr">
+              <a:defRPr>
+                <a:latin typeface="Inter"/>
+              </a:defRPr>
+            </a:pPr>
           </a:p>
         </p:txBody>
       </p:sp>
@@ -10645,7 +12117,11 @@
           <a:bodyPr rtlCol="0" anchor="ctr"/>
           <a:lstStyle/>
           <a:p>
-            <a:pPr algn="ctr"/>
+            <a:pPr algn="ctr">
+              <a:defRPr>
+                <a:latin typeface="Inter"/>
+              </a:defRPr>
+            </a:pPr>
           </a:p>
         </p:txBody>
       </p:sp>
@@ -10683,6 +12159,9 @@
               </a:defRPr>
             </a:pPr>
             <a:r>
+              <a:rPr>
+                <a:latin typeface="Inter"/>
+              </a:rPr>
               <a:t>No new failures</a:t>
             </a:r>
           </a:p>
@@ -10722,6 +12201,9 @@
               </a:defRPr>
             </a:pPr>
             <a:r>
+              <a:rPr>
+                <a:latin typeface="Inter"/>
+              </a:rPr>
               <a:t>All probes completed without a new failure. The CMA baseline returns a fresh risk-free rate.</a:t>
             </a:r>
           </a:p>
@@ -10768,7 +12250,11 @@
           <a:bodyPr rtlCol="0" anchor="ctr"/>
           <a:lstStyle/>
           <a:p>
-            <a:pPr algn="ctr"/>
+            <a:pPr algn="ctr">
+              <a:defRPr>
+                <a:latin typeface="Inter"/>
+              </a:defRPr>
+            </a:pPr>
           </a:p>
         </p:txBody>
       </p:sp>
@@ -10806,6 +12292,9 @@
               </a:defRPr>
             </a:pPr>
             <a:r>
+              <a:rPr>
+                <a:latin typeface="Inter"/>
+              </a:rPr>
               <a:t>Sources: none cited</a:t>
             </a:r>
           </a:p>
@@ -10845,7 +12334,10 @@
               </a:defRPr>
             </a:pPr>
             <a:r>
-              <a:t>Confidential — internal investment use</a:t>
+              <a:rPr>
+                <a:latin typeface="Inter"/>
+              </a:rPr>
+              <a:t>Confidential — prepared for internal investment use · Data as of 2026-10-04</a:t>
             </a:r>
           </a:p>
         </p:txBody>
@@ -10884,6 +12376,9 @@
               </a:defRPr>
             </a:pPr>
             <a:r>
+              <a:rPr>
+                <a:latin typeface="Inter"/>
+              </a:rPr>
               <a:t>7</a:t>
             </a:r>
           </a:p>
@@ -10948,7 +12443,11 @@
           <a:bodyPr rtlCol="0" anchor="ctr"/>
           <a:lstStyle/>
           <a:p>
-            <a:pPr algn="ctr"/>
+            <a:pPr algn="ctr">
+              <a:defRPr>
+                <a:latin typeface="Inter"/>
+              </a:defRPr>
+            </a:pPr>
           </a:p>
         </p:txBody>
       </p:sp>
@@ -10986,6 +12485,9 @@
               </a:defRPr>
             </a:pPr>
             <a:r>
+              <a:rPr>
+                <a:latin typeface="Inter"/>
+              </a:rPr>
               <a:t>PROMPTS THAT WORK FOR THIS ORGANIZATION TODAY</a:t>
             </a:r>
           </a:p>
@@ -11025,6 +12527,9 @@
               </a:defRPr>
             </a:pPr>
             <a:r>
+              <a:rPr>
+                <a:latin typeface="Inter"/>
+              </a:rPr>
               <a:t>Try next</a:t>
             </a:r>
           </a:p>
@@ -11071,7 +12576,11 @@
           <a:bodyPr rtlCol="0" anchor="ctr"/>
           <a:lstStyle/>
           <a:p>
-            <a:pPr algn="ctr"/>
+            <a:pPr algn="ctr">
+              <a:defRPr>
+                <a:latin typeface="Inter"/>
+              </a:defRPr>
+            </a:pPr>
           </a:p>
         </p:txBody>
       </p:sp>
@@ -11116,7 +12625,11 @@
           <a:bodyPr rtlCol="0" anchor="ctr"/>
           <a:lstStyle/>
           <a:p>
-            <a:pPr algn="ctr"/>
+            <a:pPr algn="ctr">
+              <a:defRPr>
+                <a:latin typeface="Inter"/>
+              </a:defRPr>
+            </a:pPr>
           </a:p>
         </p:txBody>
       </p:sp>
@@ -11154,6 +12667,9 @@
               </a:defRPr>
             </a:pPr>
             <a:r>
+              <a:rPr>
+                <a:latin typeface="Inter"/>
+              </a:rPr>
               <a:t>05</a:t>
             </a:r>
           </a:p>
@@ -11193,10 +12709,16 @@
               </a:defRPr>
             </a:pPr>
             <a:r>
+              <a:rPr>
+                <a:latin typeface="Inter"/>
+              </a:rPr>
               <a:t>01  Run an ODD report on Ridgeview Global Macro Fund II.</a:t>
             </a:r>
             <a:br/>
             <a:r>
+              <a:rPr>
+                <a:latin typeface="Inter"/>
+              </a:rPr>
               <a:t>      Your one roster fund; a new Form ADV was filed after its last review.</a:t>
             </a:r>
           </a:p>
@@ -11213,10 +12735,16 @@
               </a:defRPr>
             </a:pPr>
             <a:r>
+              <a:rPr>
+                <a:latin typeface="Inter"/>
+              </a:rPr>
               <a:t>02  Give me this week's manager monitoring digest, and schedule it for Mondays.</a:t>
             </a:r>
             <a:br/>
             <a:r>
+              <a:rPr>
+                <a:latin typeface="Inter"/>
+              </a:rPr>
               <a:t>      Keeps the roster under watch without manual checks.</a:t>
             </a:r>
           </a:p>
@@ -11233,10 +12761,16 @@
               </a:defRPr>
             </a:pPr>
             <a:r>
+              <a:rPr>
+                <a:latin typeface="Inter"/>
+              </a:rPr>
               <a:t>03  Build the macro briefing deck for Thursday's committee.</a:t>
             </a:r>
             <a:br/>
             <a:r>
+              <a:rPr>
+                <a:latin typeface="Inter"/>
+              </a:rPr>
               <a:t>      Uses The Read, rates, Gradient signal, calendar and CMAs.</a:t>
             </a:r>
           </a:p>
@@ -11283,7 +12817,11 @@
           <a:bodyPr rtlCol="0" anchor="ctr"/>
           <a:lstStyle/>
           <a:p>
-            <a:pPr algn="ctr"/>
+            <a:pPr algn="ctr">
+              <a:defRPr>
+                <a:latin typeface="Inter"/>
+              </a:defRPr>
+            </a:pPr>
           </a:p>
         </p:txBody>
       </p:sp>
@@ -11321,6 +12859,9 @@
               </a:defRPr>
             </a:pPr>
             <a:r>
+              <a:rPr>
+                <a:latin typeface="Inter"/>
+              </a:rPr>
               <a:t>Sources: none cited</a:t>
             </a:r>
           </a:p>
@@ -11360,7 +12901,10 @@
               </a:defRPr>
             </a:pPr>
             <a:r>
-              <a:t>Confidential — internal investment use</a:t>
+              <a:rPr>
+                <a:latin typeface="Inter"/>
+              </a:rPr>
+              <a:t>Confidential — prepared for internal investment use · Data as of 2026-10-04</a:t>
             </a:r>
           </a:p>
         </p:txBody>
@@ -11399,6 +12943,9 @@
               </a:defRPr>
             </a:pPr>
             <a:r>
+              <a:rPr>
+                <a:latin typeface="Inter"/>
+              </a:rPr>
               <a:t>8</a:t>
             </a:r>
           </a:p>
@@ -11463,7 +13010,11 @@
           <a:bodyPr rtlCol="0" anchor="ctr"/>
           <a:lstStyle/>
           <a:p>
-            <a:pPr algn="ctr"/>
+            <a:pPr algn="ctr">
+              <a:defRPr>
+                <a:latin typeface="Inter"/>
+              </a:defRPr>
+            </a:pPr>
           </a:p>
         </p:txBody>
       </p:sp>
@@ -11501,7 +13052,10 @@
               </a:defRPr>
             </a:pPr>
             <a:r>
-              <a:t>Appendix — Sources</a:t>
+              <a:rPr>
+                <a:latin typeface="Inter"/>
+              </a:rPr>
+              <a:t>Appendix A — Sources</a:t>
             </a:r>
           </a:p>
         </p:txBody>
@@ -11547,7 +13101,11 @@
           <a:bodyPr rtlCol="0" anchor="ctr"/>
           <a:lstStyle/>
           <a:p>
-            <a:pPr algn="ctr"/>
+            <a:pPr algn="ctr">
+              <a:defRPr>
+                <a:latin typeface="Inter"/>
+              </a:defRPr>
+            </a:pPr>
           </a:p>
         </p:txBody>
       </p:sp>
@@ -11592,7 +13150,11 @@
           <a:bodyPr rtlCol="0" anchor="ctr"/>
           <a:lstStyle/>
           <a:p>
-            <a:pPr algn="ctr"/>
+            <a:pPr algn="ctr">
+              <a:defRPr>
+                <a:latin typeface="Inter"/>
+              </a:defRPr>
+            </a:pPr>
           </a:p>
         </p:txBody>
       </p:sp>
@@ -11630,6 +13192,9 @@
               </a:defRPr>
             </a:pPr>
             <a:r>
+              <a:rPr>
+                <a:latin typeface="Inter"/>
+              </a:rPr>
               <a:t>A</a:t>
             </a:r>
           </a:p>
@@ -11645,7 +13210,7 @@
         </p:nvGraphicFramePr>
         <p:xfrm>
           <a:off x="640080" y="1325880"/>
-          <a:ext cx="10908792" cy="3499699"/>
+          <a:ext cx="10908792" cy="4892040"/>
         </p:xfrm>
         <a:graphic>
           <a:graphicData uri="http://schemas.openxmlformats.org/drawingml/2006/table">
@@ -11660,7 +13225,7 @@
                 <a:gridCol w="2224278"/>
                 <a:gridCol w="2224278"/>
               </a:tblGrid>
-              <a:tr h="699939">
+              <a:tr h="543560">
                 <a:tc>
                   <a:txBody>
                     <a:bodyPr/>
@@ -11675,6 +13240,9 @@
                         </a:defRPr>
                       </a:pPr>
                       <a:r>
+                        <a:rPr>
+                          <a:latin typeface="Inter"/>
+                        </a:rPr>
                         <a:t>Tag</a:t>
                       </a:r>
                     </a:p>
@@ -11699,6 +13267,9 @@
                         </a:defRPr>
                       </a:pPr>
                       <a:r>
+                        <a:rPr>
+                          <a:latin typeface="Inter"/>
+                        </a:rPr>
                         <a:t>Evidence</a:t>
                       </a:r>
                     </a:p>
@@ -11723,6 +13294,9 @@
                         </a:defRPr>
                       </a:pPr>
                       <a:r>
+                        <a:rPr>
+                          <a:latin typeface="Inter"/>
+                        </a:rPr>
                         <a:t>Tool</a:t>
                       </a:r>
                     </a:p>
@@ -11747,6 +13321,9 @@
                         </a:defRPr>
                       </a:pPr>
                       <a:r>
+                        <a:rPr>
+                          <a:latin typeface="Inter"/>
+                        </a:rPr>
                         <a:t>As of</a:t>
                       </a:r>
                     </a:p>
@@ -11771,6 +13348,9 @@
                         </a:defRPr>
                       </a:pPr>
                       <a:r>
+                        <a:rPr>
+                          <a:latin typeface="Inter"/>
+                        </a:rPr>
                         <a:t>Validation</a:t>
                       </a:r>
                     </a:p>
@@ -11782,7 +13362,7 @@
                   </a:tcPr>
                 </a:tc>
               </a:tr>
-              <a:tr h="699939">
+              <a:tr h="543560">
                 <a:tc>
                   <a:txBody>
                     <a:bodyPr/>
@@ -11797,6 +13377,9 @@
                         </a:defRPr>
                       </a:pPr>
                       <a:r>
+                        <a:rPr>
+                          <a:latin typeface="Inter"/>
+                        </a:rPr>
                         <a:t>S1</a:t>
                       </a:r>
                     </a:p>
@@ -11821,6 +13404,9 @@
                         </a:defRPr>
                       </a:pPr>
                       <a:r>
+                        <a:rPr>
+                          <a:latin typeface="Inter"/>
+                        </a:rPr>
                         <a:t>Organizations and modules</a:t>
                       </a:r>
                     </a:p>
@@ -11845,6 +13431,9 @@
                         </a:defRPr>
                       </a:pPr>
                       <a:r>
+                        <a:rPr>
+                          <a:latin typeface="Inter"/>
+                        </a:rPr>
                         <a:t>list_organizations</a:t>
                       </a:r>
                     </a:p>
@@ -11869,6 +13458,9 @@
                         </a:defRPr>
                       </a:pPr>
                       <a:r>
+                        <a:rPr>
+                          <a:latin typeface="Inter"/>
+                        </a:rPr>
                         <a:t>2026-10-04</a:t>
                       </a:r>
                     </a:p>
@@ -11893,6 +13485,9 @@
                         </a:defRPr>
                       </a:pPr>
                       <a:r>
+                        <a:rPr>
+                          <a:latin typeface="Inter"/>
+                        </a:rPr>
                         <a:t>● n/a</a:t>
                       </a:r>
                     </a:p>
@@ -11904,7 +13499,7 @@
                   </a:tcPr>
                 </a:tc>
               </a:tr>
-              <a:tr h="699939">
+              <a:tr h="543560">
                 <a:tc>
                   <a:txBody>
                     <a:bodyPr/>
@@ -11919,6 +13514,9 @@
                         </a:defRPr>
                       </a:pPr>
                       <a:r>
+                        <a:rPr>
+                          <a:latin typeface="Inter"/>
+                        </a:rPr>
                         <a:t>S2</a:t>
                       </a:r>
                     </a:p>
@@ -11943,6 +13541,9 @@
                         </a:defRPr>
                       </a:pPr>
                       <a:r>
+                        <a:rPr>
+                          <a:latin typeface="Inter"/>
+                        </a:rPr>
                         <a:t>Capabilities, entitlement, coverage</a:t>
                       </a:r>
                     </a:p>
@@ -11967,6 +13568,9 @@
                         </a:defRPr>
                       </a:pPr>
                       <a:r>
+                        <a:rPr>
+                          <a:latin typeface="Inter"/>
+                        </a:rPr>
                         <a:t>get_gradient_capabilities</a:t>
                       </a:r>
                     </a:p>
@@ -11991,6 +13595,9 @@
                         </a:defRPr>
                       </a:pPr>
                       <a:r>
+                        <a:rPr>
+                          <a:latin typeface="Inter"/>
+                        </a:rPr>
                         <a:t>2026-10-04</a:t>
                       </a:r>
                     </a:p>
@@ -12015,6 +13622,9 @@
                         </a:defRPr>
                       </a:pPr>
                       <a:r>
+                        <a:rPr>
+                          <a:latin typeface="Inter"/>
+                        </a:rPr>
                         <a:t>● n/a</a:t>
                       </a:r>
                     </a:p>
@@ -12026,7 +13636,7 @@
                   </a:tcPr>
                 </a:tc>
               </a:tr>
-              <a:tr h="699939">
+              <a:tr h="543560">
                 <a:tc>
                   <a:txBody>
                     <a:bodyPr/>
@@ -12041,6 +13651,9 @@
                         </a:defRPr>
                       </a:pPr>
                       <a:r>
+                        <a:rPr>
+                          <a:latin typeface="Inter"/>
+                        </a:rPr>
                         <a:t>S3</a:t>
                       </a:r>
                     </a:p>
@@ -12065,6 +13678,9 @@
                         </a:defRPr>
                       </a:pPr>
                       <a:r>
+                        <a:rPr>
+                          <a:latin typeface="Inter"/>
+                        </a:rPr>
                         <a:t>Contract probes (14)</a:t>
                       </a:r>
                     </a:p>
@@ -12089,6 +13705,9 @@
                         </a:defRPr>
                       </a:pPr>
                       <a:r>
+                        <a:rPr>
+                          <a:latin typeface="Inter"/>
+                        </a:rPr>
                         <a:t>see table in section 04</a:t>
                       </a:r>
                     </a:p>
@@ -12113,6 +13732,9 @@
                         </a:defRPr>
                       </a:pPr>
                       <a:r>
+                        <a:rPr>
+                          <a:latin typeface="Inter"/>
+                        </a:rPr>
                         <a:t>2026-10-04</a:t>
                       </a:r>
                     </a:p>
@@ -12137,6 +13759,9 @@
                         </a:defRPr>
                       </a:pPr>
                       <a:r>
+                        <a:rPr>
+                          <a:latin typeface="Inter"/>
+                        </a:rPr>
                         <a:t>● passed</a:t>
                       </a:r>
                     </a:p>
@@ -12148,7 +13773,7 @@
                   </a:tcPr>
                 </a:tc>
               </a:tr>
-              <a:tr h="699943">
+              <a:tr h="543560">
                 <a:tc>
                   <a:txBody>
                     <a:bodyPr/>
@@ -12163,6 +13788,9 @@
                         </a:defRPr>
                       </a:pPr>
                       <a:r>
+                        <a:rPr>
+                          <a:latin typeface="Inter"/>
+                        </a:rPr>
                         <a:t>S4</a:t>
                       </a:r>
                     </a:p>
@@ -12187,6 +13815,9 @@
                         </a:defRPr>
                       </a:pPr>
                       <a:r>
+                        <a:rPr>
+                          <a:latin typeface="Inter"/>
+                        </a:rPr>
                         <a:t>Diligence Roster</a:t>
                       </a:r>
                     </a:p>
@@ -12211,6 +13842,9 @@
                         </a:defRPr>
                       </a:pPr>
                       <a:r>
+                        <a:rPr>
+                          <a:latin typeface="Inter"/>
+                        </a:rPr>
                         <a:t>get_diligence_roster_funds</a:t>
                       </a:r>
                     </a:p>
@@ -12235,6 +13869,9 @@
                         </a:defRPr>
                       </a:pPr>
                       <a:r>
+                        <a:rPr>
+                          <a:latin typeface="Inter"/>
+                        </a:rPr>
                         <a:t>2026-10-04</a:t>
                       </a:r>
                     </a:p>
@@ -12259,6 +13896,557 @@
                         </a:defRPr>
                       </a:pPr>
                       <a:r>
+                        <a:rPr>
+                          <a:latin typeface="Inter"/>
+                        </a:rPr>
+                        <a:t>● passed</a:t>
+                      </a:r>
+                    </a:p>
+                  </a:txBody>
+                  <a:tcPr marL="54864" marR="54864" marT="27432" marB="27432" anchor="ctr">
+                    <a:solidFill>
+                      <a:srgbClr val="F5F7F9"/>
+                    </a:solidFill>
+                  </a:tcPr>
+                </a:tc>
+              </a:tr>
+              <a:tr h="543560">
+                <a:tc>
+                  <a:txBody>
+                    <a:bodyPr/>
+                    <a:lstStyle/>
+                    <a:p>
+                      <a:pPr>
+                        <a:defRPr sz="720" b="1">
+                          <a:solidFill>
+                            <a:srgbClr val="0D1117"/>
+                          </a:solidFill>
+                          <a:latin typeface="Inter"/>
+                        </a:defRPr>
+                      </a:pPr>
+                      <a:r>
+                        <a:rPr>
+                          <a:latin typeface="Inter"/>
+                        </a:rPr>
+                        <a:t>S5</a:t>
+                      </a:r>
+                    </a:p>
+                  </a:txBody>
+                  <a:tcPr marL="54864" marR="54864" marT="27432" marB="27432" anchor="ctr">
+                    <a:solidFill>
+                      <a:srgbClr val="FFFFFF"/>
+                    </a:solidFill>
+                  </a:tcPr>
+                </a:tc>
+                <a:tc>
+                  <a:txBody>
+                    <a:bodyPr/>
+                    <a:lstStyle/>
+                    <a:p>
+                      <a:pPr>
+                        <a:defRPr sz="720" b="0">
+                          <a:solidFill>
+                            <a:srgbClr val="0D1117"/>
+                          </a:solidFill>
+                          <a:latin typeface="Inter"/>
+                        </a:defRPr>
+                      </a:pPr>
+                      <a:r>
+                        <a:rPr>
+                          <a:latin typeface="Inter"/>
+                        </a:rPr>
+                        <a:t>The Read readiness probe</a:t>
+                      </a:r>
+                    </a:p>
+                  </a:txBody>
+                  <a:tcPr marL="54864" marR="54864" marT="27432" marB="27432" anchor="ctr">
+                    <a:solidFill>
+                      <a:srgbClr val="FFFFFF"/>
+                    </a:solidFill>
+                  </a:tcPr>
+                </a:tc>
+                <a:tc>
+                  <a:txBody>
+                    <a:bodyPr/>
+                    <a:lstStyle/>
+                    <a:p>
+                      <a:pPr>
+                        <a:defRPr sz="720" b="0">
+                          <a:solidFill>
+                            <a:srgbClr val="0D1117"/>
+                          </a:solidFill>
+                          <a:latin typeface="Inter"/>
+                        </a:defRPr>
+                      </a:pPr>
+                      <a:r>
+                        <a:rPr>
+                          <a:latin typeface="Inter"/>
+                        </a:rPr>
+                        <a:t>get_the_read</a:t>
+                      </a:r>
+                    </a:p>
+                  </a:txBody>
+                  <a:tcPr marL="54864" marR="54864" marT="27432" marB="27432" anchor="ctr">
+                    <a:solidFill>
+                      <a:srgbClr val="FFFFFF"/>
+                    </a:solidFill>
+                  </a:tcPr>
+                </a:tc>
+                <a:tc>
+                  <a:txBody>
+                    <a:bodyPr/>
+                    <a:lstStyle/>
+                    <a:p>
+                      <a:pPr>
+                        <a:defRPr sz="720" b="0">
+                          <a:solidFill>
+                            <a:srgbClr val="0D1117"/>
+                          </a:solidFill>
+                          <a:latin typeface="Inter"/>
+                        </a:defRPr>
+                      </a:pPr>
+                      <a:r>
+                        <a:rPr>
+                          <a:latin typeface="Inter"/>
+                        </a:rPr>
+                        <a:t>2026-10-02</a:t>
+                      </a:r>
+                    </a:p>
+                  </a:txBody>
+                  <a:tcPr marL="54864" marR="54864" marT="27432" marB="27432" anchor="ctr">
+                    <a:solidFill>
+                      <a:srgbClr val="FFFFFF"/>
+                    </a:solidFill>
+                  </a:tcPr>
+                </a:tc>
+                <a:tc>
+                  <a:txBody>
+                    <a:bodyPr/>
+                    <a:lstStyle/>
+                    <a:p>
+                      <a:pPr>
+                        <a:defRPr sz="720" b="1">
+                          <a:solidFill>
+                            <a:srgbClr val="C6F432"/>
+                          </a:solidFill>
+                          <a:latin typeface="Inter"/>
+                        </a:defRPr>
+                      </a:pPr>
+                      <a:r>
+                        <a:rPr>
+                          <a:latin typeface="Inter"/>
+                        </a:rPr>
+                        <a:t>● passed</a:t>
+                      </a:r>
+                    </a:p>
+                  </a:txBody>
+                  <a:tcPr marL="54864" marR="54864" marT="27432" marB="27432" anchor="ctr">
+                    <a:solidFill>
+                      <a:srgbClr val="F5F7F9"/>
+                    </a:solidFill>
+                  </a:tcPr>
+                </a:tc>
+              </a:tr>
+              <a:tr h="543560">
+                <a:tc>
+                  <a:txBody>
+                    <a:bodyPr/>
+                    <a:lstStyle/>
+                    <a:p>
+                      <a:pPr>
+                        <a:defRPr sz="720" b="1">
+                          <a:solidFill>
+                            <a:srgbClr val="0D1117"/>
+                          </a:solidFill>
+                          <a:latin typeface="Inter"/>
+                        </a:defRPr>
+                      </a:pPr>
+                      <a:r>
+                        <a:rPr>
+                          <a:latin typeface="Inter"/>
+                        </a:rPr>
+                        <a:t>S6</a:t>
+                      </a:r>
+                    </a:p>
+                  </a:txBody>
+                  <a:tcPr marL="54864" marR="54864" marT="27432" marB="27432" anchor="ctr">
+                    <a:solidFill>
+                      <a:srgbClr val="F5F7F9"/>
+                    </a:solidFill>
+                  </a:tcPr>
+                </a:tc>
+                <a:tc>
+                  <a:txBody>
+                    <a:bodyPr/>
+                    <a:lstStyle/>
+                    <a:p>
+                      <a:pPr>
+                        <a:defRPr sz="720" b="0">
+                          <a:solidFill>
+                            <a:srgbClr val="0D1117"/>
+                          </a:solidFill>
+                          <a:latin typeface="Inter"/>
+                        </a:defRPr>
+                      </a:pPr>
+                      <a:r>
+                        <a:rPr>
+                          <a:latin typeface="Inter"/>
+                        </a:rPr>
+                        <a:t>Macro conditions readiness probe</a:t>
+                      </a:r>
+                    </a:p>
+                  </a:txBody>
+                  <a:tcPr marL="54864" marR="54864" marT="27432" marB="27432" anchor="ctr">
+                    <a:solidFill>
+                      <a:srgbClr val="F5F7F9"/>
+                    </a:solidFill>
+                  </a:tcPr>
+                </a:tc>
+                <a:tc>
+                  <a:txBody>
+                    <a:bodyPr/>
+                    <a:lstStyle/>
+                    <a:p>
+                      <a:pPr>
+                        <a:defRPr sz="720" b="0">
+                          <a:solidFill>
+                            <a:srgbClr val="0D1117"/>
+                          </a:solidFill>
+                          <a:latin typeface="Inter"/>
+                        </a:defRPr>
+                      </a:pPr>
+                      <a:r>
+                        <a:rPr>
+                          <a:latin typeface="Inter"/>
+                        </a:rPr>
+                        <a:t>get_macro_conditions</a:t>
+                      </a:r>
+                    </a:p>
+                  </a:txBody>
+                  <a:tcPr marL="54864" marR="54864" marT="27432" marB="27432" anchor="ctr">
+                    <a:solidFill>
+                      <a:srgbClr val="F5F7F9"/>
+                    </a:solidFill>
+                  </a:tcPr>
+                </a:tc>
+                <a:tc>
+                  <a:txBody>
+                    <a:bodyPr/>
+                    <a:lstStyle/>
+                    <a:p>
+                      <a:pPr>
+                        <a:defRPr sz="720" b="0">
+                          <a:solidFill>
+                            <a:srgbClr val="0D1117"/>
+                          </a:solidFill>
+                          <a:latin typeface="Inter"/>
+                        </a:defRPr>
+                      </a:pPr>
+                      <a:r>
+                        <a:rPr>
+                          <a:latin typeface="Inter"/>
+                        </a:rPr>
+                        <a:t>2026-10-02</a:t>
+                      </a:r>
+                    </a:p>
+                  </a:txBody>
+                  <a:tcPr marL="54864" marR="54864" marT="27432" marB="27432" anchor="ctr">
+                    <a:solidFill>
+                      <a:srgbClr val="F5F7F9"/>
+                    </a:solidFill>
+                  </a:tcPr>
+                </a:tc>
+                <a:tc>
+                  <a:txBody>
+                    <a:bodyPr/>
+                    <a:lstStyle/>
+                    <a:p>
+                      <a:pPr>
+                        <a:defRPr sz="720" b="1">
+                          <a:solidFill>
+                            <a:srgbClr val="C6F432"/>
+                          </a:solidFill>
+                          <a:latin typeface="Inter"/>
+                        </a:defRPr>
+                      </a:pPr>
+                      <a:r>
+                        <a:rPr>
+                          <a:latin typeface="Inter"/>
+                        </a:rPr>
+                        <a:t>● passed</a:t>
+                      </a:r>
+                    </a:p>
+                  </a:txBody>
+                  <a:tcPr marL="54864" marR="54864" marT="27432" marB="27432" anchor="ctr">
+                    <a:solidFill>
+                      <a:srgbClr val="F5F7F9"/>
+                    </a:solidFill>
+                  </a:tcPr>
+                </a:tc>
+              </a:tr>
+              <a:tr h="543560">
+                <a:tc>
+                  <a:txBody>
+                    <a:bodyPr/>
+                    <a:lstStyle/>
+                    <a:p>
+                      <a:pPr>
+                        <a:defRPr sz="720" b="1">
+                          <a:solidFill>
+                            <a:srgbClr val="0D1117"/>
+                          </a:solidFill>
+                          <a:latin typeface="Inter"/>
+                        </a:defRPr>
+                      </a:pPr>
+                      <a:r>
+                        <a:rPr>
+                          <a:latin typeface="Inter"/>
+                        </a:rPr>
+                        <a:t>S7</a:t>
+                      </a:r>
+                    </a:p>
+                  </a:txBody>
+                  <a:tcPr marL="54864" marR="54864" marT="27432" marB="27432" anchor="ctr">
+                    <a:solidFill>
+                      <a:srgbClr val="FFFFFF"/>
+                    </a:solidFill>
+                  </a:tcPr>
+                </a:tc>
+                <a:tc>
+                  <a:txBody>
+                    <a:bodyPr/>
+                    <a:lstStyle/>
+                    <a:p>
+                      <a:pPr>
+                        <a:defRPr sz="720" b="0">
+                          <a:solidFill>
+                            <a:srgbClr val="0D1117"/>
+                          </a:solidFill>
+                          <a:latin typeface="Inter"/>
+                        </a:defRPr>
+                      </a:pPr>
+                      <a:r>
+                        <a:rPr>
+                          <a:latin typeface="Inter"/>
+                        </a:rPr>
+                        <a:t>Gradient signal readiness probe</a:t>
+                      </a:r>
+                    </a:p>
+                  </a:txBody>
+                  <a:tcPr marL="54864" marR="54864" marT="27432" marB="27432" anchor="ctr">
+                    <a:solidFill>
+                      <a:srgbClr val="FFFFFF"/>
+                    </a:solidFill>
+                  </a:tcPr>
+                </a:tc>
+                <a:tc>
+                  <a:txBody>
+                    <a:bodyPr/>
+                    <a:lstStyle/>
+                    <a:p>
+                      <a:pPr>
+                        <a:defRPr sz="720" b="0">
+                          <a:solidFill>
+                            <a:srgbClr val="0D1117"/>
+                          </a:solidFill>
+                          <a:latin typeface="Inter"/>
+                        </a:defRPr>
+                      </a:pPr>
+                      <a:r>
+                        <a:rPr>
+                          <a:latin typeface="Inter"/>
+                        </a:rPr>
+                        <a:t>get_macro_signals</a:t>
+                      </a:r>
+                    </a:p>
+                  </a:txBody>
+                  <a:tcPr marL="54864" marR="54864" marT="27432" marB="27432" anchor="ctr">
+                    <a:solidFill>
+                      <a:srgbClr val="FFFFFF"/>
+                    </a:solidFill>
+                  </a:tcPr>
+                </a:tc>
+                <a:tc>
+                  <a:txBody>
+                    <a:bodyPr/>
+                    <a:lstStyle/>
+                    <a:p>
+                      <a:pPr>
+                        <a:defRPr sz="720" b="0">
+                          <a:solidFill>
+                            <a:srgbClr val="0D1117"/>
+                          </a:solidFill>
+                          <a:latin typeface="Inter"/>
+                        </a:defRPr>
+                      </a:pPr>
+                      <a:r>
+                        <a:rPr>
+                          <a:latin typeface="Inter"/>
+                        </a:rPr>
+                        <a:t>2026-10-02</a:t>
+                      </a:r>
+                    </a:p>
+                  </a:txBody>
+                  <a:tcPr marL="54864" marR="54864" marT="27432" marB="27432" anchor="ctr">
+                    <a:solidFill>
+                      <a:srgbClr val="FFFFFF"/>
+                    </a:solidFill>
+                  </a:tcPr>
+                </a:tc>
+                <a:tc>
+                  <a:txBody>
+                    <a:bodyPr/>
+                    <a:lstStyle/>
+                    <a:p>
+                      <a:pPr>
+                        <a:defRPr sz="720" b="1">
+                          <a:solidFill>
+                            <a:srgbClr val="C6F432"/>
+                          </a:solidFill>
+                          <a:latin typeface="Inter"/>
+                        </a:defRPr>
+                      </a:pPr>
+                      <a:r>
+                        <a:rPr>
+                          <a:latin typeface="Inter"/>
+                        </a:rPr>
+                        <a:t>● passed</a:t>
+                      </a:r>
+                    </a:p>
+                  </a:txBody>
+                  <a:tcPr marL="54864" marR="54864" marT="27432" marB="27432" anchor="ctr">
+                    <a:solidFill>
+                      <a:srgbClr val="F5F7F9"/>
+                    </a:solidFill>
+                  </a:tcPr>
+                </a:tc>
+              </a:tr>
+              <a:tr h="543560">
+                <a:tc>
+                  <a:txBody>
+                    <a:bodyPr/>
+                    <a:lstStyle/>
+                    <a:p>
+                      <a:pPr>
+                        <a:defRPr sz="720" b="1">
+                          <a:solidFill>
+                            <a:srgbClr val="0D1117"/>
+                          </a:solidFill>
+                          <a:latin typeface="Inter"/>
+                        </a:defRPr>
+                      </a:pPr>
+                      <a:r>
+                        <a:rPr>
+                          <a:latin typeface="Inter"/>
+                        </a:rPr>
+                        <a:t>S8</a:t>
+                      </a:r>
+                    </a:p>
+                  </a:txBody>
+                  <a:tcPr marL="54864" marR="54864" marT="27432" marB="27432" anchor="ctr">
+                    <a:solidFill>
+                      <a:srgbClr val="F5F7F9"/>
+                    </a:solidFill>
+                  </a:tcPr>
+                </a:tc>
+                <a:tc>
+                  <a:txBody>
+                    <a:bodyPr/>
+                    <a:lstStyle/>
+                    <a:p>
+                      <a:pPr>
+                        <a:defRPr sz="720" b="0">
+                          <a:solidFill>
+                            <a:srgbClr val="0D1117"/>
+                          </a:solidFill>
+                          <a:latin typeface="Inter"/>
+                        </a:defRPr>
+                      </a:pPr>
+                      <a:r>
+                        <a:rPr>
+                          <a:latin typeface="Inter"/>
+                        </a:rPr>
+                        <a:t>Macro calendar readiness probe</a:t>
+                      </a:r>
+                    </a:p>
+                  </a:txBody>
+                  <a:tcPr marL="54864" marR="54864" marT="27432" marB="27432" anchor="ctr">
+                    <a:solidFill>
+                      <a:srgbClr val="F5F7F9"/>
+                    </a:solidFill>
+                  </a:tcPr>
+                </a:tc>
+                <a:tc>
+                  <a:txBody>
+                    <a:bodyPr/>
+                    <a:lstStyle/>
+                    <a:p>
+                      <a:pPr>
+                        <a:defRPr sz="720" b="0">
+                          <a:solidFill>
+                            <a:srgbClr val="0D1117"/>
+                          </a:solidFill>
+                          <a:latin typeface="Inter"/>
+                        </a:defRPr>
+                      </a:pPr>
+                      <a:r>
+                        <a:rPr>
+                          <a:latin typeface="Inter"/>
+                        </a:rPr>
+                        <a:t>get_macro_calendar</a:t>
+                      </a:r>
+                    </a:p>
+                  </a:txBody>
+                  <a:tcPr marL="54864" marR="54864" marT="27432" marB="27432" anchor="ctr">
+                    <a:solidFill>
+                      <a:srgbClr val="F5F7F9"/>
+                    </a:solidFill>
+                  </a:tcPr>
+                </a:tc>
+                <a:tc>
+                  <a:txBody>
+                    <a:bodyPr/>
+                    <a:lstStyle/>
+                    <a:p>
+                      <a:pPr>
+                        <a:defRPr sz="720" b="0">
+                          <a:solidFill>
+                            <a:srgbClr val="0D1117"/>
+                          </a:solidFill>
+                          <a:latin typeface="Inter"/>
+                        </a:defRPr>
+                      </a:pPr>
+                      <a:r>
+                        <a:rPr>
+                          <a:latin typeface="Inter"/>
+                        </a:rPr>
+                        <a:t>2026-10-04</a:t>
+                      </a:r>
+                    </a:p>
+                  </a:txBody>
+                  <a:tcPr marL="54864" marR="54864" marT="27432" marB="27432" anchor="ctr">
+                    <a:solidFill>
+                      <a:srgbClr val="F5F7F9"/>
+                    </a:solidFill>
+                  </a:tcPr>
+                </a:tc>
+                <a:tc>
+                  <a:txBody>
+                    <a:bodyPr/>
+                    <a:lstStyle/>
+                    <a:p>
+                      <a:pPr>
+                        <a:defRPr sz="720" b="1">
+                          <a:solidFill>
+                            <a:srgbClr val="C6F432"/>
+                          </a:solidFill>
+                          <a:latin typeface="Inter"/>
+                        </a:defRPr>
+                      </a:pPr>
+                      <a:r>
+                        <a:rPr>
+                          <a:latin typeface="Inter"/>
+                        </a:rPr>
                         <a:t>● passed</a:t>
                       </a:r>
                     </a:p>
@@ -12276,46 +14464,7 @@
       </p:graphicFrame>
       <p:sp>
         <p:nvSpPr>
-          <p:cNvPr id="8" name="TextBox 7"/>
-          <p:cNvSpPr txBox="1"/>
-          <p:nvPr/>
-        </p:nvSpPr>
-        <p:spPr>
-          <a:xfrm>
-            <a:off x="640080" y="4935307"/>
-            <a:ext cx="10908792" cy="1282612"/>
-          </a:xfrm>
-          <a:prstGeom prst="rect">
-            <a:avLst/>
-          </a:prstGeom>
-          <a:noFill/>
-        </p:spPr>
-        <p:txBody>
-          <a:bodyPr wrap="none" lIns="9144" rIns="9144" tIns="9144" bIns="9144" anchor="t">
-            <a:spAutoFit/>
-          </a:bodyPr>
-          <a:lstStyle/>
-          <a:p>
-            <a:pPr algn="l">
-              <a:spcAft>
-                <a:spcPts val="0"/>
-              </a:spcAft>
-              <a:defRPr sz="1100" b="0">
-                <a:solidFill>
-                  <a:srgbClr val="4A5563"/>
-                </a:solidFill>
-                <a:latin typeface="Inter"/>
-              </a:defRPr>
-            </a:pPr>
-            <a:r>
-              <a:t>Readiness reflects entitlement, OAuth scope, backend health and data readiness reported by GradientCIO at the time of the check. Tool availability does not guarantee that data is published for every subject.</a:t>
-            </a:r>
-          </a:p>
-        </p:txBody>
-      </p:sp>
-      <p:sp>
-        <p:nvSpPr>
-          <p:cNvPr id="9" name="Rectangle 8"/>
+          <p:cNvPr id="8" name="Rectangle 7"/>
           <p:cNvSpPr/>
           <p:nvPr/>
         </p:nvSpPr>
@@ -12354,13 +14503,17 @@
           <a:bodyPr rtlCol="0" anchor="ctr"/>
           <a:lstStyle/>
           <a:p>
-            <a:pPr algn="ctr"/>
-          </a:p>
-        </p:txBody>
-      </p:sp>
-      <p:sp>
-        <p:nvSpPr>
-          <p:cNvPr id="10" name="TextBox 9"/>
+            <a:pPr algn="ctr">
+              <a:defRPr>
+                <a:latin typeface="Inter"/>
+              </a:defRPr>
+            </a:pPr>
+          </a:p>
+        </p:txBody>
+      </p:sp>
+      <p:sp>
+        <p:nvSpPr>
+          <p:cNvPr id="9" name="TextBox 8"/>
           <p:cNvSpPr txBox="1"/>
           <p:nvPr/>
         </p:nvSpPr>
@@ -12392,14 +14545,17 @@
               </a:defRPr>
             </a:pPr>
             <a:r>
-              <a:t>Sources: S1 · S2 · S3 · S4</a:t>
+              <a:rPr>
+                <a:latin typeface="Inter"/>
+              </a:rPr>
+              <a:t>Sources: S1 · S2 · S3 · S4 · S5 · S6 · S7 · S8</a:t>
             </a:r>
           </a:p>
         </p:txBody>
       </p:sp>
       <p:sp>
         <p:nvSpPr>
-          <p:cNvPr id="11" name="TextBox 10"/>
+          <p:cNvPr id="10" name="TextBox 9"/>
           <p:cNvSpPr txBox="1"/>
           <p:nvPr/>
         </p:nvSpPr>
@@ -12431,14 +14587,17 @@
               </a:defRPr>
             </a:pPr>
             <a:r>
-              <a:t>Confidential — internal investment use</a:t>
+              <a:rPr>
+                <a:latin typeface="Inter"/>
+              </a:rPr>
+              <a:t>Confidential — prepared for internal investment use · Data as of 2026-10-04</a:t>
             </a:r>
           </a:p>
         </p:txBody>
       </p:sp>
       <p:sp>
         <p:nvSpPr>
-          <p:cNvPr id="12" name="TextBox 11"/>
+          <p:cNvPr id="11" name="TextBox 10"/>
           <p:cNvSpPr txBox="1"/>
           <p:nvPr/>
         </p:nvSpPr>
@@ -12470,6 +14629,9 @@
               </a:defRPr>
             </a:pPr>
             <a:r>
+              <a:rPr>
+                <a:latin typeface="Inter"/>
+              </a:rPr>
               <a:t>9</a:t>
             </a:r>
           </a:p>
@@ -12488,34 +14650,34 @@
   <a:themeElements>
     <a:clrScheme name="Office">
       <a:dk1>
-        <a:sysClr val="windowText" lastClr="000000"/>
+        <a:srgbClr val="0D1117"/>
       </a:dk1>
       <a:lt1>
-        <a:sysClr val="window" lastClr="FFFFFF"/>
+        <a:srgbClr val="FFFFFF"/>
       </a:lt1>
       <a:dk2>
-        <a:srgbClr val="1F497D"/>
+        <a:srgbClr val="161C24"/>
       </a:dk2>
       <a:lt2>
-        <a:srgbClr val="EEECE1"/>
+        <a:srgbClr val="F5F7F9"/>
       </a:lt2>
       <a:accent1>
-        <a:srgbClr val="4F81BD"/>
+        <a:srgbClr val="C6F432"/>
       </a:accent1>
       <a:accent2>
-        <a:srgbClr val="C0504D"/>
+        <a:srgbClr val="4F6B00"/>
       </a:accent2>
       <a:accent3>
-        <a:srgbClr val="9BBB59"/>
+        <a:srgbClr val="F2A93B"/>
       </a:accent3>
       <a:accent4>
-        <a:srgbClr val="8064A2"/>
+        <a:srgbClr val="5B8DEF"/>
       </a:accent4>
       <a:accent5>
-        <a:srgbClr val="4BACC6"/>
+        <a:srgbClr val="FF6B5E"/>
       </a:accent5>
       <a:accent6>
-        <a:srgbClr val="F79646"/>
+        <a:srgbClr val="3FB8AF"/>
       </a:accent6>
       <a:hlink>
         <a:srgbClr val="0000FF"/>

--- a/plugins/gradient-cio/assets/examples/gradient-setup.pptx
+++ b/plugins/gradient-cio/assets/examples/gradient-setup.pptx
@@ -6023,7 +6023,7 @@
                         <a:rPr>
                           <a:latin typeface="Inter"/>
                         </a:rPr>
-                        <a:t>gradient-ddq-reconcile</a:t>
+                        <a:t>gradient-odd-ddq-reconcile</a:t>
                       </a:r>
                     </a:p>
                   </a:txBody>
@@ -6106,7 +6106,7 @@
                         <a:rPr>
                           <a:latin typeface="Inter"/>
                         </a:rPr>
-                        <a:t>gradient-manager-monitor</a:t>
+                        <a:t>gradient-odd-manager-monitor</a:t>
                       </a:r>
                     </a:p>
                   </a:txBody>
@@ -6556,7 +6556,7 @@
                         <a:rPr>
                           <a:latin typeface="Inter"/>
                         </a:rPr>
-                        <a:t>gradient-macro-brief</a:t>
+                        <a:t>gradient-research-macro-brief</a:t>
                       </a:r>
                     </a:p>
                   </a:txBody>
@@ -6639,7 +6639,7 @@
                         <a:rPr>
                           <a:latin typeface="Inter"/>
                         </a:rPr>
-                        <a:t>gradient-ic-memo</a:t>
+                        <a:t>gradient-decision-ic-memo</a:t>
                       </a:r>
                     </a:p>
                   </a:txBody>

--- a/plugins/gradient-cio/assets/examples/gradient-setup.pptx
+++ b/plugins/gradient-cio/assets/examples/gradient-setup.pptx
@@ -2361,7 +2361,7 @@
         </p:nvSpPr>
         <p:spPr>
           <a:xfrm>
-            <a:off x="685800" y="1828800"/>
+            <a:off x="685800" y="1664208"/>
             <a:ext cx="9966960" cy="274320"/>
           </a:xfrm>
           <a:prstGeom prst="rect">
@@ -2379,7 +2379,7 @@
               <a:spcAft>
                 <a:spcPts val="0"/>
               </a:spcAft>
-              <a:defRPr sz="900" b="1">
+              <a:defRPr sz="850" b="1">
                 <a:solidFill>
                   <a:srgbClr val="C6F432"/>
                 </a:solidFill>
@@ -2390,7 +2390,7 @@
               <a:rPr>
                 <a:latin typeface="Inter"/>
               </a:rPr>
-              <a:t>SETUP &amp; READINESS</a:t>
+              <a:t>PLATFORM READINESS</a:t>
             </a:r>
           </a:p>
         </p:txBody>
@@ -2403,7 +2403,7 @@
         </p:nvSpPr>
         <p:spPr>
           <a:xfrm>
-            <a:off x="685800" y="2176272"/>
+            <a:off x="685800" y="2011680"/>
             <a:ext cx="9966960" cy="1234440"/>
           </a:xfrm>
           <a:prstGeom prst="rect">
@@ -2421,7 +2421,7 @@
               <a:spcAft>
                 <a:spcPts val="0"/>
               </a:spcAft>
-              <a:defRPr sz="3400" b="1">
+              <a:defRPr sz="3300" b="1">
                 <a:solidFill>
                   <a:srgbClr val="FFFFFF"/>
                 </a:solidFill>
@@ -2432,7 +2432,7 @@
               <a:rPr>
                 <a:latin typeface="Inter"/>
               </a:rPr>
-              <a:t>Gradient</a:t>
+              <a:t>Northstar Investment Office</a:t>
             </a:r>
           </a:p>
         </p:txBody>
@@ -2445,8 +2445,8 @@
         </p:nvSpPr>
         <p:spPr>
           <a:xfrm>
-            <a:off x="685800" y="3456432"/>
-            <a:ext cx="9692640" cy="640080"/>
+            <a:off x="685800" y="3273552"/>
+            <a:ext cx="9692640" cy="594360"/>
           </a:xfrm>
           <a:prstGeom prst="rect">
             <a:avLst/>
@@ -2463,7 +2463,7 @@
               <a:spcAft>
                 <a:spcPts val="0"/>
               </a:spcAft>
-              <a:defRPr sz="1500" b="0">
+              <a:defRPr sz="1400" b="0">
                 <a:solidFill>
                   <a:srgbClr val="9AA5B1"/>
                 </a:solidFill>
@@ -2474,7 +2474,7 @@
               <a:rPr>
                 <a:latin typeface="Inter"/>
               </a:rPr>
-              <a:t>GradientCIO connection, access and data readiness</a:t>
+              <a:t>Access, licensed capabilities and data coverage</a:t>
             </a:r>
           </a:p>
         </p:txBody>
@@ -2487,8 +2487,8 @@
         </p:nvSpPr>
         <p:spPr>
           <a:xfrm>
-            <a:off x="685800" y="4251960"/>
-            <a:ext cx="1005840" cy="54864"/>
+            <a:off x="685800" y="4005072"/>
+            <a:ext cx="822960" cy="45720"/>
           </a:xfrm>
           <a:prstGeom prst="rect">
             <a:avLst/>
@@ -2536,8 +2536,8 @@
         </p:nvSpPr>
         <p:spPr>
           <a:xfrm>
-            <a:off x="685800" y="4572000"/>
-            <a:ext cx="3063240" cy="182880"/>
+            <a:off x="685800" y="4315968"/>
+            <a:ext cx="4709160" cy="182880"/>
           </a:xfrm>
           <a:prstGeom prst="rect">
             <a:avLst/>
@@ -2578,8 +2578,8 @@
         </p:nvSpPr>
         <p:spPr>
           <a:xfrm>
-            <a:off x="685800" y="4773168"/>
-            <a:ext cx="3063240" cy="320040"/>
+            <a:off x="685800" y="4507992"/>
+            <a:ext cx="4709160" cy="310896"/>
           </a:xfrm>
           <a:prstGeom prst="rect">
             <a:avLst/>
@@ -2607,7 +2607,7 @@
               <a:rPr>
                 <a:latin typeface="Inter"/>
               </a:rPr>
-              <a:t>Gradient</a:t>
+              <a:t>Northstar Investment Office</a:t>
             </a:r>
           </a:p>
         </p:txBody>
@@ -2620,8 +2620,8 @@
         </p:nvSpPr>
         <p:spPr>
           <a:xfrm>
-            <a:off x="4160520" y="4572000"/>
-            <a:ext cx="3063240" cy="182880"/>
+            <a:off x="5852160" y="4315968"/>
+            <a:ext cx="4709160" cy="182880"/>
           </a:xfrm>
           <a:prstGeom prst="rect">
             <a:avLst/>
@@ -2649,7 +2649,7 @@
               <a:rPr>
                 <a:latin typeface="Inter"/>
               </a:rPr>
-              <a:t>ROLE</a:t>
+              <a:t>ACCESS</a:t>
             </a:r>
           </a:p>
         </p:txBody>
@@ -2662,8 +2662,8 @@
         </p:nvSpPr>
         <p:spPr>
           <a:xfrm>
-            <a:off x="4160520" y="4773168"/>
-            <a:ext cx="3063240" cy="320040"/>
+            <a:off x="5852160" y="4507992"/>
+            <a:ext cx="4709160" cy="310896"/>
           </a:xfrm>
           <a:prstGeom prst="rect">
             <a:avLst/>
@@ -2691,7 +2691,7 @@
               <a:rPr>
                 <a:latin typeface="Inter"/>
               </a:rPr>
-              <a:t>Admin</a:t>
+              <a:t>Connected</a:t>
             </a:r>
           </a:p>
         </p:txBody>
@@ -2704,8 +2704,8 @@
         </p:nvSpPr>
         <p:spPr>
           <a:xfrm>
-            <a:off x="7635240" y="4572000"/>
-            <a:ext cx="3063240" cy="182880"/>
+            <a:off x="685800" y="4937759"/>
+            <a:ext cx="4709160" cy="182880"/>
           </a:xfrm>
           <a:prstGeom prst="rect">
             <a:avLst/>
@@ -2733,7 +2733,7 @@
               <a:rPr>
                 <a:latin typeface="Inter"/>
               </a:rPr>
-              <a:t>LICENSED MODULES</a:t>
+              <a:t>LICENSED CAPABILITIES</a:t>
             </a:r>
           </a:p>
         </p:txBody>
@@ -2746,8 +2746,8 @@
         </p:nvSpPr>
         <p:spPr>
           <a:xfrm>
-            <a:off x="7635240" y="4773168"/>
-            <a:ext cx="3063240" cy="320040"/>
+            <a:off x="685800" y="5129783"/>
+            <a:ext cx="4709160" cy="310896"/>
           </a:xfrm>
           <a:prstGeom prst="rect">
             <a:avLst/>
@@ -2788,8 +2788,8 @@
         </p:nvSpPr>
         <p:spPr>
           <a:xfrm>
-            <a:off x="685800" y="5230368"/>
-            <a:ext cx="3063240" cy="182880"/>
+            <a:off x="5852160" y="4937759"/>
+            <a:ext cx="4709160" cy="182880"/>
           </a:xfrm>
           <a:prstGeom prst="rect">
             <a:avLst/>
@@ -2817,7 +2817,7 @@
               <a:rPr>
                 <a:latin typeface="Inter"/>
               </a:rPr>
-              <a:t>ROSTER FUNDS</a:t>
+              <a:t>REVIEWED</a:t>
             </a:r>
           </a:p>
         </p:txBody>
@@ -2830,8 +2830,8 @@
         </p:nvSpPr>
         <p:spPr>
           <a:xfrm>
-            <a:off x="685800" y="5431536"/>
-            <a:ext cx="3063240" cy="320040"/>
+            <a:off x="5852160" y="5129783"/>
+            <a:ext cx="4709160" cy="310896"/>
           </a:xfrm>
           <a:prstGeom prst="rect">
             <a:avLst/>
@@ -2859,174 +2859,6 @@
               <a:rPr>
                 <a:latin typeface="Inter"/>
               </a:rPr>
-              <a:t>1 of 3 slots</a:t>
-            </a:r>
-          </a:p>
-        </p:txBody>
-      </p:sp>
-      <p:sp>
-        <p:nvSpPr>
-          <p:cNvPr id="17" name="TextBox 16"/>
-          <p:cNvSpPr txBox="1"/>
-          <p:nvPr/>
-        </p:nvSpPr>
-        <p:spPr>
-          <a:xfrm>
-            <a:off x="4160520" y="5230368"/>
-            <a:ext cx="3063240" cy="182880"/>
-          </a:xfrm>
-          <a:prstGeom prst="rect">
-            <a:avLst/>
-          </a:prstGeom>
-          <a:noFill/>
-        </p:spPr>
-        <p:txBody>
-          <a:bodyPr wrap="none" lIns="9144" rIns="9144" tIns="9144" bIns="9144" anchor="t">
-            <a:spAutoFit/>
-          </a:bodyPr>
-          <a:lstStyle/>
-          <a:p>
-            <a:pPr algn="l">
-              <a:spcAft>
-                <a:spcPts val="0"/>
-              </a:spcAft>
-              <a:defRPr sz="700" b="1">
-                <a:solidFill>
-                  <a:srgbClr val="8A94A1"/>
-                </a:solidFill>
-                <a:latin typeface="Inter"/>
-              </a:defRPr>
-            </a:pPr>
-            <a:r>
-              <a:rPr>
-                <a:latin typeface="Inter"/>
-              </a:rPr>
-              <a:t>MCP VERSION</a:t>
-            </a:r>
-          </a:p>
-        </p:txBody>
-      </p:sp>
-      <p:sp>
-        <p:nvSpPr>
-          <p:cNvPr id="18" name="TextBox 17"/>
-          <p:cNvSpPr txBox="1"/>
-          <p:nvPr/>
-        </p:nvSpPr>
-        <p:spPr>
-          <a:xfrm>
-            <a:off x="4160520" y="5431536"/>
-            <a:ext cx="3063240" cy="320040"/>
-          </a:xfrm>
-          <a:prstGeom prst="rect">
-            <a:avLst/>
-          </a:prstGeom>
-          <a:noFill/>
-        </p:spPr>
-        <p:txBody>
-          <a:bodyPr wrap="none" lIns="9144" rIns="9144" tIns="9144" bIns="9144" anchor="t">
-            <a:spAutoFit/>
-          </a:bodyPr>
-          <a:lstStyle/>
-          <a:p>
-            <a:pPr algn="l">
-              <a:spcAft>
-                <a:spcPts val="0"/>
-              </a:spcAft>
-              <a:defRPr sz="1000" b="1">
-                <a:solidFill>
-                  <a:srgbClr val="FFFFFF"/>
-                </a:solidFill>
-                <a:latin typeface="Inter"/>
-              </a:defRPr>
-            </a:pPr>
-            <a:r>
-              <a:rPr>
-                <a:latin typeface="Inter"/>
-              </a:rPr>
-              <a:t>gradient-mcp 0.7.0</a:t>
-            </a:r>
-          </a:p>
-        </p:txBody>
-      </p:sp>
-      <p:sp>
-        <p:nvSpPr>
-          <p:cNvPr id="19" name="TextBox 18"/>
-          <p:cNvSpPr txBox="1"/>
-          <p:nvPr/>
-        </p:nvSpPr>
-        <p:spPr>
-          <a:xfrm>
-            <a:off x="7635240" y="5230368"/>
-            <a:ext cx="3063240" cy="182880"/>
-          </a:xfrm>
-          <a:prstGeom prst="rect">
-            <a:avLst/>
-          </a:prstGeom>
-          <a:noFill/>
-        </p:spPr>
-        <p:txBody>
-          <a:bodyPr wrap="none" lIns="9144" rIns="9144" tIns="9144" bIns="9144" anchor="t">
-            <a:spAutoFit/>
-          </a:bodyPr>
-          <a:lstStyle/>
-          <a:p>
-            <a:pPr algn="l">
-              <a:spcAft>
-                <a:spcPts val="0"/>
-              </a:spcAft>
-              <a:defRPr sz="700" b="1">
-                <a:solidFill>
-                  <a:srgbClr val="8A94A1"/>
-                </a:solidFill>
-                <a:latin typeface="Inter"/>
-              </a:defRPr>
-            </a:pPr>
-            <a:r>
-              <a:rPr>
-                <a:latin typeface="Inter"/>
-              </a:rPr>
-              <a:t>CHECKED</a:t>
-            </a:r>
-          </a:p>
-        </p:txBody>
-      </p:sp>
-      <p:sp>
-        <p:nvSpPr>
-          <p:cNvPr id="20" name="TextBox 19"/>
-          <p:cNvSpPr txBox="1"/>
-          <p:nvPr/>
-        </p:nvSpPr>
-        <p:spPr>
-          <a:xfrm>
-            <a:off x="7635240" y="5431536"/>
-            <a:ext cx="3063240" cy="320040"/>
-          </a:xfrm>
-          <a:prstGeom prst="rect">
-            <a:avLst/>
-          </a:prstGeom>
-          <a:noFill/>
-        </p:spPr>
-        <p:txBody>
-          <a:bodyPr wrap="none" lIns="9144" rIns="9144" tIns="9144" bIns="9144" anchor="t">
-            <a:spAutoFit/>
-          </a:bodyPr>
-          <a:lstStyle/>
-          <a:p>
-            <a:pPr algn="l">
-              <a:spcAft>
-                <a:spcPts val="0"/>
-              </a:spcAft>
-              <a:defRPr sz="1000" b="1">
-                <a:solidFill>
-                  <a:srgbClr val="FFFFFF"/>
-                </a:solidFill>
-                <a:latin typeface="Inter"/>
-              </a:defRPr>
-            </a:pPr>
-            <a:r>
-              <a:rPr>
-                <a:latin typeface="Inter"/>
-              </a:rPr>
               <a:t>2026-10-04</a:t>
             </a:r>
           </a:p>
@@ -3034,14 +2866,14 @@
       </p:sp>
       <p:sp>
         <p:nvSpPr>
-          <p:cNvPr id="21" name="Rectangle 20"/>
+          <p:cNvPr id="17" name="Rectangle 16"/>
           <p:cNvSpPr/>
           <p:nvPr/>
         </p:nvSpPr>
         <p:spPr>
           <a:xfrm>
-            <a:off x="685800" y="5833872"/>
-            <a:ext cx="3063240" cy="384048"/>
+            <a:off x="685800" y="5687568"/>
+            <a:ext cx="3337560" cy="530352"/>
           </a:xfrm>
           <a:prstGeom prst="rect">
             <a:avLst/>
@@ -3083,14 +2915,14 @@
       </p:sp>
       <p:sp>
         <p:nvSpPr>
-          <p:cNvPr id="22" name="TextBox 21"/>
+          <p:cNvPr id="18" name="TextBox 17"/>
           <p:cNvSpPr txBox="1"/>
           <p:nvPr/>
         </p:nvSpPr>
         <p:spPr>
           <a:xfrm>
-            <a:off x="822960" y="5934456"/>
-            <a:ext cx="2788920" cy="164592"/>
+            <a:off x="822960" y="5760720"/>
+            <a:ext cx="3063240" cy="128016"/>
           </a:xfrm>
           <a:prstGeom prst="rect">
             <a:avLst/>
@@ -3107,7 +2939,7 @@
               <a:spcAft>
                 <a:spcPts val="0"/>
               </a:spcAft>
-              <a:defRPr sz="800" b="1">
+              <a:defRPr sz="620" b="1">
                 <a:solidFill>
                   <a:srgbClr val="0D1117"/>
                 </a:solidFill>
@@ -3118,6 +2950,48 @@
               <a:rPr>
                 <a:latin typeface="Inter"/>
               </a:rPr>
+              <a:t>READINESS</a:t>
+            </a:r>
+          </a:p>
+        </p:txBody>
+      </p:sp>
+      <p:sp>
+        <p:nvSpPr>
+          <p:cNvPr id="19" name="TextBox 18"/>
+          <p:cNvSpPr txBox="1"/>
+          <p:nvPr/>
+        </p:nvSpPr>
+        <p:spPr>
+          <a:xfrm>
+            <a:off x="822960" y="5916168"/>
+            <a:ext cx="3063240" cy="182880"/>
+          </a:xfrm>
+          <a:prstGeom prst="rect">
+            <a:avLst/>
+          </a:prstGeom>
+          <a:noFill/>
+        </p:spPr>
+        <p:txBody>
+          <a:bodyPr wrap="none" lIns="9144" rIns="9144" tIns="9144" bIns="9144" anchor="t">
+            <a:spAutoFit/>
+          </a:bodyPr>
+          <a:lstStyle/>
+          <a:p>
+            <a:pPr algn="l">
+              <a:spcAft>
+                <a:spcPts val="0"/>
+              </a:spcAft>
+              <a:defRPr sz="900" b="1">
+                <a:solidFill>
+                  <a:srgbClr val="0D1117"/>
+                </a:solidFill>
+                <a:latin typeface="Inter"/>
+              </a:defRPr>
+            </a:pPr>
+            <a:r>
+              <a:rPr>
+                <a:latin typeface="Inter"/>
+              </a:rPr>
               <a:t>Ready, with limits</a:t>
             </a:r>
           </a:p>
@@ -3125,13 +2999,13 @@
       </p:sp>
       <p:sp>
         <p:nvSpPr>
-          <p:cNvPr id="23" name="TextBox 22"/>
+          <p:cNvPr id="20" name="TextBox 19"/>
           <p:cNvSpPr txBox="1"/>
           <p:nvPr/>
         </p:nvSpPr>
         <p:spPr>
           <a:xfrm>
-            <a:off x="3977639" y="5824728"/>
+            <a:off x="4297680" y="5733288"/>
             <a:ext cx="3108960" cy="164592"/>
           </a:xfrm>
           <a:prstGeom prst="rect">
@@ -3160,20 +3034,20 @@
               <a:rPr>
                 <a:latin typeface="Inter"/>
               </a:rPr>
-              <a:t>CHECKS PASSED</a:t>
+              <a:t>CAPABILITIES REVIEWED</a:t>
             </a:r>
           </a:p>
         </p:txBody>
       </p:sp>
       <p:sp>
         <p:nvSpPr>
-          <p:cNvPr id="24" name="TextBox 23"/>
+          <p:cNvPr id="21" name="TextBox 20"/>
           <p:cNvSpPr txBox="1"/>
           <p:nvPr/>
         </p:nvSpPr>
         <p:spPr>
           <a:xfrm>
-            <a:off x="3977639" y="5998464"/>
+            <a:off x="4297680" y="5934456"/>
             <a:ext cx="3108960" cy="201168"/>
           </a:xfrm>
           <a:prstGeom prst="rect">
@@ -3209,14 +3083,14 @@
       </p:sp>
       <p:sp>
         <p:nvSpPr>
-          <p:cNvPr id="25" name="TextBox 24"/>
+          <p:cNvPr id="22" name="TextBox 21"/>
           <p:cNvSpPr txBox="1"/>
           <p:nvPr/>
         </p:nvSpPr>
         <p:spPr>
           <a:xfrm>
-            <a:off x="685800" y="6473952"/>
-            <a:ext cx="8046720" cy="182880"/>
+            <a:off x="685800" y="6400800"/>
+            <a:ext cx="8046720" cy="146304"/>
           </a:xfrm>
           <a:prstGeom prst="rect">
             <a:avLst/>
@@ -3244,14 +3118,56 @@
               <a:rPr>
                 <a:latin typeface="Inter"/>
               </a:rPr>
-              <a:t>Confidential — prepared for internal investment use</a:t>
+              <a:t>Confidential — operational readiness review</a:t>
             </a:r>
           </a:p>
         </p:txBody>
       </p:sp>
       <p:sp>
         <p:nvSpPr>
-          <p:cNvPr id="26" name="TextBox 25"/>
+          <p:cNvPr id="23" name="TextBox 22"/>
+          <p:cNvSpPr txBox="1"/>
+          <p:nvPr/>
+        </p:nvSpPr>
+        <p:spPr>
+          <a:xfrm>
+            <a:off x="685800" y="6556248"/>
+            <a:ext cx="8046720" cy="128016"/>
+          </a:xfrm>
+          <a:prstGeom prst="rect">
+            <a:avLst/>
+          </a:prstGeom>
+          <a:noFill/>
+        </p:spPr>
+        <p:txBody>
+          <a:bodyPr wrap="none" lIns="9144" rIns="9144" tIns="9144" bIns="9144" anchor="t">
+            <a:spAutoFit/>
+          </a:bodyPr>
+          <a:lstStyle/>
+          <a:p>
+            <a:pPr algn="l">
+              <a:spcAft>
+                <a:spcPts val="0"/>
+              </a:spcAft>
+              <a:defRPr sz="650" b="0">
+                <a:solidFill>
+                  <a:srgbClr val="8A94A1"/>
+                </a:solidFill>
+                <a:latin typeface="Inter"/>
+              </a:defRPr>
+            </a:pPr>
+            <a:r>
+              <a:rPr>
+                <a:latin typeface="Inter"/>
+              </a:rPr>
+              <a:t>Illustrative sample · not client data</a:t>
+            </a:r>
+          </a:p>
+        </p:txBody>
+      </p:sp>
+      <p:sp>
+        <p:nvSpPr>
+          <p:cNvPr id="24" name="TextBox 23"/>
           <p:cNvSpPr txBox="1"/>
           <p:nvPr/>
         </p:nvSpPr>
@@ -3366,6 +3282,48 @@
         </p:nvSpPr>
         <p:spPr>
           <a:xfrm>
+            <a:off x="5897880" y="310896"/>
+            <a:ext cx="4800600" cy="256032"/>
+          </a:xfrm>
+          <a:prstGeom prst="rect">
+            <a:avLst/>
+          </a:prstGeom>
+          <a:noFill/>
+        </p:spPr>
+        <p:txBody>
+          <a:bodyPr wrap="none" lIns="9144" rIns="9144" tIns="9144" bIns="9144" anchor="t">
+            <a:spAutoFit/>
+          </a:bodyPr>
+          <a:lstStyle/>
+          <a:p>
+            <a:pPr algn="r">
+              <a:spcAft>
+                <a:spcPts val="0"/>
+              </a:spcAft>
+              <a:defRPr sz="680" b="1">
+                <a:solidFill>
+                  <a:srgbClr val="4F6B00"/>
+                </a:solidFill>
+                <a:latin typeface="Inter"/>
+              </a:defRPr>
+            </a:pPr>
+            <a:r>
+              <a:rPr>
+                <a:latin typeface="Inter"/>
+              </a:rPr>
+              <a:t>Illustrative, Gradient Maintained — demo data, not the client's holdings or managers</a:t>
+            </a:r>
+          </a:p>
+        </p:txBody>
+      </p:sp>
+      <p:sp>
+        <p:nvSpPr>
+          <p:cNvPr id="4" name="TextBox 3"/>
+          <p:cNvSpPr txBox="1"/>
+          <p:nvPr/>
+        </p:nvSpPr>
+        <p:spPr>
+          <a:xfrm>
             <a:off x="640080" y="566928"/>
             <a:ext cx="10058400" cy="530352"/>
           </a:xfrm>
@@ -3395,14 +3353,14 @@
               <a:rPr>
                 <a:latin typeface="Inter"/>
               </a:rPr>
-              <a:t>Appendix A — Sources — continued</a:t>
+              <a:t>Appendix — Sources and methods — continued</a:t>
             </a:r>
           </a:p>
         </p:txBody>
       </p:sp>
       <p:sp>
         <p:nvSpPr>
-          <p:cNvPr id="4" name="Rectangle 3"/>
+          <p:cNvPr id="5" name="Rectangle 4"/>
           <p:cNvSpPr/>
           <p:nvPr/>
         </p:nvSpPr>
@@ -3451,7 +3409,7 @@
       </p:sp>
       <p:sp>
         <p:nvSpPr>
-          <p:cNvPr id="5" name="Rectangle 4"/>
+          <p:cNvPr id="6" name="Rectangle 5"/>
           <p:cNvSpPr/>
           <p:nvPr/>
         </p:nvSpPr>
@@ -3500,7 +3458,7 @@
       </p:sp>
       <p:sp>
         <p:nvSpPr>
-          <p:cNvPr id="6" name="TextBox 5"/>
+          <p:cNvPr id="7" name="TextBox 6"/>
           <p:cNvSpPr txBox="1"/>
           <p:nvPr/>
         </p:nvSpPr>
@@ -3542,7 +3500,7 @@
       </p:sp>
       <p:sp>
         <p:nvSpPr>
-          <p:cNvPr id="7" name="TextBox 6"/>
+          <p:cNvPr id="8" name="TextBox 7"/>
           <p:cNvSpPr txBox="1"/>
           <p:nvPr/>
         </p:nvSpPr>
@@ -3584,7 +3542,7 @@
       </p:sp>
       <p:sp>
         <p:nvSpPr>
-          <p:cNvPr id="8" name="Rectangle 7"/>
+          <p:cNvPr id="9" name="Rectangle 8"/>
           <p:cNvSpPr/>
           <p:nvPr/>
         </p:nvSpPr>
@@ -3633,7 +3591,7 @@
       </p:sp>
       <p:sp>
         <p:nvSpPr>
-          <p:cNvPr id="9" name="TextBox 8"/>
+          <p:cNvPr id="10" name="TextBox 9"/>
           <p:cNvSpPr txBox="1"/>
           <p:nvPr/>
         </p:nvSpPr>
@@ -3675,7 +3633,7 @@
       </p:sp>
       <p:sp>
         <p:nvSpPr>
-          <p:cNvPr id="10" name="TextBox 9"/>
+          <p:cNvPr id="11" name="TextBox 10"/>
           <p:cNvSpPr txBox="1"/>
           <p:nvPr/>
         </p:nvSpPr>
@@ -3710,14 +3668,14 @@
               <a:rPr>
                 <a:latin typeface="Inter"/>
               </a:rPr>
-              <a:t>Confidential — prepared for internal investment use · Data as of 2026-10-04</a:t>
+              <a:t>Confidential — operational readiness review · Data as of 2026-10-04</a:t>
             </a:r>
           </a:p>
         </p:txBody>
       </p:sp>
       <p:sp>
         <p:nvSpPr>
-          <p:cNvPr id="11" name="TextBox 10"/>
+          <p:cNvPr id="12" name="TextBox 11"/>
           <p:cNvSpPr txBox="1"/>
           <p:nvPr/>
         </p:nvSpPr>
@@ -3833,7 +3791,7 @@
         <p:spPr>
           <a:xfrm>
             <a:off x="640080" y="329184"/>
-            <a:ext cx="9875520" cy="182880"/>
+            <a:ext cx="5303520" cy="182880"/>
           </a:xfrm>
           <a:prstGeom prst="rect">
             <a:avLst/>
@@ -3874,6 +3832,48 @@
         </p:nvSpPr>
         <p:spPr>
           <a:xfrm>
+            <a:off x="5897880" y="310896"/>
+            <a:ext cx="4800600" cy="256032"/>
+          </a:xfrm>
+          <a:prstGeom prst="rect">
+            <a:avLst/>
+          </a:prstGeom>
+          <a:noFill/>
+        </p:spPr>
+        <p:txBody>
+          <a:bodyPr wrap="none" lIns="9144" rIns="9144" tIns="9144" bIns="9144" anchor="t">
+            <a:spAutoFit/>
+          </a:bodyPr>
+          <a:lstStyle/>
+          <a:p>
+            <a:pPr algn="r">
+              <a:spcAft>
+                <a:spcPts val="0"/>
+              </a:spcAft>
+              <a:defRPr sz="680" b="1">
+                <a:solidFill>
+                  <a:srgbClr val="4F6B00"/>
+                </a:solidFill>
+                <a:latin typeface="Inter"/>
+              </a:defRPr>
+            </a:pPr>
+            <a:r>
+              <a:rPr>
+                <a:latin typeface="Inter"/>
+              </a:rPr>
+              <a:t>Illustrative, Gradient Maintained — demo data, not the client's holdings or managers</a:t>
+            </a:r>
+          </a:p>
+        </p:txBody>
+      </p:sp>
+      <p:sp>
+        <p:nvSpPr>
+          <p:cNvPr id="5" name="TextBox 4"/>
+          <p:cNvSpPr txBox="1"/>
+          <p:nvPr/>
+        </p:nvSpPr>
+        <p:spPr>
+          <a:xfrm>
             <a:off x="640080" y="566928"/>
             <a:ext cx="10058400" cy="530352"/>
           </a:xfrm>
@@ -3910,7 +3910,7 @@
       </p:sp>
       <p:sp>
         <p:nvSpPr>
-          <p:cNvPr id="5" name="Rectangle 4"/>
+          <p:cNvPr id="6" name="Rectangle 5"/>
           <p:cNvSpPr/>
           <p:nvPr/>
         </p:nvSpPr>
@@ -3959,7 +3959,7 @@
       </p:sp>
       <p:sp>
         <p:nvSpPr>
-          <p:cNvPr id="6" name="Rectangle 5"/>
+          <p:cNvPr id="7" name="Rectangle 6"/>
           <p:cNvSpPr/>
           <p:nvPr/>
         </p:nvSpPr>
@@ -4008,7 +4008,7 @@
       </p:sp>
       <p:sp>
         <p:nvSpPr>
-          <p:cNvPr id="7" name="TextBox 6"/>
+          <p:cNvPr id="8" name="TextBox 7"/>
           <p:cNvSpPr txBox="1"/>
           <p:nvPr/>
         </p:nvSpPr>
@@ -4050,7 +4050,7 @@
       </p:sp>
       <p:sp>
         <p:nvSpPr>
-          <p:cNvPr id="8" name="Rectangle 7"/>
+          <p:cNvPr id="9" name="Rectangle 8"/>
           <p:cNvSpPr/>
           <p:nvPr/>
         </p:nvSpPr>
@@ -4099,7 +4099,7 @@
       </p:sp>
       <p:sp>
         <p:nvSpPr>
-          <p:cNvPr id="9" name="Rectangle 8"/>
+          <p:cNvPr id="10" name="Rectangle 9"/>
           <p:cNvSpPr/>
           <p:nvPr/>
         </p:nvSpPr>
@@ -4148,7 +4148,7 @@
       </p:sp>
       <p:sp>
         <p:nvSpPr>
-          <p:cNvPr id="10" name="TextBox 9"/>
+          <p:cNvPr id="11" name="TextBox 10"/>
           <p:cNvSpPr txBox="1"/>
           <p:nvPr/>
         </p:nvSpPr>
@@ -4190,7 +4190,7 @@
       </p:sp>
       <p:sp>
         <p:nvSpPr>
-          <p:cNvPr id="11" name="TextBox 10"/>
+          <p:cNvPr id="12" name="TextBox 11"/>
           <p:cNvSpPr txBox="1"/>
           <p:nvPr/>
         </p:nvSpPr>
@@ -4232,7 +4232,7 @@
       </p:sp>
       <p:sp>
         <p:nvSpPr>
-          <p:cNvPr id="12" name="Rectangle 11"/>
+          <p:cNvPr id="13" name="Rectangle 12"/>
           <p:cNvSpPr/>
           <p:nvPr/>
         </p:nvSpPr>
@@ -4281,7 +4281,7 @@
       </p:sp>
       <p:sp>
         <p:nvSpPr>
-          <p:cNvPr id="13" name="Rectangle 12"/>
+          <p:cNvPr id="14" name="Rectangle 13"/>
           <p:cNvSpPr/>
           <p:nvPr/>
         </p:nvSpPr>
@@ -4330,7 +4330,7 @@
       </p:sp>
       <p:sp>
         <p:nvSpPr>
-          <p:cNvPr id="14" name="TextBox 13"/>
+          <p:cNvPr id="15" name="TextBox 14"/>
           <p:cNvSpPr txBox="1"/>
           <p:nvPr/>
         </p:nvSpPr>
@@ -4372,7 +4372,7 @@
       </p:sp>
       <p:sp>
         <p:nvSpPr>
-          <p:cNvPr id="15" name="TextBox 14"/>
+          <p:cNvPr id="16" name="TextBox 15"/>
           <p:cNvSpPr txBox="1"/>
           <p:nvPr/>
         </p:nvSpPr>
@@ -4414,7 +4414,7 @@
       </p:sp>
       <p:sp>
         <p:nvSpPr>
-          <p:cNvPr id="16" name="TextBox 15"/>
+          <p:cNvPr id="17" name="TextBox 16"/>
           <p:cNvSpPr txBox="1"/>
           <p:nvPr/>
         </p:nvSpPr>
@@ -4456,7 +4456,7 @@
       </p:sp>
       <p:sp>
         <p:nvSpPr>
-          <p:cNvPr id="17" name="Rectangle 16"/>
+          <p:cNvPr id="18" name="Rectangle 17"/>
           <p:cNvSpPr/>
           <p:nvPr/>
         </p:nvSpPr>
@@ -4505,7 +4505,7 @@
       </p:sp>
       <p:sp>
         <p:nvSpPr>
-          <p:cNvPr id="18" name="Rectangle 17"/>
+          <p:cNvPr id="19" name="Rectangle 18"/>
           <p:cNvSpPr/>
           <p:nvPr/>
         </p:nvSpPr>
@@ -4554,7 +4554,7 @@
       </p:sp>
       <p:sp>
         <p:nvSpPr>
-          <p:cNvPr id="19" name="TextBox 18"/>
+          <p:cNvPr id="20" name="TextBox 19"/>
           <p:cNvSpPr txBox="1"/>
           <p:nvPr/>
         </p:nvSpPr>
@@ -4596,7 +4596,7 @@
       </p:sp>
       <p:sp>
         <p:nvSpPr>
-          <p:cNvPr id="20" name="TextBox 19"/>
+          <p:cNvPr id="21" name="TextBox 20"/>
           <p:cNvSpPr txBox="1"/>
           <p:nvPr/>
         </p:nvSpPr>
@@ -4638,7 +4638,7 @@
       </p:sp>
       <p:sp>
         <p:nvSpPr>
-          <p:cNvPr id="21" name="TextBox 20"/>
+          <p:cNvPr id="22" name="TextBox 21"/>
           <p:cNvSpPr txBox="1"/>
           <p:nvPr/>
         </p:nvSpPr>
@@ -4680,7 +4680,7 @@
       </p:sp>
       <p:sp>
         <p:nvSpPr>
-          <p:cNvPr id="22" name="Rectangle 21"/>
+          <p:cNvPr id="23" name="Rectangle 22"/>
           <p:cNvSpPr/>
           <p:nvPr/>
         </p:nvSpPr>
@@ -4729,7 +4729,7 @@
       </p:sp>
       <p:sp>
         <p:nvSpPr>
-          <p:cNvPr id="23" name="Rectangle 22"/>
+          <p:cNvPr id="24" name="Rectangle 23"/>
           <p:cNvSpPr/>
           <p:nvPr/>
         </p:nvSpPr>
@@ -4778,7 +4778,7 @@
       </p:sp>
       <p:sp>
         <p:nvSpPr>
-          <p:cNvPr id="24" name="TextBox 23"/>
+          <p:cNvPr id="25" name="TextBox 24"/>
           <p:cNvSpPr txBox="1"/>
           <p:nvPr/>
         </p:nvSpPr>
@@ -4820,7 +4820,7 @@
       </p:sp>
       <p:sp>
         <p:nvSpPr>
-          <p:cNvPr id="25" name="TextBox 24"/>
+          <p:cNvPr id="26" name="TextBox 25"/>
           <p:cNvSpPr txBox="1"/>
           <p:nvPr/>
         </p:nvSpPr>
@@ -4862,7 +4862,7 @@
       </p:sp>
       <p:sp>
         <p:nvSpPr>
-          <p:cNvPr id="26" name="TextBox 25"/>
+          <p:cNvPr id="27" name="TextBox 26"/>
           <p:cNvSpPr txBox="1"/>
           <p:nvPr/>
         </p:nvSpPr>
@@ -4904,7 +4904,7 @@
       </p:sp>
       <p:sp>
         <p:nvSpPr>
-          <p:cNvPr id="27" name="Rectangle 26"/>
+          <p:cNvPr id="28" name="Rectangle 27"/>
           <p:cNvSpPr/>
           <p:nvPr/>
         </p:nvSpPr>
@@ -4953,7 +4953,7 @@
       </p:sp>
       <p:sp>
         <p:nvSpPr>
-          <p:cNvPr id="28" name="Rectangle 27"/>
+          <p:cNvPr id="29" name="Rectangle 28"/>
           <p:cNvSpPr/>
           <p:nvPr/>
         </p:nvSpPr>
@@ -5002,7 +5002,7 @@
       </p:sp>
       <p:sp>
         <p:nvSpPr>
-          <p:cNvPr id="29" name="TextBox 28"/>
+          <p:cNvPr id="30" name="TextBox 29"/>
           <p:cNvSpPr txBox="1"/>
           <p:nvPr/>
         </p:nvSpPr>
@@ -5044,7 +5044,7 @@
       </p:sp>
       <p:sp>
         <p:nvSpPr>
-          <p:cNvPr id="30" name="TextBox 29"/>
+          <p:cNvPr id="31" name="TextBox 30"/>
           <p:cNvSpPr txBox="1"/>
           <p:nvPr/>
         </p:nvSpPr>
@@ -5086,7 +5086,7 @@
       </p:sp>
       <p:sp>
         <p:nvSpPr>
-          <p:cNvPr id="31" name="TextBox 30"/>
+          <p:cNvPr id="32" name="TextBox 31"/>
           <p:cNvSpPr txBox="1"/>
           <p:nvPr/>
         </p:nvSpPr>
@@ -5128,7 +5128,7 @@
       </p:sp>
       <p:sp>
         <p:nvSpPr>
-          <p:cNvPr id="32" name="Rectangle 31"/>
+          <p:cNvPr id="33" name="Rectangle 32"/>
           <p:cNvSpPr/>
           <p:nvPr/>
         </p:nvSpPr>
@@ -5177,7 +5177,7 @@
       </p:sp>
       <p:sp>
         <p:nvSpPr>
-          <p:cNvPr id="33" name="Rectangle 32"/>
+          <p:cNvPr id="34" name="Rectangle 33"/>
           <p:cNvSpPr/>
           <p:nvPr/>
         </p:nvSpPr>
@@ -5226,7 +5226,7 @@
       </p:sp>
       <p:sp>
         <p:nvSpPr>
-          <p:cNvPr id="34" name="TextBox 33"/>
+          <p:cNvPr id="35" name="TextBox 34"/>
           <p:cNvSpPr txBox="1"/>
           <p:nvPr/>
         </p:nvSpPr>
@@ -5268,7 +5268,7 @@
       </p:sp>
       <p:sp>
         <p:nvSpPr>
-          <p:cNvPr id="35" name="TextBox 34"/>
+          <p:cNvPr id="36" name="TextBox 35"/>
           <p:cNvSpPr txBox="1"/>
           <p:nvPr/>
         </p:nvSpPr>
@@ -5310,7 +5310,7 @@
       </p:sp>
       <p:sp>
         <p:nvSpPr>
-          <p:cNvPr id="36" name="Rectangle 35"/>
+          <p:cNvPr id="37" name="Rectangle 36"/>
           <p:cNvSpPr/>
           <p:nvPr/>
         </p:nvSpPr>
@@ -5359,7 +5359,7 @@
       </p:sp>
       <p:sp>
         <p:nvSpPr>
-          <p:cNvPr id="37" name="TextBox 36"/>
+          <p:cNvPr id="38" name="TextBox 37"/>
           <p:cNvSpPr txBox="1"/>
           <p:nvPr/>
         </p:nvSpPr>
@@ -5401,7 +5401,7 @@
       </p:sp>
       <p:sp>
         <p:nvSpPr>
-          <p:cNvPr id="38" name="TextBox 37"/>
+          <p:cNvPr id="39" name="TextBox 38"/>
           <p:cNvSpPr txBox="1"/>
           <p:nvPr/>
         </p:nvSpPr>
@@ -5436,14 +5436,14 @@
               <a:rPr>
                 <a:latin typeface="Inter"/>
               </a:rPr>
-              <a:t>Confidential — prepared for internal investment use · Data as of 2026-10-04</a:t>
+              <a:t>Confidential — operational readiness review · Data as of 2026-10-04</a:t>
             </a:r>
           </a:p>
         </p:txBody>
       </p:sp>
       <p:sp>
         <p:nvSpPr>
-          <p:cNvPr id="39" name="TextBox 38"/>
+          <p:cNvPr id="40" name="TextBox 39"/>
           <p:cNvSpPr txBox="1"/>
           <p:nvPr/>
         </p:nvSpPr>
@@ -5559,7 +5559,7 @@
         <p:spPr>
           <a:xfrm>
             <a:off x="640080" y="329184"/>
-            <a:ext cx="9875520" cy="182880"/>
+            <a:ext cx="5303520" cy="182880"/>
           </a:xfrm>
           <a:prstGeom prst="rect">
             <a:avLst/>
@@ -5600,6 +5600,48 @@
         </p:nvSpPr>
         <p:spPr>
           <a:xfrm>
+            <a:off x="5897880" y="310896"/>
+            <a:ext cx="4800600" cy="256032"/>
+          </a:xfrm>
+          <a:prstGeom prst="rect">
+            <a:avLst/>
+          </a:prstGeom>
+          <a:noFill/>
+        </p:spPr>
+        <p:txBody>
+          <a:bodyPr wrap="none" lIns="9144" rIns="9144" tIns="9144" bIns="9144" anchor="t">
+            <a:spAutoFit/>
+          </a:bodyPr>
+          <a:lstStyle/>
+          <a:p>
+            <a:pPr algn="r">
+              <a:spcAft>
+                <a:spcPts val="0"/>
+              </a:spcAft>
+              <a:defRPr sz="680" b="1">
+                <a:solidFill>
+                  <a:srgbClr val="4F6B00"/>
+                </a:solidFill>
+                <a:latin typeface="Inter"/>
+              </a:defRPr>
+            </a:pPr>
+            <a:r>
+              <a:rPr>
+                <a:latin typeface="Inter"/>
+              </a:rPr>
+              <a:t>Illustrative, Gradient Maintained — demo data, not the client's holdings or managers</a:t>
+            </a:r>
+          </a:p>
+        </p:txBody>
+      </p:sp>
+      <p:sp>
+        <p:nvSpPr>
+          <p:cNvPr id="5" name="TextBox 4"/>
+          <p:cNvSpPr txBox="1"/>
+          <p:nvPr/>
+        </p:nvSpPr>
+        <p:spPr>
+          <a:xfrm>
             <a:off x="640080" y="566928"/>
             <a:ext cx="10058400" cy="530352"/>
           </a:xfrm>
@@ -5636,7 +5678,7 @@
       </p:sp>
       <p:sp>
         <p:nvSpPr>
-          <p:cNvPr id="5" name="Rectangle 4"/>
+          <p:cNvPr id="6" name="Rectangle 5"/>
           <p:cNvSpPr/>
           <p:nvPr/>
         </p:nvSpPr>
@@ -5685,7 +5727,7 @@
       </p:sp>
       <p:sp>
         <p:nvSpPr>
-          <p:cNvPr id="6" name="Rectangle 5"/>
+          <p:cNvPr id="7" name="Rectangle 6"/>
           <p:cNvSpPr/>
           <p:nvPr/>
         </p:nvSpPr>
@@ -5734,7 +5776,7 @@
       </p:sp>
       <p:sp>
         <p:nvSpPr>
-          <p:cNvPr id="7" name="TextBox 6"/>
+          <p:cNvPr id="8" name="TextBox 7"/>
           <p:cNvSpPr txBox="1"/>
           <p:nvPr/>
         </p:nvSpPr>
@@ -5776,7 +5818,7 @@
       </p:sp>
       <p:sp>
         <p:nvSpPr>
-          <p:cNvPr id="8" name="TextBox 7"/>
+          <p:cNvPr id="9" name="TextBox 8"/>
           <p:cNvSpPr txBox="1"/>
           <p:nvPr/>
         </p:nvSpPr>
@@ -5818,7 +5860,7 @@
       </p:sp>
       <p:graphicFrame>
         <p:nvGraphicFramePr>
-          <p:cNvPr id="9" name="Table 8"/>
+          <p:cNvPr id="10" name="Table 9"/>
           <p:cNvGraphicFramePr>
             <a:graphicFrameLocks noGrp="1"/>
           </p:cNvGraphicFramePr>
@@ -6343,7 +6385,7 @@
       </p:graphicFrame>
       <p:sp>
         <p:nvSpPr>
-          <p:cNvPr id="10" name="Rectangle 9"/>
+          <p:cNvPr id="11" name="Rectangle 10"/>
           <p:cNvSpPr/>
           <p:nvPr/>
         </p:nvSpPr>
@@ -6392,7 +6434,7 @@
       </p:sp>
       <p:sp>
         <p:nvSpPr>
-          <p:cNvPr id="11" name="TextBox 10"/>
+          <p:cNvPr id="12" name="TextBox 11"/>
           <p:cNvSpPr txBox="1"/>
           <p:nvPr/>
         </p:nvSpPr>
@@ -6434,7 +6476,7 @@
       </p:sp>
       <p:graphicFrame>
         <p:nvGraphicFramePr>
-          <p:cNvPr id="12" name="Table 11"/>
+          <p:cNvPr id="13" name="Table 12"/>
           <p:cNvGraphicFramePr>
             <a:graphicFrameLocks noGrp="1"/>
           </p:cNvGraphicFramePr>
@@ -6455,7 +6497,7 @@
                 <a:gridCol w="1746504"/>
                 <a:gridCol w="1746504"/>
               </a:tblGrid>
-              <a:tr h="1539240">
+              <a:tr h="2308860">
                 <a:tc>
                   <a:txBody>
                     <a:bodyPr/>
@@ -6538,7 +6580,7 @@
                   </a:tcPr>
                 </a:tc>
               </a:tr>
-              <a:tr h="1539240">
+              <a:tr h="2308860">
                 <a:tc>
                   <a:txBody>
                     <a:bodyPr/>
@@ -6556,7 +6598,7 @@
                         <a:rPr>
                           <a:latin typeface="Inter"/>
                         </a:rPr>
-                        <a:t>gradient-research-macro-brief</a:t>
+                        <a:t>gradient-decision-ic-memo</a:t>
                       </a:r>
                     </a:p>
                   </a:txBody>
@@ -6583,7 +6625,7 @@
                         <a:rPr>
                           <a:latin typeface="Inter"/>
                         </a:rPr>
-                        <a:t>Macro deck</a:t>
+                        <a:t>IC memo</a:t>
                       </a:r>
                     </a:p>
                   </a:txBody>
@@ -6610,96 +6652,13 @@
                         <a:rPr>
                           <a:latin typeface="Inter"/>
                         </a:rPr>
-                        <a:t>Regime state unavailable; uses Gradient signal</a:t>
+                        <a:t>Portfolio core: Not licensed; Strategy Lab supplement: Not licensed (optional). Use supplied holdings</a:t>
                       </a:r>
                     </a:p>
                   </a:txBody>
                   <a:tcPr marL="54864" marR="54864" marT="27432" marB="27432" anchor="ctr">
                     <a:solidFill>
                       <a:srgbClr val="FFFFFF"/>
-                    </a:solidFill>
-                  </a:tcPr>
-                </a:tc>
-              </a:tr>
-              <a:tr h="1539240">
-                <a:tc>
-                  <a:txBody>
-                    <a:bodyPr/>
-                    <a:lstStyle/>
-                    <a:p>
-                      <a:pPr>
-                        <a:defRPr sz="800" b="1">
-                          <a:solidFill>
-                            <a:srgbClr val="0D1117"/>
-                          </a:solidFill>
-                          <a:latin typeface="Inter"/>
-                        </a:defRPr>
-                      </a:pPr>
-                      <a:r>
-                        <a:rPr>
-                          <a:latin typeface="Inter"/>
-                        </a:rPr>
-                        <a:t>gradient-decision-ic-memo</a:t>
-                      </a:r>
-                    </a:p>
-                  </a:txBody>
-                  <a:tcPr marL="54864" marR="54864" marT="27432" marB="27432" anchor="ctr">
-                    <a:solidFill>
-                      <a:srgbClr val="F5F7F9"/>
-                    </a:solidFill>
-                  </a:tcPr>
-                </a:tc>
-                <a:tc>
-                  <a:txBody>
-                    <a:bodyPr/>
-                    <a:lstStyle/>
-                    <a:p>
-                      <a:pPr>
-                        <a:defRPr sz="800" b="0">
-                          <a:solidFill>
-                            <a:srgbClr val="0D1117"/>
-                          </a:solidFill>
-                          <a:latin typeface="Inter"/>
-                        </a:defRPr>
-                      </a:pPr>
-                      <a:r>
-                        <a:rPr>
-                          <a:latin typeface="Inter"/>
-                        </a:rPr>
-                        <a:t>IC memo</a:t>
-                      </a:r>
-                    </a:p>
-                  </a:txBody>
-                  <a:tcPr marL="54864" marR="54864" marT="27432" marB="27432" anchor="ctr">
-                    <a:solidFill>
-                      <a:srgbClr val="F5F7F9"/>
-                    </a:solidFill>
-                  </a:tcPr>
-                </a:tc>
-                <a:tc>
-                  <a:txBody>
-                    <a:bodyPr/>
-                    <a:lstStyle/>
-                    <a:p>
-                      <a:pPr>
-                        <a:defRPr sz="800" b="0">
-                          <a:solidFill>
-                            <a:srgbClr val="0D1117"/>
-                          </a:solidFill>
-                          <a:latin typeface="Inter"/>
-                        </a:defRPr>
-                      </a:pPr>
-                      <a:r>
-                        <a:rPr>
-                          <a:latin typeface="Inter"/>
-                        </a:rPr>
-                        <a:t>Portfolio core: Not licensed; Strategy Lab supplement: Not licensed (optional). Use supplied holdings</a:t>
-                      </a:r>
-                    </a:p>
-                  </a:txBody>
-                  <a:tcPr marL="54864" marR="54864" marT="27432" marB="27432" anchor="ctr">
-                    <a:solidFill>
-                      <a:srgbClr val="F5F7F9"/>
                     </a:solidFill>
                   </a:tcPr>
                 </a:tc>
@@ -6710,7 +6669,7 @@
       </p:graphicFrame>
       <p:sp>
         <p:nvSpPr>
-          <p:cNvPr id="13" name="Rectangle 12"/>
+          <p:cNvPr id="14" name="Rectangle 13"/>
           <p:cNvSpPr/>
           <p:nvPr/>
         </p:nvSpPr>
@@ -6759,7 +6718,7 @@
       </p:sp>
       <p:sp>
         <p:nvSpPr>
-          <p:cNvPr id="14" name="TextBox 13"/>
+          <p:cNvPr id="15" name="TextBox 14"/>
           <p:cNvSpPr txBox="1"/>
           <p:nvPr/>
         </p:nvSpPr>
@@ -6801,7 +6760,7 @@
       </p:sp>
       <p:sp>
         <p:nvSpPr>
-          <p:cNvPr id="15" name="TextBox 14"/>
+          <p:cNvPr id="16" name="TextBox 15"/>
           <p:cNvSpPr txBox="1"/>
           <p:nvPr/>
         </p:nvSpPr>
@@ -6836,14 +6795,14 @@
               <a:rPr>
                 <a:latin typeface="Inter"/>
               </a:rPr>
-              <a:t>Confidential — prepared for internal investment use · Data as of 2026-10-04</a:t>
+              <a:t>Confidential — operational readiness review · Data as of 2026-10-04</a:t>
             </a:r>
           </a:p>
         </p:txBody>
       </p:sp>
       <p:sp>
         <p:nvSpPr>
-          <p:cNvPr id="16" name="TextBox 15"/>
+          <p:cNvPr id="17" name="TextBox 16"/>
           <p:cNvSpPr txBox="1"/>
           <p:nvPr/>
         </p:nvSpPr>
@@ -6959,7 +6918,7 @@
         <p:spPr>
           <a:xfrm>
             <a:off x="640080" y="329184"/>
-            <a:ext cx="9875520" cy="182880"/>
+            <a:ext cx="5303520" cy="182880"/>
           </a:xfrm>
           <a:prstGeom prst="rect">
             <a:avLst/>
@@ -7000,6 +6959,48 @@
         </p:nvSpPr>
         <p:spPr>
           <a:xfrm>
+            <a:off x="5897880" y="310896"/>
+            <a:ext cx="4800600" cy="256032"/>
+          </a:xfrm>
+          <a:prstGeom prst="rect">
+            <a:avLst/>
+          </a:prstGeom>
+          <a:noFill/>
+        </p:spPr>
+        <p:txBody>
+          <a:bodyPr wrap="none" lIns="9144" rIns="9144" tIns="9144" bIns="9144" anchor="t">
+            <a:spAutoFit/>
+          </a:bodyPr>
+          <a:lstStyle/>
+          <a:p>
+            <a:pPr algn="r">
+              <a:spcAft>
+                <a:spcPts val="0"/>
+              </a:spcAft>
+              <a:defRPr sz="680" b="1">
+                <a:solidFill>
+                  <a:srgbClr val="4F6B00"/>
+                </a:solidFill>
+                <a:latin typeface="Inter"/>
+              </a:defRPr>
+            </a:pPr>
+            <a:r>
+              <a:rPr>
+                <a:latin typeface="Inter"/>
+              </a:rPr>
+              <a:t>Illustrative, Gradient Maintained — demo data, not the client's holdings or managers</a:t>
+            </a:r>
+          </a:p>
+        </p:txBody>
+      </p:sp>
+      <p:sp>
+        <p:nvSpPr>
+          <p:cNvPr id="5" name="TextBox 4"/>
+          <p:cNvSpPr txBox="1"/>
+          <p:nvPr/>
+        </p:nvSpPr>
+        <p:spPr>
+          <a:xfrm>
             <a:off x="640080" y="566928"/>
             <a:ext cx="10058400" cy="530352"/>
           </a:xfrm>
@@ -7036,7 +7037,7 @@
       </p:sp>
       <p:sp>
         <p:nvSpPr>
-          <p:cNvPr id="5" name="Rectangle 4"/>
+          <p:cNvPr id="6" name="Rectangle 5"/>
           <p:cNvSpPr/>
           <p:nvPr/>
         </p:nvSpPr>
@@ -7085,7 +7086,7 @@
       </p:sp>
       <p:sp>
         <p:nvSpPr>
-          <p:cNvPr id="6" name="Rectangle 5"/>
+          <p:cNvPr id="7" name="Rectangle 6"/>
           <p:cNvSpPr/>
           <p:nvPr/>
         </p:nvSpPr>
@@ -7134,7 +7135,7 @@
       </p:sp>
       <p:sp>
         <p:nvSpPr>
-          <p:cNvPr id="7" name="TextBox 6"/>
+          <p:cNvPr id="8" name="TextBox 7"/>
           <p:cNvSpPr txBox="1"/>
           <p:nvPr/>
         </p:nvSpPr>
@@ -7176,7 +7177,7 @@
       </p:sp>
       <p:sp>
         <p:nvSpPr>
-          <p:cNvPr id="8" name="TextBox 7"/>
+          <p:cNvPr id="9" name="TextBox 8"/>
           <p:cNvSpPr txBox="1"/>
           <p:nvPr/>
         </p:nvSpPr>
@@ -7218,7 +7219,7 @@
       </p:sp>
       <p:graphicFrame>
         <p:nvGraphicFramePr>
-          <p:cNvPr id="9" name="Table 8"/>
+          <p:cNvPr id="10" name="Table 9"/>
           <p:cNvGraphicFramePr>
             <a:graphicFrameLocks noGrp="1"/>
           </p:cNvGraphicFramePr>
@@ -7636,7 +7637,7 @@
       </p:graphicFrame>
       <p:sp>
         <p:nvSpPr>
-          <p:cNvPr id="10" name="Rectangle 9"/>
+          <p:cNvPr id="11" name="Rectangle 10"/>
           <p:cNvSpPr/>
           <p:nvPr/>
         </p:nvSpPr>
@@ -7685,7 +7686,7 @@
       </p:sp>
       <p:sp>
         <p:nvSpPr>
-          <p:cNvPr id="11" name="TextBox 10"/>
+          <p:cNvPr id="12" name="TextBox 11"/>
           <p:cNvSpPr txBox="1"/>
           <p:nvPr/>
         </p:nvSpPr>
@@ -7727,7 +7728,7 @@
       </p:sp>
       <p:sp>
         <p:nvSpPr>
-          <p:cNvPr id="12" name="TextBox 11"/>
+          <p:cNvPr id="13" name="TextBox 12"/>
           <p:cNvSpPr txBox="1"/>
           <p:nvPr/>
         </p:nvSpPr>
@@ -7762,14 +7763,14 @@
               <a:rPr>
                 <a:latin typeface="Inter"/>
               </a:rPr>
-              <a:t>Confidential — prepared for internal investment use · Data as of 2026-10-04</a:t>
+              <a:t>Confidential — operational readiness review · Data as of 2026-10-04</a:t>
             </a:r>
           </a:p>
         </p:txBody>
       </p:sp>
       <p:sp>
         <p:nvSpPr>
-          <p:cNvPr id="13" name="TextBox 12"/>
+          <p:cNvPr id="14" name="TextBox 13"/>
           <p:cNvSpPr txBox="1"/>
           <p:nvPr/>
         </p:nvSpPr>
@@ -7885,7 +7886,7 @@
         <p:spPr>
           <a:xfrm>
             <a:off x="640080" y="329184"/>
-            <a:ext cx="9875520" cy="182880"/>
+            <a:ext cx="5303520" cy="182880"/>
           </a:xfrm>
           <a:prstGeom prst="rect">
             <a:avLst/>
@@ -7926,6 +7927,48 @@
         </p:nvSpPr>
         <p:spPr>
           <a:xfrm>
+            <a:off x="5897880" y="310896"/>
+            <a:ext cx="4800600" cy="256032"/>
+          </a:xfrm>
+          <a:prstGeom prst="rect">
+            <a:avLst/>
+          </a:prstGeom>
+          <a:noFill/>
+        </p:spPr>
+        <p:txBody>
+          <a:bodyPr wrap="none" lIns="9144" rIns="9144" tIns="9144" bIns="9144" anchor="t">
+            <a:spAutoFit/>
+          </a:bodyPr>
+          <a:lstStyle/>
+          <a:p>
+            <a:pPr algn="r">
+              <a:spcAft>
+                <a:spcPts val="0"/>
+              </a:spcAft>
+              <a:defRPr sz="680" b="1">
+                <a:solidFill>
+                  <a:srgbClr val="4F6B00"/>
+                </a:solidFill>
+                <a:latin typeface="Inter"/>
+              </a:defRPr>
+            </a:pPr>
+            <a:r>
+              <a:rPr>
+                <a:latin typeface="Inter"/>
+              </a:rPr>
+              <a:t>Illustrative, Gradient Maintained — demo data, not the client's holdings or managers</a:t>
+            </a:r>
+          </a:p>
+        </p:txBody>
+      </p:sp>
+      <p:sp>
+        <p:nvSpPr>
+          <p:cNvPr id="5" name="TextBox 4"/>
+          <p:cNvSpPr txBox="1"/>
+          <p:nvPr/>
+        </p:nvSpPr>
+        <p:spPr>
+          <a:xfrm>
             <a:off x="640080" y="566928"/>
             <a:ext cx="10058400" cy="530352"/>
           </a:xfrm>
@@ -7962,7 +8005,7 @@
       </p:sp>
       <p:sp>
         <p:nvSpPr>
-          <p:cNvPr id="5" name="Rectangle 4"/>
+          <p:cNvPr id="6" name="Rectangle 5"/>
           <p:cNvSpPr/>
           <p:nvPr/>
         </p:nvSpPr>
@@ -8011,7 +8054,7 @@
       </p:sp>
       <p:sp>
         <p:nvSpPr>
-          <p:cNvPr id="6" name="Rectangle 5"/>
+          <p:cNvPr id="7" name="Rectangle 6"/>
           <p:cNvSpPr/>
           <p:nvPr/>
         </p:nvSpPr>
@@ -8060,7 +8103,7 @@
       </p:sp>
       <p:sp>
         <p:nvSpPr>
-          <p:cNvPr id="7" name="TextBox 6"/>
+          <p:cNvPr id="8" name="TextBox 7"/>
           <p:cNvSpPr txBox="1"/>
           <p:nvPr/>
         </p:nvSpPr>
@@ -8102,7 +8145,7 @@
       </p:sp>
       <p:sp>
         <p:nvSpPr>
-          <p:cNvPr id="8" name="TextBox 7"/>
+          <p:cNvPr id="9" name="TextBox 8"/>
           <p:cNvSpPr txBox="1"/>
           <p:nvPr/>
         </p:nvSpPr>
@@ -8144,7 +8187,7 @@
       </p:sp>
       <p:graphicFrame>
         <p:nvGraphicFramePr>
-          <p:cNvPr id="9" name="Table 8"/>
+          <p:cNvPr id="10" name="Table 9"/>
           <p:cNvGraphicFramePr>
             <a:graphicFrameLocks noGrp="1"/>
           </p:cNvGraphicFramePr>
@@ -8835,7 +8878,7 @@
       </p:graphicFrame>
       <p:sp>
         <p:nvSpPr>
-          <p:cNvPr id="10" name="Rectangle 9"/>
+          <p:cNvPr id="11" name="Rectangle 10"/>
           <p:cNvSpPr/>
           <p:nvPr/>
         </p:nvSpPr>
@@ -8884,7 +8927,7 @@
       </p:sp>
       <p:sp>
         <p:nvSpPr>
-          <p:cNvPr id="11" name="TextBox 10"/>
+          <p:cNvPr id="12" name="TextBox 11"/>
           <p:cNvSpPr txBox="1"/>
           <p:nvPr/>
         </p:nvSpPr>
@@ -8926,7 +8969,7 @@
       </p:sp>
       <p:sp>
         <p:nvSpPr>
-          <p:cNvPr id="12" name="TextBox 11"/>
+          <p:cNvPr id="13" name="TextBox 12"/>
           <p:cNvSpPr txBox="1"/>
           <p:nvPr/>
         </p:nvSpPr>
@@ -8961,14 +9004,14 @@
               <a:rPr>
                 <a:latin typeface="Inter"/>
               </a:rPr>
-              <a:t>Confidential — prepared for internal investment use · Data as of 2026-10-04</a:t>
+              <a:t>Confidential — operational readiness review · Data as of 2026-10-04</a:t>
             </a:r>
           </a:p>
         </p:txBody>
       </p:sp>
       <p:sp>
         <p:nvSpPr>
-          <p:cNvPr id="13" name="TextBox 12"/>
+          <p:cNvPr id="14" name="TextBox 13"/>
           <p:cNvSpPr txBox="1"/>
           <p:nvPr/>
         </p:nvSpPr>
@@ -9084,7 +9127,7 @@
         <p:spPr>
           <a:xfrm>
             <a:off x="640080" y="329184"/>
-            <a:ext cx="9875520" cy="182880"/>
+            <a:ext cx="5303520" cy="182880"/>
           </a:xfrm>
           <a:prstGeom prst="rect">
             <a:avLst/>
@@ -9125,6 +9168,48 @@
         </p:nvSpPr>
         <p:spPr>
           <a:xfrm>
+            <a:off x="5897880" y="310896"/>
+            <a:ext cx="4800600" cy="256032"/>
+          </a:xfrm>
+          <a:prstGeom prst="rect">
+            <a:avLst/>
+          </a:prstGeom>
+          <a:noFill/>
+        </p:spPr>
+        <p:txBody>
+          <a:bodyPr wrap="none" lIns="9144" rIns="9144" tIns="9144" bIns="9144" anchor="t">
+            <a:spAutoFit/>
+          </a:bodyPr>
+          <a:lstStyle/>
+          <a:p>
+            <a:pPr algn="r">
+              <a:spcAft>
+                <a:spcPts val="0"/>
+              </a:spcAft>
+              <a:defRPr sz="680" b="1">
+                <a:solidFill>
+                  <a:srgbClr val="4F6B00"/>
+                </a:solidFill>
+                <a:latin typeface="Inter"/>
+              </a:defRPr>
+            </a:pPr>
+            <a:r>
+              <a:rPr>
+                <a:latin typeface="Inter"/>
+              </a:rPr>
+              <a:t>Illustrative, Gradient Maintained — demo data, not the client's holdings or managers</a:t>
+            </a:r>
+          </a:p>
+        </p:txBody>
+      </p:sp>
+      <p:sp>
+        <p:nvSpPr>
+          <p:cNvPr id="5" name="TextBox 4"/>
+          <p:cNvSpPr txBox="1"/>
+          <p:nvPr/>
+        </p:nvSpPr>
+        <p:spPr>
+          <a:xfrm>
             <a:off x="640080" y="566928"/>
             <a:ext cx="10058400" cy="530352"/>
           </a:xfrm>
@@ -9161,7 +9246,7 @@
       </p:sp>
       <p:sp>
         <p:nvSpPr>
-          <p:cNvPr id="5" name="Rectangle 4"/>
+          <p:cNvPr id="6" name="Rectangle 5"/>
           <p:cNvSpPr/>
           <p:nvPr/>
         </p:nvSpPr>
@@ -9210,7 +9295,7 @@
       </p:sp>
       <p:sp>
         <p:nvSpPr>
-          <p:cNvPr id="6" name="Rectangle 5"/>
+          <p:cNvPr id="7" name="Rectangle 6"/>
           <p:cNvSpPr/>
           <p:nvPr/>
         </p:nvSpPr>
@@ -9259,7 +9344,7 @@
       </p:sp>
       <p:sp>
         <p:nvSpPr>
-          <p:cNvPr id="7" name="TextBox 6"/>
+          <p:cNvPr id="8" name="TextBox 7"/>
           <p:cNvSpPr txBox="1"/>
           <p:nvPr/>
         </p:nvSpPr>
@@ -9301,7 +9386,7 @@
       </p:sp>
       <p:graphicFrame>
         <p:nvGraphicFramePr>
-          <p:cNvPr id="8" name="Table 7"/>
+          <p:cNvPr id="9" name="Table 8"/>
           <p:cNvGraphicFramePr>
             <a:graphicFrameLocks noGrp="1"/>
           </p:cNvGraphicFramePr>
@@ -11033,12 +11118,6 @@
                           <a:latin typeface="Inter"/>
                         </a:defRPr>
                       </a:pPr>
-                      <a:r>
-                        <a:rPr>
-                          <a:latin typeface="Inter"/>
-                        </a:rPr>
-                        <a:t>—</a:t>
-                      </a:r>
                     </a:p>
                   </a:txBody>
                   <a:tcPr marL="54864" marR="54864" marT="27432" marB="27432" anchor="ctr">
@@ -11081,7 +11160,7 @@
       </p:graphicFrame>
       <p:sp>
         <p:nvSpPr>
-          <p:cNvPr id="9" name="Rectangle 8"/>
+          <p:cNvPr id="10" name="Rectangle 9"/>
           <p:cNvSpPr/>
           <p:nvPr/>
         </p:nvSpPr>
@@ -11130,7 +11209,7 @@
       </p:sp>
       <p:sp>
         <p:nvSpPr>
-          <p:cNvPr id="10" name="TextBox 9"/>
+          <p:cNvPr id="11" name="TextBox 10"/>
           <p:cNvSpPr txBox="1"/>
           <p:nvPr/>
         </p:nvSpPr>
@@ -11172,7 +11251,7 @@
       </p:sp>
       <p:sp>
         <p:nvSpPr>
-          <p:cNvPr id="11" name="TextBox 10"/>
+          <p:cNvPr id="12" name="TextBox 11"/>
           <p:cNvSpPr txBox="1"/>
           <p:nvPr/>
         </p:nvSpPr>
@@ -11207,14 +11286,14 @@
               <a:rPr>
                 <a:latin typeface="Inter"/>
               </a:rPr>
-              <a:t>Confidential — prepared for internal investment use · Data as of 2026-10-04</a:t>
+              <a:t>Confidential — operational readiness review · Data as of 2026-10-04</a:t>
             </a:r>
           </a:p>
         </p:txBody>
       </p:sp>
       <p:sp>
         <p:nvSpPr>
-          <p:cNvPr id="12" name="TextBox 11"/>
+          <p:cNvPr id="13" name="TextBox 12"/>
           <p:cNvSpPr txBox="1"/>
           <p:nvPr/>
         </p:nvSpPr>
@@ -11330,7 +11409,7 @@
         <p:spPr>
           <a:xfrm>
             <a:off x="640080" y="329184"/>
-            <a:ext cx="9875520" cy="182880"/>
+            <a:ext cx="5303520" cy="182880"/>
           </a:xfrm>
           <a:prstGeom prst="rect">
             <a:avLst/>
@@ -11371,6 +11450,48 @@
         </p:nvSpPr>
         <p:spPr>
           <a:xfrm>
+            <a:off x="5897880" y="310896"/>
+            <a:ext cx="4800600" cy="256032"/>
+          </a:xfrm>
+          <a:prstGeom prst="rect">
+            <a:avLst/>
+          </a:prstGeom>
+          <a:noFill/>
+        </p:spPr>
+        <p:txBody>
+          <a:bodyPr wrap="none" lIns="9144" rIns="9144" tIns="9144" bIns="9144" anchor="t">
+            <a:spAutoFit/>
+          </a:bodyPr>
+          <a:lstStyle/>
+          <a:p>
+            <a:pPr algn="r">
+              <a:spcAft>
+                <a:spcPts val="0"/>
+              </a:spcAft>
+              <a:defRPr sz="680" b="1">
+                <a:solidFill>
+                  <a:srgbClr val="4F6B00"/>
+                </a:solidFill>
+                <a:latin typeface="Inter"/>
+              </a:defRPr>
+            </a:pPr>
+            <a:r>
+              <a:rPr>
+                <a:latin typeface="Inter"/>
+              </a:rPr>
+              <a:t>Illustrative, Gradient Maintained — demo data, not the client's holdings or managers</a:t>
+            </a:r>
+          </a:p>
+        </p:txBody>
+      </p:sp>
+      <p:sp>
+        <p:nvSpPr>
+          <p:cNvPr id="5" name="TextBox 4"/>
+          <p:cNvSpPr txBox="1"/>
+          <p:nvPr/>
+        </p:nvSpPr>
+        <p:spPr>
+          <a:xfrm>
             <a:off x="640080" y="566928"/>
             <a:ext cx="10058400" cy="530352"/>
           </a:xfrm>
@@ -11407,7 +11528,7 @@
       </p:sp>
       <p:sp>
         <p:nvSpPr>
-          <p:cNvPr id="5" name="Rectangle 4"/>
+          <p:cNvPr id="6" name="Rectangle 5"/>
           <p:cNvSpPr/>
           <p:nvPr/>
         </p:nvSpPr>
@@ -11456,7 +11577,7 @@
       </p:sp>
       <p:sp>
         <p:nvSpPr>
-          <p:cNvPr id="6" name="Rectangle 5"/>
+          <p:cNvPr id="7" name="Rectangle 6"/>
           <p:cNvSpPr/>
           <p:nvPr/>
         </p:nvSpPr>
@@ -11505,7 +11626,7 @@
       </p:sp>
       <p:sp>
         <p:nvSpPr>
-          <p:cNvPr id="7" name="TextBox 6"/>
+          <p:cNvPr id="8" name="TextBox 7"/>
           <p:cNvSpPr txBox="1"/>
           <p:nvPr/>
         </p:nvSpPr>
@@ -11547,7 +11668,7 @@
       </p:sp>
       <p:sp>
         <p:nvSpPr>
-          <p:cNvPr id="8" name="TextBox 7"/>
+          <p:cNvPr id="9" name="TextBox 8"/>
           <p:cNvSpPr txBox="1"/>
           <p:nvPr/>
         </p:nvSpPr>
@@ -11589,7 +11710,7 @@
       </p:sp>
       <p:graphicFrame>
         <p:nvGraphicFramePr>
-          <p:cNvPr id="9" name="Table 8"/>
+          <p:cNvPr id="10" name="Table 9"/>
           <p:cNvGraphicFramePr>
             <a:graphicFrameLocks noGrp="1"/>
           </p:cNvGraphicFramePr>
@@ -12029,7 +12150,7 @@
       </p:graphicFrame>
       <p:sp>
         <p:nvSpPr>
-          <p:cNvPr id="10" name="Rectangle 9"/>
+          <p:cNvPr id="11" name="Rectangle 10"/>
           <p:cNvSpPr/>
           <p:nvPr/>
         </p:nvSpPr>
@@ -12078,7 +12199,7 @@
       </p:sp>
       <p:sp>
         <p:nvSpPr>
-          <p:cNvPr id="11" name="Rectangle 10"/>
+          <p:cNvPr id="12" name="Rectangle 11"/>
           <p:cNvSpPr/>
           <p:nvPr/>
         </p:nvSpPr>
@@ -12127,7 +12248,7 @@
       </p:sp>
       <p:sp>
         <p:nvSpPr>
-          <p:cNvPr id="12" name="TextBox 11"/>
+          <p:cNvPr id="13" name="TextBox 12"/>
           <p:cNvSpPr txBox="1"/>
           <p:nvPr/>
         </p:nvSpPr>
@@ -12169,7 +12290,7 @@
       </p:sp>
       <p:sp>
         <p:nvSpPr>
-          <p:cNvPr id="13" name="TextBox 12"/>
+          <p:cNvPr id="14" name="TextBox 13"/>
           <p:cNvSpPr txBox="1"/>
           <p:nvPr/>
         </p:nvSpPr>
@@ -12211,7 +12332,7 @@
       </p:sp>
       <p:sp>
         <p:nvSpPr>
-          <p:cNvPr id="14" name="Rectangle 13"/>
+          <p:cNvPr id="15" name="Rectangle 14"/>
           <p:cNvSpPr/>
           <p:nvPr/>
         </p:nvSpPr>
@@ -12260,7 +12381,7 @@
       </p:sp>
       <p:sp>
         <p:nvSpPr>
-          <p:cNvPr id="15" name="TextBox 14"/>
+          <p:cNvPr id="16" name="TextBox 15"/>
           <p:cNvSpPr txBox="1"/>
           <p:nvPr/>
         </p:nvSpPr>
@@ -12302,7 +12423,7 @@
       </p:sp>
       <p:sp>
         <p:nvSpPr>
-          <p:cNvPr id="16" name="TextBox 15"/>
+          <p:cNvPr id="17" name="TextBox 16"/>
           <p:cNvSpPr txBox="1"/>
           <p:nvPr/>
         </p:nvSpPr>
@@ -12337,14 +12458,14 @@
               <a:rPr>
                 <a:latin typeface="Inter"/>
               </a:rPr>
-              <a:t>Confidential — prepared for internal investment use · Data as of 2026-10-04</a:t>
+              <a:t>Confidential — operational readiness review · Data as of 2026-10-04</a:t>
             </a:r>
           </a:p>
         </p:txBody>
       </p:sp>
       <p:sp>
         <p:nvSpPr>
-          <p:cNvPr id="17" name="TextBox 16"/>
+          <p:cNvPr id="18" name="TextBox 17"/>
           <p:cNvSpPr txBox="1"/>
           <p:nvPr/>
         </p:nvSpPr>
@@ -12460,7 +12581,7 @@
         <p:spPr>
           <a:xfrm>
             <a:off x="640080" y="329184"/>
-            <a:ext cx="9875520" cy="182880"/>
+            <a:ext cx="5303520" cy="182880"/>
           </a:xfrm>
           <a:prstGeom prst="rect">
             <a:avLst/>
@@ -12501,6 +12622,48 @@
         </p:nvSpPr>
         <p:spPr>
           <a:xfrm>
+            <a:off x="5897880" y="310896"/>
+            <a:ext cx="4800600" cy="256032"/>
+          </a:xfrm>
+          <a:prstGeom prst="rect">
+            <a:avLst/>
+          </a:prstGeom>
+          <a:noFill/>
+        </p:spPr>
+        <p:txBody>
+          <a:bodyPr wrap="none" lIns="9144" rIns="9144" tIns="9144" bIns="9144" anchor="t">
+            <a:spAutoFit/>
+          </a:bodyPr>
+          <a:lstStyle/>
+          <a:p>
+            <a:pPr algn="r">
+              <a:spcAft>
+                <a:spcPts val="0"/>
+              </a:spcAft>
+              <a:defRPr sz="680" b="1">
+                <a:solidFill>
+                  <a:srgbClr val="4F6B00"/>
+                </a:solidFill>
+                <a:latin typeface="Inter"/>
+              </a:defRPr>
+            </a:pPr>
+            <a:r>
+              <a:rPr>
+                <a:latin typeface="Inter"/>
+              </a:rPr>
+              <a:t>Illustrative, Gradient Maintained — demo data, not the client's holdings or managers</a:t>
+            </a:r>
+          </a:p>
+        </p:txBody>
+      </p:sp>
+      <p:sp>
+        <p:nvSpPr>
+          <p:cNvPr id="5" name="TextBox 4"/>
+          <p:cNvSpPr txBox="1"/>
+          <p:nvPr/>
+        </p:nvSpPr>
+        <p:spPr>
+          <a:xfrm>
             <a:off x="640080" y="566928"/>
             <a:ext cx="10058400" cy="530352"/>
           </a:xfrm>
@@ -12537,7 +12700,7 @@
       </p:sp>
       <p:sp>
         <p:nvSpPr>
-          <p:cNvPr id="5" name="Rectangle 4"/>
+          <p:cNvPr id="6" name="Rectangle 5"/>
           <p:cNvSpPr/>
           <p:nvPr/>
         </p:nvSpPr>
@@ -12586,7 +12749,7 @@
       </p:sp>
       <p:sp>
         <p:nvSpPr>
-          <p:cNvPr id="6" name="Rectangle 5"/>
+          <p:cNvPr id="7" name="Rectangle 6"/>
           <p:cNvSpPr/>
           <p:nvPr/>
         </p:nvSpPr>
@@ -12635,7 +12798,7 @@
       </p:sp>
       <p:sp>
         <p:nvSpPr>
-          <p:cNvPr id="7" name="TextBox 6"/>
+          <p:cNvPr id="8" name="TextBox 7"/>
           <p:cNvSpPr txBox="1"/>
           <p:nvPr/>
         </p:nvSpPr>
@@ -12677,7 +12840,7 @@
       </p:sp>
       <p:sp>
         <p:nvSpPr>
-          <p:cNvPr id="8" name="TextBox 7"/>
+          <p:cNvPr id="9" name="TextBox 8"/>
           <p:cNvSpPr txBox="1"/>
           <p:nvPr/>
         </p:nvSpPr>
@@ -12778,7 +12941,7 @@
       </p:sp>
       <p:sp>
         <p:nvSpPr>
-          <p:cNvPr id="9" name="Rectangle 8"/>
+          <p:cNvPr id="10" name="Rectangle 9"/>
           <p:cNvSpPr/>
           <p:nvPr/>
         </p:nvSpPr>
@@ -12827,7 +12990,7 @@
       </p:sp>
       <p:sp>
         <p:nvSpPr>
-          <p:cNvPr id="10" name="TextBox 9"/>
+          <p:cNvPr id="11" name="TextBox 10"/>
           <p:cNvSpPr txBox="1"/>
           <p:nvPr/>
         </p:nvSpPr>
@@ -12869,7 +13032,7 @@
       </p:sp>
       <p:sp>
         <p:nvSpPr>
-          <p:cNvPr id="11" name="TextBox 10"/>
+          <p:cNvPr id="12" name="TextBox 11"/>
           <p:cNvSpPr txBox="1"/>
           <p:nvPr/>
         </p:nvSpPr>
@@ -12904,14 +13067,14 @@
               <a:rPr>
                 <a:latin typeface="Inter"/>
               </a:rPr>
-              <a:t>Confidential — prepared for internal investment use · Data as of 2026-10-04</a:t>
+              <a:t>Confidential — operational readiness review · Data as of 2026-10-04</a:t>
             </a:r>
           </a:p>
         </p:txBody>
       </p:sp>
       <p:sp>
         <p:nvSpPr>
-          <p:cNvPr id="12" name="TextBox 11"/>
+          <p:cNvPr id="13" name="TextBox 12"/>
           <p:cNvSpPr txBox="1"/>
           <p:nvPr/>
         </p:nvSpPr>
@@ -13026,6 +13189,48 @@
         </p:nvSpPr>
         <p:spPr>
           <a:xfrm>
+            <a:off x="5897880" y="310896"/>
+            <a:ext cx="4800600" cy="256032"/>
+          </a:xfrm>
+          <a:prstGeom prst="rect">
+            <a:avLst/>
+          </a:prstGeom>
+          <a:noFill/>
+        </p:spPr>
+        <p:txBody>
+          <a:bodyPr wrap="none" lIns="9144" rIns="9144" tIns="9144" bIns="9144" anchor="t">
+            <a:spAutoFit/>
+          </a:bodyPr>
+          <a:lstStyle/>
+          <a:p>
+            <a:pPr algn="r">
+              <a:spcAft>
+                <a:spcPts val="0"/>
+              </a:spcAft>
+              <a:defRPr sz="680" b="1">
+                <a:solidFill>
+                  <a:srgbClr val="4F6B00"/>
+                </a:solidFill>
+                <a:latin typeface="Inter"/>
+              </a:defRPr>
+            </a:pPr>
+            <a:r>
+              <a:rPr>
+                <a:latin typeface="Inter"/>
+              </a:rPr>
+              <a:t>Illustrative, Gradient Maintained — demo data, not the client's holdings or managers</a:t>
+            </a:r>
+          </a:p>
+        </p:txBody>
+      </p:sp>
+      <p:sp>
+        <p:nvSpPr>
+          <p:cNvPr id="4" name="TextBox 3"/>
+          <p:cNvSpPr txBox="1"/>
+          <p:nvPr/>
+        </p:nvSpPr>
+        <p:spPr>
+          <a:xfrm>
             <a:off x="640080" y="566928"/>
             <a:ext cx="10058400" cy="530352"/>
           </a:xfrm>
@@ -13055,14 +13260,14 @@
               <a:rPr>
                 <a:latin typeface="Inter"/>
               </a:rPr>
-              <a:t>Appendix A — Sources</a:t>
+              <a:t>Appendix — Sources and methods</a:t>
             </a:r>
           </a:p>
         </p:txBody>
       </p:sp>
       <p:sp>
         <p:nvSpPr>
-          <p:cNvPr id="4" name="Rectangle 3"/>
+          <p:cNvPr id="5" name="Rectangle 4"/>
           <p:cNvSpPr/>
           <p:nvPr/>
         </p:nvSpPr>
@@ -13111,7 +13316,7 @@
       </p:sp>
       <p:sp>
         <p:nvSpPr>
-          <p:cNvPr id="5" name="Rectangle 4"/>
+          <p:cNvPr id="6" name="Rectangle 5"/>
           <p:cNvSpPr/>
           <p:nvPr/>
         </p:nvSpPr>
@@ -13160,7 +13365,7 @@
       </p:sp>
       <p:sp>
         <p:nvSpPr>
-          <p:cNvPr id="6" name="TextBox 5"/>
+          <p:cNvPr id="7" name="TextBox 6"/>
           <p:cNvSpPr txBox="1"/>
           <p:nvPr/>
         </p:nvSpPr>
@@ -13202,7 +13407,7 @@
       </p:sp>
       <p:graphicFrame>
         <p:nvGraphicFramePr>
-          <p:cNvPr id="7" name="Table 6"/>
+          <p:cNvPr id="8" name="Table 7"/>
           <p:cNvGraphicFramePr>
             <a:graphicFrameLocks noGrp="1"/>
           </p:cNvGraphicFramePr>
@@ -13210,7 +13415,7 @@
         </p:nvGraphicFramePr>
         <p:xfrm>
           <a:off x="640080" y="1325880"/>
-          <a:ext cx="10908792" cy="4892040"/>
+          <a:ext cx="10908792" cy="4690872"/>
         </p:xfrm>
         <a:graphic>
           <a:graphicData uri="http://schemas.openxmlformats.org/drawingml/2006/table">
@@ -13225,7 +13430,7 @@
                 <a:gridCol w="2224278"/>
                 <a:gridCol w="2224278"/>
               </a:tblGrid>
-              <a:tr h="543560">
+              <a:tr h="521208">
                 <a:tc>
                   <a:txBody>
                     <a:bodyPr/>
@@ -13362,7 +13567,7 @@
                   </a:tcPr>
                 </a:tc>
               </a:tr>
-              <a:tr h="543560">
+              <a:tr h="521208">
                 <a:tc>
                   <a:txBody>
                     <a:bodyPr/>
@@ -13499,7 +13704,7 @@
                   </a:tcPr>
                 </a:tc>
               </a:tr>
-              <a:tr h="543560">
+              <a:tr h="521208">
                 <a:tc>
                   <a:txBody>
                     <a:bodyPr/>
@@ -13636,7 +13841,7 @@
                   </a:tcPr>
                 </a:tc>
               </a:tr>
-              <a:tr h="543560">
+              <a:tr h="521208">
                 <a:tc>
                   <a:txBody>
                     <a:bodyPr/>
@@ -13773,7 +13978,7 @@
                   </a:tcPr>
                 </a:tc>
               </a:tr>
-              <a:tr h="543560">
+              <a:tr h="521208">
                 <a:tc>
                   <a:txBody>
                     <a:bodyPr/>
@@ -13910,7 +14115,7 @@
                   </a:tcPr>
                 </a:tc>
               </a:tr>
-              <a:tr h="543560">
+              <a:tr h="521208">
                 <a:tc>
                   <a:txBody>
                     <a:bodyPr/>
@@ -14047,7 +14252,7 @@
                   </a:tcPr>
                 </a:tc>
               </a:tr>
-              <a:tr h="543560">
+              <a:tr h="521208">
                 <a:tc>
                   <a:txBody>
                     <a:bodyPr/>
@@ -14184,7 +14389,7 @@
                   </a:tcPr>
                 </a:tc>
               </a:tr>
-              <a:tr h="543560">
+              <a:tr h="521208">
                 <a:tc>
                   <a:txBody>
                     <a:bodyPr/>
@@ -14321,7 +14526,7 @@
                   </a:tcPr>
                 </a:tc>
               </a:tr>
-              <a:tr h="543560">
+              <a:tr h="521208">
                 <a:tc>
                   <a:txBody>
                     <a:bodyPr/>
@@ -14464,7 +14669,49 @@
       </p:graphicFrame>
       <p:sp>
         <p:nvSpPr>
-          <p:cNvPr id="8" name="Rectangle 7"/>
+          <p:cNvPr id="9" name="TextBox 8"/>
+          <p:cNvSpPr txBox="1"/>
+          <p:nvPr/>
+        </p:nvSpPr>
+        <p:spPr>
+          <a:xfrm>
+            <a:off x="640080" y="6035040"/>
+            <a:ext cx="10908792" cy="164592"/>
+          </a:xfrm>
+          <a:prstGeom prst="rect">
+            <a:avLst/>
+          </a:prstGeom>
+          <a:noFill/>
+        </p:spPr>
+        <p:txBody>
+          <a:bodyPr wrap="none" lIns="9144" rIns="9144" tIns="9144" bIns="9144" anchor="t">
+            <a:spAutoFit/>
+          </a:bodyPr>
+          <a:lstStyle/>
+          <a:p>
+            <a:pPr algn="l">
+              <a:spcAft>
+                <a:spcPts val="0"/>
+              </a:spcAft>
+              <a:defRPr sz="680" b="0">
+                <a:solidFill>
+                  <a:srgbClr val="8A94A1"/>
+                </a:solidFill>
+                <a:latin typeface="Inter"/>
+              </a:defRPr>
+            </a:pPr>
+            <a:r>
+              <a:rPr>
+                <a:latin typeface="Inter"/>
+              </a:rPr>
+              <a:t>Illustrative, Gradient Maintained — demo data, not the client's holdings or managers. All organizations, portfolios, managers and results in this public example are illustrative.</a:t>
+            </a:r>
+          </a:p>
+        </p:txBody>
+      </p:sp>
+      <p:sp>
+        <p:nvSpPr>
+          <p:cNvPr id="10" name="Rectangle 9"/>
           <p:cNvSpPr/>
           <p:nvPr/>
         </p:nvSpPr>
@@ -14513,7 +14760,7 @@
       </p:sp>
       <p:sp>
         <p:nvSpPr>
-          <p:cNvPr id="9" name="TextBox 8"/>
+          <p:cNvPr id="11" name="TextBox 10"/>
           <p:cNvSpPr txBox="1"/>
           <p:nvPr/>
         </p:nvSpPr>
@@ -14555,7 +14802,7 @@
       </p:sp>
       <p:sp>
         <p:nvSpPr>
-          <p:cNvPr id="10" name="TextBox 9"/>
+          <p:cNvPr id="12" name="TextBox 11"/>
           <p:cNvSpPr txBox="1"/>
           <p:nvPr/>
         </p:nvSpPr>
@@ -14590,14 +14837,14 @@
               <a:rPr>
                 <a:latin typeface="Inter"/>
               </a:rPr>
-              <a:t>Confidential — prepared for internal investment use · Data as of 2026-10-04</a:t>
+              <a:t>Confidential — operational readiness review · Data as of 2026-10-04</a:t>
             </a:r>
           </a:p>
         </p:txBody>
       </p:sp>
       <p:sp>
         <p:nvSpPr>
-          <p:cNvPr id="11" name="TextBox 10"/>
+          <p:cNvPr id="13" name="TextBox 12"/>
           <p:cNvSpPr txBox="1"/>
           <p:nvPr/>
         </p:nvSpPr>

--- a/plugins/gradient-cio/assets/examples/gradient-setup.pptx
+++ b/plugins/gradient-cio/assets/examples/gradient-setup.pptx
@@ -2649,7 +2649,7 @@
               <a:rPr>
                 <a:latin typeface="Inter"/>
               </a:rPr>
-              <a:t>ACCESS</a:t>
+              <a:t>REVIEWED</a:t>
             </a:r>
           </a:p>
         </p:txBody>
@@ -2691,174 +2691,6 @@
               <a:rPr>
                 <a:latin typeface="Inter"/>
               </a:rPr>
-              <a:t>Connected</a:t>
-            </a:r>
-          </a:p>
-        </p:txBody>
-      </p:sp>
-      <p:sp>
-        <p:nvSpPr>
-          <p:cNvPr id="13" name="TextBox 12"/>
-          <p:cNvSpPr txBox="1"/>
-          <p:nvPr/>
-        </p:nvSpPr>
-        <p:spPr>
-          <a:xfrm>
-            <a:off x="685800" y="4937759"/>
-            <a:ext cx="4709160" cy="182880"/>
-          </a:xfrm>
-          <a:prstGeom prst="rect">
-            <a:avLst/>
-          </a:prstGeom>
-          <a:noFill/>
-        </p:spPr>
-        <p:txBody>
-          <a:bodyPr wrap="none" lIns="9144" rIns="9144" tIns="9144" bIns="9144" anchor="t">
-            <a:spAutoFit/>
-          </a:bodyPr>
-          <a:lstStyle/>
-          <a:p>
-            <a:pPr algn="l">
-              <a:spcAft>
-                <a:spcPts val="0"/>
-              </a:spcAft>
-              <a:defRPr sz="700" b="1">
-                <a:solidFill>
-                  <a:srgbClr val="8A94A1"/>
-                </a:solidFill>
-                <a:latin typeface="Inter"/>
-              </a:defRPr>
-            </a:pPr>
-            <a:r>
-              <a:rPr>
-                <a:latin typeface="Inter"/>
-              </a:rPr>
-              <a:t>LICENSED CAPABILITIES</a:t>
-            </a:r>
-          </a:p>
-        </p:txBody>
-      </p:sp>
-      <p:sp>
-        <p:nvSpPr>
-          <p:cNvPr id="14" name="TextBox 13"/>
-          <p:cNvSpPr txBox="1"/>
-          <p:nvPr/>
-        </p:nvSpPr>
-        <p:spPr>
-          <a:xfrm>
-            <a:off x="685800" y="5129783"/>
-            <a:ext cx="4709160" cy="310896"/>
-          </a:xfrm>
-          <a:prstGeom prst="rect">
-            <a:avLst/>
-          </a:prstGeom>
-          <a:noFill/>
-        </p:spPr>
-        <p:txBody>
-          <a:bodyPr wrap="none" lIns="9144" rIns="9144" tIns="9144" bIns="9144" anchor="t">
-            <a:spAutoFit/>
-          </a:bodyPr>
-          <a:lstStyle/>
-          <a:p>
-            <a:pPr algn="l">
-              <a:spcAft>
-                <a:spcPts val="0"/>
-              </a:spcAft>
-              <a:defRPr sz="1000" b="1">
-                <a:solidFill>
-                  <a:srgbClr val="FFFFFF"/>
-                </a:solidFill>
-                <a:latin typeface="Inter"/>
-              </a:defRPr>
-            </a:pPr>
-            <a:r>
-              <a:rPr>
-                <a:latin typeface="Inter"/>
-              </a:rPr>
-              <a:t>4 of 7</a:t>
-            </a:r>
-          </a:p>
-        </p:txBody>
-      </p:sp>
-      <p:sp>
-        <p:nvSpPr>
-          <p:cNvPr id="15" name="TextBox 14"/>
-          <p:cNvSpPr txBox="1"/>
-          <p:nvPr/>
-        </p:nvSpPr>
-        <p:spPr>
-          <a:xfrm>
-            <a:off x="5852160" y="4937759"/>
-            <a:ext cx="4709160" cy="182880"/>
-          </a:xfrm>
-          <a:prstGeom prst="rect">
-            <a:avLst/>
-          </a:prstGeom>
-          <a:noFill/>
-        </p:spPr>
-        <p:txBody>
-          <a:bodyPr wrap="none" lIns="9144" rIns="9144" tIns="9144" bIns="9144" anchor="t">
-            <a:spAutoFit/>
-          </a:bodyPr>
-          <a:lstStyle/>
-          <a:p>
-            <a:pPr algn="l">
-              <a:spcAft>
-                <a:spcPts val="0"/>
-              </a:spcAft>
-              <a:defRPr sz="700" b="1">
-                <a:solidFill>
-                  <a:srgbClr val="8A94A1"/>
-                </a:solidFill>
-                <a:latin typeface="Inter"/>
-              </a:defRPr>
-            </a:pPr>
-            <a:r>
-              <a:rPr>
-                <a:latin typeface="Inter"/>
-              </a:rPr>
-              <a:t>REVIEWED</a:t>
-            </a:r>
-          </a:p>
-        </p:txBody>
-      </p:sp>
-      <p:sp>
-        <p:nvSpPr>
-          <p:cNvPr id="16" name="TextBox 15"/>
-          <p:cNvSpPr txBox="1"/>
-          <p:nvPr/>
-        </p:nvSpPr>
-        <p:spPr>
-          <a:xfrm>
-            <a:off x="5852160" y="5129783"/>
-            <a:ext cx="4709160" cy="310896"/>
-          </a:xfrm>
-          <a:prstGeom prst="rect">
-            <a:avLst/>
-          </a:prstGeom>
-          <a:noFill/>
-        </p:spPr>
-        <p:txBody>
-          <a:bodyPr wrap="none" lIns="9144" rIns="9144" tIns="9144" bIns="9144" anchor="t">
-            <a:spAutoFit/>
-          </a:bodyPr>
-          <a:lstStyle/>
-          <a:p>
-            <a:pPr algn="l">
-              <a:spcAft>
-                <a:spcPts val="0"/>
-              </a:spcAft>
-              <a:defRPr sz="1000" b="1">
-                <a:solidFill>
-                  <a:srgbClr val="FFFFFF"/>
-                </a:solidFill>
-                <a:latin typeface="Inter"/>
-              </a:defRPr>
-            </a:pPr>
-            <a:r>
-              <a:rPr>
-                <a:latin typeface="Inter"/>
-              </a:rPr>
               <a:t>2026-10-04</a:t>
             </a:r>
           </a:p>
@@ -2866,224 +2698,7 @@
       </p:sp>
       <p:sp>
         <p:nvSpPr>
-          <p:cNvPr id="17" name="Rectangle 16"/>
-          <p:cNvSpPr/>
-          <p:nvPr/>
-        </p:nvSpPr>
-        <p:spPr>
-          <a:xfrm>
-            <a:off x="685800" y="5687568"/>
-            <a:ext cx="3337560" cy="530352"/>
-          </a:xfrm>
-          <a:prstGeom prst="rect">
-            <a:avLst/>
-          </a:prstGeom>
-          <a:solidFill>
-            <a:srgbClr val="F2A93B"/>
-          </a:solidFill>
-          <a:ln>
-            <a:solidFill>
-              <a:srgbClr val="F2A93B"/>
-            </a:solidFill>
-          </a:ln>
-        </p:spPr>
-        <p:style>
-          <a:lnRef idx="1">
-            <a:schemeClr val="accent1"/>
-          </a:lnRef>
-          <a:fillRef idx="3">
-            <a:schemeClr val="accent1"/>
-          </a:fillRef>
-          <a:effectRef idx="2">
-            <a:schemeClr val="accent1"/>
-          </a:effectRef>
-          <a:fontRef idx="minor">
-            <a:schemeClr val="lt1"/>
-          </a:fontRef>
-        </p:style>
-        <p:txBody>
-          <a:bodyPr rtlCol="0" anchor="ctr"/>
-          <a:lstStyle/>
-          <a:p>
-            <a:pPr algn="ctr">
-              <a:defRPr>
-                <a:latin typeface="Inter"/>
-              </a:defRPr>
-            </a:pPr>
-          </a:p>
-        </p:txBody>
-      </p:sp>
-      <p:sp>
-        <p:nvSpPr>
-          <p:cNvPr id="18" name="TextBox 17"/>
-          <p:cNvSpPr txBox="1"/>
-          <p:nvPr/>
-        </p:nvSpPr>
-        <p:spPr>
-          <a:xfrm>
-            <a:off x="822960" y="5760720"/>
-            <a:ext cx="3063240" cy="128016"/>
-          </a:xfrm>
-          <a:prstGeom prst="rect">
-            <a:avLst/>
-          </a:prstGeom>
-          <a:noFill/>
-        </p:spPr>
-        <p:txBody>
-          <a:bodyPr wrap="none" lIns="9144" rIns="9144" tIns="9144" bIns="9144" anchor="t">
-            <a:spAutoFit/>
-          </a:bodyPr>
-          <a:lstStyle/>
-          <a:p>
-            <a:pPr algn="l">
-              <a:spcAft>
-                <a:spcPts val="0"/>
-              </a:spcAft>
-              <a:defRPr sz="620" b="1">
-                <a:solidFill>
-                  <a:srgbClr val="0D1117"/>
-                </a:solidFill>
-                <a:latin typeface="Inter"/>
-              </a:defRPr>
-            </a:pPr>
-            <a:r>
-              <a:rPr>
-                <a:latin typeface="Inter"/>
-              </a:rPr>
-              <a:t>READINESS</a:t>
-            </a:r>
-          </a:p>
-        </p:txBody>
-      </p:sp>
-      <p:sp>
-        <p:nvSpPr>
-          <p:cNvPr id="19" name="TextBox 18"/>
-          <p:cNvSpPr txBox="1"/>
-          <p:nvPr/>
-        </p:nvSpPr>
-        <p:spPr>
-          <a:xfrm>
-            <a:off x="822960" y="5916168"/>
-            <a:ext cx="3063240" cy="182880"/>
-          </a:xfrm>
-          <a:prstGeom prst="rect">
-            <a:avLst/>
-          </a:prstGeom>
-          <a:noFill/>
-        </p:spPr>
-        <p:txBody>
-          <a:bodyPr wrap="none" lIns="9144" rIns="9144" tIns="9144" bIns="9144" anchor="t">
-            <a:spAutoFit/>
-          </a:bodyPr>
-          <a:lstStyle/>
-          <a:p>
-            <a:pPr algn="l">
-              <a:spcAft>
-                <a:spcPts val="0"/>
-              </a:spcAft>
-              <a:defRPr sz="900" b="1">
-                <a:solidFill>
-                  <a:srgbClr val="0D1117"/>
-                </a:solidFill>
-                <a:latin typeface="Inter"/>
-              </a:defRPr>
-            </a:pPr>
-            <a:r>
-              <a:rPr>
-                <a:latin typeface="Inter"/>
-              </a:rPr>
-              <a:t>Ready, with limits</a:t>
-            </a:r>
-          </a:p>
-        </p:txBody>
-      </p:sp>
-      <p:sp>
-        <p:nvSpPr>
-          <p:cNvPr id="20" name="TextBox 19"/>
-          <p:cNvSpPr txBox="1"/>
-          <p:nvPr/>
-        </p:nvSpPr>
-        <p:spPr>
-          <a:xfrm>
-            <a:off x="4297680" y="5733288"/>
-            <a:ext cx="3108960" cy="164592"/>
-          </a:xfrm>
-          <a:prstGeom prst="rect">
-            <a:avLst/>
-          </a:prstGeom>
-          <a:noFill/>
-        </p:spPr>
-        <p:txBody>
-          <a:bodyPr wrap="none" lIns="9144" rIns="9144" tIns="9144" bIns="9144" anchor="t">
-            <a:spAutoFit/>
-          </a:bodyPr>
-          <a:lstStyle/>
-          <a:p>
-            <a:pPr algn="l">
-              <a:spcAft>
-                <a:spcPts val="0"/>
-              </a:spcAft>
-              <a:defRPr sz="650" b="1">
-                <a:solidFill>
-                  <a:srgbClr val="8A94A1"/>
-                </a:solidFill>
-                <a:latin typeface="Inter"/>
-              </a:defRPr>
-            </a:pPr>
-            <a:r>
-              <a:rPr>
-                <a:latin typeface="Inter"/>
-              </a:rPr>
-              <a:t>CAPABILITIES REVIEWED</a:t>
-            </a:r>
-          </a:p>
-        </p:txBody>
-      </p:sp>
-      <p:sp>
-        <p:nvSpPr>
-          <p:cNvPr id="21" name="TextBox 20"/>
-          <p:cNvSpPr txBox="1"/>
-          <p:nvPr/>
-        </p:nvSpPr>
-        <p:spPr>
-          <a:xfrm>
-            <a:off x="4297680" y="5934456"/>
-            <a:ext cx="3108960" cy="201168"/>
-          </a:xfrm>
-          <a:prstGeom prst="rect">
-            <a:avLst/>
-          </a:prstGeom>
-          <a:noFill/>
-        </p:spPr>
-        <p:txBody>
-          <a:bodyPr wrap="none" lIns="9144" rIns="9144" tIns="9144" bIns="9144" anchor="t">
-            <a:spAutoFit/>
-          </a:bodyPr>
-          <a:lstStyle/>
-          <a:p>
-            <a:pPr algn="l">
-              <a:spcAft>
-                <a:spcPts val="0"/>
-              </a:spcAft>
-              <a:defRPr sz="800" b="1">
-                <a:solidFill>
-                  <a:srgbClr val="FFFFFF"/>
-                </a:solidFill>
-                <a:latin typeface="Inter"/>
-              </a:defRPr>
-            </a:pPr>
-            <a:r>
-              <a:rPr>
-                <a:latin typeface="Inter"/>
-              </a:rPr>
-              <a:t>13 of 14 · Partial</a:t>
-            </a:r>
-          </a:p>
-        </p:txBody>
-      </p:sp>
-      <p:sp>
-        <p:nvSpPr>
-          <p:cNvPr id="22" name="TextBox 21"/>
+          <p:cNvPr id="13" name="TextBox 12"/>
           <p:cNvSpPr txBox="1"/>
           <p:nvPr/>
         </p:nvSpPr>
@@ -3125,7 +2740,7 @@
       </p:sp>
       <p:sp>
         <p:nvSpPr>
-          <p:cNvPr id="23" name="TextBox 22"/>
+          <p:cNvPr id="14" name="TextBox 13"/>
           <p:cNvSpPr txBox="1"/>
           <p:nvPr/>
         </p:nvSpPr>
@@ -3167,7 +2782,7 @@
       </p:sp>
       <p:sp>
         <p:nvSpPr>
-          <p:cNvPr id="24" name="TextBox 23"/>
+          <p:cNvPr id="15" name="TextBox 14"/>
           <p:cNvSpPr txBox="1"/>
           <p:nvPr/>
         </p:nvSpPr>
@@ -3282,48 +2897,6 @@
         </p:nvSpPr>
         <p:spPr>
           <a:xfrm>
-            <a:off x="5897880" y="310896"/>
-            <a:ext cx="4800600" cy="256032"/>
-          </a:xfrm>
-          <a:prstGeom prst="rect">
-            <a:avLst/>
-          </a:prstGeom>
-          <a:noFill/>
-        </p:spPr>
-        <p:txBody>
-          <a:bodyPr wrap="none" lIns="9144" rIns="9144" tIns="9144" bIns="9144" anchor="t">
-            <a:spAutoFit/>
-          </a:bodyPr>
-          <a:lstStyle/>
-          <a:p>
-            <a:pPr algn="r">
-              <a:spcAft>
-                <a:spcPts val="0"/>
-              </a:spcAft>
-              <a:defRPr sz="680" b="1">
-                <a:solidFill>
-                  <a:srgbClr val="4F6B00"/>
-                </a:solidFill>
-                <a:latin typeface="Inter"/>
-              </a:defRPr>
-            </a:pPr>
-            <a:r>
-              <a:rPr>
-                <a:latin typeface="Inter"/>
-              </a:rPr>
-              <a:t>Illustrative, Gradient Maintained — demo data, not the client's holdings or managers</a:t>
-            </a:r>
-          </a:p>
-        </p:txBody>
-      </p:sp>
-      <p:sp>
-        <p:nvSpPr>
-          <p:cNvPr id="4" name="TextBox 3"/>
-          <p:cNvSpPr txBox="1"/>
-          <p:nvPr/>
-        </p:nvSpPr>
-        <p:spPr>
-          <a:xfrm>
             <a:off x="640080" y="566928"/>
             <a:ext cx="10058400" cy="530352"/>
           </a:xfrm>
@@ -3360,7 +2933,7 @@
       </p:sp>
       <p:sp>
         <p:nvSpPr>
-          <p:cNvPr id="5" name="Rectangle 4"/>
+          <p:cNvPr id="4" name="Rectangle 3"/>
           <p:cNvSpPr/>
           <p:nvPr/>
         </p:nvSpPr>
@@ -3409,7 +2982,7 @@
       </p:sp>
       <p:sp>
         <p:nvSpPr>
-          <p:cNvPr id="6" name="Rectangle 5"/>
+          <p:cNvPr id="5" name="Rectangle 4"/>
           <p:cNvSpPr/>
           <p:nvPr/>
         </p:nvSpPr>
@@ -3458,7 +3031,7 @@
       </p:sp>
       <p:sp>
         <p:nvSpPr>
-          <p:cNvPr id="7" name="TextBox 6"/>
+          <p:cNvPr id="6" name="TextBox 5"/>
           <p:cNvSpPr txBox="1"/>
           <p:nvPr/>
         </p:nvSpPr>
@@ -3500,7 +3073,7 @@
       </p:sp>
       <p:sp>
         <p:nvSpPr>
-          <p:cNvPr id="8" name="TextBox 7"/>
+          <p:cNvPr id="7" name="TextBox 6"/>
           <p:cNvSpPr txBox="1"/>
           <p:nvPr/>
         </p:nvSpPr>
@@ -3542,7 +3115,7 @@
       </p:sp>
       <p:sp>
         <p:nvSpPr>
-          <p:cNvPr id="9" name="Rectangle 8"/>
+          <p:cNvPr id="8" name="Rectangle 7"/>
           <p:cNvSpPr/>
           <p:nvPr/>
         </p:nvSpPr>
@@ -3591,7 +3164,7 @@
       </p:sp>
       <p:sp>
         <p:nvSpPr>
-          <p:cNvPr id="10" name="TextBox 9"/>
+          <p:cNvPr id="9" name="TextBox 8"/>
           <p:cNvSpPr txBox="1"/>
           <p:nvPr/>
         </p:nvSpPr>
@@ -3633,7 +3206,7 @@
       </p:sp>
       <p:sp>
         <p:nvSpPr>
-          <p:cNvPr id="11" name="TextBox 10"/>
+          <p:cNvPr id="10" name="TextBox 9"/>
           <p:cNvSpPr txBox="1"/>
           <p:nvPr/>
         </p:nvSpPr>
@@ -3675,7 +3248,7 @@
       </p:sp>
       <p:sp>
         <p:nvSpPr>
-          <p:cNvPr id="12" name="TextBox 11"/>
+          <p:cNvPr id="11" name="TextBox 10"/>
           <p:cNvSpPr txBox="1"/>
           <p:nvPr/>
         </p:nvSpPr>
@@ -3791,7 +3364,7 @@
         <p:spPr>
           <a:xfrm>
             <a:off x="640080" y="329184"/>
-            <a:ext cx="5303520" cy="182880"/>
+            <a:ext cx="9875520" cy="182880"/>
           </a:xfrm>
           <a:prstGeom prst="rect">
             <a:avLst/>
@@ -3832,48 +3405,6 @@
         </p:nvSpPr>
         <p:spPr>
           <a:xfrm>
-            <a:off x="5897880" y="310896"/>
-            <a:ext cx="4800600" cy="256032"/>
-          </a:xfrm>
-          <a:prstGeom prst="rect">
-            <a:avLst/>
-          </a:prstGeom>
-          <a:noFill/>
-        </p:spPr>
-        <p:txBody>
-          <a:bodyPr wrap="none" lIns="9144" rIns="9144" tIns="9144" bIns="9144" anchor="t">
-            <a:spAutoFit/>
-          </a:bodyPr>
-          <a:lstStyle/>
-          <a:p>
-            <a:pPr algn="r">
-              <a:spcAft>
-                <a:spcPts val="0"/>
-              </a:spcAft>
-              <a:defRPr sz="680" b="1">
-                <a:solidFill>
-                  <a:srgbClr val="4F6B00"/>
-                </a:solidFill>
-                <a:latin typeface="Inter"/>
-              </a:defRPr>
-            </a:pPr>
-            <a:r>
-              <a:rPr>
-                <a:latin typeface="Inter"/>
-              </a:rPr>
-              <a:t>Illustrative, Gradient Maintained — demo data, not the client's holdings or managers</a:t>
-            </a:r>
-          </a:p>
-        </p:txBody>
-      </p:sp>
-      <p:sp>
-        <p:nvSpPr>
-          <p:cNvPr id="5" name="TextBox 4"/>
-          <p:cNvSpPr txBox="1"/>
-          <p:nvPr/>
-        </p:nvSpPr>
-        <p:spPr>
-          <a:xfrm>
             <a:off x="640080" y="566928"/>
             <a:ext cx="10058400" cy="530352"/>
           </a:xfrm>
@@ -3910,7 +3441,7 @@
       </p:sp>
       <p:sp>
         <p:nvSpPr>
-          <p:cNvPr id="6" name="Rectangle 5"/>
+          <p:cNvPr id="5" name="Rectangle 4"/>
           <p:cNvSpPr/>
           <p:nvPr/>
         </p:nvSpPr>
@@ -3959,7 +3490,7 @@
       </p:sp>
       <p:sp>
         <p:nvSpPr>
-          <p:cNvPr id="7" name="Rectangle 6"/>
+          <p:cNvPr id="6" name="Rectangle 5"/>
           <p:cNvSpPr/>
           <p:nvPr/>
         </p:nvSpPr>
@@ -4008,7 +3539,7 @@
       </p:sp>
       <p:sp>
         <p:nvSpPr>
-          <p:cNvPr id="8" name="TextBox 7"/>
+          <p:cNvPr id="7" name="TextBox 6"/>
           <p:cNvSpPr txBox="1"/>
           <p:nvPr/>
         </p:nvSpPr>
@@ -4050,14 +3581,105 @@
       </p:sp>
       <p:sp>
         <p:nvSpPr>
-          <p:cNvPr id="9" name="Rectangle 8"/>
+          <p:cNvPr id="8" name="Rectangle 7"/>
           <p:cNvSpPr/>
           <p:nvPr/>
         </p:nvSpPr>
         <p:spPr>
           <a:xfrm>
-            <a:off x="640080" y="1325880"/>
-            <a:ext cx="10908792" cy="1823056"/>
+            <a:off x="640080" y="1399032"/>
+            <a:ext cx="73152" cy="729225"/>
+          </a:xfrm>
+          <a:prstGeom prst="rect">
+            <a:avLst/>
+          </a:prstGeom>
+          <a:solidFill>
+            <a:srgbClr val="F2A93B"/>
+          </a:solidFill>
+          <a:ln>
+            <a:solidFill>
+              <a:srgbClr val="F2A93B"/>
+            </a:solidFill>
+          </a:ln>
+        </p:spPr>
+        <p:style>
+          <a:lnRef idx="1">
+            <a:schemeClr val="accent1"/>
+          </a:lnRef>
+          <a:fillRef idx="3">
+            <a:schemeClr val="accent1"/>
+          </a:fillRef>
+          <a:effectRef idx="2">
+            <a:schemeClr val="accent1"/>
+          </a:effectRef>
+          <a:fontRef idx="minor">
+            <a:schemeClr val="lt1"/>
+          </a:fontRef>
+        </p:style>
+        <p:txBody>
+          <a:bodyPr rtlCol="0" anchor="ctr"/>
+          <a:lstStyle/>
+          <a:p>
+            <a:pPr algn="ctr">
+              <a:defRPr>
+                <a:latin typeface="Inter"/>
+              </a:defRPr>
+            </a:pPr>
+          </a:p>
+        </p:txBody>
+      </p:sp>
+      <p:sp>
+        <p:nvSpPr>
+          <p:cNvPr id="9" name="TextBox 8"/>
+          <p:cNvSpPr txBox="1"/>
+          <p:nvPr/>
+        </p:nvSpPr>
+        <p:spPr>
+          <a:xfrm>
+            <a:off x="896112" y="1371600"/>
+            <a:ext cx="10588752" cy="507807"/>
+          </a:xfrm>
+          <a:prstGeom prst="rect">
+            <a:avLst/>
+          </a:prstGeom>
+          <a:noFill/>
+        </p:spPr>
+        <p:txBody>
+          <a:bodyPr wrap="none" lIns="9144" rIns="9144" tIns="9144" bIns="9144" anchor="t">
+            <a:spAutoFit/>
+          </a:bodyPr>
+          <a:lstStyle/>
+          <a:p>
+            <a:pPr algn="l">
+              <a:spcAft>
+                <a:spcPts val="0"/>
+              </a:spcAft>
+              <a:defRPr sz="1800" b="1">
+                <a:solidFill>
+                  <a:srgbClr val="0D1117"/>
+                </a:solidFill>
+                <a:latin typeface="Inter"/>
+              </a:defRPr>
+            </a:pPr>
+            <a:r>
+              <a:rPr>
+                <a:latin typeface="Inter"/>
+              </a:rPr>
+              <a:t>Ready to use, with some skills limited</a:t>
+            </a:r>
+          </a:p>
+        </p:txBody>
+      </p:sp>
+      <p:sp>
+        <p:nvSpPr>
+          <p:cNvPr id="10" name="Rectangle 9"/>
+          <p:cNvSpPr/>
+          <p:nvPr/>
+        </p:nvSpPr>
+        <p:spPr>
+          <a:xfrm>
+            <a:off x="640080" y="2311137"/>
+            <a:ext cx="10908792" cy="1443781"/>
           </a:xfrm>
           <a:prstGeom prst="rect">
             <a:avLst/>
@@ -4099,14 +3721,14 @@
       </p:sp>
       <p:sp>
         <p:nvSpPr>
-          <p:cNvPr id="10" name="Rectangle 9"/>
+          <p:cNvPr id="11" name="Rectangle 10"/>
           <p:cNvSpPr/>
           <p:nvPr/>
         </p:nvSpPr>
         <p:spPr>
           <a:xfrm>
-            <a:off x="640080" y="1325880"/>
-            <a:ext cx="54864" cy="1823056"/>
+            <a:off x="640080" y="2311137"/>
+            <a:ext cx="54864" cy="1443781"/>
           </a:xfrm>
           <a:prstGeom prst="rect">
             <a:avLst/>
@@ -4148,13 +3770,13 @@
       </p:sp>
       <p:sp>
         <p:nvSpPr>
-          <p:cNvPr id="11" name="TextBox 10"/>
+          <p:cNvPr id="12" name="TextBox 11"/>
           <p:cNvSpPr txBox="1"/>
           <p:nvPr/>
         </p:nvSpPr>
         <p:spPr>
           <a:xfrm>
-            <a:off x="804671" y="1435607"/>
+            <a:off x="804671" y="2420865"/>
             <a:ext cx="10616184" cy="228600"/>
           </a:xfrm>
           <a:prstGeom prst="rect">
@@ -4190,14 +3812,14 @@
       </p:sp>
       <p:sp>
         <p:nvSpPr>
-          <p:cNvPr id="12" name="TextBox 11"/>
+          <p:cNvPr id="13" name="TextBox 12"/>
           <p:cNvSpPr txBox="1"/>
           <p:nvPr/>
         </p:nvSpPr>
         <p:spPr>
           <a:xfrm>
-            <a:off x="804671" y="1719072"/>
-            <a:ext cx="10616184" cy="1338424"/>
+            <a:off x="804671" y="2704329"/>
+            <a:ext cx="10616184" cy="959149"/>
           </a:xfrm>
           <a:prstGeom prst="rect">
             <a:avLst/>
@@ -4225,21 +3847,21 @@
               <a:rPr>
                 <a:latin typeface="Inter"/>
               </a:rPr>
-              <a:t>GradientCIO is connected and healthy for organization Gradient [S1][S2]. Nineteen of twenty-one skills are ready; the macro briefing has one unavailable view, and the IC memo needs the Portfolio and Strategy Lab modules for live portfolio data [S2]. 13 of 14 contract checks passed; macro regime state returned Not available (HTTP 500) [S3].</a:t>
+              <a:t>GradientCIO is connected and healthy for organization Gradient [S1][S2]. Nineteen of twenty-one skills are ready; the macro briefing has one unavailable view, and the IC memo needs the Portfolio and Strategy Lab modules for live portfolio data [S2]. 13 of 14 connection checks passed; macro regime state returned Not available (HTTP 500) [S3].</a:t>
             </a:r>
           </a:p>
         </p:txBody>
       </p:sp>
       <p:sp>
         <p:nvSpPr>
-          <p:cNvPr id="13" name="Rectangle 12"/>
+          <p:cNvPr id="14" name="Rectangle 13"/>
           <p:cNvSpPr/>
           <p:nvPr/>
         </p:nvSpPr>
         <p:spPr>
           <a:xfrm>
-            <a:off x="640080" y="3258664"/>
-            <a:ext cx="2644902" cy="1737516"/>
+            <a:off x="640080" y="3864647"/>
+            <a:ext cx="2644902" cy="1368014"/>
           </a:xfrm>
           <a:prstGeom prst="rect">
             <a:avLst/>
@@ -4281,13 +3903,13 @@
       </p:sp>
       <p:sp>
         <p:nvSpPr>
-          <p:cNvPr id="14" name="Rectangle 13"/>
+          <p:cNvPr id="15" name="Rectangle 14"/>
           <p:cNvSpPr/>
           <p:nvPr/>
         </p:nvSpPr>
         <p:spPr>
           <a:xfrm>
-            <a:off x="640080" y="3258664"/>
+            <a:off x="640080" y="3864647"/>
             <a:ext cx="2644902" cy="45720"/>
           </a:xfrm>
           <a:prstGeom prst="rect">
@@ -4330,13 +3952,13 @@
       </p:sp>
       <p:sp>
         <p:nvSpPr>
-          <p:cNvPr id="15" name="TextBox 14"/>
+          <p:cNvPr id="16" name="TextBox 15"/>
           <p:cNvSpPr txBox="1"/>
           <p:nvPr/>
         </p:nvSpPr>
         <p:spPr>
           <a:xfrm>
-            <a:off x="749808" y="3386680"/>
+            <a:off x="749808" y="3992663"/>
             <a:ext cx="2425446" cy="201168"/>
           </a:xfrm>
           <a:prstGeom prst="rect">
@@ -4372,13 +3994,13 @@
       </p:sp>
       <p:sp>
         <p:nvSpPr>
-          <p:cNvPr id="16" name="TextBox 15"/>
+          <p:cNvPr id="17" name="TextBox 16"/>
           <p:cNvSpPr txBox="1"/>
           <p:nvPr/>
         </p:nvSpPr>
         <p:spPr>
           <a:xfrm>
-            <a:off x="749808" y="3642712"/>
+            <a:off x="749808" y="4248695"/>
             <a:ext cx="2425446" cy="475488"/>
           </a:xfrm>
           <a:prstGeom prst="rect">
@@ -4414,13 +4036,13 @@
       </p:sp>
       <p:sp>
         <p:nvSpPr>
-          <p:cNvPr id="17" name="TextBox 16"/>
+          <p:cNvPr id="18" name="TextBox 17"/>
           <p:cNvSpPr txBox="1"/>
           <p:nvPr/>
         </p:nvSpPr>
         <p:spPr>
           <a:xfrm>
-            <a:off x="749808" y="4666997"/>
+            <a:off x="749808" y="4903478"/>
             <a:ext cx="2425446" cy="228600"/>
           </a:xfrm>
           <a:prstGeom prst="rect">
@@ -4456,14 +4078,14 @@
       </p:sp>
       <p:sp>
         <p:nvSpPr>
-          <p:cNvPr id="18" name="Rectangle 17"/>
+          <p:cNvPr id="19" name="Rectangle 18"/>
           <p:cNvSpPr/>
           <p:nvPr/>
         </p:nvSpPr>
         <p:spPr>
           <a:xfrm>
-            <a:off x="3394710" y="3258664"/>
-            <a:ext cx="2644902" cy="1737516"/>
+            <a:off x="3394710" y="3864647"/>
+            <a:ext cx="2644902" cy="1368014"/>
           </a:xfrm>
           <a:prstGeom prst="rect">
             <a:avLst/>
@@ -4505,13 +4127,13 @@
       </p:sp>
       <p:sp>
         <p:nvSpPr>
-          <p:cNvPr id="19" name="Rectangle 18"/>
+          <p:cNvPr id="20" name="Rectangle 19"/>
           <p:cNvSpPr/>
           <p:nvPr/>
         </p:nvSpPr>
         <p:spPr>
           <a:xfrm>
-            <a:off x="3394710" y="3258664"/>
+            <a:off x="3394710" y="3864647"/>
             <a:ext cx="2644902" cy="45720"/>
           </a:xfrm>
           <a:prstGeom prst="rect">
@@ -4554,13 +4176,13 @@
       </p:sp>
       <p:sp>
         <p:nvSpPr>
-          <p:cNvPr id="20" name="TextBox 19"/>
+          <p:cNvPr id="21" name="TextBox 20"/>
           <p:cNvSpPr txBox="1"/>
           <p:nvPr/>
         </p:nvSpPr>
         <p:spPr>
           <a:xfrm>
-            <a:off x="3504438" y="3386680"/>
+            <a:off x="3504438" y="3992663"/>
             <a:ext cx="2425446" cy="201168"/>
           </a:xfrm>
           <a:prstGeom prst="rect">
@@ -4589,20 +4211,20 @@
               <a:rPr>
                 <a:latin typeface="Inter"/>
               </a:rPr>
-              <a:t>PARTIAL</a:t>
+              <a:t>PARTLY AVAILABLE</a:t>
             </a:r>
           </a:p>
         </p:txBody>
       </p:sp>
       <p:sp>
         <p:nvSpPr>
-          <p:cNvPr id="21" name="TextBox 20"/>
+          <p:cNvPr id="22" name="TextBox 21"/>
           <p:cNvSpPr txBox="1"/>
           <p:nvPr/>
         </p:nvSpPr>
         <p:spPr>
           <a:xfrm>
-            <a:off x="3504438" y="3642712"/>
+            <a:off x="3504438" y="4248695"/>
             <a:ext cx="2425446" cy="475488"/>
           </a:xfrm>
           <a:prstGeom prst="rect">
@@ -4638,13 +4260,13 @@
       </p:sp>
       <p:sp>
         <p:nvSpPr>
-          <p:cNvPr id="22" name="TextBox 21"/>
+          <p:cNvPr id="23" name="TextBox 22"/>
           <p:cNvSpPr txBox="1"/>
           <p:nvPr/>
         </p:nvSpPr>
         <p:spPr>
           <a:xfrm>
-            <a:off x="3504438" y="4666997"/>
+            <a:off x="3504438" y="4903478"/>
             <a:ext cx="2425446" cy="228600"/>
           </a:xfrm>
           <a:prstGeom prst="rect">
@@ -4680,14 +4302,14 @@
       </p:sp>
       <p:sp>
         <p:nvSpPr>
-          <p:cNvPr id="23" name="Rectangle 22"/>
+          <p:cNvPr id="24" name="Rectangle 23"/>
           <p:cNvSpPr/>
           <p:nvPr/>
         </p:nvSpPr>
         <p:spPr>
           <a:xfrm>
-            <a:off x="6149340" y="3258664"/>
-            <a:ext cx="2644902" cy="1737516"/>
+            <a:off x="6149340" y="3864647"/>
+            <a:ext cx="2644902" cy="1368014"/>
           </a:xfrm>
           <a:prstGeom prst="rect">
             <a:avLst/>
@@ -4729,13 +4351,13 @@
       </p:sp>
       <p:sp>
         <p:nvSpPr>
-          <p:cNvPr id="24" name="Rectangle 23"/>
+          <p:cNvPr id="25" name="Rectangle 24"/>
           <p:cNvSpPr/>
           <p:nvPr/>
         </p:nvSpPr>
         <p:spPr>
           <a:xfrm>
-            <a:off x="6149340" y="3258664"/>
+            <a:off x="6149340" y="3864647"/>
             <a:ext cx="2644902" cy="45720"/>
           </a:xfrm>
           <a:prstGeom prst="rect">
@@ -4778,13 +4400,13 @@
       </p:sp>
       <p:sp>
         <p:nvSpPr>
-          <p:cNvPr id="25" name="TextBox 24"/>
+          <p:cNvPr id="26" name="TextBox 25"/>
           <p:cNvSpPr txBox="1"/>
           <p:nvPr/>
         </p:nvSpPr>
         <p:spPr>
           <a:xfrm>
-            <a:off x="6259068" y="3386680"/>
+            <a:off x="6259068" y="3992663"/>
             <a:ext cx="2425446" cy="201168"/>
           </a:xfrm>
           <a:prstGeom prst="rect">
@@ -4820,13 +4442,13 @@
       </p:sp>
       <p:sp>
         <p:nvSpPr>
-          <p:cNvPr id="26" name="TextBox 25"/>
+          <p:cNvPr id="27" name="TextBox 26"/>
           <p:cNvSpPr txBox="1"/>
           <p:nvPr/>
         </p:nvSpPr>
         <p:spPr>
           <a:xfrm>
-            <a:off x="6259068" y="3642712"/>
+            <a:off x="6259068" y="4248695"/>
             <a:ext cx="2425446" cy="475488"/>
           </a:xfrm>
           <a:prstGeom prst="rect">
@@ -4862,13 +4484,13 @@
       </p:sp>
       <p:sp>
         <p:nvSpPr>
-          <p:cNvPr id="27" name="TextBox 26"/>
+          <p:cNvPr id="28" name="TextBox 27"/>
           <p:cNvSpPr txBox="1"/>
           <p:nvPr/>
         </p:nvSpPr>
         <p:spPr>
           <a:xfrm>
-            <a:off x="6259068" y="4666997"/>
+            <a:off x="6259068" y="4903478"/>
             <a:ext cx="2425446" cy="228600"/>
           </a:xfrm>
           <a:prstGeom prst="rect">
@@ -4904,14 +4526,14 @@
       </p:sp>
       <p:sp>
         <p:nvSpPr>
-          <p:cNvPr id="28" name="Rectangle 27"/>
+          <p:cNvPr id="29" name="Rectangle 28"/>
           <p:cNvSpPr/>
           <p:nvPr/>
         </p:nvSpPr>
         <p:spPr>
           <a:xfrm>
-            <a:off x="8903970" y="3258664"/>
-            <a:ext cx="2644902" cy="1737516"/>
+            <a:off x="8903970" y="3864647"/>
+            <a:ext cx="2644902" cy="1368014"/>
           </a:xfrm>
           <a:prstGeom prst="rect">
             <a:avLst/>
@@ -4953,13 +4575,13 @@
       </p:sp>
       <p:sp>
         <p:nvSpPr>
-          <p:cNvPr id="29" name="Rectangle 28"/>
+          <p:cNvPr id="30" name="Rectangle 29"/>
           <p:cNvSpPr/>
           <p:nvPr/>
         </p:nvSpPr>
         <p:spPr>
           <a:xfrm>
-            <a:off x="8903970" y="3258664"/>
+            <a:off x="8903970" y="3864647"/>
             <a:ext cx="2644902" cy="45720"/>
           </a:xfrm>
           <a:prstGeom prst="rect">
@@ -5002,13 +4624,13 @@
       </p:sp>
       <p:sp>
         <p:nvSpPr>
-          <p:cNvPr id="30" name="TextBox 29"/>
+          <p:cNvPr id="31" name="TextBox 30"/>
           <p:cNvSpPr txBox="1"/>
           <p:nvPr/>
         </p:nvSpPr>
         <p:spPr>
           <a:xfrm>
-            <a:off x="9013698" y="3386680"/>
+            <a:off x="9013698" y="3992663"/>
             <a:ext cx="2425446" cy="201168"/>
           </a:xfrm>
           <a:prstGeom prst="rect">
@@ -5044,13 +4666,13 @@
       </p:sp>
       <p:sp>
         <p:nvSpPr>
-          <p:cNvPr id="31" name="TextBox 30"/>
+          <p:cNvPr id="32" name="TextBox 31"/>
           <p:cNvSpPr txBox="1"/>
           <p:nvPr/>
         </p:nvSpPr>
         <p:spPr>
           <a:xfrm>
-            <a:off x="9013698" y="3642712"/>
+            <a:off x="9013698" y="4248695"/>
             <a:ext cx="2425446" cy="475488"/>
           </a:xfrm>
           <a:prstGeom prst="rect">
@@ -5086,13 +4708,13 @@
       </p:sp>
       <p:sp>
         <p:nvSpPr>
-          <p:cNvPr id="32" name="TextBox 31"/>
+          <p:cNvPr id="33" name="TextBox 32"/>
           <p:cNvSpPr txBox="1"/>
           <p:nvPr/>
         </p:nvSpPr>
         <p:spPr>
           <a:xfrm>
-            <a:off x="9013698" y="4666997"/>
+            <a:off x="9013698" y="4903478"/>
             <a:ext cx="2425446" cy="228600"/>
           </a:xfrm>
           <a:prstGeom prst="rect">
@@ -5128,14 +4750,14 @@
       </p:sp>
       <p:sp>
         <p:nvSpPr>
-          <p:cNvPr id="33" name="Rectangle 32"/>
+          <p:cNvPr id="34" name="Rectangle 33"/>
           <p:cNvSpPr/>
           <p:nvPr/>
         </p:nvSpPr>
         <p:spPr>
           <a:xfrm>
-            <a:off x="640080" y="5105909"/>
-            <a:ext cx="10908792" cy="1112010"/>
+            <a:off x="640080" y="5342390"/>
+            <a:ext cx="10908792" cy="875529"/>
           </a:xfrm>
           <a:prstGeom prst="rect">
             <a:avLst/>
@@ -5177,14 +4799,14 @@
       </p:sp>
       <p:sp>
         <p:nvSpPr>
-          <p:cNvPr id="34" name="Rectangle 33"/>
+          <p:cNvPr id="35" name="Rectangle 34"/>
           <p:cNvSpPr/>
           <p:nvPr/>
         </p:nvSpPr>
         <p:spPr>
           <a:xfrm>
-            <a:off x="640080" y="5105909"/>
-            <a:ext cx="54864" cy="1112010"/>
+            <a:off x="640080" y="5342390"/>
+            <a:ext cx="54864" cy="875529"/>
           </a:xfrm>
           <a:prstGeom prst="rect">
             <a:avLst/>
@@ -5226,13 +4848,13 @@
       </p:sp>
       <p:sp>
         <p:nvSpPr>
-          <p:cNvPr id="35" name="TextBox 34"/>
+          <p:cNvPr id="36" name="TextBox 35"/>
           <p:cNvSpPr txBox="1"/>
           <p:nvPr/>
         </p:nvSpPr>
         <p:spPr>
           <a:xfrm>
-            <a:off x="804671" y="5215637"/>
+            <a:off x="804671" y="5452118"/>
             <a:ext cx="10616184" cy="228600"/>
           </a:xfrm>
           <a:prstGeom prst="rect">
@@ -5268,14 +4890,14 @@
       </p:sp>
       <p:sp>
         <p:nvSpPr>
-          <p:cNvPr id="36" name="TextBox 35"/>
+          <p:cNvPr id="37" name="TextBox 36"/>
           <p:cNvSpPr txBox="1"/>
           <p:nvPr/>
         </p:nvSpPr>
         <p:spPr>
           <a:xfrm>
-            <a:off x="804671" y="5499101"/>
-            <a:ext cx="10616184" cy="627378"/>
+            <a:off x="804671" y="5735582"/>
+            <a:ext cx="10616184" cy="390897"/>
           </a:xfrm>
           <a:prstGeom prst="rect">
             <a:avLst/>
@@ -5310,7 +4932,7 @@
       </p:sp>
       <p:sp>
         <p:nvSpPr>
-          <p:cNvPr id="37" name="Rectangle 36"/>
+          <p:cNvPr id="38" name="Rectangle 37"/>
           <p:cNvSpPr/>
           <p:nvPr/>
         </p:nvSpPr>
@@ -5359,7 +4981,7 @@
       </p:sp>
       <p:sp>
         <p:nvSpPr>
-          <p:cNvPr id="38" name="TextBox 37"/>
+          <p:cNvPr id="39" name="TextBox 38"/>
           <p:cNvSpPr txBox="1"/>
           <p:nvPr/>
         </p:nvSpPr>
@@ -5401,7 +5023,7 @@
       </p:sp>
       <p:sp>
         <p:nvSpPr>
-          <p:cNvPr id="39" name="TextBox 38"/>
+          <p:cNvPr id="40" name="TextBox 39"/>
           <p:cNvSpPr txBox="1"/>
           <p:nvPr/>
         </p:nvSpPr>
@@ -5443,7 +5065,7 @@
       </p:sp>
       <p:sp>
         <p:nvSpPr>
-          <p:cNvPr id="40" name="TextBox 39"/>
+          <p:cNvPr id="41" name="TextBox 40"/>
           <p:cNvSpPr txBox="1"/>
           <p:nvPr/>
         </p:nvSpPr>
@@ -5559,7 +5181,7 @@
         <p:spPr>
           <a:xfrm>
             <a:off x="640080" y="329184"/>
-            <a:ext cx="5303520" cy="182880"/>
+            <a:ext cx="9875520" cy="182880"/>
           </a:xfrm>
           <a:prstGeom prst="rect">
             <a:avLst/>
@@ -5600,48 +5222,6 @@
         </p:nvSpPr>
         <p:spPr>
           <a:xfrm>
-            <a:off x="5897880" y="310896"/>
-            <a:ext cx="4800600" cy="256032"/>
-          </a:xfrm>
-          <a:prstGeom prst="rect">
-            <a:avLst/>
-          </a:prstGeom>
-          <a:noFill/>
-        </p:spPr>
-        <p:txBody>
-          <a:bodyPr wrap="none" lIns="9144" rIns="9144" tIns="9144" bIns="9144" anchor="t">
-            <a:spAutoFit/>
-          </a:bodyPr>
-          <a:lstStyle/>
-          <a:p>
-            <a:pPr algn="r">
-              <a:spcAft>
-                <a:spcPts val="0"/>
-              </a:spcAft>
-              <a:defRPr sz="680" b="1">
-                <a:solidFill>
-                  <a:srgbClr val="4F6B00"/>
-                </a:solidFill>
-                <a:latin typeface="Inter"/>
-              </a:defRPr>
-            </a:pPr>
-            <a:r>
-              <a:rPr>
-                <a:latin typeface="Inter"/>
-              </a:rPr>
-              <a:t>Illustrative, Gradient Maintained — demo data, not the client's holdings or managers</a:t>
-            </a:r>
-          </a:p>
-        </p:txBody>
-      </p:sp>
-      <p:sp>
-        <p:nvSpPr>
-          <p:cNvPr id="5" name="TextBox 4"/>
-          <p:cNvSpPr txBox="1"/>
-          <p:nvPr/>
-        </p:nvSpPr>
-        <p:spPr>
-          <a:xfrm>
             <a:off x="640080" y="566928"/>
             <a:ext cx="10058400" cy="530352"/>
           </a:xfrm>
@@ -5678,7 +5258,7 @@
       </p:sp>
       <p:sp>
         <p:nvSpPr>
-          <p:cNvPr id="6" name="Rectangle 5"/>
+          <p:cNvPr id="5" name="Rectangle 4"/>
           <p:cNvSpPr/>
           <p:nvPr/>
         </p:nvSpPr>
@@ -5727,7 +5307,7 @@
       </p:sp>
       <p:sp>
         <p:nvSpPr>
-          <p:cNvPr id="7" name="Rectangle 6"/>
+          <p:cNvPr id="6" name="Rectangle 5"/>
           <p:cNvSpPr/>
           <p:nvPr/>
         </p:nvSpPr>
@@ -5776,7 +5356,7 @@
       </p:sp>
       <p:sp>
         <p:nvSpPr>
-          <p:cNvPr id="8" name="TextBox 7"/>
+          <p:cNvPr id="7" name="TextBox 6"/>
           <p:cNvSpPr txBox="1"/>
           <p:nvPr/>
         </p:nvSpPr>
@@ -5818,7 +5398,7 @@
       </p:sp>
       <p:sp>
         <p:nvSpPr>
-          <p:cNvPr id="9" name="TextBox 8"/>
+          <p:cNvPr id="8" name="TextBox 7"/>
           <p:cNvSpPr txBox="1"/>
           <p:nvPr/>
         </p:nvSpPr>
@@ -5860,7 +5440,7 @@
       </p:sp>
       <p:graphicFrame>
         <p:nvGraphicFramePr>
-          <p:cNvPr id="10" name="Table 9"/>
+          <p:cNvPr id="9" name="Table 8"/>
           <p:cNvGraphicFramePr>
             <a:graphicFrameLocks noGrp="1"/>
           </p:cNvGraphicFramePr>
@@ -6385,7 +5965,7 @@
       </p:graphicFrame>
       <p:sp>
         <p:nvSpPr>
-          <p:cNvPr id="11" name="Rectangle 10"/>
+          <p:cNvPr id="10" name="Rectangle 9"/>
           <p:cNvSpPr/>
           <p:nvPr/>
         </p:nvSpPr>
@@ -6434,7 +6014,7 @@
       </p:sp>
       <p:sp>
         <p:nvSpPr>
-          <p:cNvPr id="12" name="TextBox 11"/>
+          <p:cNvPr id="11" name="TextBox 10"/>
           <p:cNvSpPr txBox="1"/>
           <p:nvPr/>
         </p:nvSpPr>
@@ -6469,14 +6049,14 @@
               <a:rPr>
                 <a:latin typeface="Inter"/>
               </a:rPr>
-              <a:t>PARTIAL</a:t>
+              <a:t>PARTLY AVAILABLE</a:t>
             </a:r>
           </a:p>
         </p:txBody>
       </p:sp>
       <p:graphicFrame>
         <p:nvGraphicFramePr>
-          <p:cNvPr id="13" name="Table 12"/>
+          <p:cNvPr id="12" name="Table 11"/>
           <p:cNvGraphicFramePr>
             <a:graphicFrameLocks noGrp="1"/>
           </p:cNvGraphicFramePr>
@@ -6669,7 +6249,7 @@
       </p:graphicFrame>
       <p:sp>
         <p:nvSpPr>
-          <p:cNvPr id="14" name="Rectangle 13"/>
+          <p:cNvPr id="13" name="Rectangle 12"/>
           <p:cNvSpPr/>
           <p:nvPr/>
         </p:nvSpPr>
@@ -6718,7 +6298,7 @@
       </p:sp>
       <p:sp>
         <p:nvSpPr>
-          <p:cNvPr id="15" name="TextBox 14"/>
+          <p:cNvPr id="14" name="TextBox 13"/>
           <p:cNvSpPr txBox="1"/>
           <p:nvPr/>
         </p:nvSpPr>
@@ -6760,7 +6340,7 @@
       </p:sp>
       <p:sp>
         <p:nvSpPr>
-          <p:cNvPr id="16" name="TextBox 15"/>
+          <p:cNvPr id="15" name="TextBox 14"/>
           <p:cNvSpPr txBox="1"/>
           <p:nvPr/>
         </p:nvSpPr>
@@ -6802,7 +6382,7 @@
       </p:sp>
       <p:sp>
         <p:nvSpPr>
-          <p:cNvPr id="17" name="TextBox 16"/>
+          <p:cNvPr id="16" name="TextBox 15"/>
           <p:cNvSpPr txBox="1"/>
           <p:nvPr/>
         </p:nvSpPr>
@@ -6918,7 +6498,7 @@
         <p:spPr>
           <a:xfrm>
             <a:off x="640080" y="329184"/>
-            <a:ext cx="5303520" cy="182880"/>
+            <a:ext cx="9875520" cy="182880"/>
           </a:xfrm>
           <a:prstGeom prst="rect">
             <a:avLst/>
@@ -6959,48 +6539,6 @@
         </p:nvSpPr>
         <p:spPr>
           <a:xfrm>
-            <a:off x="5897880" y="310896"/>
-            <a:ext cx="4800600" cy="256032"/>
-          </a:xfrm>
-          <a:prstGeom prst="rect">
-            <a:avLst/>
-          </a:prstGeom>
-          <a:noFill/>
-        </p:spPr>
-        <p:txBody>
-          <a:bodyPr wrap="none" lIns="9144" rIns="9144" tIns="9144" bIns="9144" anchor="t">
-            <a:spAutoFit/>
-          </a:bodyPr>
-          <a:lstStyle/>
-          <a:p>
-            <a:pPr algn="r">
-              <a:spcAft>
-                <a:spcPts val="0"/>
-              </a:spcAft>
-              <a:defRPr sz="680" b="1">
-                <a:solidFill>
-                  <a:srgbClr val="4F6B00"/>
-                </a:solidFill>
-                <a:latin typeface="Inter"/>
-              </a:defRPr>
-            </a:pPr>
-            <a:r>
-              <a:rPr>
-                <a:latin typeface="Inter"/>
-              </a:rPr>
-              <a:t>Illustrative, Gradient Maintained — demo data, not the client's holdings or managers</a:t>
-            </a:r>
-          </a:p>
-        </p:txBody>
-      </p:sp>
-      <p:sp>
-        <p:nvSpPr>
-          <p:cNvPr id="5" name="TextBox 4"/>
-          <p:cNvSpPr txBox="1"/>
-          <p:nvPr/>
-        </p:nvSpPr>
-        <p:spPr>
-          <a:xfrm>
             <a:off x="640080" y="566928"/>
             <a:ext cx="10058400" cy="530352"/>
           </a:xfrm>
@@ -7037,7 +6575,7 @@
       </p:sp>
       <p:sp>
         <p:nvSpPr>
-          <p:cNvPr id="6" name="Rectangle 5"/>
+          <p:cNvPr id="5" name="Rectangle 4"/>
           <p:cNvSpPr/>
           <p:nvPr/>
         </p:nvSpPr>
@@ -7086,7 +6624,7 @@
       </p:sp>
       <p:sp>
         <p:nvSpPr>
-          <p:cNvPr id="7" name="Rectangle 6"/>
+          <p:cNvPr id="6" name="Rectangle 5"/>
           <p:cNvSpPr/>
           <p:nvPr/>
         </p:nvSpPr>
@@ -7135,7 +6673,7 @@
       </p:sp>
       <p:sp>
         <p:nvSpPr>
-          <p:cNvPr id="8" name="TextBox 7"/>
+          <p:cNvPr id="7" name="TextBox 6"/>
           <p:cNvSpPr txBox="1"/>
           <p:nvPr/>
         </p:nvSpPr>
@@ -7177,7 +6715,7 @@
       </p:sp>
       <p:sp>
         <p:nvSpPr>
-          <p:cNvPr id="9" name="TextBox 8"/>
+          <p:cNvPr id="8" name="TextBox 7"/>
           <p:cNvSpPr txBox="1"/>
           <p:nvPr/>
         </p:nvSpPr>
@@ -7219,7 +6757,7 @@
       </p:sp>
       <p:graphicFrame>
         <p:nvGraphicFramePr>
-          <p:cNvPr id="10" name="Table 9"/>
+          <p:cNvPr id="9" name="Table 8"/>
           <p:cNvGraphicFramePr>
             <a:graphicFrameLocks noGrp="1"/>
           </p:cNvGraphicFramePr>
@@ -7637,7 +7175,7 @@
       </p:graphicFrame>
       <p:sp>
         <p:nvSpPr>
-          <p:cNvPr id="11" name="Rectangle 10"/>
+          <p:cNvPr id="10" name="Rectangle 9"/>
           <p:cNvSpPr/>
           <p:nvPr/>
         </p:nvSpPr>
@@ -7686,7 +7224,7 @@
       </p:sp>
       <p:sp>
         <p:nvSpPr>
-          <p:cNvPr id="12" name="TextBox 11"/>
+          <p:cNvPr id="11" name="TextBox 10"/>
           <p:cNvSpPr txBox="1"/>
           <p:nvPr/>
         </p:nvSpPr>
@@ -7728,7 +7266,7 @@
       </p:sp>
       <p:sp>
         <p:nvSpPr>
-          <p:cNvPr id="13" name="TextBox 12"/>
+          <p:cNvPr id="12" name="TextBox 11"/>
           <p:cNvSpPr txBox="1"/>
           <p:nvPr/>
         </p:nvSpPr>
@@ -7770,7 +7308,7 @@
       </p:sp>
       <p:sp>
         <p:nvSpPr>
-          <p:cNvPr id="14" name="TextBox 13"/>
+          <p:cNvPr id="13" name="TextBox 12"/>
           <p:cNvSpPr txBox="1"/>
           <p:nvPr/>
         </p:nvSpPr>
@@ -7886,7 +7424,7 @@
         <p:spPr>
           <a:xfrm>
             <a:off x="640080" y="329184"/>
-            <a:ext cx="5303520" cy="182880"/>
+            <a:ext cx="9875520" cy="182880"/>
           </a:xfrm>
           <a:prstGeom prst="rect">
             <a:avLst/>
@@ -7927,48 +7465,6 @@
         </p:nvSpPr>
         <p:spPr>
           <a:xfrm>
-            <a:off x="5897880" y="310896"/>
-            <a:ext cx="4800600" cy="256032"/>
-          </a:xfrm>
-          <a:prstGeom prst="rect">
-            <a:avLst/>
-          </a:prstGeom>
-          <a:noFill/>
-        </p:spPr>
-        <p:txBody>
-          <a:bodyPr wrap="none" lIns="9144" rIns="9144" tIns="9144" bIns="9144" anchor="t">
-            <a:spAutoFit/>
-          </a:bodyPr>
-          <a:lstStyle/>
-          <a:p>
-            <a:pPr algn="r">
-              <a:spcAft>
-                <a:spcPts val="0"/>
-              </a:spcAft>
-              <a:defRPr sz="680" b="1">
-                <a:solidFill>
-                  <a:srgbClr val="4F6B00"/>
-                </a:solidFill>
-                <a:latin typeface="Inter"/>
-              </a:defRPr>
-            </a:pPr>
-            <a:r>
-              <a:rPr>
-                <a:latin typeface="Inter"/>
-              </a:rPr>
-              <a:t>Illustrative, Gradient Maintained — demo data, not the client's holdings or managers</a:t>
-            </a:r>
-          </a:p>
-        </p:txBody>
-      </p:sp>
-      <p:sp>
-        <p:nvSpPr>
-          <p:cNvPr id="5" name="TextBox 4"/>
-          <p:cNvSpPr txBox="1"/>
-          <p:nvPr/>
-        </p:nvSpPr>
-        <p:spPr>
-          <a:xfrm>
             <a:off x="640080" y="566928"/>
             <a:ext cx="10058400" cy="530352"/>
           </a:xfrm>
@@ -8005,7 +7501,7 @@
       </p:sp>
       <p:sp>
         <p:nvSpPr>
-          <p:cNvPr id="6" name="Rectangle 5"/>
+          <p:cNvPr id="5" name="Rectangle 4"/>
           <p:cNvSpPr/>
           <p:nvPr/>
         </p:nvSpPr>
@@ -8054,7 +7550,7 @@
       </p:sp>
       <p:sp>
         <p:nvSpPr>
-          <p:cNvPr id="7" name="Rectangle 6"/>
+          <p:cNvPr id="6" name="Rectangle 5"/>
           <p:cNvSpPr/>
           <p:nvPr/>
         </p:nvSpPr>
@@ -8103,7 +7599,7 @@
       </p:sp>
       <p:sp>
         <p:nvSpPr>
-          <p:cNvPr id="8" name="TextBox 7"/>
+          <p:cNvPr id="7" name="TextBox 6"/>
           <p:cNvSpPr txBox="1"/>
           <p:nvPr/>
         </p:nvSpPr>
@@ -8145,7 +7641,7 @@
       </p:sp>
       <p:sp>
         <p:nvSpPr>
-          <p:cNvPr id="9" name="TextBox 8"/>
+          <p:cNvPr id="8" name="TextBox 7"/>
           <p:cNvSpPr txBox="1"/>
           <p:nvPr/>
         </p:nvSpPr>
@@ -8187,7 +7683,7 @@
       </p:sp>
       <p:graphicFrame>
         <p:nvGraphicFramePr>
-          <p:cNvPr id="10" name="Table 9"/>
+          <p:cNvPr id="9" name="Table 8"/>
           <p:cNvGraphicFramePr>
             <a:graphicFrameLocks noGrp="1"/>
           </p:cNvGraphicFramePr>
@@ -8336,7 +7832,7 @@
                         <a:rPr>
                           <a:latin typeface="Inter"/>
                         </a:rPr>
-                        <a:t>● available</a:t>
+                        <a:t>● Available</a:t>
                       </a:r>
                     </a:p>
                   </a:txBody>
@@ -8419,7 +7915,7 @@
                         <a:rPr>
                           <a:latin typeface="Inter"/>
                         </a:rPr>
-                        <a:t>● partial</a:t>
+                        <a:t>● Partly available</a:t>
                       </a:r>
                     </a:p>
                   </a:txBody>
@@ -8502,7 +7998,7 @@
                         <a:rPr>
                           <a:latin typeface="Inter"/>
                         </a:rPr>
-                        <a:t>● partial</a:t>
+                        <a:t>● Partly available</a:t>
                       </a:r>
                     </a:p>
                   </a:txBody>
@@ -8585,7 +8081,7 @@
                         <a:rPr>
                           <a:latin typeface="Inter"/>
                         </a:rPr>
-                        <a:t>● partial</a:t>
+                        <a:t>● Partly available</a:t>
                       </a:r>
                     </a:p>
                   </a:txBody>
@@ -8668,7 +8164,7 @@
                         <a:rPr>
                           <a:latin typeface="Inter"/>
                         </a:rPr>
-                        <a:t>● partial</a:t>
+                        <a:t>● Partly available</a:t>
                       </a:r>
                     </a:p>
                   </a:txBody>
@@ -8751,7 +8247,7 @@
                         <a:rPr>
                           <a:latin typeface="Inter"/>
                         </a:rPr>
-                        <a:t>● partial</a:t>
+                        <a:t>● Partly available</a:t>
                       </a:r>
                     </a:p>
                   </a:txBody>
@@ -8834,7 +8330,7 @@
                         <a:rPr>
                           <a:latin typeface="Inter"/>
                         </a:rPr>
-                        <a:t>● unavailable</a:t>
+                        <a:t>● Not available</a:t>
                       </a:r>
                     </a:p>
                   </a:txBody>
@@ -8878,7 +8374,7 @@
       </p:graphicFrame>
       <p:sp>
         <p:nvSpPr>
-          <p:cNvPr id="11" name="Rectangle 10"/>
+          <p:cNvPr id="10" name="Rectangle 9"/>
           <p:cNvSpPr/>
           <p:nvPr/>
         </p:nvSpPr>
@@ -8927,7 +8423,7 @@
       </p:sp>
       <p:sp>
         <p:nvSpPr>
-          <p:cNvPr id="12" name="TextBox 11"/>
+          <p:cNvPr id="11" name="TextBox 10"/>
           <p:cNvSpPr txBox="1"/>
           <p:nvPr/>
         </p:nvSpPr>
@@ -8969,7 +8465,7 @@
       </p:sp>
       <p:sp>
         <p:nvSpPr>
-          <p:cNvPr id="13" name="TextBox 12"/>
+          <p:cNvPr id="12" name="TextBox 11"/>
           <p:cNvSpPr txBox="1"/>
           <p:nvPr/>
         </p:nvSpPr>
@@ -9011,7 +8507,7 @@
       </p:sp>
       <p:sp>
         <p:nvSpPr>
-          <p:cNvPr id="14" name="TextBox 13"/>
+          <p:cNvPr id="13" name="TextBox 12"/>
           <p:cNvSpPr txBox="1"/>
           <p:nvPr/>
         </p:nvSpPr>
@@ -9127,7 +8623,7 @@
         <p:spPr>
           <a:xfrm>
             <a:off x="640080" y="329184"/>
-            <a:ext cx="5303520" cy="182880"/>
+            <a:ext cx="9875520" cy="182880"/>
           </a:xfrm>
           <a:prstGeom prst="rect">
             <a:avLst/>
@@ -9155,7 +8651,7 @@
               <a:rPr>
                 <a:latin typeface="Inter"/>
               </a:rPr>
-              <a:t>FULL SELF-TEST: 14 PROBES AGAINST THE LIVE CONNECTOR</a:t>
+              <a:t>13 OF 14 CHECKS PASSED AGAINST THE GRADIENTCIO CONNECTION</a:t>
             </a:r>
           </a:p>
         </p:txBody>
@@ -9163,48 +8659,6 @@
       <p:sp>
         <p:nvSpPr>
           <p:cNvPr id="4" name="TextBox 3"/>
-          <p:cNvSpPr txBox="1"/>
-          <p:nvPr/>
-        </p:nvSpPr>
-        <p:spPr>
-          <a:xfrm>
-            <a:off x="5897880" y="310896"/>
-            <a:ext cx="4800600" cy="256032"/>
-          </a:xfrm>
-          <a:prstGeom prst="rect">
-            <a:avLst/>
-          </a:prstGeom>
-          <a:noFill/>
-        </p:spPr>
-        <p:txBody>
-          <a:bodyPr wrap="none" lIns="9144" rIns="9144" tIns="9144" bIns="9144" anchor="t">
-            <a:spAutoFit/>
-          </a:bodyPr>
-          <a:lstStyle/>
-          <a:p>
-            <a:pPr algn="r">
-              <a:spcAft>
-                <a:spcPts val="0"/>
-              </a:spcAft>
-              <a:defRPr sz="680" b="1">
-                <a:solidFill>
-                  <a:srgbClr val="4F6B00"/>
-                </a:solidFill>
-                <a:latin typeface="Inter"/>
-              </a:defRPr>
-            </a:pPr>
-            <a:r>
-              <a:rPr>
-                <a:latin typeface="Inter"/>
-              </a:rPr>
-              <a:t>Illustrative, Gradient Maintained — demo data, not the client's holdings or managers</a:t>
-            </a:r>
-          </a:p>
-        </p:txBody>
-      </p:sp>
-      <p:sp>
-        <p:nvSpPr>
-          <p:cNvPr id="5" name="TextBox 4"/>
           <p:cNvSpPr txBox="1"/>
           <p:nvPr/>
         </p:nvSpPr>
@@ -9239,14 +8693,14 @@
               <a:rPr>
                 <a:latin typeface="Inter"/>
               </a:rPr>
-              <a:t>Contract checks</a:t>
+              <a:t>Connection checks</a:t>
             </a:r>
           </a:p>
         </p:txBody>
       </p:sp>
       <p:sp>
         <p:nvSpPr>
-          <p:cNvPr id="6" name="Rectangle 5"/>
+          <p:cNvPr id="5" name="Rectangle 4"/>
           <p:cNvSpPr/>
           <p:nvPr/>
         </p:nvSpPr>
@@ -9295,7 +8749,7 @@
       </p:sp>
       <p:sp>
         <p:nvSpPr>
-          <p:cNvPr id="7" name="Rectangle 6"/>
+          <p:cNvPr id="6" name="Rectangle 5"/>
           <p:cNvSpPr/>
           <p:nvPr/>
         </p:nvSpPr>
@@ -9344,7 +8798,7 @@
       </p:sp>
       <p:sp>
         <p:nvSpPr>
-          <p:cNvPr id="8" name="TextBox 7"/>
+          <p:cNvPr id="7" name="TextBox 6"/>
           <p:cNvSpPr txBox="1"/>
           <p:nvPr/>
         </p:nvSpPr>
@@ -9386,7 +8840,7 @@
       </p:sp>
       <p:graphicFrame>
         <p:nvGraphicFramePr>
-          <p:cNvPr id="9" name="Table 8"/>
+          <p:cNvPr id="8" name="Table 7"/>
           <p:cNvGraphicFramePr>
             <a:graphicFrameLocks noGrp="1"/>
           </p:cNvGraphicFramePr>
@@ -9427,7 +8881,7 @@
                         <a:rPr>
                           <a:latin typeface="Inter"/>
                         </a:rPr>
-                        <a:t>Probe</a:t>
+                        <a:t>Check</a:t>
                       </a:r>
                     </a:p>
                   </a:txBody>
@@ -11160,7 +10614,7 @@
       </p:graphicFrame>
       <p:sp>
         <p:nvSpPr>
-          <p:cNvPr id="10" name="Rectangle 9"/>
+          <p:cNvPr id="9" name="Rectangle 8"/>
           <p:cNvSpPr/>
           <p:nvPr/>
         </p:nvSpPr>
@@ -11209,7 +10663,7 @@
       </p:sp>
       <p:sp>
         <p:nvSpPr>
-          <p:cNvPr id="11" name="TextBox 10"/>
+          <p:cNvPr id="10" name="TextBox 9"/>
           <p:cNvSpPr txBox="1"/>
           <p:nvPr/>
         </p:nvSpPr>
@@ -11251,7 +10705,7 @@
       </p:sp>
       <p:sp>
         <p:nvSpPr>
-          <p:cNvPr id="12" name="TextBox 11"/>
+          <p:cNvPr id="11" name="TextBox 10"/>
           <p:cNvSpPr txBox="1"/>
           <p:nvPr/>
         </p:nvSpPr>
@@ -11293,7 +10747,7 @@
       </p:sp>
       <p:sp>
         <p:nvSpPr>
-          <p:cNvPr id="13" name="TextBox 12"/>
+          <p:cNvPr id="12" name="TextBox 11"/>
           <p:cNvSpPr txBox="1"/>
           <p:nvPr/>
         </p:nvSpPr>
@@ -11409,7 +10863,7 @@
         <p:spPr>
           <a:xfrm>
             <a:off x="640080" y="329184"/>
-            <a:ext cx="5303520" cy="182880"/>
+            <a:ext cx="9875520" cy="182880"/>
           </a:xfrm>
           <a:prstGeom prst="rect">
             <a:avLst/>
@@ -11437,7 +10891,7 @@
               <a:rPr>
                 <a:latin typeface="Inter"/>
               </a:rPr>
-              <a:t>FULL SELF-TEST: 14 PROBES AGAINST THE LIVE CONNECTOR</a:t>
+              <a:t>13 OF 14 CHECKS PASSED AGAINST THE GRADIENTCIO CONNECTION</a:t>
             </a:r>
           </a:p>
         </p:txBody>
@@ -11445,48 +10899,6 @@
       <p:sp>
         <p:nvSpPr>
           <p:cNvPr id="4" name="TextBox 3"/>
-          <p:cNvSpPr txBox="1"/>
-          <p:nvPr/>
-        </p:nvSpPr>
-        <p:spPr>
-          <a:xfrm>
-            <a:off x="5897880" y="310896"/>
-            <a:ext cx="4800600" cy="256032"/>
-          </a:xfrm>
-          <a:prstGeom prst="rect">
-            <a:avLst/>
-          </a:prstGeom>
-          <a:noFill/>
-        </p:spPr>
-        <p:txBody>
-          <a:bodyPr wrap="none" lIns="9144" rIns="9144" tIns="9144" bIns="9144" anchor="t">
-            <a:spAutoFit/>
-          </a:bodyPr>
-          <a:lstStyle/>
-          <a:p>
-            <a:pPr algn="r">
-              <a:spcAft>
-                <a:spcPts val="0"/>
-              </a:spcAft>
-              <a:defRPr sz="680" b="1">
-                <a:solidFill>
-                  <a:srgbClr val="4F6B00"/>
-                </a:solidFill>
-                <a:latin typeface="Inter"/>
-              </a:defRPr>
-            </a:pPr>
-            <a:r>
-              <a:rPr>
-                <a:latin typeface="Inter"/>
-              </a:rPr>
-              <a:t>Illustrative, Gradient Maintained — demo data, not the client's holdings or managers</a:t>
-            </a:r>
-          </a:p>
-        </p:txBody>
-      </p:sp>
-      <p:sp>
-        <p:nvSpPr>
-          <p:cNvPr id="5" name="TextBox 4"/>
           <p:cNvSpPr txBox="1"/>
           <p:nvPr/>
         </p:nvSpPr>
@@ -11521,14 +10933,14 @@
               <a:rPr>
                 <a:latin typeface="Inter"/>
               </a:rPr>
-              <a:t>Contract checks — continued</a:t>
+              <a:t>Connection checks — continued</a:t>
             </a:r>
           </a:p>
         </p:txBody>
       </p:sp>
       <p:sp>
         <p:nvSpPr>
-          <p:cNvPr id="6" name="Rectangle 5"/>
+          <p:cNvPr id="5" name="Rectangle 4"/>
           <p:cNvSpPr/>
           <p:nvPr/>
         </p:nvSpPr>
@@ -11577,7 +10989,7 @@
       </p:sp>
       <p:sp>
         <p:nvSpPr>
-          <p:cNvPr id="7" name="Rectangle 6"/>
+          <p:cNvPr id="6" name="Rectangle 5"/>
           <p:cNvSpPr/>
           <p:nvPr/>
         </p:nvSpPr>
@@ -11626,7 +11038,7 @@
       </p:sp>
       <p:sp>
         <p:nvSpPr>
-          <p:cNvPr id="8" name="TextBox 7"/>
+          <p:cNvPr id="7" name="TextBox 6"/>
           <p:cNvSpPr txBox="1"/>
           <p:nvPr/>
         </p:nvSpPr>
@@ -11668,7 +11080,7 @@
       </p:sp>
       <p:sp>
         <p:nvSpPr>
-          <p:cNvPr id="9" name="TextBox 8"/>
+          <p:cNvPr id="8" name="TextBox 7"/>
           <p:cNvSpPr txBox="1"/>
           <p:nvPr/>
         </p:nvSpPr>
@@ -11710,7 +11122,7 @@
       </p:sp>
       <p:graphicFrame>
         <p:nvGraphicFramePr>
-          <p:cNvPr id="10" name="Table 9"/>
+          <p:cNvPr id="9" name="Table 8"/>
           <p:cNvGraphicFramePr>
             <a:graphicFrameLocks noGrp="1"/>
           </p:cNvGraphicFramePr>
@@ -11751,7 +11163,7 @@
                         <a:rPr>
                           <a:latin typeface="Inter"/>
                         </a:rPr>
-                        <a:t>Probe</a:t>
+                        <a:t>Check</a:t>
                       </a:r>
                     </a:p>
                   </a:txBody>
@@ -12150,7 +11562,7 @@
       </p:graphicFrame>
       <p:sp>
         <p:nvSpPr>
-          <p:cNvPr id="11" name="Rectangle 10"/>
+          <p:cNvPr id="10" name="Rectangle 9"/>
           <p:cNvSpPr/>
           <p:nvPr/>
         </p:nvSpPr>
@@ -12199,7 +11611,7 @@
       </p:sp>
       <p:sp>
         <p:nvSpPr>
-          <p:cNvPr id="12" name="Rectangle 11"/>
+          <p:cNvPr id="11" name="Rectangle 10"/>
           <p:cNvSpPr/>
           <p:nvPr/>
         </p:nvSpPr>
@@ -12248,7 +11660,7 @@
       </p:sp>
       <p:sp>
         <p:nvSpPr>
-          <p:cNvPr id="13" name="TextBox 12"/>
+          <p:cNvPr id="12" name="TextBox 11"/>
           <p:cNvSpPr txBox="1"/>
           <p:nvPr/>
         </p:nvSpPr>
@@ -12290,7 +11702,7 @@
       </p:sp>
       <p:sp>
         <p:nvSpPr>
-          <p:cNvPr id="14" name="TextBox 13"/>
+          <p:cNvPr id="13" name="TextBox 12"/>
           <p:cNvSpPr txBox="1"/>
           <p:nvPr/>
         </p:nvSpPr>
@@ -12332,7 +11744,7 @@
       </p:sp>
       <p:sp>
         <p:nvSpPr>
-          <p:cNvPr id="15" name="Rectangle 14"/>
+          <p:cNvPr id="14" name="Rectangle 13"/>
           <p:cNvSpPr/>
           <p:nvPr/>
         </p:nvSpPr>
@@ -12381,7 +11793,7 @@
       </p:sp>
       <p:sp>
         <p:nvSpPr>
-          <p:cNvPr id="16" name="TextBox 15"/>
+          <p:cNvPr id="15" name="TextBox 14"/>
           <p:cNvSpPr txBox="1"/>
           <p:nvPr/>
         </p:nvSpPr>
@@ -12423,7 +11835,7 @@
       </p:sp>
       <p:sp>
         <p:nvSpPr>
-          <p:cNvPr id="17" name="TextBox 16"/>
+          <p:cNvPr id="16" name="TextBox 15"/>
           <p:cNvSpPr txBox="1"/>
           <p:nvPr/>
         </p:nvSpPr>
@@ -12465,7 +11877,7 @@
       </p:sp>
       <p:sp>
         <p:nvSpPr>
-          <p:cNvPr id="18" name="TextBox 17"/>
+          <p:cNvPr id="17" name="TextBox 16"/>
           <p:cNvSpPr txBox="1"/>
           <p:nvPr/>
         </p:nvSpPr>
@@ -12581,7 +11993,7 @@
         <p:spPr>
           <a:xfrm>
             <a:off x="640080" y="329184"/>
-            <a:ext cx="5303520" cy="182880"/>
+            <a:ext cx="9875520" cy="182880"/>
           </a:xfrm>
           <a:prstGeom prst="rect">
             <a:avLst/>
@@ -12622,48 +12034,6 @@
         </p:nvSpPr>
         <p:spPr>
           <a:xfrm>
-            <a:off x="5897880" y="310896"/>
-            <a:ext cx="4800600" cy="256032"/>
-          </a:xfrm>
-          <a:prstGeom prst="rect">
-            <a:avLst/>
-          </a:prstGeom>
-          <a:noFill/>
-        </p:spPr>
-        <p:txBody>
-          <a:bodyPr wrap="none" lIns="9144" rIns="9144" tIns="9144" bIns="9144" anchor="t">
-            <a:spAutoFit/>
-          </a:bodyPr>
-          <a:lstStyle/>
-          <a:p>
-            <a:pPr algn="r">
-              <a:spcAft>
-                <a:spcPts val="0"/>
-              </a:spcAft>
-              <a:defRPr sz="680" b="1">
-                <a:solidFill>
-                  <a:srgbClr val="4F6B00"/>
-                </a:solidFill>
-                <a:latin typeface="Inter"/>
-              </a:defRPr>
-            </a:pPr>
-            <a:r>
-              <a:rPr>
-                <a:latin typeface="Inter"/>
-              </a:rPr>
-              <a:t>Illustrative, Gradient Maintained — demo data, not the client's holdings or managers</a:t>
-            </a:r>
-          </a:p>
-        </p:txBody>
-      </p:sp>
-      <p:sp>
-        <p:nvSpPr>
-          <p:cNvPr id="5" name="TextBox 4"/>
-          <p:cNvSpPr txBox="1"/>
-          <p:nvPr/>
-        </p:nvSpPr>
-        <p:spPr>
-          <a:xfrm>
             <a:off x="640080" y="566928"/>
             <a:ext cx="10058400" cy="530352"/>
           </a:xfrm>
@@ -12700,7 +12070,7 @@
       </p:sp>
       <p:sp>
         <p:nvSpPr>
-          <p:cNvPr id="6" name="Rectangle 5"/>
+          <p:cNvPr id="5" name="Rectangle 4"/>
           <p:cNvSpPr/>
           <p:nvPr/>
         </p:nvSpPr>
@@ -12749,7 +12119,7 @@
       </p:sp>
       <p:sp>
         <p:nvSpPr>
-          <p:cNvPr id="7" name="Rectangle 6"/>
+          <p:cNvPr id="6" name="Rectangle 5"/>
           <p:cNvSpPr/>
           <p:nvPr/>
         </p:nvSpPr>
@@ -12798,7 +12168,7 @@
       </p:sp>
       <p:sp>
         <p:nvSpPr>
-          <p:cNvPr id="8" name="TextBox 7"/>
+          <p:cNvPr id="7" name="TextBox 6"/>
           <p:cNvSpPr txBox="1"/>
           <p:nvPr/>
         </p:nvSpPr>
@@ -12840,7 +12210,7 @@
       </p:sp>
       <p:sp>
         <p:nvSpPr>
-          <p:cNvPr id="9" name="TextBox 8"/>
+          <p:cNvPr id="8" name="TextBox 7"/>
           <p:cNvSpPr txBox="1"/>
           <p:nvPr/>
         </p:nvSpPr>
@@ -12941,7 +12311,7 @@
       </p:sp>
       <p:sp>
         <p:nvSpPr>
-          <p:cNvPr id="10" name="Rectangle 9"/>
+          <p:cNvPr id="9" name="Rectangle 8"/>
           <p:cNvSpPr/>
           <p:nvPr/>
         </p:nvSpPr>
@@ -12990,7 +12360,7 @@
       </p:sp>
       <p:sp>
         <p:nvSpPr>
-          <p:cNvPr id="11" name="TextBox 10"/>
+          <p:cNvPr id="10" name="TextBox 9"/>
           <p:cNvSpPr txBox="1"/>
           <p:nvPr/>
         </p:nvSpPr>
@@ -13032,7 +12402,7 @@
       </p:sp>
       <p:sp>
         <p:nvSpPr>
-          <p:cNvPr id="12" name="TextBox 11"/>
+          <p:cNvPr id="11" name="TextBox 10"/>
           <p:cNvSpPr txBox="1"/>
           <p:nvPr/>
         </p:nvSpPr>
@@ -13074,7 +12444,7 @@
       </p:sp>
       <p:sp>
         <p:nvSpPr>
-          <p:cNvPr id="13" name="TextBox 12"/>
+          <p:cNvPr id="12" name="TextBox 11"/>
           <p:cNvSpPr txBox="1"/>
           <p:nvPr/>
         </p:nvSpPr>
@@ -13189,48 +12559,6 @@
         </p:nvSpPr>
         <p:spPr>
           <a:xfrm>
-            <a:off x="5897880" y="310896"/>
-            <a:ext cx="4800600" cy="256032"/>
-          </a:xfrm>
-          <a:prstGeom prst="rect">
-            <a:avLst/>
-          </a:prstGeom>
-          <a:noFill/>
-        </p:spPr>
-        <p:txBody>
-          <a:bodyPr wrap="none" lIns="9144" rIns="9144" tIns="9144" bIns="9144" anchor="t">
-            <a:spAutoFit/>
-          </a:bodyPr>
-          <a:lstStyle/>
-          <a:p>
-            <a:pPr algn="r">
-              <a:spcAft>
-                <a:spcPts val="0"/>
-              </a:spcAft>
-              <a:defRPr sz="680" b="1">
-                <a:solidFill>
-                  <a:srgbClr val="4F6B00"/>
-                </a:solidFill>
-                <a:latin typeface="Inter"/>
-              </a:defRPr>
-            </a:pPr>
-            <a:r>
-              <a:rPr>
-                <a:latin typeface="Inter"/>
-              </a:rPr>
-              <a:t>Illustrative, Gradient Maintained — demo data, not the client's holdings or managers</a:t>
-            </a:r>
-          </a:p>
-        </p:txBody>
-      </p:sp>
-      <p:sp>
-        <p:nvSpPr>
-          <p:cNvPr id="4" name="TextBox 3"/>
-          <p:cNvSpPr txBox="1"/>
-          <p:nvPr/>
-        </p:nvSpPr>
-        <p:spPr>
-          <a:xfrm>
             <a:off x="640080" y="566928"/>
             <a:ext cx="10058400" cy="530352"/>
           </a:xfrm>
@@ -13267,7 +12595,7 @@
       </p:sp>
       <p:sp>
         <p:nvSpPr>
-          <p:cNvPr id="5" name="Rectangle 4"/>
+          <p:cNvPr id="4" name="Rectangle 3"/>
           <p:cNvSpPr/>
           <p:nvPr/>
         </p:nvSpPr>
@@ -13316,7 +12644,7 @@
       </p:sp>
       <p:sp>
         <p:nvSpPr>
-          <p:cNvPr id="6" name="Rectangle 5"/>
+          <p:cNvPr id="5" name="Rectangle 4"/>
           <p:cNvSpPr/>
           <p:nvPr/>
         </p:nvSpPr>
@@ -13365,7 +12693,7 @@
       </p:sp>
       <p:sp>
         <p:nvSpPr>
-          <p:cNvPr id="7" name="TextBox 6"/>
+          <p:cNvPr id="6" name="TextBox 5"/>
           <p:cNvSpPr txBox="1"/>
           <p:nvPr/>
         </p:nvSpPr>
@@ -13407,7 +12735,7 @@
       </p:sp>
       <p:graphicFrame>
         <p:nvGraphicFramePr>
-          <p:cNvPr id="8" name="Table 7"/>
+          <p:cNvPr id="7" name="Table 6"/>
           <p:cNvGraphicFramePr>
             <a:graphicFrameLocks noGrp="1"/>
           </p:cNvGraphicFramePr>
@@ -13693,7 +13021,7 @@
                         <a:rPr>
                           <a:latin typeface="Inter"/>
                         </a:rPr>
-                        <a:t>● n/a</a:t>
+                        <a:t>● Not applicable</a:t>
                       </a:r>
                     </a:p>
                   </a:txBody>
@@ -13830,7 +13158,7 @@
                         <a:rPr>
                           <a:latin typeface="Inter"/>
                         </a:rPr>
-                        <a:t>● n/a</a:t>
+                        <a:t>● Not applicable</a:t>
                       </a:r>
                     </a:p>
                   </a:txBody>
@@ -13967,7 +13295,7 @@
                         <a:rPr>
                           <a:latin typeface="Inter"/>
                         </a:rPr>
-                        <a:t>● passed</a:t>
+                        <a:t>● Passed</a:t>
                       </a:r>
                     </a:p>
                   </a:txBody>
@@ -14104,7 +13432,7 @@
                         <a:rPr>
                           <a:latin typeface="Inter"/>
                         </a:rPr>
-                        <a:t>● passed</a:t>
+                        <a:t>● Passed</a:t>
                       </a:r>
                     </a:p>
                   </a:txBody>
@@ -14241,7 +13569,7 @@
                         <a:rPr>
                           <a:latin typeface="Inter"/>
                         </a:rPr>
-                        <a:t>● passed</a:t>
+                        <a:t>● Passed</a:t>
                       </a:r>
                     </a:p>
                   </a:txBody>
@@ -14378,7 +13706,7 @@
                         <a:rPr>
                           <a:latin typeface="Inter"/>
                         </a:rPr>
-                        <a:t>● passed</a:t>
+                        <a:t>● Passed</a:t>
                       </a:r>
                     </a:p>
                   </a:txBody>
@@ -14515,7 +13843,7 @@
                         <a:rPr>
                           <a:latin typeface="Inter"/>
                         </a:rPr>
-                        <a:t>● passed</a:t>
+                        <a:t>● Passed</a:t>
                       </a:r>
                     </a:p>
                   </a:txBody>
@@ -14652,7 +13980,7 @@
                         <a:rPr>
                           <a:latin typeface="Inter"/>
                         </a:rPr>
-                        <a:t>● passed</a:t>
+                        <a:t>● Passed</a:t>
                       </a:r>
                     </a:p>
                   </a:txBody>
@@ -14669,7 +13997,7 @@
       </p:graphicFrame>
       <p:sp>
         <p:nvSpPr>
-          <p:cNvPr id="9" name="TextBox 8"/>
+          <p:cNvPr id="8" name="TextBox 7"/>
           <p:cNvSpPr txBox="1"/>
           <p:nvPr/>
         </p:nvSpPr>
@@ -14711,7 +14039,7 @@
       </p:sp>
       <p:sp>
         <p:nvSpPr>
-          <p:cNvPr id="10" name="Rectangle 9"/>
+          <p:cNvPr id="9" name="Rectangle 8"/>
           <p:cNvSpPr/>
           <p:nvPr/>
         </p:nvSpPr>
@@ -14760,7 +14088,7 @@
       </p:sp>
       <p:sp>
         <p:nvSpPr>
-          <p:cNvPr id="11" name="TextBox 10"/>
+          <p:cNvPr id="10" name="TextBox 9"/>
           <p:cNvSpPr txBox="1"/>
           <p:nvPr/>
         </p:nvSpPr>
@@ -14802,7 +14130,7 @@
       </p:sp>
       <p:sp>
         <p:nvSpPr>
-          <p:cNvPr id="12" name="TextBox 11"/>
+          <p:cNvPr id="11" name="TextBox 10"/>
           <p:cNvSpPr txBox="1"/>
           <p:nvPr/>
         </p:nvSpPr>
@@ -14844,7 +14172,7 @@
       </p:sp>
       <p:sp>
         <p:nvSpPr>
-          <p:cNvPr id="13" name="TextBox 12"/>
+          <p:cNvPr id="12" name="TextBox 11"/>
           <p:cNvSpPr txBox="1"/>
           <p:nvPr/>
         </p:nvSpPr>

--- a/plugins/gradient-cio/assets/examples/gradient-setup.pptx
+++ b/plugins/gradient-cio/assets/examples/gradient-setup.pptx
@@ -3498,16 +3498,1278 @@
           </a:p>
         </p:txBody>
       </p:sp>
-      <p:sp>
-        <p:nvSpPr>
-          <p:cNvPr id="8" name="TextBox 7"/>
+      <p:graphicFrame>
+        <p:nvGraphicFramePr>
+          <p:cNvPr id="8" name="Table 7"/>
+          <p:cNvGraphicFramePr>
+            <a:graphicFrameLocks noGrp="1"/>
+          </p:cNvGraphicFramePr>
+          <p:nvPr/>
+        </p:nvGraphicFramePr>
+        <p:xfrm>
+          <a:off x="640080" y="1325880"/>
+          <a:ext cx="10908792" cy="4690872"/>
+        </p:xfrm>
+        <a:graphic>
+          <a:graphicData uri="http://schemas.openxmlformats.org/drawingml/2006/table">
+            <a:tbl>
+              <a:tblPr firstRow="1" bandRow="1">
+                <a:tableStyleId>{5C22544A-7EE6-4342-B048-85BDC9FD1C3A}</a:tableStyleId>
+              </a:tblPr>
+              <a:tblGrid>
+                <a:gridCol w="2011680"/>
+                <a:gridCol w="2224278"/>
+                <a:gridCol w="2224278"/>
+                <a:gridCol w="2224278"/>
+                <a:gridCol w="2224278"/>
+              </a:tblGrid>
+              <a:tr h="521208">
+                <a:tc>
+                  <a:txBody>
+                    <a:bodyPr/>
+                    <a:lstStyle/>
+                    <a:p>
+                      <a:pPr>
+                        <a:defRPr sz="750" b="1">
+                          <a:solidFill>
+                            <a:srgbClr val="FFFFFF"/>
+                          </a:solidFill>
+                          <a:latin typeface="Inter"/>
+                        </a:defRPr>
+                      </a:pPr>
+                      <a:r>
+                        <a:rPr>
+                          <a:latin typeface="Inter"/>
+                        </a:rPr>
+                        <a:t>Tag</a:t>
+                      </a:r>
+                    </a:p>
+                  </a:txBody>
+                  <a:tcPr marL="54864" marR="54864" marT="27432" marB="27432" anchor="ctr">
+                    <a:solidFill>
+                      <a:srgbClr val="0D1117"/>
+                    </a:solidFill>
+                  </a:tcPr>
+                </a:tc>
+                <a:tc>
+                  <a:txBody>
+                    <a:bodyPr/>
+                    <a:lstStyle/>
+                    <a:p>
+                      <a:pPr>
+                        <a:defRPr sz="750" b="1">
+                          <a:solidFill>
+                            <a:srgbClr val="FFFFFF"/>
+                          </a:solidFill>
+                          <a:latin typeface="Inter"/>
+                        </a:defRPr>
+                      </a:pPr>
+                      <a:r>
+                        <a:rPr>
+                          <a:latin typeface="Inter"/>
+                        </a:rPr>
+                        <a:t>Evidence</a:t>
+                      </a:r>
+                    </a:p>
+                  </a:txBody>
+                  <a:tcPr marL="54864" marR="54864" marT="27432" marB="27432" anchor="ctr">
+                    <a:solidFill>
+                      <a:srgbClr val="0D1117"/>
+                    </a:solidFill>
+                  </a:tcPr>
+                </a:tc>
+                <a:tc>
+                  <a:txBody>
+                    <a:bodyPr/>
+                    <a:lstStyle/>
+                    <a:p>
+                      <a:pPr>
+                        <a:defRPr sz="750" b="1">
+                          <a:solidFill>
+                            <a:srgbClr val="FFFFFF"/>
+                          </a:solidFill>
+                          <a:latin typeface="Inter"/>
+                        </a:defRPr>
+                      </a:pPr>
+                      <a:r>
+                        <a:rPr>
+                          <a:latin typeface="Inter"/>
+                        </a:rPr>
+                        <a:t>Tool</a:t>
+                      </a:r>
+                    </a:p>
+                  </a:txBody>
+                  <a:tcPr marL="54864" marR="54864" marT="27432" marB="27432" anchor="ctr">
+                    <a:solidFill>
+                      <a:srgbClr val="0D1117"/>
+                    </a:solidFill>
+                  </a:tcPr>
+                </a:tc>
+                <a:tc>
+                  <a:txBody>
+                    <a:bodyPr/>
+                    <a:lstStyle/>
+                    <a:p>
+                      <a:pPr>
+                        <a:defRPr sz="750" b="1">
+                          <a:solidFill>
+                            <a:srgbClr val="FFFFFF"/>
+                          </a:solidFill>
+                          <a:latin typeface="Inter"/>
+                        </a:defRPr>
+                      </a:pPr>
+                      <a:r>
+                        <a:rPr>
+                          <a:latin typeface="Inter"/>
+                        </a:rPr>
+                        <a:t>As of</a:t>
+                      </a:r>
+                    </a:p>
+                  </a:txBody>
+                  <a:tcPr marL="54864" marR="54864" marT="27432" marB="27432" anchor="ctr">
+                    <a:solidFill>
+                      <a:srgbClr val="0D1117"/>
+                    </a:solidFill>
+                  </a:tcPr>
+                </a:tc>
+                <a:tc>
+                  <a:txBody>
+                    <a:bodyPr/>
+                    <a:lstStyle/>
+                    <a:p>
+                      <a:pPr>
+                        <a:defRPr sz="750" b="1">
+                          <a:solidFill>
+                            <a:srgbClr val="FFFFFF"/>
+                          </a:solidFill>
+                          <a:latin typeface="Inter"/>
+                        </a:defRPr>
+                      </a:pPr>
+                      <a:r>
+                        <a:rPr>
+                          <a:latin typeface="Inter"/>
+                        </a:rPr>
+                        <a:t>Validation</a:t>
+                      </a:r>
+                    </a:p>
+                  </a:txBody>
+                  <a:tcPr marL="54864" marR="54864" marT="27432" marB="27432" anchor="ctr">
+                    <a:solidFill>
+                      <a:srgbClr val="0D1117"/>
+                    </a:solidFill>
+                  </a:tcPr>
+                </a:tc>
+              </a:tr>
+              <a:tr h="521208">
+                <a:tc>
+                  <a:txBody>
+                    <a:bodyPr/>
+                    <a:lstStyle/>
+                    <a:p>
+                      <a:pPr>
+                        <a:defRPr sz="720" b="1">
+                          <a:solidFill>
+                            <a:srgbClr val="0D1117"/>
+                          </a:solidFill>
+                          <a:latin typeface="Inter"/>
+                        </a:defRPr>
+                      </a:pPr>
+                      <a:r>
+                        <a:rPr>
+                          <a:latin typeface="Inter"/>
+                        </a:rPr>
+                        <a:t>S1</a:t>
+                      </a:r>
+                    </a:p>
+                  </a:txBody>
+                  <a:tcPr marL="54864" marR="54864" marT="27432" marB="27432" anchor="ctr">
+                    <a:solidFill>
+                      <a:srgbClr val="FFFFFF"/>
+                    </a:solidFill>
+                  </a:tcPr>
+                </a:tc>
+                <a:tc>
+                  <a:txBody>
+                    <a:bodyPr/>
+                    <a:lstStyle/>
+                    <a:p>
+                      <a:pPr>
+                        <a:defRPr sz="720" b="0">
+                          <a:solidFill>
+                            <a:srgbClr val="0D1117"/>
+                          </a:solidFill>
+                          <a:latin typeface="Inter"/>
+                        </a:defRPr>
+                      </a:pPr>
+                      <a:r>
+                        <a:rPr>
+                          <a:latin typeface="Inter"/>
+                        </a:rPr>
+                        <a:t>Organizations and modules</a:t>
+                      </a:r>
+                    </a:p>
+                  </a:txBody>
+                  <a:tcPr marL="54864" marR="54864" marT="27432" marB="27432" anchor="ctr">
+                    <a:solidFill>
+                      <a:srgbClr val="FFFFFF"/>
+                    </a:solidFill>
+                  </a:tcPr>
+                </a:tc>
+                <a:tc>
+                  <a:txBody>
+                    <a:bodyPr/>
+                    <a:lstStyle/>
+                    <a:p>
+                      <a:pPr>
+                        <a:defRPr sz="720" b="0">
+                          <a:solidFill>
+                            <a:srgbClr val="0D1117"/>
+                          </a:solidFill>
+                          <a:latin typeface="Inter"/>
+                        </a:defRPr>
+                      </a:pPr>
+                      <a:r>
+                        <a:rPr>
+                          <a:latin typeface="Inter"/>
+                        </a:rPr>
+                        <a:t>list_organizations</a:t>
+                      </a:r>
+                    </a:p>
+                  </a:txBody>
+                  <a:tcPr marL="54864" marR="54864" marT="27432" marB="27432" anchor="ctr">
+                    <a:solidFill>
+                      <a:srgbClr val="FFFFFF"/>
+                    </a:solidFill>
+                  </a:tcPr>
+                </a:tc>
+                <a:tc>
+                  <a:txBody>
+                    <a:bodyPr/>
+                    <a:lstStyle/>
+                    <a:p>
+                      <a:pPr>
+                        <a:defRPr sz="720" b="0">
+                          <a:solidFill>
+                            <a:srgbClr val="0D1117"/>
+                          </a:solidFill>
+                          <a:latin typeface="Inter"/>
+                        </a:defRPr>
+                      </a:pPr>
+                      <a:r>
+                        <a:rPr>
+                          <a:latin typeface="Inter"/>
+                        </a:rPr>
+                        <a:t>2026-10-04</a:t>
+                      </a:r>
+                    </a:p>
+                  </a:txBody>
+                  <a:tcPr marL="54864" marR="54864" marT="27432" marB="27432" anchor="ctr">
+                    <a:solidFill>
+                      <a:srgbClr val="FFFFFF"/>
+                    </a:solidFill>
+                  </a:tcPr>
+                </a:tc>
+                <a:tc>
+                  <a:txBody>
+                    <a:bodyPr/>
+                    <a:lstStyle/>
+                    <a:p>
+                      <a:pPr>
+                        <a:defRPr sz="720" b="1">
+                          <a:solidFill>
+                            <a:srgbClr val="9AA5B1"/>
+                          </a:solidFill>
+                          <a:latin typeface="Inter"/>
+                        </a:defRPr>
+                      </a:pPr>
+                      <a:r>
+                        <a:rPr>
+                          <a:latin typeface="Inter"/>
+                        </a:rPr>
+                        <a:t>● n/a</a:t>
+                      </a:r>
+                    </a:p>
+                  </a:txBody>
+                  <a:tcPr marL="54864" marR="54864" marT="27432" marB="27432" anchor="ctr">
+                    <a:solidFill>
+                      <a:srgbClr val="F5F7F9"/>
+                    </a:solidFill>
+                  </a:tcPr>
+                </a:tc>
+              </a:tr>
+              <a:tr h="521208">
+                <a:tc>
+                  <a:txBody>
+                    <a:bodyPr/>
+                    <a:lstStyle/>
+                    <a:p>
+                      <a:pPr>
+                        <a:defRPr sz="720" b="1">
+                          <a:solidFill>
+                            <a:srgbClr val="0D1117"/>
+                          </a:solidFill>
+                          <a:latin typeface="Inter"/>
+                        </a:defRPr>
+                      </a:pPr>
+                      <a:r>
+                        <a:rPr>
+                          <a:latin typeface="Inter"/>
+                        </a:rPr>
+                        <a:t>S2</a:t>
+                      </a:r>
+                    </a:p>
+                  </a:txBody>
+                  <a:tcPr marL="54864" marR="54864" marT="27432" marB="27432" anchor="ctr">
+                    <a:solidFill>
+                      <a:srgbClr val="F5F7F9"/>
+                    </a:solidFill>
+                  </a:tcPr>
+                </a:tc>
+                <a:tc>
+                  <a:txBody>
+                    <a:bodyPr/>
+                    <a:lstStyle/>
+                    <a:p>
+                      <a:pPr>
+                        <a:defRPr sz="720" b="0">
+                          <a:solidFill>
+                            <a:srgbClr val="0D1117"/>
+                          </a:solidFill>
+                          <a:latin typeface="Inter"/>
+                        </a:defRPr>
+                      </a:pPr>
+                      <a:r>
+                        <a:rPr>
+                          <a:latin typeface="Inter"/>
+                        </a:rPr>
+                        <a:t>Capabilities, entitlement, coverage</a:t>
+                      </a:r>
+                    </a:p>
+                  </a:txBody>
+                  <a:tcPr marL="54864" marR="54864" marT="27432" marB="27432" anchor="ctr">
+                    <a:solidFill>
+                      <a:srgbClr val="F5F7F9"/>
+                    </a:solidFill>
+                  </a:tcPr>
+                </a:tc>
+                <a:tc>
+                  <a:txBody>
+                    <a:bodyPr/>
+                    <a:lstStyle/>
+                    <a:p>
+                      <a:pPr>
+                        <a:defRPr sz="720" b="0">
+                          <a:solidFill>
+                            <a:srgbClr val="0D1117"/>
+                          </a:solidFill>
+                          <a:latin typeface="Inter"/>
+                        </a:defRPr>
+                      </a:pPr>
+                      <a:r>
+                        <a:rPr>
+                          <a:latin typeface="Inter"/>
+                        </a:rPr>
+                        <a:t>get_gradient_capabilities</a:t>
+                      </a:r>
+                    </a:p>
+                  </a:txBody>
+                  <a:tcPr marL="54864" marR="54864" marT="27432" marB="27432" anchor="ctr">
+                    <a:solidFill>
+                      <a:srgbClr val="F5F7F9"/>
+                    </a:solidFill>
+                  </a:tcPr>
+                </a:tc>
+                <a:tc>
+                  <a:txBody>
+                    <a:bodyPr/>
+                    <a:lstStyle/>
+                    <a:p>
+                      <a:pPr>
+                        <a:defRPr sz="720" b="0">
+                          <a:solidFill>
+                            <a:srgbClr val="0D1117"/>
+                          </a:solidFill>
+                          <a:latin typeface="Inter"/>
+                        </a:defRPr>
+                      </a:pPr>
+                      <a:r>
+                        <a:rPr>
+                          <a:latin typeface="Inter"/>
+                        </a:rPr>
+                        <a:t>2026-10-04</a:t>
+                      </a:r>
+                    </a:p>
+                  </a:txBody>
+                  <a:tcPr marL="54864" marR="54864" marT="27432" marB="27432" anchor="ctr">
+                    <a:solidFill>
+                      <a:srgbClr val="F5F7F9"/>
+                    </a:solidFill>
+                  </a:tcPr>
+                </a:tc>
+                <a:tc>
+                  <a:txBody>
+                    <a:bodyPr/>
+                    <a:lstStyle/>
+                    <a:p>
+                      <a:pPr>
+                        <a:defRPr sz="720" b="1">
+                          <a:solidFill>
+                            <a:srgbClr val="9AA5B1"/>
+                          </a:solidFill>
+                          <a:latin typeface="Inter"/>
+                        </a:defRPr>
+                      </a:pPr>
+                      <a:r>
+                        <a:rPr>
+                          <a:latin typeface="Inter"/>
+                        </a:rPr>
+                        <a:t>● n/a</a:t>
+                      </a:r>
+                    </a:p>
+                  </a:txBody>
+                  <a:tcPr marL="54864" marR="54864" marT="27432" marB="27432" anchor="ctr">
+                    <a:solidFill>
+                      <a:srgbClr val="F5F7F9"/>
+                    </a:solidFill>
+                  </a:tcPr>
+                </a:tc>
+              </a:tr>
+              <a:tr h="521208">
+                <a:tc>
+                  <a:txBody>
+                    <a:bodyPr/>
+                    <a:lstStyle/>
+                    <a:p>
+                      <a:pPr>
+                        <a:defRPr sz="720" b="1">
+                          <a:solidFill>
+                            <a:srgbClr val="0D1117"/>
+                          </a:solidFill>
+                          <a:latin typeface="Inter"/>
+                        </a:defRPr>
+                      </a:pPr>
+                      <a:r>
+                        <a:rPr>
+                          <a:latin typeface="Inter"/>
+                        </a:rPr>
+                        <a:t>S3</a:t>
+                      </a:r>
+                    </a:p>
+                  </a:txBody>
+                  <a:tcPr marL="54864" marR="54864" marT="27432" marB="27432" anchor="ctr">
+                    <a:solidFill>
+                      <a:srgbClr val="FFFFFF"/>
+                    </a:solidFill>
+                  </a:tcPr>
+                </a:tc>
+                <a:tc>
+                  <a:txBody>
+                    <a:bodyPr/>
+                    <a:lstStyle/>
+                    <a:p>
+                      <a:pPr>
+                        <a:defRPr sz="720" b="0">
+                          <a:solidFill>
+                            <a:srgbClr val="0D1117"/>
+                          </a:solidFill>
+                          <a:latin typeface="Inter"/>
+                        </a:defRPr>
+                      </a:pPr>
+                      <a:r>
+                        <a:rPr>
+                          <a:latin typeface="Inter"/>
+                        </a:rPr>
+                        <a:t>Contract probes (14)</a:t>
+                      </a:r>
+                    </a:p>
+                  </a:txBody>
+                  <a:tcPr marL="54864" marR="54864" marT="27432" marB="27432" anchor="ctr">
+                    <a:solidFill>
+                      <a:srgbClr val="FFFFFF"/>
+                    </a:solidFill>
+                  </a:tcPr>
+                </a:tc>
+                <a:tc>
+                  <a:txBody>
+                    <a:bodyPr/>
+                    <a:lstStyle/>
+                    <a:p>
+                      <a:pPr>
+                        <a:defRPr sz="720" b="0">
+                          <a:solidFill>
+                            <a:srgbClr val="0D1117"/>
+                          </a:solidFill>
+                          <a:latin typeface="Inter"/>
+                        </a:defRPr>
+                      </a:pPr>
+                      <a:r>
+                        <a:rPr>
+                          <a:latin typeface="Inter"/>
+                        </a:rPr>
+                        <a:t>see table in section 04</a:t>
+                      </a:r>
+                    </a:p>
+                  </a:txBody>
+                  <a:tcPr marL="54864" marR="54864" marT="27432" marB="27432" anchor="ctr">
+                    <a:solidFill>
+                      <a:srgbClr val="FFFFFF"/>
+                    </a:solidFill>
+                  </a:tcPr>
+                </a:tc>
+                <a:tc>
+                  <a:txBody>
+                    <a:bodyPr/>
+                    <a:lstStyle/>
+                    <a:p>
+                      <a:pPr>
+                        <a:defRPr sz="720" b="0">
+                          <a:solidFill>
+                            <a:srgbClr val="0D1117"/>
+                          </a:solidFill>
+                          <a:latin typeface="Inter"/>
+                        </a:defRPr>
+                      </a:pPr>
+                      <a:r>
+                        <a:rPr>
+                          <a:latin typeface="Inter"/>
+                        </a:rPr>
+                        <a:t>2026-10-04</a:t>
+                      </a:r>
+                    </a:p>
+                  </a:txBody>
+                  <a:tcPr marL="54864" marR="54864" marT="27432" marB="27432" anchor="ctr">
+                    <a:solidFill>
+                      <a:srgbClr val="FFFFFF"/>
+                    </a:solidFill>
+                  </a:tcPr>
+                </a:tc>
+                <a:tc>
+                  <a:txBody>
+                    <a:bodyPr/>
+                    <a:lstStyle/>
+                    <a:p>
+                      <a:pPr>
+                        <a:defRPr sz="720" b="1">
+                          <a:solidFill>
+                            <a:srgbClr val="C6F432"/>
+                          </a:solidFill>
+                          <a:latin typeface="Inter"/>
+                        </a:defRPr>
+                      </a:pPr>
+                      <a:r>
+                        <a:rPr>
+                          <a:latin typeface="Inter"/>
+                        </a:rPr>
+                        <a:t>● passed</a:t>
+                      </a:r>
+                    </a:p>
+                  </a:txBody>
+                  <a:tcPr marL="54864" marR="54864" marT="27432" marB="27432" anchor="ctr">
+                    <a:solidFill>
+                      <a:srgbClr val="F5F7F9"/>
+                    </a:solidFill>
+                  </a:tcPr>
+                </a:tc>
+              </a:tr>
+              <a:tr h="521208">
+                <a:tc>
+                  <a:txBody>
+                    <a:bodyPr/>
+                    <a:lstStyle/>
+                    <a:p>
+                      <a:pPr>
+                        <a:defRPr sz="720" b="1">
+                          <a:solidFill>
+                            <a:srgbClr val="0D1117"/>
+                          </a:solidFill>
+                          <a:latin typeface="Inter"/>
+                        </a:defRPr>
+                      </a:pPr>
+                      <a:r>
+                        <a:rPr>
+                          <a:latin typeface="Inter"/>
+                        </a:rPr>
+                        <a:t>S4</a:t>
+                      </a:r>
+                    </a:p>
+                  </a:txBody>
+                  <a:tcPr marL="54864" marR="54864" marT="27432" marB="27432" anchor="ctr">
+                    <a:solidFill>
+                      <a:srgbClr val="F5F7F9"/>
+                    </a:solidFill>
+                  </a:tcPr>
+                </a:tc>
+                <a:tc>
+                  <a:txBody>
+                    <a:bodyPr/>
+                    <a:lstStyle/>
+                    <a:p>
+                      <a:pPr>
+                        <a:defRPr sz="720" b="0">
+                          <a:solidFill>
+                            <a:srgbClr val="0D1117"/>
+                          </a:solidFill>
+                          <a:latin typeface="Inter"/>
+                        </a:defRPr>
+                      </a:pPr>
+                      <a:r>
+                        <a:rPr>
+                          <a:latin typeface="Inter"/>
+                        </a:rPr>
+                        <a:t>Diligence Roster</a:t>
+                      </a:r>
+                    </a:p>
+                  </a:txBody>
+                  <a:tcPr marL="54864" marR="54864" marT="27432" marB="27432" anchor="ctr">
+                    <a:solidFill>
+                      <a:srgbClr val="F5F7F9"/>
+                    </a:solidFill>
+                  </a:tcPr>
+                </a:tc>
+                <a:tc>
+                  <a:txBody>
+                    <a:bodyPr/>
+                    <a:lstStyle/>
+                    <a:p>
+                      <a:pPr>
+                        <a:defRPr sz="720" b="0">
+                          <a:solidFill>
+                            <a:srgbClr val="0D1117"/>
+                          </a:solidFill>
+                          <a:latin typeface="Inter"/>
+                        </a:defRPr>
+                      </a:pPr>
+                      <a:r>
+                        <a:rPr>
+                          <a:latin typeface="Inter"/>
+                        </a:rPr>
+                        <a:t>get_diligence_roster_funds</a:t>
+                      </a:r>
+                    </a:p>
+                  </a:txBody>
+                  <a:tcPr marL="54864" marR="54864" marT="27432" marB="27432" anchor="ctr">
+                    <a:solidFill>
+                      <a:srgbClr val="F5F7F9"/>
+                    </a:solidFill>
+                  </a:tcPr>
+                </a:tc>
+                <a:tc>
+                  <a:txBody>
+                    <a:bodyPr/>
+                    <a:lstStyle/>
+                    <a:p>
+                      <a:pPr>
+                        <a:defRPr sz="720" b="0">
+                          <a:solidFill>
+                            <a:srgbClr val="0D1117"/>
+                          </a:solidFill>
+                          <a:latin typeface="Inter"/>
+                        </a:defRPr>
+                      </a:pPr>
+                      <a:r>
+                        <a:rPr>
+                          <a:latin typeface="Inter"/>
+                        </a:rPr>
+                        <a:t>2026-10-04</a:t>
+                      </a:r>
+                    </a:p>
+                  </a:txBody>
+                  <a:tcPr marL="54864" marR="54864" marT="27432" marB="27432" anchor="ctr">
+                    <a:solidFill>
+                      <a:srgbClr val="F5F7F9"/>
+                    </a:solidFill>
+                  </a:tcPr>
+                </a:tc>
+                <a:tc>
+                  <a:txBody>
+                    <a:bodyPr/>
+                    <a:lstStyle/>
+                    <a:p>
+                      <a:pPr>
+                        <a:defRPr sz="720" b="1">
+                          <a:solidFill>
+                            <a:srgbClr val="C6F432"/>
+                          </a:solidFill>
+                          <a:latin typeface="Inter"/>
+                        </a:defRPr>
+                      </a:pPr>
+                      <a:r>
+                        <a:rPr>
+                          <a:latin typeface="Inter"/>
+                        </a:rPr>
+                        <a:t>● passed</a:t>
+                      </a:r>
+                    </a:p>
+                  </a:txBody>
+                  <a:tcPr marL="54864" marR="54864" marT="27432" marB="27432" anchor="ctr">
+                    <a:solidFill>
+                      <a:srgbClr val="F5F7F9"/>
+                    </a:solidFill>
+                  </a:tcPr>
+                </a:tc>
+              </a:tr>
+              <a:tr h="521208">
+                <a:tc>
+                  <a:txBody>
+                    <a:bodyPr/>
+                    <a:lstStyle/>
+                    <a:p>
+                      <a:pPr>
+                        <a:defRPr sz="720" b="1">
+                          <a:solidFill>
+                            <a:srgbClr val="0D1117"/>
+                          </a:solidFill>
+                          <a:latin typeface="Inter"/>
+                        </a:defRPr>
+                      </a:pPr>
+                      <a:r>
+                        <a:rPr>
+                          <a:latin typeface="Inter"/>
+                        </a:rPr>
+                        <a:t>S5</a:t>
+                      </a:r>
+                    </a:p>
+                  </a:txBody>
+                  <a:tcPr marL="54864" marR="54864" marT="27432" marB="27432" anchor="ctr">
+                    <a:solidFill>
+                      <a:srgbClr val="FFFFFF"/>
+                    </a:solidFill>
+                  </a:tcPr>
+                </a:tc>
+                <a:tc>
+                  <a:txBody>
+                    <a:bodyPr/>
+                    <a:lstStyle/>
+                    <a:p>
+                      <a:pPr>
+                        <a:defRPr sz="720" b="0">
+                          <a:solidFill>
+                            <a:srgbClr val="0D1117"/>
+                          </a:solidFill>
+                          <a:latin typeface="Inter"/>
+                        </a:defRPr>
+                      </a:pPr>
+                      <a:r>
+                        <a:rPr>
+                          <a:latin typeface="Inter"/>
+                        </a:rPr>
+                        <a:t>The Read readiness probe</a:t>
+                      </a:r>
+                    </a:p>
+                  </a:txBody>
+                  <a:tcPr marL="54864" marR="54864" marT="27432" marB="27432" anchor="ctr">
+                    <a:solidFill>
+                      <a:srgbClr val="FFFFFF"/>
+                    </a:solidFill>
+                  </a:tcPr>
+                </a:tc>
+                <a:tc>
+                  <a:txBody>
+                    <a:bodyPr/>
+                    <a:lstStyle/>
+                    <a:p>
+                      <a:pPr>
+                        <a:defRPr sz="720" b="0">
+                          <a:solidFill>
+                            <a:srgbClr val="0D1117"/>
+                          </a:solidFill>
+                          <a:latin typeface="Inter"/>
+                        </a:defRPr>
+                      </a:pPr>
+                      <a:r>
+                        <a:rPr>
+                          <a:latin typeface="Inter"/>
+                        </a:rPr>
+                        <a:t>get_the_read</a:t>
+                      </a:r>
+                    </a:p>
+                  </a:txBody>
+                  <a:tcPr marL="54864" marR="54864" marT="27432" marB="27432" anchor="ctr">
+                    <a:solidFill>
+                      <a:srgbClr val="FFFFFF"/>
+                    </a:solidFill>
+                  </a:tcPr>
+                </a:tc>
+                <a:tc>
+                  <a:txBody>
+                    <a:bodyPr/>
+                    <a:lstStyle/>
+                    <a:p>
+                      <a:pPr>
+                        <a:defRPr sz="720" b="0">
+                          <a:solidFill>
+                            <a:srgbClr val="0D1117"/>
+                          </a:solidFill>
+                          <a:latin typeface="Inter"/>
+                        </a:defRPr>
+                      </a:pPr>
+                      <a:r>
+                        <a:rPr>
+                          <a:latin typeface="Inter"/>
+                        </a:rPr>
+                        <a:t>2026-10-02</a:t>
+                      </a:r>
+                    </a:p>
+                  </a:txBody>
+                  <a:tcPr marL="54864" marR="54864" marT="27432" marB="27432" anchor="ctr">
+                    <a:solidFill>
+                      <a:srgbClr val="FFFFFF"/>
+                    </a:solidFill>
+                  </a:tcPr>
+                </a:tc>
+                <a:tc>
+                  <a:txBody>
+                    <a:bodyPr/>
+                    <a:lstStyle/>
+                    <a:p>
+                      <a:pPr>
+                        <a:defRPr sz="720" b="1">
+                          <a:solidFill>
+                            <a:srgbClr val="C6F432"/>
+                          </a:solidFill>
+                          <a:latin typeface="Inter"/>
+                        </a:defRPr>
+                      </a:pPr>
+                      <a:r>
+                        <a:rPr>
+                          <a:latin typeface="Inter"/>
+                        </a:rPr>
+                        <a:t>● passed</a:t>
+                      </a:r>
+                    </a:p>
+                  </a:txBody>
+                  <a:tcPr marL="54864" marR="54864" marT="27432" marB="27432" anchor="ctr">
+                    <a:solidFill>
+                      <a:srgbClr val="F5F7F9"/>
+                    </a:solidFill>
+                  </a:tcPr>
+                </a:tc>
+              </a:tr>
+              <a:tr h="521208">
+                <a:tc>
+                  <a:txBody>
+                    <a:bodyPr/>
+                    <a:lstStyle/>
+                    <a:p>
+                      <a:pPr>
+                        <a:defRPr sz="720" b="1">
+                          <a:solidFill>
+                            <a:srgbClr val="0D1117"/>
+                          </a:solidFill>
+                          <a:latin typeface="Inter"/>
+                        </a:defRPr>
+                      </a:pPr>
+                      <a:r>
+                        <a:rPr>
+                          <a:latin typeface="Inter"/>
+                        </a:rPr>
+                        <a:t>S6</a:t>
+                      </a:r>
+                    </a:p>
+                  </a:txBody>
+                  <a:tcPr marL="54864" marR="54864" marT="27432" marB="27432" anchor="ctr">
+                    <a:solidFill>
+                      <a:srgbClr val="F5F7F9"/>
+                    </a:solidFill>
+                  </a:tcPr>
+                </a:tc>
+                <a:tc>
+                  <a:txBody>
+                    <a:bodyPr/>
+                    <a:lstStyle/>
+                    <a:p>
+                      <a:pPr>
+                        <a:defRPr sz="720" b="0">
+                          <a:solidFill>
+                            <a:srgbClr val="0D1117"/>
+                          </a:solidFill>
+                          <a:latin typeface="Inter"/>
+                        </a:defRPr>
+                      </a:pPr>
+                      <a:r>
+                        <a:rPr>
+                          <a:latin typeface="Inter"/>
+                        </a:rPr>
+                        <a:t>Macro conditions readiness probe</a:t>
+                      </a:r>
+                    </a:p>
+                  </a:txBody>
+                  <a:tcPr marL="54864" marR="54864" marT="27432" marB="27432" anchor="ctr">
+                    <a:solidFill>
+                      <a:srgbClr val="F5F7F9"/>
+                    </a:solidFill>
+                  </a:tcPr>
+                </a:tc>
+                <a:tc>
+                  <a:txBody>
+                    <a:bodyPr/>
+                    <a:lstStyle/>
+                    <a:p>
+                      <a:pPr>
+                        <a:defRPr sz="720" b="0">
+                          <a:solidFill>
+                            <a:srgbClr val="0D1117"/>
+                          </a:solidFill>
+                          <a:latin typeface="Inter"/>
+                        </a:defRPr>
+                      </a:pPr>
+                      <a:r>
+                        <a:rPr>
+                          <a:latin typeface="Inter"/>
+                        </a:rPr>
+                        <a:t>get_macro_conditions</a:t>
+                      </a:r>
+                    </a:p>
+                  </a:txBody>
+                  <a:tcPr marL="54864" marR="54864" marT="27432" marB="27432" anchor="ctr">
+                    <a:solidFill>
+                      <a:srgbClr val="F5F7F9"/>
+                    </a:solidFill>
+                  </a:tcPr>
+                </a:tc>
+                <a:tc>
+                  <a:txBody>
+                    <a:bodyPr/>
+                    <a:lstStyle/>
+                    <a:p>
+                      <a:pPr>
+                        <a:defRPr sz="720" b="0">
+                          <a:solidFill>
+                            <a:srgbClr val="0D1117"/>
+                          </a:solidFill>
+                          <a:latin typeface="Inter"/>
+                        </a:defRPr>
+                      </a:pPr>
+                      <a:r>
+                        <a:rPr>
+                          <a:latin typeface="Inter"/>
+                        </a:rPr>
+                        <a:t>2026-10-02</a:t>
+                      </a:r>
+                    </a:p>
+                  </a:txBody>
+                  <a:tcPr marL="54864" marR="54864" marT="27432" marB="27432" anchor="ctr">
+                    <a:solidFill>
+                      <a:srgbClr val="F5F7F9"/>
+                    </a:solidFill>
+                  </a:tcPr>
+                </a:tc>
+                <a:tc>
+                  <a:txBody>
+                    <a:bodyPr/>
+                    <a:lstStyle/>
+                    <a:p>
+                      <a:pPr>
+                        <a:defRPr sz="720" b="1">
+                          <a:solidFill>
+                            <a:srgbClr val="C6F432"/>
+                          </a:solidFill>
+                          <a:latin typeface="Inter"/>
+                        </a:defRPr>
+                      </a:pPr>
+                      <a:r>
+                        <a:rPr>
+                          <a:latin typeface="Inter"/>
+                        </a:rPr>
+                        <a:t>● passed</a:t>
+                      </a:r>
+                    </a:p>
+                  </a:txBody>
+                  <a:tcPr marL="54864" marR="54864" marT="27432" marB="27432" anchor="ctr">
+                    <a:solidFill>
+                      <a:srgbClr val="F5F7F9"/>
+                    </a:solidFill>
+                  </a:tcPr>
+                </a:tc>
+              </a:tr>
+              <a:tr h="521208">
+                <a:tc>
+                  <a:txBody>
+                    <a:bodyPr/>
+                    <a:lstStyle/>
+                    <a:p>
+                      <a:pPr>
+                        <a:defRPr sz="720" b="1">
+                          <a:solidFill>
+                            <a:srgbClr val="0D1117"/>
+                          </a:solidFill>
+                          <a:latin typeface="Inter"/>
+                        </a:defRPr>
+                      </a:pPr>
+                      <a:r>
+                        <a:rPr>
+                          <a:latin typeface="Inter"/>
+                        </a:rPr>
+                        <a:t>S7</a:t>
+                      </a:r>
+                    </a:p>
+                  </a:txBody>
+                  <a:tcPr marL="54864" marR="54864" marT="27432" marB="27432" anchor="ctr">
+                    <a:solidFill>
+                      <a:srgbClr val="FFFFFF"/>
+                    </a:solidFill>
+                  </a:tcPr>
+                </a:tc>
+                <a:tc>
+                  <a:txBody>
+                    <a:bodyPr/>
+                    <a:lstStyle/>
+                    <a:p>
+                      <a:pPr>
+                        <a:defRPr sz="720" b="0">
+                          <a:solidFill>
+                            <a:srgbClr val="0D1117"/>
+                          </a:solidFill>
+                          <a:latin typeface="Inter"/>
+                        </a:defRPr>
+                      </a:pPr>
+                      <a:r>
+                        <a:rPr>
+                          <a:latin typeface="Inter"/>
+                        </a:rPr>
+                        <a:t>Gradient signal readiness probe</a:t>
+                      </a:r>
+                    </a:p>
+                  </a:txBody>
+                  <a:tcPr marL="54864" marR="54864" marT="27432" marB="27432" anchor="ctr">
+                    <a:solidFill>
+                      <a:srgbClr val="FFFFFF"/>
+                    </a:solidFill>
+                  </a:tcPr>
+                </a:tc>
+                <a:tc>
+                  <a:txBody>
+                    <a:bodyPr/>
+                    <a:lstStyle/>
+                    <a:p>
+                      <a:pPr>
+                        <a:defRPr sz="720" b="0">
+                          <a:solidFill>
+                            <a:srgbClr val="0D1117"/>
+                          </a:solidFill>
+                          <a:latin typeface="Inter"/>
+                        </a:defRPr>
+                      </a:pPr>
+                      <a:r>
+                        <a:rPr>
+                          <a:latin typeface="Inter"/>
+                        </a:rPr>
+                        <a:t>get_macro_signals</a:t>
+                      </a:r>
+                    </a:p>
+                  </a:txBody>
+                  <a:tcPr marL="54864" marR="54864" marT="27432" marB="27432" anchor="ctr">
+                    <a:solidFill>
+                      <a:srgbClr val="FFFFFF"/>
+                    </a:solidFill>
+                  </a:tcPr>
+                </a:tc>
+                <a:tc>
+                  <a:txBody>
+                    <a:bodyPr/>
+                    <a:lstStyle/>
+                    <a:p>
+                      <a:pPr>
+                        <a:defRPr sz="720" b="0">
+                          <a:solidFill>
+                            <a:srgbClr val="0D1117"/>
+                          </a:solidFill>
+                          <a:latin typeface="Inter"/>
+                        </a:defRPr>
+                      </a:pPr>
+                      <a:r>
+                        <a:rPr>
+                          <a:latin typeface="Inter"/>
+                        </a:rPr>
+                        <a:t>2026-10-02</a:t>
+                      </a:r>
+                    </a:p>
+                  </a:txBody>
+                  <a:tcPr marL="54864" marR="54864" marT="27432" marB="27432" anchor="ctr">
+                    <a:solidFill>
+                      <a:srgbClr val="FFFFFF"/>
+                    </a:solidFill>
+                  </a:tcPr>
+                </a:tc>
+                <a:tc>
+                  <a:txBody>
+                    <a:bodyPr/>
+                    <a:lstStyle/>
+                    <a:p>
+                      <a:pPr>
+                        <a:defRPr sz="720" b="1">
+                          <a:solidFill>
+                            <a:srgbClr val="C6F432"/>
+                          </a:solidFill>
+                          <a:latin typeface="Inter"/>
+                        </a:defRPr>
+                      </a:pPr>
+                      <a:r>
+                        <a:rPr>
+                          <a:latin typeface="Inter"/>
+                        </a:rPr>
+                        <a:t>● passed</a:t>
+                      </a:r>
+                    </a:p>
+                  </a:txBody>
+                  <a:tcPr marL="54864" marR="54864" marT="27432" marB="27432" anchor="ctr">
+                    <a:solidFill>
+                      <a:srgbClr val="F5F7F9"/>
+                    </a:solidFill>
+                  </a:tcPr>
+                </a:tc>
+              </a:tr>
+              <a:tr h="521208">
+                <a:tc>
+                  <a:txBody>
+                    <a:bodyPr/>
+                    <a:lstStyle/>
+                    <a:p>
+                      <a:pPr>
+                        <a:defRPr sz="720" b="1">
+                          <a:solidFill>
+                            <a:srgbClr val="0D1117"/>
+                          </a:solidFill>
+                          <a:latin typeface="Inter"/>
+                        </a:defRPr>
+                      </a:pPr>
+                      <a:r>
+                        <a:rPr>
+                          <a:latin typeface="Inter"/>
+                        </a:rPr>
+                        <a:t>S8</a:t>
+                      </a:r>
+                    </a:p>
+                  </a:txBody>
+                  <a:tcPr marL="54864" marR="54864" marT="27432" marB="27432" anchor="ctr">
+                    <a:solidFill>
+                      <a:srgbClr val="F5F7F9"/>
+                    </a:solidFill>
+                  </a:tcPr>
+                </a:tc>
+                <a:tc>
+                  <a:txBody>
+                    <a:bodyPr/>
+                    <a:lstStyle/>
+                    <a:p>
+                      <a:pPr>
+                        <a:defRPr sz="720" b="0">
+                          <a:solidFill>
+                            <a:srgbClr val="0D1117"/>
+                          </a:solidFill>
+                          <a:latin typeface="Inter"/>
+                        </a:defRPr>
+                      </a:pPr>
+                      <a:r>
+                        <a:rPr>
+                          <a:latin typeface="Inter"/>
+                        </a:rPr>
+                        <a:t>Macro calendar readiness probe</a:t>
+                      </a:r>
+                    </a:p>
+                  </a:txBody>
+                  <a:tcPr marL="54864" marR="54864" marT="27432" marB="27432" anchor="ctr">
+                    <a:solidFill>
+                      <a:srgbClr val="F5F7F9"/>
+                    </a:solidFill>
+                  </a:tcPr>
+                </a:tc>
+                <a:tc>
+                  <a:txBody>
+                    <a:bodyPr/>
+                    <a:lstStyle/>
+                    <a:p>
+                      <a:pPr>
+                        <a:defRPr sz="720" b="0">
+                          <a:solidFill>
+                            <a:srgbClr val="0D1117"/>
+                          </a:solidFill>
+                          <a:latin typeface="Inter"/>
+                        </a:defRPr>
+                      </a:pPr>
+                      <a:r>
+                        <a:rPr>
+                          <a:latin typeface="Inter"/>
+                        </a:rPr>
+                        <a:t>get_macro_calendar</a:t>
+                      </a:r>
+                    </a:p>
+                  </a:txBody>
+                  <a:tcPr marL="54864" marR="54864" marT="27432" marB="27432" anchor="ctr">
+                    <a:solidFill>
+                      <a:srgbClr val="F5F7F9"/>
+                    </a:solidFill>
+                  </a:tcPr>
+                </a:tc>
+                <a:tc>
+                  <a:txBody>
+                    <a:bodyPr/>
+                    <a:lstStyle/>
+                    <a:p>
+                      <a:pPr>
+                        <a:defRPr sz="720" b="0">
+                          <a:solidFill>
+                            <a:srgbClr val="0D1117"/>
+                          </a:solidFill>
+                          <a:latin typeface="Inter"/>
+                        </a:defRPr>
+                      </a:pPr>
+                      <a:r>
+                        <a:rPr>
+                          <a:latin typeface="Inter"/>
+                        </a:rPr>
+                        <a:t>2026-10-04</a:t>
+                      </a:r>
+                    </a:p>
+                  </a:txBody>
+                  <a:tcPr marL="54864" marR="54864" marT="27432" marB="27432" anchor="ctr">
+                    <a:solidFill>
+                      <a:srgbClr val="F5F7F9"/>
+                    </a:solidFill>
+                  </a:tcPr>
+                </a:tc>
+                <a:tc>
+                  <a:txBody>
+                    <a:bodyPr/>
+                    <a:lstStyle/>
+                    <a:p>
+                      <a:pPr>
+                        <a:defRPr sz="720" b="1">
+                          <a:solidFill>
+                            <a:srgbClr val="C6F432"/>
+                          </a:solidFill>
+                          <a:latin typeface="Inter"/>
+                        </a:defRPr>
+                      </a:pPr>
+                      <a:r>
+                        <a:rPr>
+                          <a:latin typeface="Inter"/>
+                        </a:rPr>
+                        <a:t>● passed</a:t>
+                      </a:r>
+                    </a:p>
+                  </a:txBody>
+                  <a:tcPr marL="54864" marR="54864" marT="27432" marB="27432" anchor="ctr">
+                    <a:solidFill>
+                      <a:srgbClr val="F5F7F9"/>
+                    </a:solidFill>
+                  </a:tcPr>
+                </a:tc>
+              </a:tr>
+            </a:tbl>
+          </a:graphicData>
+        </a:graphic>
+      </p:graphicFrame>
+      <p:sp>
+        <p:nvSpPr>
+          <p:cNvPr id="9" name="TextBox 8"/>
           <p:cNvSpPr txBox="1"/>
           <p:nvPr/>
         </p:nvSpPr>
         <p:spPr>
           <a:xfrm>
-            <a:off x="640080" y="1325880"/>
-            <a:ext cx="10908792" cy="4892040"/>
+            <a:off x="640080" y="6035040"/>
+            <a:ext cx="10908792" cy="164592"/>
           </a:xfrm>
           <a:prstGeom prst="rect">
             <a:avLst/>
@@ -3524,9 +4786,9 @@
               <a:spcAft>
                 <a:spcPts val="0"/>
               </a:spcAft>
-              <a:defRPr sz="1100" b="0">
+              <a:defRPr sz="680" b="0">
                 <a:solidFill>
-                  <a:srgbClr val="4A5563"/>
+                  <a:srgbClr val="8A94A1"/>
                 </a:solidFill>
                 <a:latin typeface="Inter"/>
               </a:defRPr>
@@ -3535,14 +4797,14 @@
               <a:rPr>
                 <a:latin typeface="Inter"/>
               </a:rPr>
-              <a:t>Readiness reflects entitlement, OAuth scope, backend health and data readiness reported by GradientCIO at the time of the check. Tool availability does not guarantee that data is published for every subject.</a:t>
+              <a:t>Illustrative, Gradient Maintained — demo data, not the client's holdings or managers. All organizations, portfolios, managers and results in this public example are illustrative.</a:t>
             </a:r>
           </a:p>
         </p:txBody>
       </p:sp>
       <p:sp>
         <p:nvSpPr>
-          <p:cNvPr id="9" name="Rectangle 8"/>
+          <p:cNvPr id="10" name="Rectangle 9"/>
           <p:cNvSpPr/>
           <p:nvPr/>
         </p:nvSpPr>
@@ -3591,7 +4853,7 @@
       </p:sp>
       <p:sp>
         <p:nvSpPr>
-          <p:cNvPr id="10" name="TextBox 9"/>
+          <p:cNvPr id="11" name="TextBox 10"/>
           <p:cNvSpPr txBox="1"/>
           <p:nvPr/>
         </p:nvSpPr>
@@ -3626,14 +4888,14 @@
               <a:rPr>
                 <a:latin typeface="Inter"/>
               </a:rPr>
-              <a:t>Sources: none cited</a:t>
+              <a:t>Sources: S1 · S2 · S3 · S4 · S5 · S6 · S7 · S8</a:t>
             </a:r>
           </a:p>
         </p:txBody>
       </p:sp>
       <p:sp>
         <p:nvSpPr>
-          <p:cNvPr id="11" name="TextBox 10"/>
+          <p:cNvPr id="12" name="TextBox 11"/>
           <p:cNvSpPr txBox="1"/>
           <p:nvPr/>
         </p:nvSpPr>
@@ -3675,7 +4937,7 @@
       </p:sp>
       <p:sp>
         <p:nvSpPr>
-          <p:cNvPr id="12" name="TextBox 11"/>
+          <p:cNvPr id="13" name="TextBox 12"/>
           <p:cNvSpPr txBox="1"/>
           <p:nvPr/>
         </p:nvSpPr>
@@ -4057,7 +5319,7 @@
         <p:spPr>
           <a:xfrm>
             <a:off x="640080" y="1325880"/>
-            <a:ext cx="10908792" cy="1823056"/>
+            <a:ext cx="10908792" cy="1591357"/>
           </a:xfrm>
           <a:prstGeom prst="rect">
             <a:avLst/>
@@ -4106,7 +5368,7 @@
         <p:spPr>
           <a:xfrm>
             <a:off x="640080" y="1325880"/>
-            <a:ext cx="54864" cy="1823056"/>
+            <a:ext cx="54864" cy="1591357"/>
           </a:xfrm>
           <a:prstGeom prst="rect">
             <a:avLst/>
@@ -4197,7 +5459,7 @@
         <p:spPr>
           <a:xfrm>
             <a:off x="804671" y="1719072"/>
-            <a:ext cx="10616184" cy="1338424"/>
+            <a:ext cx="10616184" cy="1106725"/>
           </a:xfrm>
           <a:prstGeom prst="rect">
             <a:avLst/>
@@ -4238,8 +5500,8 @@
         </p:nvSpPr>
         <p:spPr>
           <a:xfrm>
-            <a:off x="640080" y="3258664"/>
-            <a:ext cx="2644902" cy="1737516"/>
+            <a:off x="640080" y="3026965"/>
+            <a:ext cx="2644902" cy="1770141"/>
           </a:xfrm>
           <a:prstGeom prst="rect">
             <a:avLst/>
@@ -4287,7 +5549,7 @@
         </p:nvSpPr>
         <p:spPr>
           <a:xfrm>
-            <a:off x="640080" y="3258664"/>
+            <a:off x="640080" y="3026965"/>
             <a:ext cx="2644902" cy="45720"/>
           </a:xfrm>
           <a:prstGeom prst="rect">
@@ -4336,7 +5598,7 @@
         </p:nvSpPr>
         <p:spPr>
           <a:xfrm>
-            <a:off x="749808" y="3386680"/>
+            <a:off x="749808" y="3154981"/>
             <a:ext cx="2425446" cy="201168"/>
           </a:xfrm>
           <a:prstGeom prst="rect">
@@ -4378,7 +5640,7 @@
         </p:nvSpPr>
         <p:spPr>
           <a:xfrm>
-            <a:off x="749808" y="3642712"/>
+            <a:off x="749808" y="3411013"/>
             <a:ext cx="2425446" cy="475488"/>
           </a:xfrm>
           <a:prstGeom prst="rect">
@@ -4420,7 +5682,7 @@
         </p:nvSpPr>
         <p:spPr>
           <a:xfrm>
-            <a:off x="749808" y="4666997"/>
+            <a:off x="749808" y="4467923"/>
             <a:ext cx="2425446" cy="228600"/>
           </a:xfrm>
           <a:prstGeom prst="rect">
@@ -4462,8 +5724,8 @@
         </p:nvSpPr>
         <p:spPr>
           <a:xfrm>
-            <a:off x="3394710" y="3258664"/>
-            <a:ext cx="2644902" cy="1737516"/>
+            <a:off x="3394710" y="3026965"/>
+            <a:ext cx="2644902" cy="1770141"/>
           </a:xfrm>
           <a:prstGeom prst="rect">
             <a:avLst/>
@@ -4511,7 +5773,7 @@
         </p:nvSpPr>
         <p:spPr>
           <a:xfrm>
-            <a:off x="3394710" y="3258664"/>
+            <a:off x="3394710" y="3026965"/>
             <a:ext cx="2644902" cy="45720"/>
           </a:xfrm>
           <a:prstGeom prst="rect">
@@ -4560,7 +5822,7 @@
         </p:nvSpPr>
         <p:spPr>
           <a:xfrm>
-            <a:off x="3504438" y="3386680"/>
+            <a:off x="3504438" y="3154981"/>
             <a:ext cx="2425446" cy="201168"/>
           </a:xfrm>
           <a:prstGeom prst="rect">
@@ -4602,7 +5864,7 @@
         </p:nvSpPr>
         <p:spPr>
           <a:xfrm>
-            <a:off x="3504438" y="3642712"/>
+            <a:off x="3504438" y="3411013"/>
             <a:ext cx="2425446" cy="475488"/>
           </a:xfrm>
           <a:prstGeom prst="rect">
@@ -4644,7 +5906,7 @@
         </p:nvSpPr>
         <p:spPr>
           <a:xfrm>
-            <a:off x="3504438" y="4666997"/>
+            <a:off x="3504438" y="4467923"/>
             <a:ext cx="2425446" cy="228600"/>
           </a:xfrm>
           <a:prstGeom prst="rect">
@@ -4686,8 +5948,8 @@
         </p:nvSpPr>
         <p:spPr>
           <a:xfrm>
-            <a:off x="6149340" y="3258664"/>
-            <a:ext cx="2644902" cy="1737516"/>
+            <a:off x="6149340" y="3026965"/>
+            <a:ext cx="2644902" cy="1770141"/>
           </a:xfrm>
           <a:prstGeom prst="rect">
             <a:avLst/>
@@ -4735,7 +5997,7 @@
         </p:nvSpPr>
         <p:spPr>
           <a:xfrm>
-            <a:off x="6149340" y="3258664"/>
+            <a:off x="6149340" y="3026965"/>
             <a:ext cx="2644902" cy="45720"/>
           </a:xfrm>
           <a:prstGeom prst="rect">
@@ -4784,7 +6046,7 @@
         </p:nvSpPr>
         <p:spPr>
           <a:xfrm>
-            <a:off x="6259068" y="3386680"/>
+            <a:off x="6259068" y="3154981"/>
             <a:ext cx="2425446" cy="201168"/>
           </a:xfrm>
           <a:prstGeom prst="rect">
@@ -4826,7 +6088,7 @@
         </p:nvSpPr>
         <p:spPr>
           <a:xfrm>
-            <a:off x="6259068" y="3642712"/>
+            <a:off x="6259068" y="3411013"/>
             <a:ext cx="2425446" cy="475488"/>
           </a:xfrm>
           <a:prstGeom prst="rect">
@@ -4868,7 +6130,7 @@
         </p:nvSpPr>
         <p:spPr>
           <a:xfrm>
-            <a:off x="6259068" y="4666997"/>
+            <a:off x="6259068" y="4467923"/>
             <a:ext cx="2425446" cy="228600"/>
           </a:xfrm>
           <a:prstGeom prst="rect">
@@ -4910,8 +6172,8 @@
         </p:nvSpPr>
         <p:spPr>
           <a:xfrm>
-            <a:off x="8903970" y="3258664"/>
-            <a:ext cx="2644902" cy="1737516"/>
+            <a:off x="8903970" y="3026965"/>
+            <a:ext cx="2644902" cy="1770141"/>
           </a:xfrm>
           <a:prstGeom prst="rect">
             <a:avLst/>
@@ -4959,7 +6221,7 @@
         </p:nvSpPr>
         <p:spPr>
           <a:xfrm>
-            <a:off x="8903970" y="3258664"/>
+            <a:off x="8903970" y="3026965"/>
             <a:ext cx="2644902" cy="45720"/>
           </a:xfrm>
           <a:prstGeom prst="rect">
@@ -5008,7 +6270,7 @@
         </p:nvSpPr>
         <p:spPr>
           <a:xfrm>
-            <a:off x="9013698" y="3386680"/>
+            <a:off x="9013698" y="3154981"/>
             <a:ext cx="2425446" cy="201168"/>
           </a:xfrm>
           <a:prstGeom prst="rect">
@@ -5050,7 +6312,7 @@
         </p:nvSpPr>
         <p:spPr>
           <a:xfrm>
-            <a:off x="9013698" y="3642712"/>
+            <a:off x="9013698" y="3411013"/>
             <a:ext cx="2425446" cy="475488"/>
           </a:xfrm>
           <a:prstGeom prst="rect">
@@ -5092,7 +6354,7 @@
         </p:nvSpPr>
         <p:spPr>
           <a:xfrm>
-            <a:off x="9013698" y="4666997"/>
+            <a:off x="9013698" y="4467923"/>
             <a:ext cx="2425446" cy="228600"/>
           </a:xfrm>
           <a:prstGeom prst="rect">
@@ -5134,8 +6396,8 @@
         </p:nvSpPr>
         <p:spPr>
           <a:xfrm>
-            <a:off x="640080" y="5105909"/>
-            <a:ext cx="10908792" cy="1112010"/>
+            <a:off x="640080" y="4906835"/>
+            <a:ext cx="10908792" cy="1311084"/>
           </a:xfrm>
           <a:prstGeom prst="rect">
             <a:avLst/>
@@ -5183,8 +6445,8 @@
         </p:nvSpPr>
         <p:spPr>
           <a:xfrm>
-            <a:off x="640080" y="5105909"/>
-            <a:ext cx="54864" cy="1112010"/>
+            <a:off x="640080" y="4906835"/>
+            <a:ext cx="54864" cy="1311084"/>
           </a:xfrm>
           <a:prstGeom prst="rect">
             <a:avLst/>
@@ -5232,7 +6494,7 @@
         </p:nvSpPr>
         <p:spPr>
           <a:xfrm>
-            <a:off x="804671" y="5215637"/>
+            <a:off x="804671" y="5016563"/>
             <a:ext cx="10616184" cy="228600"/>
           </a:xfrm>
           <a:prstGeom prst="rect">
@@ -5274,8 +6536,8 @@
         </p:nvSpPr>
         <p:spPr>
           <a:xfrm>
-            <a:off x="804671" y="5499101"/>
-            <a:ext cx="10616184" cy="627378"/>
+            <a:off x="804671" y="5300027"/>
+            <a:ext cx="10616184" cy="826452"/>
           </a:xfrm>
           <a:prstGeom prst="rect">
             <a:avLst/>
@@ -5825,7 +7087,7 @@
         <p:spPr>
           <a:xfrm>
             <a:off x="640080" y="1325880"/>
-            <a:ext cx="5239512" cy="201168"/>
+            <a:ext cx="10908792" cy="201168"/>
           </a:xfrm>
           <a:prstGeom prst="rect">
             <a:avLst/>
@@ -5868,7 +7130,7 @@
         </p:nvGraphicFramePr>
         <p:xfrm>
           <a:off x="640080" y="1600200"/>
-          <a:ext cx="5239512" cy="4617720"/>
+          <a:ext cx="10908792" cy="3152495"/>
         </p:xfrm>
         <a:graphic>
           <a:graphicData uri="http://schemas.openxmlformats.org/drawingml/2006/table">
@@ -5877,11 +7139,11 @@
                 <a:tableStyleId>{5C22544A-7EE6-4342-B048-85BDC9FD1C3A}</a:tableStyleId>
               </a:tblPr>
               <a:tblGrid>
-                <a:gridCol w="1746504"/>
-                <a:gridCol w="1746504"/>
-                <a:gridCol w="1746504"/>
+                <a:gridCol w="2011680"/>
+                <a:gridCol w="4448556"/>
+                <a:gridCol w="4448556"/>
               </a:tblGrid>
-              <a:tr h="769620">
+              <a:tr h="525415">
                 <a:tc>
                   <a:txBody>
                     <a:bodyPr/>
@@ -5964,7 +7226,7 @@
                   </a:tcPr>
                 </a:tc>
               </a:tr>
-              <a:tr h="769620">
+              <a:tr h="525415">
                 <a:tc>
                   <a:txBody>
                     <a:bodyPr/>
@@ -6047,7 +7309,7 @@
                   </a:tcPr>
                 </a:tc>
               </a:tr>
-              <a:tr h="769620">
+              <a:tr h="525415">
                 <a:tc>
                   <a:txBody>
                     <a:bodyPr/>
@@ -6130,7 +7392,7 @@
                   </a:tcPr>
                 </a:tc>
               </a:tr>
-              <a:tr h="769620">
+              <a:tr h="525415">
                 <a:tc>
                   <a:txBody>
                     <a:bodyPr/>
@@ -6213,7 +7475,7 @@
                   </a:tcPr>
                 </a:tc>
               </a:tr>
-              <a:tr h="769620">
+              <a:tr h="525415">
                 <a:tc>
                   <a:txBody>
                     <a:bodyPr/>
@@ -6296,7 +7558,7 @@
                   </a:tcPr>
                 </a:tc>
               </a:tr>
-              <a:tr h="769620">
+              <a:tr h="525420">
                 <a:tc>
                   <a:txBody>
                     <a:bodyPr/>
@@ -6385,14 +7647,249 @@
       </p:graphicFrame>
       <p:sp>
         <p:nvSpPr>
-          <p:cNvPr id="11" name="Rectangle 10"/>
+          <p:cNvPr id="11" name="TextBox 10"/>
+          <p:cNvSpPr txBox="1"/>
+          <p:nvPr/>
+        </p:nvSpPr>
+        <p:spPr>
+          <a:xfrm>
+            <a:off x="640080" y="4862423"/>
+            <a:ext cx="10908792" cy="201168"/>
+          </a:xfrm>
+          <a:prstGeom prst="rect">
+            <a:avLst/>
+          </a:prstGeom>
+          <a:noFill/>
+        </p:spPr>
+        <p:txBody>
+          <a:bodyPr wrap="none" lIns="9144" rIns="9144" tIns="9144" bIns="9144" anchor="t">
+            <a:spAutoFit/>
+          </a:bodyPr>
+          <a:lstStyle/>
+          <a:p>
+            <a:pPr algn="l">
+              <a:spcAft>
+                <a:spcPts val="0"/>
+              </a:spcAft>
+              <a:defRPr sz="720" b="1">
+                <a:solidFill>
+                  <a:srgbClr val="4A5563"/>
+                </a:solidFill>
+                <a:latin typeface="Inter"/>
+              </a:defRPr>
+            </a:pPr>
+            <a:r>
+              <a:rPr>
+                <a:latin typeface="Inter"/>
+              </a:rPr>
+              <a:t>PARTIAL OR UNAVAILABLE</a:t>
+            </a:r>
+          </a:p>
+        </p:txBody>
+      </p:sp>
+      <p:graphicFrame>
+        <p:nvGraphicFramePr>
+          <p:cNvPr id="12" name="Table 11"/>
+          <p:cNvGraphicFramePr>
+            <a:graphicFrameLocks noGrp="1"/>
+          </p:cNvGraphicFramePr>
+          <p:nvPr/>
+        </p:nvGraphicFramePr>
+        <p:xfrm>
+          <a:off x="640080" y="5136743"/>
+          <a:ext cx="10908792" cy="1081176"/>
+        </p:xfrm>
+        <a:graphic>
+          <a:graphicData uri="http://schemas.openxmlformats.org/drawingml/2006/table">
+            <a:tbl>
+              <a:tblPr firstRow="1" bandRow="1">
+                <a:tableStyleId>{5C22544A-7EE6-4342-B048-85BDC9FD1C3A}</a:tableStyleId>
+              </a:tblPr>
+              <a:tblGrid>
+                <a:gridCol w="2011680"/>
+                <a:gridCol w="4448556"/>
+                <a:gridCol w="4448556"/>
+              </a:tblGrid>
+              <a:tr h="540588">
+                <a:tc>
+                  <a:txBody>
+                    <a:bodyPr/>
+                    <a:lstStyle/>
+                    <a:p>
+                      <a:pPr>
+                        <a:defRPr sz="750" b="1">
+                          <a:solidFill>
+                            <a:srgbClr val="FFFFFF"/>
+                          </a:solidFill>
+                          <a:latin typeface="Inter"/>
+                        </a:defRPr>
+                      </a:pPr>
+                      <a:r>
+                        <a:rPr>
+                          <a:latin typeface="Inter"/>
+                        </a:rPr>
+                        <a:t>Skill</a:t>
+                      </a:r>
+                    </a:p>
+                  </a:txBody>
+                  <a:tcPr marL="54864" marR="54864" marT="27432" marB="27432" anchor="ctr">
+                    <a:solidFill>
+                      <a:srgbClr val="0D1117"/>
+                    </a:solidFill>
+                  </a:tcPr>
+                </a:tc>
+                <a:tc>
+                  <a:txBody>
+                    <a:bodyPr/>
+                    <a:lstStyle/>
+                    <a:p>
+                      <a:pPr>
+                        <a:defRPr sz="750" b="1">
+                          <a:solidFill>
+                            <a:srgbClr val="FFFFFF"/>
+                          </a:solidFill>
+                          <a:latin typeface="Inter"/>
+                        </a:defRPr>
+                      </a:pPr>
+                      <a:r>
+                        <a:rPr>
+                          <a:latin typeface="Inter"/>
+                        </a:rPr>
+                        <a:t>Produces</a:t>
+                      </a:r>
+                    </a:p>
+                  </a:txBody>
+                  <a:tcPr marL="54864" marR="54864" marT="27432" marB="27432" anchor="ctr">
+                    <a:solidFill>
+                      <a:srgbClr val="0D1117"/>
+                    </a:solidFill>
+                  </a:tcPr>
+                </a:tc>
+                <a:tc>
+                  <a:txBody>
+                    <a:bodyPr/>
+                    <a:lstStyle/>
+                    <a:p>
+                      <a:pPr>
+                        <a:defRPr sz="750" b="1">
+                          <a:solidFill>
+                            <a:srgbClr val="FFFFFF"/>
+                          </a:solidFill>
+                          <a:latin typeface="Inter"/>
+                        </a:defRPr>
+                      </a:pPr>
+                      <a:r>
+                        <a:rPr>
+                          <a:latin typeface="Inter"/>
+                        </a:rPr>
+                        <a:t>Note</a:t>
+                      </a:r>
+                    </a:p>
+                  </a:txBody>
+                  <a:tcPr marL="54864" marR="54864" marT="27432" marB="27432" anchor="ctr">
+                    <a:solidFill>
+                      <a:srgbClr val="0D1117"/>
+                    </a:solidFill>
+                  </a:tcPr>
+                </a:tc>
+              </a:tr>
+              <a:tr h="540588">
+                <a:tc>
+                  <a:txBody>
+                    <a:bodyPr/>
+                    <a:lstStyle/>
+                    <a:p>
+                      <a:pPr>
+                        <a:defRPr sz="800" b="1">
+                          <a:solidFill>
+                            <a:srgbClr val="0D1117"/>
+                          </a:solidFill>
+                          <a:latin typeface="Inter"/>
+                        </a:defRPr>
+                      </a:pPr>
+                      <a:r>
+                        <a:rPr>
+                          <a:latin typeface="Inter"/>
+                        </a:rPr>
+                        <a:t>gradient-decision-ic-memo</a:t>
+                      </a:r>
+                    </a:p>
+                  </a:txBody>
+                  <a:tcPr marL="54864" marR="54864" marT="27432" marB="27432" anchor="ctr">
+                    <a:solidFill>
+                      <a:srgbClr val="FFFFFF"/>
+                    </a:solidFill>
+                  </a:tcPr>
+                </a:tc>
+                <a:tc>
+                  <a:txBody>
+                    <a:bodyPr/>
+                    <a:lstStyle/>
+                    <a:p>
+                      <a:pPr>
+                        <a:defRPr sz="800" b="0">
+                          <a:solidFill>
+                            <a:srgbClr val="0D1117"/>
+                          </a:solidFill>
+                          <a:latin typeface="Inter"/>
+                        </a:defRPr>
+                      </a:pPr>
+                      <a:r>
+                        <a:rPr>
+                          <a:latin typeface="Inter"/>
+                        </a:rPr>
+                        <a:t>IC memo</a:t>
+                      </a:r>
+                    </a:p>
+                  </a:txBody>
+                  <a:tcPr marL="54864" marR="54864" marT="27432" marB="27432" anchor="ctr">
+                    <a:solidFill>
+                      <a:srgbClr val="FFFFFF"/>
+                    </a:solidFill>
+                  </a:tcPr>
+                </a:tc>
+                <a:tc>
+                  <a:txBody>
+                    <a:bodyPr/>
+                    <a:lstStyle/>
+                    <a:p>
+                      <a:pPr>
+                        <a:defRPr sz="800" b="0">
+                          <a:solidFill>
+                            <a:srgbClr val="0D1117"/>
+                          </a:solidFill>
+                          <a:latin typeface="Inter"/>
+                        </a:defRPr>
+                      </a:pPr>
+                      <a:r>
+                        <a:rPr>
+                          <a:latin typeface="Inter"/>
+                        </a:rPr>
+                        <a:t>Portfolio core: Not licensed; Strategy Lab supplement: Not licensed (optional). Use supplied holdings</a:t>
+                      </a:r>
+                    </a:p>
+                  </a:txBody>
+                  <a:tcPr marL="54864" marR="54864" marT="27432" marB="27432" anchor="ctr">
+                    <a:solidFill>
+                      <a:srgbClr val="FFFFFF"/>
+                    </a:solidFill>
+                  </a:tcPr>
+                </a:tc>
+              </a:tr>
+            </a:tbl>
+          </a:graphicData>
+        </a:graphic>
+      </p:graphicFrame>
+      <p:sp>
+        <p:nvSpPr>
+          <p:cNvPr id="13" name="Rectangle 12"/>
           <p:cNvSpPr/>
           <p:nvPr/>
         </p:nvSpPr>
         <p:spPr>
           <a:xfrm>
-            <a:off x="6080760" y="1325880"/>
-            <a:ext cx="9144" cy="4892040"/>
+            <a:off x="640080" y="6446520"/>
+            <a:ext cx="10908792" cy="9144"/>
           </a:xfrm>
           <a:prstGeom prst="rect">
             <a:avLst/>
@@ -6434,291 +7931,7 @@
       </p:sp>
       <p:sp>
         <p:nvSpPr>
-          <p:cNvPr id="12" name="TextBox 11"/>
-          <p:cNvSpPr txBox="1"/>
-          <p:nvPr/>
-        </p:nvSpPr>
-        <p:spPr>
-          <a:xfrm>
-            <a:off x="6309360" y="1325880"/>
-            <a:ext cx="5239512" cy="201168"/>
-          </a:xfrm>
-          <a:prstGeom prst="rect">
-            <a:avLst/>
-          </a:prstGeom>
-          <a:noFill/>
-        </p:spPr>
-        <p:txBody>
-          <a:bodyPr wrap="none" lIns="9144" rIns="9144" tIns="9144" bIns="9144" anchor="t">
-            <a:spAutoFit/>
-          </a:bodyPr>
-          <a:lstStyle/>
-          <a:p>
-            <a:pPr algn="l">
-              <a:spcAft>
-                <a:spcPts val="0"/>
-              </a:spcAft>
-              <a:defRPr sz="720" b="1">
-                <a:solidFill>
-                  <a:srgbClr val="4A5563"/>
-                </a:solidFill>
-                <a:latin typeface="Inter"/>
-              </a:defRPr>
-            </a:pPr>
-            <a:r>
-              <a:rPr>
-                <a:latin typeface="Inter"/>
-              </a:rPr>
-              <a:t>PARTIAL</a:t>
-            </a:r>
-          </a:p>
-        </p:txBody>
-      </p:sp>
-      <p:graphicFrame>
-        <p:nvGraphicFramePr>
-          <p:cNvPr id="13" name="Table 12"/>
-          <p:cNvGraphicFramePr>
-            <a:graphicFrameLocks noGrp="1"/>
-          </p:cNvGraphicFramePr>
-          <p:nvPr/>
-        </p:nvGraphicFramePr>
-        <p:xfrm>
-          <a:off x="6309360" y="1600200"/>
-          <a:ext cx="5239512" cy="4617720"/>
-        </p:xfrm>
-        <a:graphic>
-          <a:graphicData uri="http://schemas.openxmlformats.org/drawingml/2006/table">
-            <a:tbl>
-              <a:tblPr firstRow="1" bandRow="1">
-                <a:tableStyleId>{5C22544A-7EE6-4342-B048-85BDC9FD1C3A}</a:tableStyleId>
-              </a:tblPr>
-              <a:tblGrid>
-                <a:gridCol w="1746504"/>
-                <a:gridCol w="1746504"/>
-                <a:gridCol w="1746504"/>
-              </a:tblGrid>
-              <a:tr h="2308860">
-                <a:tc>
-                  <a:txBody>
-                    <a:bodyPr/>
-                    <a:lstStyle/>
-                    <a:p>
-                      <a:pPr>
-                        <a:defRPr sz="750" b="1">
-                          <a:solidFill>
-                            <a:srgbClr val="FFFFFF"/>
-                          </a:solidFill>
-                          <a:latin typeface="Inter"/>
-                        </a:defRPr>
-                      </a:pPr>
-                      <a:r>
-                        <a:rPr>
-                          <a:latin typeface="Inter"/>
-                        </a:rPr>
-                        <a:t>Skill</a:t>
-                      </a:r>
-                    </a:p>
-                  </a:txBody>
-                  <a:tcPr marL="54864" marR="54864" marT="27432" marB="27432" anchor="ctr">
-                    <a:solidFill>
-                      <a:srgbClr val="0D1117"/>
-                    </a:solidFill>
-                  </a:tcPr>
-                </a:tc>
-                <a:tc>
-                  <a:txBody>
-                    <a:bodyPr/>
-                    <a:lstStyle/>
-                    <a:p>
-                      <a:pPr>
-                        <a:defRPr sz="750" b="1">
-                          <a:solidFill>
-                            <a:srgbClr val="FFFFFF"/>
-                          </a:solidFill>
-                          <a:latin typeface="Inter"/>
-                        </a:defRPr>
-                      </a:pPr>
-                      <a:r>
-                        <a:rPr>
-                          <a:latin typeface="Inter"/>
-                        </a:rPr>
-                        <a:t>Produces</a:t>
-                      </a:r>
-                    </a:p>
-                  </a:txBody>
-                  <a:tcPr marL="54864" marR="54864" marT="27432" marB="27432" anchor="ctr">
-                    <a:solidFill>
-                      <a:srgbClr val="0D1117"/>
-                    </a:solidFill>
-                  </a:tcPr>
-                </a:tc>
-                <a:tc>
-                  <a:txBody>
-                    <a:bodyPr/>
-                    <a:lstStyle/>
-                    <a:p>
-                      <a:pPr>
-                        <a:defRPr sz="750" b="1">
-                          <a:solidFill>
-                            <a:srgbClr val="FFFFFF"/>
-                          </a:solidFill>
-                          <a:latin typeface="Inter"/>
-                        </a:defRPr>
-                      </a:pPr>
-                      <a:r>
-                        <a:rPr>
-                          <a:latin typeface="Inter"/>
-                        </a:rPr>
-                        <a:t>Note</a:t>
-                      </a:r>
-                    </a:p>
-                  </a:txBody>
-                  <a:tcPr marL="54864" marR="54864" marT="27432" marB="27432" anchor="ctr">
-                    <a:solidFill>
-                      <a:srgbClr val="0D1117"/>
-                    </a:solidFill>
-                  </a:tcPr>
-                </a:tc>
-              </a:tr>
-              <a:tr h="2308860">
-                <a:tc>
-                  <a:txBody>
-                    <a:bodyPr/>
-                    <a:lstStyle/>
-                    <a:p>
-                      <a:pPr>
-                        <a:defRPr sz="800" b="1">
-                          <a:solidFill>
-                            <a:srgbClr val="0D1117"/>
-                          </a:solidFill>
-                          <a:latin typeface="Inter"/>
-                        </a:defRPr>
-                      </a:pPr>
-                      <a:r>
-                        <a:rPr>
-                          <a:latin typeface="Inter"/>
-                        </a:rPr>
-                        <a:t>gradient-decision-ic-memo</a:t>
-                      </a:r>
-                    </a:p>
-                  </a:txBody>
-                  <a:tcPr marL="54864" marR="54864" marT="27432" marB="27432" anchor="ctr">
-                    <a:solidFill>
-                      <a:srgbClr val="FFFFFF"/>
-                    </a:solidFill>
-                  </a:tcPr>
-                </a:tc>
-                <a:tc>
-                  <a:txBody>
-                    <a:bodyPr/>
-                    <a:lstStyle/>
-                    <a:p>
-                      <a:pPr>
-                        <a:defRPr sz="800" b="0">
-                          <a:solidFill>
-                            <a:srgbClr val="0D1117"/>
-                          </a:solidFill>
-                          <a:latin typeface="Inter"/>
-                        </a:defRPr>
-                      </a:pPr>
-                      <a:r>
-                        <a:rPr>
-                          <a:latin typeface="Inter"/>
-                        </a:rPr>
-                        <a:t>IC memo</a:t>
-                      </a:r>
-                    </a:p>
-                  </a:txBody>
-                  <a:tcPr marL="54864" marR="54864" marT="27432" marB="27432" anchor="ctr">
-                    <a:solidFill>
-                      <a:srgbClr val="FFFFFF"/>
-                    </a:solidFill>
-                  </a:tcPr>
-                </a:tc>
-                <a:tc>
-                  <a:txBody>
-                    <a:bodyPr/>
-                    <a:lstStyle/>
-                    <a:p>
-                      <a:pPr>
-                        <a:defRPr sz="800" b="0">
-                          <a:solidFill>
-                            <a:srgbClr val="0D1117"/>
-                          </a:solidFill>
-                          <a:latin typeface="Inter"/>
-                        </a:defRPr>
-                      </a:pPr>
-                      <a:r>
-                        <a:rPr>
-                          <a:latin typeface="Inter"/>
-                        </a:rPr>
-                        <a:t>Portfolio core: Not licensed; Strategy Lab supplement: Not licensed (optional). Use supplied holdings</a:t>
-                      </a:r>
-                    </a:p>
-                  </a:txBody>
-                  <a:tcPr marL="54864" marR="54864" marT="27432" marB="27432" anchor="ctr">
-                    <a:solidFill>
-                      <a:srgbClr val="FFFFFF"/>
-                    </a:solidFill>
-                  </a:tcPr>
-                </a:tc>
-              </a:tr>
-            </a:tbl>
-          </a:graphicData>
-        </a:graphic>
-      </p:graphicFrame>
-      <p:sp>
-        <p:nvSpPr>
-          <p:cNvPr id="14" name="Rectangle 13"/>
-          <p:cNvSpPr/>
-          <p:nvPr/>
-        </p:nvSpPr>
-        <p:spPr>
-          <a:xfrm>
-            <a:off x="640080" y="6446520"/>
-            <a:ext cx="10908792" cy="9144"/>
-          </a:xfrm>
-          <a:prstGeom prst="rect">
-            <a:avLst/>
-          </a:prstGeom>
-          <a:solidFill>
-            <a:srgbClr val="E3E7EC"/>
-          </a:solidFill>
-          <a:ln>
-            <a:solidFill>
-              <a:srgbClr val="E3E7EC"/>
-            </a:solidFill>
-          </a:ln>
-        </p:spPr>
-        <p:style>
-          <a:lnRef idx="1">
-            <a:schemeClr val="accent1"/>
-          </a:lnRef>
-          <a:fillRef idx="3">
-            <a:schemeClr val="accent1"/>
-          </a:fillRef>
-          <a:effectRef idx="2">
-            <a:schemeClr val="accent1"/>
-          </a:effectRef>
-          <a:fontRef idx="minor">
-            <a:schemeClr val="lt1"/>
-          </a:fontRef>
-        </p:style>
-        <p:txBody>
-          <a:bodyPr rtlCol="0" anchor="ctr"/>
-          <a:lstStyle/>
-          <a:p>
-            <a:pPr algn="ctr">
-              <a:defRPr>
-                <a:latin typeface="Inter"/>
-              </a:defRPr>
-            </a:pPr>
-          </a:p>
-        </p:txBody>
-      </p:sp>
-      <p:sp>
-        <p:nvSpPr>
-          <p:cNvPr id="15" name="TextBox 14"/>
+          <p:cNvPr id="14" name="TextBox 13"/>
           <p:cNvSpPr txBox="1"/>
           <p:nvPr/>
         </p:nvSpPr>
@@ -6760,7 +7973,7 @@
       </p:sp>
       <p:sp>
         <p:nvSpPr>
-          <p:cNvPr id="16" name="TextBox 15"/>
+          <p:cNvPr id="15" name="TextBox 14"/>
           <p:cNvSpPr txBox="1"/>
           <p:nvPr/>
         </p:nvSpPr>
@@ -6802,7 +8015,7 @@
       </p:sp>
       <p:sp>
         <p:nvSpPr>
-          <p:cNvPr id="17" name="TextBox 16"/>
+          <p:cNvPr id="16" name="TextBox 15"/>
           <p:cNvSpPr txBox="1"/>
           <p:nvPr/>
         </p:nvSpPr>
@@ -13405,1278 +14618,16 @@
           </a:p>
         </p:txBody>
       </p:sp>
-      <p:graphicFrame>
-        <p:nvGraphicFramePr>
-          <p:cNvPr id="8" name="Table 7"/>
-          <p:cNvGraphicFramePr>
-            <a:graphicFrameLocks noGrp="1"/>
-          </p:cNvGraphicFramePr>
-          <p:nvPr/>
-        </p:nvGraphicFramePr>
-        <p:xfrm>
-          <a:off x="640080" y="1325880"/>
-          <a:ext cx="10908792" cy="4690872"/>
-        </p:xfrm>
-        <a:graphic>
-          <a:graphicData uri="http://schemas.openxmlformats.org/drawingml/2006/table">
-            <a:tbl>
-              <a:tblPr firstRow="1" bandRow="1">
-                <a:tableStyleId>{5C22544A-7EE6-4342-B048-85BDC9FD1C3A}</a:tableStyleId>
-              </a:tblPr>
-              <a:tblGrid>
-                <a:gridCol w="2011680"/>
-                <a:gridCol w="2224278"/>
-                <a:gridCol w="2224278"/>
-                <a:gridCol w="2224278"/>
-                <a:gridCol w="2224278"/>
-              </a:tblGrid>
-              <a:tr h="521208">
-                <a:tc>
-                  <a:txBody>
-                    <a:bodyPr/>
-                    <a:lstStyle/>
-                    <a:p>
-                      <a:pPr>
-                        <a:defRPr sz="750" b="1">
-                          <a:solidFill>
-                            <a:srgbClr val="FFFFFF"/>
-                          </a:solidFill>
-                          <a:latin typeface="Inter"/>
-                        </a:defRPr>
-                      </a:pPr>
-                      <a:r>
-                        <a:rPr>
-                          <a:latin typeface="Inter"/>
-                        </a:rPr>
-                        <a:t>Tag</a:t>
-                      </a:r>
-                    </a:p>
-                  </a:txBody>
-                  <a:tcPr marL="54864" marR="54864" marT="27432" marB="27432" anchor="ctr">
-                    <a:solidFill>
-                      <a:srgbClr val="0D1117"/>
-                    </a:solidFill>
-                  </a:tcPr>
-                </a:tc>
-                <a:tc>
-                  <a:txBody>
-                    <a:bodyPr/>
-                    <a:lstStyle/>
-                    <a:p>
-                      <a:pPr>
-                        <a:defRPr sz="750" b="1">
-                          <a:solidFill>
-                            <a:srgbClr val="FFFFFF"/>
-                          </a:solidFill>
-                          <a:latin typeface="Inter"/>
-                        </a:defRPr>
-                      </a:pPr>
-                      <a:r>
-                        <a:rPr>
-                          <a:latin typeface="Inter"/>
-                        </a:rPr>
-                        <a:t>Evidence</a:t>
-                      </a:r>
-                    </a:p>
-                  </a:txBody>
-                  <a:tcPr marL="54864" marR="54864" marT="27432" marB="27432" anchor="ctr">
-                    <a:solidFill>
-                      <a:srgbClr val="0D1117"/>
-                    </a:solidFill>
-                  </a:tcPr>
-                </a:tc>
-                <a:tc>
-                  <a:txBody>
-                    <a:bodyPr/>
-                    <a:lstStyle/>
-                    <a:p>
-                      <a:pPr>
-                        <a:defRPr sz="750" b="1">
-                          <a:solidFill>
-                            <a:srgbClr val="FFFFFF"/>
-                          </a:solidFill>
-                          <a:latin typeface="Inter"/>
-                        </a:defRPr>
-                      </a:pPr>
-                      <a:r>
-                        <a:rPr>
-                          <a:latin typeface="Inter"/>
-                        </a:rPr>
-                        <a:t>Tool</a:t>
-                      </a:r>
-                    </a:p>
-                  </a:txBody>
-                  <a:tcPr marL="54864" marR="54864" marT="27432" marB="27432" anchor="ctr">
-                    <a:solidFill>
-                      <a:srgbClr val="0D1117"/>
-                    </a:solidFill>
-                  </a:tcPr>
-                </a:tc>
-                <a:tc>
-                  <a:txBody>
-                    <a:bodyPr/>
-                    <a:lstStyle/>
-                    <a:p>
-                      <a:pPr>
-                        <a:defRPr sz="750" b="1">
-                          <a:solidFill>
-                            <a:srgbClr val="FFFFFF"/>
-                          </a:solidFill>
-                          <a:latin typeface="Inter"/>
-                        </a:defRPr>
-                      </a:pPr>
-                      <a:r>
-                        <a:rPr>
-                          <a:latin typeface="Inter"/>
-                        </a:rPr>
-                        <a:t>As of</a:t>
-                      </a:r>
-                    </a:p>
-                  </a:txBody>
-                  <a:tcPr marL="54864" marR="54864" marT="27432" marB="27432" anchor="ctr">
-                    <a:solidFill>
-                      <a:srgbClr val="0D1117"/>
-                    </a:solidFill>
-                  </a:tcPr>
-                </a:tc>
-                <a:tc>
-                  <a:txBody>
-                    <a:bodyPr/>
-                    <a:lstStyle/>
-                    <a:p>
-                      <a:pPr>
-                        <a:defRPr sz="750" b="1">
-                          <a:solidFill>
-                            <a:srgbClr val="FFFFFF"/>
-                          </a:solidFill>
-                          <a:latin typeface="Inter"/>
-                        </a:defRPr>
-                      </a:pPr>
-                      <a:r>
-                        <a:rPr>
-                          <a:latin typeface="Inter"/>
-                        </a:rPr>
-                        <a:t>Validation</a:t>
-                      </a:r>
-                    </a:p>
-                  </a:txBody>
-                  <a:tcPr marL="54864" marR="54864" marT="27432" marB="27432" anchor="ctr">
-                    <a:solidFill>
-                      <a:srgbClr val="0D1117"/>
-                    </a:solidFill>
-                  </a:tcPr>
-                </a:tc>
-              </a:tr>
-              <a:tr h="521208">
-                <a:tc>
-                  <a:txBody>
-                    <a:bodyPr/>
-                    <a:lstStyle/>
-                    <a:p>
-                      <a:pPr>
-                        <a:defRPr sz="720" b="1">
-                          <a:solidFill>
-                            <a:srgbClr val="0D1117"/>
-                          </a:solidFill>
-                          <a:latin typeface="Inter"/>
-                        </a:defRPr>
-                      </a:pPr>
-                      <a:r>
-                        <a:rPr>
-                          <a:latin typeface="Inter"/>
-                        </a:rPr>
-                        <a:t>S1</a:t>
-                      </a:r>
-                    </a:p>
-                  </a:txBody>
-                  <a:tcPr marL="54864" marR="54864" marT="27432" marB="27432" anchor="ctr">
-                    <a:solidFill>
-                      <a:srgbClr val="FFFFFF"/>
-                    </a:solidFill>
-                  </a:tcPr>
-                </a:tc>
-                <a:tc>
-                  <a:txBody>
-                    <a:bodyPr/>
-                    <a:lstStyle/>
-                    <a:p>
-                      <a:pPr>
-                        <a:defRPr sz="720" b="0">
-                          <a:solidFill>
-                            <a:srgbClr val="0D1117"/>
-                          </a:solidFill>
-                          <a:latin typeface="Inter"/>
-                        </a:defRPr>
-                      </a:pPr>
-                      <a:r>
-                        <a:rPr>
-                          <a:latin typeface="Inter"/>
-                        </a:rPr>
-                        <a:t>Organizations and modules</a:t>
-                      </a:r>
-                    </a:p>
-                  </a:txBody>
-                  <a:tcPr marL="54864" marR="54864" marT="27432" marB="27432" anchor="ctr">
-                    <a:solidFill>
-                      <a:srgbClr val="FFFFFF"/>
-                    </a:solidFill>
-                  </a:tcPr>
-                </a:tc>
-                <a:tc>
-                  <a:txBody>
-                    <a:bodyPr/>
-                    <a:lstStyle/>
-                    <a:p>
-                      <a:pPr>
-                        <a:defRPr sz="720" b="0">
-                          <a:solidFill>
-                            <a:srgbClr val="0D1117"/>
-                          </a:solidFill>
-                          <a:latin typeface="Inter"/>
-                        </a:defRPr>
-                      </a:pPr>
-                      <a:r>
-                        <a:rPr>
-                          <a:latin typeface="Inter"/>
-                        </a:rPr>
-                        <a:t>list_organizations</a:t>
-                      </a:r>
-                    </a:p>
-                  </a:txBody>
-                  <a:tcPr marL="54864" marR="54864" marT="27432" marB="27432" anchor="ctr">
-                    <a:solidFill>
-                      <a:srgbClr val="FFFFFF"/>
-                    </a:solidFill>
-                  </a:tcPr>
-                </a:tc>
-                <a:tc>
-                  <a:txBody>
-                    <a:bodyPr/>
-                    <a:lstStyle/>
-                    <a:p>
-                      <a:pPr>
-                        <a:defRPr sz="720" b="0">
-                          <a:solidFill>
-                            <a:srgbClr val="0D1117"/>
-                          </a:solidFill>
-                          <a:latin typeface="Inter"/>
-                        </a:defRPr>
-                      </a:pPr>
-                      <a:r>
-                        <a:rPr>
-                          <a:latin typeface="Inter"/>
-                        </a:rPr>
-                        <a:t>2026-10-04</a:t>
-                      </a:r>
-                    </a:p>
-                  </a:txBody>
-                  <a:tcPr marL="54864" marR="54864" marT="27432" marB="27432" anchor="ctr">
-                    <a:solidFill>
-                      <a:srgbClr val="FFFFFF"/>
-                    </a:solidFill>
-                  </a:tcPr>
-                </a:tc>
-                <a:tc>
-                  <a:txBody>
-                    <a:bodyPr/>
-                    <a:lstStyle/>
-                    <a:p>
-                      <a:pPr>
-                        <a:defRPr sz="720" b="1">
-                          <a:solidFill>
-                            <a:srgbClr val="9AA5B1"/>
-                          </a:solidFill>
-                          <a:latin typeface="Inter"/>
-                        </a:defRPr>
-                      </a:pPr>
-                      <a:r>
-                        <a:rPr>
-                          <a:latin typeface="Inter"/>
-                        </a:rPr>
-                        <a:t>● n/a</a:t>
-                      </a:r>
-                    </a:p>
-                  </a:txBody>
-                  <a:tcPr marL="54864" marR="54864" marT="27432" marB="27432" anchor="ctr">
-                    <a:solidFill>
-                      <a:srgbClr val="F5F7F9"/>
-                    </a:solidFill>
-                  </a:tcPr>
-                </a:tc>
-              </a:tr>
-              <a:tr h="521208">
-                <a:tc>
-                  <a:txBody>
-                    <a:bodyPr/>
-                    <a:lstStyle/>
-                    <a:p>
-                      <a:pPr>
-                        <a:defRPr sz="720" b="1">
-                          <a:solidFill>
-                            <a:srgbClr val="0D1117"/>
-                          </a:solidFill>
-                          <a:latin typeface="Inter"/>
-                        </a:defRPr>
-                      </a:pPr>
-                      <a:r>
-                        <a:rPr>
-                          <a:latin typeface="Inter"/>
-                        </a:rPr>
-                        <a:t>S2</a:t>
-                      </a:r>
-                    </a:p>
-                  </a:txBody>
-                  <a:tcPr marL="54864" marR="54864" marT="27432" marB="27432" anchor="ctr">
-                    <a:solidFill>
-                      <a:srgbClr val="F5F7F9"/>
-                    </a:solidFill>
-                  </a:tcPr>
-                </a:tc>
-                <a:tc>
-                  <a:txBody>
-                    <a:bodyPr/>
-                    <a:lstStyle/>
-                    <a:p>
-                      <a:pPr>
-                        <a:defRPr sz="720" b="0">
-                          <a:solidFill>
-                            <a:srgbClr val="0D1117"/>
-                          </a:solidFill>
-                          <a:latin typeface="Inter"/>
-                        </a:defRPr>
-                      </a:pPr>
-                      <a:r>
-                        <a:rPr>
-                          <a:latin typeface="Inter"/>
-                        </a:rPr>
-                        <a:t>Capabilities, entitlement, coverage</a:t>
-                      </a:r>
-                    </a:p>
-                  </a:txBody>
-                  <a:tcPr marL="54864" marR="54864" marT="27432" marB="27432" anchor="ctr">
-                    <a:solidFill>
-                      <a:srgbClr val="F5F7F9"/>
-                    </a:solidFill>
-                  </a:tcPr>
-                </a:tc>
-                <a:tc>
-                  <a:txBody>
-                    <a:bodyPr/>
-                    <a:lstStyle/>
-                    <a:p>
-                      <a:pPr>
-                        <a:defRPr sz="720" b="0">
-                          <a:solidFill>
-                            <a:srgbClr val="0D1117"/>
-                          </a:solidFill>
-                          <a:latin typeface="Inter"/>
-                        </a:defRPr>
-                      </a:pPr>
-                      <a:r>
-                        <a:rPr>
-                          <a:latin typeface="Inter"/>
-                        </a:rPr>
-                        <a:t>get_gradient_capabilities</a:t>
-                      </a:r>
-                    </a:p>
-                  </a:txBody>
-                  <a:tcPr marL="54864" marR="54864" marT="27432" marB="27432" anchor="ctr">
-                    <a:solidFill>
-                      <a:srgbClr val="F5F7F9"/>
-                    </a:solidFill>
-                  </a:tcPr>
-                </a:tc>
-                <a:tc>
-                  <a:txBody>
-                    <a:bodyPr/>
-                    <a:lstStyle/>
-                    <a:p>
-                      <a:pPr>
-                        <a:defRPr sz="720" b="0">
-                          <a:solidFill>
-                            <a:srgbClr val="0D1117"/>
-                          </a:solidFill>
-                          <a:latin typeface="Inter"/>
-                        </a:defRPr>
-                      </a:pPr>
-                      <a:r>
-                        <a:rPr>
-                          <a:latin typeface="Inter"/>
-                        </a:rPr>
-                        <a:t>2026-10-04</a:t>
-                      </a:r>
-                    </a:p>
-                  </a:txBody>
-                  <a:tcPr marL="54864" marR="54864" marT="27432" marB="27432" anchor="ctr">
-                    <a:solidFill>
-                      <a:srgbClr val="F5F7F9"/>
-                    </a:solidFill>
-                  </a:tcPr>
-                </a:tc>
-                <a:tc>
-                  <a:txBody>
-                    <a:bodyPr/>
-                    <a:lstStyle/>
-                    <a:p>
-                      <a:pPr>
-                        <a:defRPr sz="720" b="1">
-                          <a:solidFill>
-                            <a:srgbClr val="9AA5B1"/>
-                          </a:solidFill>
-                          <a:latin typeface="Inter"/>
-                        </a:defRPr>
-                      </a:pPr>
-                      <a:r>
-                        <a:rPr>
-                          <a:latin typeface="Inter"/>
-                        </a:rPr>
-                        <a:t>● n/a</a:t>
-                      </a:r>
-                    </a:p>
-                  </a:txBody>
-                  <a:tcPr marL="54864" marR="54864" marT="27432" marB="27432" anchor="ctr">
-                    <a:solidFill>
-                      <a:srgbClr val="F5F7F9"/>
-                    </a:solidFill>
-                  </a:tcPr>
-                </a:tc>
-              </a:tr>
-              <a:tr h="521208">
-                <a:tc>
-                  <a:txBody>
-                    <a:bodyPr/>
-                    <a:lstStyle/>
-                    <a:p>
-                      <a:pPr>
-                        <a:defRPr sz="720" b="1">
-                          <a:solidFill>
-                            <a:srgbClr val="0D1117"/>
-                          </a:solidFill>
-                          <a:latin typeface="Inter"/>
-                        </a:defRPr>
-                      </a:pPr>
-                      <a:r>
-                        <a:rPr>
-                          <a:latin typeface="Inter"/>
-                        </a:rPr>
-                        <a:t>S3</a:t>
-                      </a:r>
-                    </a:p>
-                  </a:txBody>
-                  <a:tcPr marL="54864" marR="54864" marT="27432" marB="27432" anchor="ctr">
-                    <a:solidFill>
-                      <a:srgbClr val="FFFFFF"/>
-                    </a:solidFill>
-                  </a:tcPr>
-                </a:tc>
-                <a:tc>
-                  <a:txBody>
-                    <a:bodyPr/>
-                    <a:lstStyle/>
-                    <a:p>
-                      <a:pPr>
-                        <a:defRPr sz="720" b="0">
-                          <a:solidFill>
-                            <a:srgbClr val="0D1117"/>
-                          </a:solidFill>
-                          <a:latin typeface="Inter"/>
-                        </a:defRPr>
-                      </a:pPr>
-                      <a:r>
-                        <a:rPr>
-                          <a:latin typeface="Inter"/>
-                        </a:rPr>
-                        <a:t>Contract probes (14)</a:t>
-                      </a:r>
-                    </a:p>
-                  </a:txBody>
-                  <a:tcPr marL="54864" marR="54864" marT="27432" marB="27432" anchor="ctr">
-                    <a:solidFill>
-                      <a:srgbClr val="FFFFFF"/>
-                    </a:solidFill>
-                  </a:tcPr>
-                </a:tc>
-                <a:tc>
-                  <a:txBody>
-                    <a:bodyPr/>
-                    <a:lstStyle/>
-                    <a:p>
-                      <a:pPr>
-                        <a:defRPr sz="720" b="0">
-                          <a:solidFill>
-                            <a:srgbClr val="0D1117"/>
-                          </a:solidFill>
-                          <a:latin typeface="Inter"/>
-                        </a:defRPr>
-                      </a:pPr>
-                      <a:r>
-                        <a:rPr>
-                          <a:latin typeface="Inter"/>
-                        </a:rPr>
-                        <a:t>see table in section 04</a:t>
-                      </a:r>
-                    </a:p>
-                  </a:txBody>
-                  <a:tcPr marL="54864" marR="54864" marT="27432" marB="27432" anchor="ctr">
-                    <a:solidFill>
-                      <a:srgbClr val="FFFFFF"/>
-                    </a:solidFill>
-                  </a:tcPr>
-                </a:tc>
-                <a:tc>
-                  <a:txBody>
-                    <a:bodyPr/>
-                    <a:lstStyle/>
-                    <a:p>
-                      <a:pPr>
-                        <a:defRPr sz="720" b="0">
-                          <a:solidFill>
-                            <a:srgbClr val="0D1117"/>
-                          </a:solidFill>
-                          <a:latin typeface="Inter"/>
-                        </a:defRPr>
-                      </a:pPr>
-                      <a:r>
-                        <a:rPr>
-                          <a:latin typeface="Inter"/>
-                        </a:rPr>
-                        <a:t>2026-10-04</a:t>
-                      </a:r>
-                    </a:p>
-                  </a:txBody>
-                  <a:tcPr marL="54864" marR="54864" marT="27432" marB="27432" anchor="ctr">
-                    <a:solidFill>
-                      <a:srgbClr val="FFFFFF"/>
-                    </a:solidFill>
-                  </a:tcPr>
-                </a:tc>
-                <a:tc>
-                  <a:txBody>
-                    <a:bodyPr/>
-                    <a:lstStyle/>
-                    <a:p>
-                      <a:pPr>
-                        <a:defRPr sz="720" b="1">
-                          <a:solidFill>
-                            <a:srgbClr val="C6F432"/>
-                          </a:solidFill>
-                          <a:latin typeface="Inter"/>
-                        </a:defRPr>
-                      </a:pPr>
-                      <a:r>
-                        <a:rPr>
-                          <a:latin typeface="Inter"/>
-                        </a:rPr>
-                        <a:t>● passed</a:t>
-                      </a:r>
-                    </a:p>
-                  </a:txBody>
-                  <a:tcPr marL="54864" marR="54864" marT="27432" marB="27432" anchor="ctr">
-                    <a:solidFill>
-                      <a:srgbClr val="F5F7F9"/>
-                    </a:solidFill>
-                  </a:tcPr>
-                </a:tc>
-              </a:tr>
-              <a:tr h="521208">
-                <a:tc>
-                  <a:txBody>
-                    <a:bodyPr/>
-                    <a:lstStyle/>
-                    <a:p>
-                      <a:pPr>
-                        <a:defRPr sz="720" b="1">
-                          <a:solidFill>
-                            <a:srgbClr val="0D1117"/>
-                          </a:solidFill>
-                          <a:latin typeface="Inter"/>
-                        </a:defRPr>
-                      </a:pPr>
-                      <a:r>
-                        <a:rPr>
-                          <a:latin typeface="Inter"/>
-                        </a:rPr>
-                        <a:t>S4</a:t>
-                      </a:r>
-                    </a:p>
-                  </a:txBody>
-                  <a:tcPr marL="54864" marR="54864" marT="27432" marB="27432" anchor="ctr">
-                    <a:solidFill>
-                      <a:srgbClr val="F5F7F9"/>
-                    </a:solidFill>
-                  </a:tcPr>
-                </a:tc>
-                <a:tc>
-                  <a:txBody>
-                    <a:bodyPr/>
-                    <a:lstStyle/>
-                    <a:p>
-                      <a:pPr>
-                        <a:defRPr sz="720" b="0">
-                          <a:solidFill>
-                            <a:srgbClr val="0D1117"/>
-                          </a:solidFill>
-                          <a:latin typeface="Inter"/>
-                        </a:defRPr>
-                      </a:pPr>
-                      <a:r>
-                        <a:rPr>
-                          <a:latin typeface="Inter"/>
-                        </a:rPr>
-                        <a:t>Diligence Roster</a:t>
-                      </a:r>
-                    </a:p>
-                  </a:txBody>
-                  <a:tcPr marL="54864" marR="54864" marT="27432" marB="27432" anchor="ctr">
-                    <a:solidFill>
-                      <a:srgbClr val="F5F7F9"/>
-                    </a:solidFill>
-                  </a:tcPr>
-                </a:tc>
-                <a:tc>
-                  <a:txBody>
-                    <a:bodyPr/>
-                    <a:lstStyle/>
-                    <a:p>
-                      <a:pPr>
-                        <a:defRPr sz="720" b="0">
-                          <a:solidFill>
-                            <a:srgbClr val="0D1117"/>
-                          </a:solidFill>
-                          <a:latin typeface="Inter"/>
-                        </a:defRPr>
-                      </a:pPr>
-                      <a:r>
-                        <a:rPr>
-                          <a:latin typeface="Inter"/>
-                        </a:rPr>
-                        <a:t>get_diligence_roster_funds</a:t>
-                      </a:r>
-                    </a:p>
-                  </a:txBody>
-                  <a:tcPr marL="54864" marR="54864" marT="27432" marB="27432" anchor="ctr">
-                    <a:solidFill>
-                      <a:srgbClr val="F5F7F9"/>
-                    </a:solidFill>
-                  </a:tcPr>
-                </a:tc>
-                <a:tc>
-                  <a:txBody>
-                    <a:bodyPr/>
-                    <a:lstStyle/>
-                    <a:p>
-                      <a:pPr>
-                        <a:defRPr sz="720" b="0">
-                          <a:solidFill>
-                            <a:srgbClr val="0D1117"/>
-                          </a:solidFill>
-                          <a:latin typeface="Inter"/>
-                        </a:defRPr>
-                      </a:pPr>
-                      <a:r>
-                        <a:rPr>
-                          <a:latin typeface="Inter"/>
-                        </a:rPr>
-                        <a:t>2026-10-04</a:t>
-                      </a:r>
-                    </a:p>
-                  </a:txBody>
-                  <a:tcPr marL="54864" marR="54864" marT="27432" marB="27432" anchor="ctr">
-                    <a:solidFill>
-                      <a:srgbClr val="F5F7F9"/>
-                    </a:solidFill>
-                  </a:tcPr>
-                </a:tc>
-                <a:tc>
-                  <a:txBody>
-                    <a:bodyPr/>
-                    <a:lstStyle/>
-                    <a:p>
-                      <a:pPr>
-                        <a:defRPr sz="720" b="1">
-                          <a:solidFill>
-                            <a:srgbClr val="C6F432"/>
-                          </a:solidFill>
-                          <a:latin typeface="Inter"/>
-                        </a:defRPr>
-                      </a:pPr>
-                      <a:r>
-                        <a:rPr>
-                          <a:latin typeface="Inter"/>
-                        </a:rPr>
-                        <a:t>● passed</a:t>
-                      </a:r>
-                    </a:p>
-                  </a:txBody>
-                  <a:tcPr marL="54864" marR="54864" marT="27432" marB="27432" anchor="ctr">
-                    <a:solidFill>
-                      <a:srgbClr val="F5F7F9"/>
-                    </a:solidFill>
-                  </a:tcPr>
-                </a:tc>
-              </a:tr>
-              <a:tr h="521208">
-                <a:tc>
-                  <a:txBody>
-                    <a:bodyPr/>
-                    <a:lstStyle/>
-                    <a:p>
-                      <a:pPr>
-                        <a:defRPr sz="720" b="1">
-                          <a:solidFill>
-                            <a:srgbClr val="0D1117"/>
-                          </a:solidFill>
-                          <a:latin typeface="Inter"/>
-                        </a:defRPr>
-                      </a:pPr>
-                      <a:r>
-                        <a:rPr>
-                          <a:latin typeface="Inter"/>
-                        </a:rPr>
-                        <a:t>S5</a:t>
-                      </a:r>
-                    </a:p>
-                  </a:txBody>
-                  <a:tcPr marL="54864" marR="54864" marT="27432" marB="27432" anchor="ctr">
-                    <a:solidFill>
-                      <a:srgbClr val="FFFFFF"/>
-                    </a:solidFill>
-                  </a:tcPr>
-                </a:tc>
-                <a:tc>
-                  <a:txBody>
-                    <a:bodyPr/>
-                    <a:lstStyle/>
-                    <a:p>
-                      <a:pPr>
-                        <a:defRPr sz="720" b="0">
-                          <a:solidFill>
-                            <a:srgbClr val="0D1117"/>
-                          </a:solidFill>
-                          <a:latin typeface="Inter"/>
-                        </a:defRPr>
-                      </a:pPr>
-                      <a:r>
-                        <a:rPr>
-                          <a:latin typeface="Inter"/>
-                        </a:rPr>
-                        <a:t>The Read readiness probe</a:t>
-                      </a:r>
-                    </a:p>
-                  </a:txBody>
-                  <a:tcPr marL="54864" marR="54864" marT="27432" marB="27432" anchor="ctr">
-                    <a:solidFill>
-                      <a:srgbClr val="FFFFFF"/>
-                    </a:solidFill>
-                  </a:tcPr>
-                </a:tc>
-                <a:tc>
-                  <a:txBody>
-                    <a:bodyPr/>
-                    <a:lstStyle/>
-                    <a:p>
-                      <a:pPr>
-                        <a:defRPr sz="720" b="0">
-                          <a:solidFill>
-                            <a:srgbClr val="0D1117"/>
-                          </a:solidFill>
-                          <a:latin typeface="Inter"/>
-                        </a:defRPr>
-                      </a:pPr>
-                      <a:r>
-                        <a:rPr>
-                          <a:latin typeface="Inter"/>
-                        </a:rPr>
-                        <a:t>get_the_read</a:t>
-                      </a:r>
-                    </a:p>
-                  </a:txBody>
-                  <a:tcPr marL="54864" marR="54864" marT="27432" marB="27432" anchor="ctr">
-                    <a:solidFill>
-                      <a:srgbClr val="FFFFFF"/>
-                    </a:solidFill>
-                  </a:tcPr>
-                </a:tc>
-                <a:tc>
-                  <a:txBody>
-                    <a:bodyPr/>
-                    <a:lstStyle/>
-                    <a:p>
-                      <a:pPr>
-                        <a:defRPr sz="720" b="0">
-                          <a:solidFill>
-                            <a:srgbClr val="0D1117"/>
-                          </a:solidFill>
-                          <a:latin typeface="Inter"/>
-                        </a:defRPr>
-                      </a:pPr>
-                      <a:r>
-                        <a:rPr>
-                          <a:latin typeface="Inter"/>
-                        </a:rPr>
-                        <a:t>2026-10-02</a:t>
-                      </a:r>
-                    </a:p>
-                  </a:txBody>
-                  <a:tcPr marL="54864" marR="54864" marT="27432" marB="27432" anchor="ctr">
-                    <a:solidFill>
-                      <a:srgbClr val="FFFFFF"/>
-                    </a:solidFill>
-                  </a:tcPr>
-                </a:tc>
-                <a:tc>
-                  <a:txBody>
-                    <a:bodyPr/>
-                    <a:lstStyle/>
-                    <a:p>
-                      <a:pPr>
-                        <a:defRPr sz="720" b="1">
-                          <a:solidFill>
-                            <a:srgbClr val="C6F432"/>
-                          </a:solidFill>
-                          <a:latin typeface="Inter"/>
-                        </a:defRPr>
-                      </a:pPr>
-                      <a:r>
-                        <a:rPr>
-                          <a:latin typeface="Inter"/>
-                        </a:rPr>
-                        <a:t>● passed</a:t>
-                      </a:r>
-                    </a:p>
-                  </a:txBody>
-                  <a:tcPr marL="54864" marR="54864" marT="27432" marB="27432" anchor="ctr">
-                    <a:solidFill>
-                      <a:srgbClr val="F5F7F9"/>
-                    </a:solidFill>
-                  </a:tcPr>
-                </a:tc>
-              </a:tr>
-              <a:tr h="521208">
-                <a:tc>
-                  <a:txBody>
-                    <a:bodyPr/>
-                    <a:lstStyle/>
-                    <a:p>
-                      <a:pPr>
-                        <a:defRPr sz="720" b="1">
-                          <a:solidFill>
-                            <a:srgbClr val="0D1117"/>
-                          </a:solidFill>
-                          <a:latin typeface="Inter"/>
-                        </a:defRPr>
-                      </a:pPr>
-                      <a:r>
-                        <a:rPr>
-                          <a:latin typeface="Inter"/>
-                        </a:rPr>
-                        <a:t>S6</a:t>
-                      </a:r>
-                    </a:p>
-                  </a:txBody>
-                  <a:tcPr marL="54864" marR="54864" marT="27432" marB="27432" anchor="ctr">
-                    <a:solidFill>
-                      <a:srgbClr val="F5F7F9"/>
-                    </a:solidFill>
-                  </a:tcPr>
-                </a:tc>
-                <a:tc>
-                  <a:txBody>
-                    <a:bodyPr/>
-                    <a:lstStyle/>
-                    <a:p>
-                      <a:pPr>
-                        <a:defRPr sz="720" b="0">
-                          <a:solidFill>
-                            <a:srgbClr val="0D1117"/>
-                          </a:solidFill>
-                          <a:latin typeface="Inter"/>
-                        </a:defRPr>
-                      </a:pPr>
-                      <a:r>
-                        <a:rPr>
-                          <a:latin typeface="Inter"/>
-                        </a:rPr>
-                        <a:t>Macro conditions readiness probe</a:t>
-                      </a:r>
-                    </a:p>
-                  </a:txBody>
-                  <a:tcPr marL="54864" marR="54864" marT="27432" marB="27432" anchor="ctr">
-                    <a:solidFill>
-                      <a:srgbClr val="F5F7F9"/>
-                    </a:solidFill>
-                  </a:tcPr>
-                </a:tc>
-                <a:tc>
-                  <a:txBody>
-                    <a:bodyPr/>
-                    <a:lstStyle/>
-                    <a:p>
-                      <a:pPr>
-                        <a:defRPr sz="720" b="0">
-                          <a:solidFill>
-                            <a:srgbClr val="0D1117"/>
-                          </a:solidFill>
-                          <a:latin typeface="Inter"/>
-                        </a:defRPr>
-                      </a:pPr>
-                      <a:r>
-                        <a:rPr>
-                          <a:latin typeface="Inter"/>
-                        </a:rPr>
-                        <a:t>get_macro_conditions</a:t>
-                      </a:r>
-                    </a:p>
-                  </a:txBody>
-                  <a:tcPr marL="54864" marR="54864" marT="27432" marB="27432" anchor="ctr">
-                    <a:solidFill>
-                      <a:srgbClr val="F5F7F9"/>
-                    </a:solidFill>
-                  </a:tcPr>
-                </a:tc>
-                <a:tc>
-                  <a:txBody>
-                    <a:bodyPr/>
-                    <a:lstStyle/>
-                    <a:p>
-                      <a:pPr>
-                        <a:defRPr sz="720" b="0">
-                          <a:solidFill>
-                            <a:srgbClr val="0D1117"/>
-                          </a:solidFill>
-                          <a:latin typeface="Inter"/>
-                        </a:defRPr>
-                      </a:pPr>
-                      <a:r>
-                        <a:rPr>
-                          <a:latin typeface="Inter"/>
-                        </a:rPr>
-                        <a:t>2026-10-02</a:t>
-                      </a:r>
-                    </a:p>
-                  </a:txBody>
-                  <a:tcPr marL="54864" marR="54864" marT="27432" marB="27432" anchor="ctr">
-                    <a:solidFill>
-                      <a:srgbClr val="F5F7F9"/>
-                    </a:solidFill>
-                  </a:tcPr>
-                </a:tc>
-                <a:tc>
-                  <a:txBody>
-                    <a:bodyPr/>
-                    <a:lstStyle/>
-                    <a:p>
-                      <a:pPr>
-                        <a:defRPr sz="720" b="1">
-                          <a:solidFill>
-                            <a:srgbClr val="C6F432"/>
-                          </a:solidFill>
-                          <a:latin typeface="Inter"/>
-                        </a:defRPr>
-                      </a:pPr>
-                      <a:r>
-                        <a:rPr>
-                          <a:latin typeface="Inter"/>
-                        </a:rPr>
-                        <a:t>● passed</a:t>
-                      </a:r>
-                    </a:p>
-                  </a:txBody>
-                  <a:tcPr marL="54864" marR="54864" marT="27432" marB="27432" anchor="ctr">
-                    <a:solidFill>
-                      <a:srgbClr val="F5F7F9"/>
-                    </a:solidFill>
-                  </a:tcPr>
-                </a:tc>
-              </a:tr>
-              <a:tr h="521208">
-                <a:tc>
-                  <a:txBody>
-                    <a:bodyPr/>
-                    <a:lstStyle/>
-                    <a:p>
-                      <a:pPr>
-                        <a:defRPr sz="720" b="1">
-                          <a:solidFill>
-                            <a:srgbClr val="0D1117"/>
-                          </a:solidFill>
-                          <a:latin typeface="Inter"/>
-                        </a:defRPr>
-                      </a:pPr>
-                      <a:r>
-                        <a:rPr>
-                          <a:latin typeface="Inter"/>
-                        </a:rPr>
-                        <a:t>S7</a:t>
-                      </a:r>
-                    </a:p>
-                  </a:txBody>
-                  <a:tcPr marL="54864" marR="54864" marT="27432" marB="27432" anchor="ctr">
-                    <a:solidFill>
-                      <a:srgbClr val="FFFFFF"/>
-                    </a:solidFill>
-                  </a:tcPr>
-                </a:tc>
-                <a:tc>
-                  <a:txBody>
-                    <a:bodyPr/>
-                    <a:lstStyle/>
-                    <a:p>
-                      <a:pPr>
-                        <a:defRPr sz="720" b="0">
-                          <a:solidFill>
-                            <a:srgbClr val="0D1117"/>
-                          </a:solidFill>
-                          <a:latin typeface="Inter"/>
-                        </a:defRPr>
-                      </a:pPr>
-                      <a:r>
-                        <a:rPr>
-                          <a:latin typeface="Inter"/>
-                        </a:rPr>
-                        <a:t>Gradient signal readiness probe</a:t>
-                      </a:r>
-                    </a:p>
-                  </a:txBody>
-                  <a:tcPr marL="54864" marR="54864" marT="27432" marB="27432" anchor="ctr">
-                    <a:solidFill>
-                      <a:srgbClr val="FFFFFF"/>
-                    </a:solidFill>
-                  </a:tcPr>
-                </a:tc>
-                <a:tc>
-                  <a:txBody>
-                    <a:bodyPr/>
-                    <a:lstStyle/>
-                    <a:p>
-                      <a:pPr>
-                        <a:defRPr sz="720" b="0">
-                          <a:solidFill>
-                            <a:srgbClr val="0D1117"/>
-                          </a:solidFill>
-                          <a:latin typeface="Inter"/>
-                        </a:defRPr>
-                      </a:pPr>
-                      <a:r>
-                        <a:rPr>
-                          <a:latin typeface="Inter"/>
-                        </a:rPr>
-                        <a:t>get_macro_signals</a:t>
-                      </a:r>
-                    </a:p>
-                  </a:txBody>
-                  <a:tcPr marL="54864" marR="54864" marT="27432" marB="27432" anchor="ctr">
-                    <a:solidFill>
-                      <a:srgbClr val="FFFFFF"/>
-                    </a:solidFill>
-                  </a:tcPr>
-                </a:tc>
-                <a:tc>
-                  <a:txBody>
-                    <a:bodyPr/>
-                    <a:lstStyle/>
-                    <a:p>
-                      <a:pPr>
-                        <a:defRPr sz="720" b="0">
-                          <a:solidFill>
-                            <a:srgbClr val="0D1117"/>
-                          </a:solidFill>
-                          <a:latin typeface="Inter"/>
-                        </a:defRPr>
-                      </a:pPr>
-                      <a:r>
-                        <a:rPr>
-                          <a:latin typeface="Inter"/>
-                        </a:rPr>
-                        <a:t>2026-10-02</a:t>
-                      </a:r>
-                    </a:p>
-                  </a:txBody>
-                  <a:tcPr marL="54864" marR="54864" marT="27432" marB="27432" anchor="ctr">
-                    <a:solidFill>
-                      <a:srgbClr val="FFFFFF"/>
-                    </a:solidFill>
-                  </a:tcPr>
-                </a:tc>
-                <a:tc>
-                  <a:txBody>
-                    <a:bodyPr/>
-                    <a:lstStyle/>
-                    <a:p>
-                      <a:pPr>
-                        <a:defRPr sz="720" b="1">
-                          <a:solidFill>
-                            <a:srgbClr val="C6F432"/>
-                          </a:solidFill>
-                          <a:latin typeface="Inter"/>
-                        </a:defRPr>
-                      </a:pPr>
-                      <a:r>
-                        <a:rPr>
-                          <a:latin typeface="Inter"/>
-                        </a:rPr>
-                        <a:t>● passed</a:t>
-                      </a:r>
-                    </a:p>
-                  </a:txBody>
-                  <a:tcPr marL="54864" marR="54864" marT="27432" marB="27432" anchor="ctr">
-                    <a:solidFill>
-                      <a:srgbClr val="F5F7F9"/>
-                    </a:solidFill>
-                  </a:tcPr>
-                </a:tc>
-              </a:tr>
-              <a:tr h="521208">
-                <a:tc>
-                  <a:txBody>
-                    <a:bodyPr/>
-                    <a:lstStyle/>
-                    <a:p>
-                      <a:pPr>
-                        <a:defRPr sz="720" b="1">
-                          <a:solidFill>
-                            <a:srgbClr val="0D1117"/>
-                          </a:solidFill>
-                          <a:latin typeface="Inter"/>
-                        </a:defRPr>
-                      </a:pPr>
-                      <a:r>
-                        <a:rPr>
-                          <a:latin typeface="Inter"/>
-                        </a:rPr>
-                        <a:t>S8</a:t>
-                      </a:r>
-                    </a:p>
-                  </a:txBody>
-                  <a:tcPr marL="54864" marR="54864" marT="27432" marB="27432" anchor="ctr">
-                    <a:solidFill>
-                      <a:srgbClr val="F5F7F9"/>
-                    </a:solidFill>
-                  </a:tcPr>
-                </a:tc>
-                <a:tc>
-                  <a:txBody>
-                    <a:bodyPr/>
-                    <a:lstStyle/>
-                    <a:p>
-                      <a:pPr>
-                        <a:defRPr sz="720" b="0">
-                          <a:solidFill>
-                            <a:srgbClr val="0D1117"/>
-                          </a:solidFill>
-                          <a:latin typeface="Inter"/>
-                        </a:defRPr>
-                      </a:pPr>
-                      <a:r>
-                        <a:rPr>
-                          <a:latin typeface="Inter"/>
-                        </a:rPr>
-                        <a:t>Macro calendar readiness probe</a:t>
-                      </a:r>
-                    </a:p>
-                  </a:txBody>
-                  <a:tcPr marL="54864" marR="54864" marT="27432" marB="27432" anchor="ctr">
-                    <a:solidFill>
-                      <a:srgbClr val="F5F7F9"/>
-                    </a:solidFill>
-                  </a:tcPr>
-                </a:tc>
-                <a:tc>
-                  <a:txBody>
-                    <a:bodyPr/>
-                    <a:lstStyle/>
-                    <a:p>
-                      <a:pPr>
-                        <a:defRPr sz="720" b="0">
-                          <a:solidFill>
-                            <a:srgbClr val="0D1117"/>
-                          </a:solidFill>
-                          <a:latin typeface="Inter"/>
-                        </a:defRPr>
-                      </a:pPr>
-                      <a:r>
-                        <a:rPr>
-                          <a:latin typeface="Inter"/>
-                        </a:rPr>
-                        <a:t>get_macro_calendar</a:t>
-                      </a:r>
-                    </a:p>
-                  </a:txBody>
-                  <a:tcPr marL="54864" marR="54864" marT="27432" marB="27432" anchor="ctr">
-                    <a:solidFill>
-                      <a:srgbClr val="F5F7F9"/>
-                    </a:solidFill>
-                  </a:tcPr>
-                </a:tc>
-                <a:tc>
-                  <a:txBody>
-                    <a:bodyPr/>
-                    <a:lstStyle/>
-                    <a:p>
-                      <a:pPr>
-                        <a:defRPr sz="720" b="0">
-                          <a:solidFill>
-                            <a:srgbClr val="0D1117"/>
-                          </a:solidFill>
-                          <a:latin typeface="Inter"/>
-                        </a:defRPr>
-                      </a:pPr>
-                      <a:r>
-                        <a:rPr>
-                          <a:latin typeface="Inter"/>
-                        </a:rPr>
-                        <a:t>2026-10-04</a:t>
-                      </a:r>
-                    </a:p>
-                  </a:txBody>
-                  <a:tcPr marL="54864" marR="54864" marT="27432" marB="27432" anchor="ctr">
-                    <a:solidFill>
-                      <a:srgbClr val="F5F7F9"/>
-                    </a:solidFill>
-                  </a:tcPr>
-                </a:tc>
-                <a:tc>
-                  <a:txBody>
-                    <a:bodyPr/>
-                    <a:lstStyle/>
-                    <a:p>
-                      <a:pPr>
-                        <a:defRPr sz="720" b="1">
-                          <a:solidFill>
-                            <a:srgbClr val="C6F432"/>
-                          </a:solidFill>
-                          <a:latin typeface="Inter"/>
-                        </a:defRPr>
-                      </a:pPr>
-                      <a:r>
-                        <a:rPr>
-                          <a:latin typeface="Inter"/>
-                        </a:rPr>
-                        <a:t>● passed</a:t>
-                      </a:r>
-                    </a:p>
-                  </a:txBody>
-                  <a:tcPr marL="54864" marR="54864" marT="27432" marB="27432" anchor="ctr">
-                    <a:solidFill>
-                      <a:srgbClr val="F5F7F9"/>
-                    </a:solidFill>
-                  </a:tcPr>
-                </a:tc>
-              </a:tr>
-            </a:tbl>
-          </a:graphicData>
-        </a:graphic>
-      </p:graphicFrame>
-      <p:sp>
-        <p:nvSpPr>
-          <p:cNvPr id="9" name="TextBox 8"/>
+      <p:sp>
+        <p:nvSpPr>
+          <p:cNvPr id="8" name="TextBox 7"/>
           <p:cNvSpPr txBox="1"/>
           <p:nvPr/>
         </p:nvSpPr>
         <p:spPr>
           <a:xfrm>
-            <a:off x="640080" y="6035040"/>
-            <a:ext cx="10908792" cy="164592"/>
+            <a:off x="640080" y="1325880"/>
+            <a:ext cx="10908792" cy="4892040"/>
           </a:xfrm>
           <a:prstGeom prst="rect">
             <a:avLst/>
@@ -14693,9 +14644,9 @@
               <a:spcAft>
                 <a:spcPts val="0"/>
               </a:spcAft>
-              <a:defRPr sz="680" b="0">
+              <a:defRPr sz="1100" b="0">
                 <a:solidFill>
-                  <a:srgbClr val="8A94A1"/>
+                  <a:srgbClr val="4A5563"/>
                 </a:solidFill>
                 <a:latin typeface="Inter"/>
               </a:defRPr>
@@ -14704,14 +14655,14 @@
               <a:rPr>
                 <a:latin typeface="Inter"/>
               </a:rPr>
-              <a:t>Illustrative, Gradient Maintained — demo data, not the client's holdings or managers. All organizations, portfolios, managers and results in this public example are illustrative.</a:t>
+              <a:t>Readiness reflects entitlement, OAuth scope, backend health and data readiness reported by GradientCIO at the time of the check. Tool availability does not guarantee that data is published for every subject.</a:t>
             </a:r>
           </a:p>
         </p:txBody>
       </p:sp>
       <p:sp>
         <p:nvSpPr>
-          <p:cNvPr id="10" name="Rectangle 9"/>
+          <p:cNvPr id="9" name="Rectangle 8"/>
           <p:cNvSpPr/>
           <p:nvPr/>
         </p:nvSpPr>
@@ -14760,7 +14711,7 @@
       </p:sp>
       <p:sp>
         <p:nvSpPr>
-          <p:cNvPr id="11" name="TextBox 10"/>
+          <p:cNvPr id="10" name="TextBox 9"/>
           <p:cNvSpPr txBox="1"/>
           <p:nvPr/>
         </p:nvSpPr>
@@ -14795,14 +14746,14 @@
               <a:rPr>
                 <a:latin typeface="Inter"/>
               </a:rPr>
-              <a:t>Sources: S1 · S2 · S3 · S4 · S5 · S6 · S7 · S8</a:t>
+              <a:t>Sources: none cited</a:t>
             </a:r>
           </a:p>
         </p:txBody>
       </p:sp>
       <p:sp>
         <p:nvSpPr>
-          <p:cNvPr id="12" name="TextBox 11"/>
+          <p:cNvPr id="11" name="TextBox 10"/>
           <p:cNvSpPr txBox="1"/>
           <p:nvPr/>
         </p:nvSpPr>
@@ -14844,7 +14795,7 @@
       </p:sp>
       <p:sp>
         <p:nvSpPr>
-          <p:cNvPr id="13" name="TextBox 12"/>
+          <p:cNvPr id="12" name="TextBox 11"/>
           <p:cNvSpPr txBox="1"/>
           <p:nvPr/>
         </p:nvSpPr>
